--- a/DOC/Presentacion de Tesis Dariel Cabrera Lopez.pptx
+++ b/DOC/Presentacion de Tesis Dariel Cabrera Lopez.pptx
@@ -5,7 +5,7 @@
     <p:sldMasterId id="2147483648" r:id="rId1"/>
   </p:sldMasterIdLst>
   <p:notesMasterIdLst>
-    <p:notesMasterId r:id="rId23"/>
+    <p:notesMasterId r:id="rId28"/>
   </p:notesMasterIdLst>
   <p:sldIdLst>
     <p:sldId id="257" r:id="rId2"/>
@@ -24,11 +24,16 @@
     <p:sldId id="328" r:id="rId15"/>
     <p:sldId id="324" r:id="rId16"/>
     <p:sldId id="329" r:id="rId17"/>
-    <p:sldId id="331" r:id="rId18"/>
-    <p:sldId id="330" r:id="rId19"/>
-    <p:sldId id="332" r:id="rId20"/>
-    <p:sldId id="333" r:id="rId21"/>
-    <p:sldId id="334" r:id="rId22"/>
+    <p:sldId id="338" r:id="rId18"/>
+    <p:sldId id="340" r:id="rId19"/>
+    <p:sldId id="339" r:id="rId20"/>
+    <p:sldId id="331" r:id="rId21"/>
+    <p:sldId id="330" r:id="rId22"/>
+    <p:sldId id="332" r:id="rId23"/>
+    <p:sldId id="341" r:id="rId24"/>
+    <p:sldId id="333" r:id="rId25"/>
+    <p:sldId id="334" r:id="rId26"/>
+    <p:sldId id="342" r:id="rId27"/>
   </p:sldIdLst>
   <p:sldSz cx="9144000" cy="6858000" type="screen4x3"/>
   <p:notesSz cx="6858000" cy="9144000"/>
@@ -3233,7 +3238,7 @@
           <a:p>
             <a:fld id="{64803A06-23BD-4449-A1D1-6ADBCF91F056}" type="datetimeFigureOut">
               <a:rPr lang="es-ES_tradnl" smtClean="0"/>
-              <a:t>02/06/2025</a:t>
+              <a:t>04/06/2025</a:t>
             </a:fld>
             <a:endParaRPr lang="es-ES_tradnl"/>
           </a:p>
@@ -3764,7 +3769,7 @@
           <a:p>
             <a:fld id="{98963F9C-36B4-4ECD-BECC-604E57EA70AC}" type="datetime1">
               <a:rPr lang="es-ES" smtClean="0"/>
-              <a:t>02/06/2025</a:t>
+              <a:t>04/06/2025</a:t>
             </a:fld>
             <a:endParaRPr lang="es-ES"/>
           </a:p>
@@ -3927,7 +3932,7 @@
           <a:p>
             <a:fld id="{C72EFBCE-E3F3-42E3-AA42-D22E0C63B5E5}" type="datetime1">
               <a:rPr lang="es-ES" smtClean="0"/>
-              <a:t>02/06/2025</a:t>
+              <a:t>04/06/2025</a:t>
             </a:fld>
             <a:endParaRPr lang="es-ES"/>
           </a:p>
@@ -4100,7 +4105,7 @@
           <a:p>
             <a:fld id="{8569FFDC-06D8-42F3-B15A-134344304A07}" type="datetime1">
               <a:rPr lang="es-ES" smtClean="0"/>
-              <a:t>02/06/2025</a:t>
+              <a:t>04/06/2025</a:t>
             </a:fld>
             <a:endParaRPr lang="es-ES"/>
           </a:p>
@@ -4263,7 +4268,7 @@
           <a:p>
             <a:fld id="{2B3D0996-3F59-44A3-A62A-DD95A94764C7}" type="datetime1">
               <a:rPr lang="es-ES" smtClean="0"/>
-              <a:t>02/06/2025</a:t>
+              <a:t>04/06/2025</a:t>
             </a:fld>
             <a:endParaRPr lang="es-ES"/>
           </a:p>
@@ -4503,7 +4508,7 @@
           <a:p>
             <a:fld id="{52120030-6113-4ABE-B7D6-521760BB2F2A}" type="datetime1">
               <a:rPr lang="es-ES" smtClean="0"/>
-              <a:t>02/06/2025</a:t>
+              <a:t>04/06/2025</a:t>
             </a:fld>
             <a:endParaRPr lang="es-ES"/>
           </a:p>
@@ -4783,7 +4788,7 @@
           <a:p>
             <a:fld id="{A8AD0488-9BF8-4343-A7C8-334439AC023A}" type="datetime1">
               <a:rPr lang="es-ES" smtClean="0"/>
-              <a:t>02/06/2025</a:t>
+              <a:t>04/06/2025</a:t>
             </a:fld>
             <a:endParaRPr lang="es-ES"/>
           </a:p>
@@ -5197,7 +5202,7 @@
           <a:p>
             <a:fld id="{B91DCCD4-540D-42E8-A1D5-532A6F28BA54}" type="datetime1">
               <a:rPr lang="es-ES" smtClean="0"/>
-              <a:t>02/06/2025</a:t>
+              <a:t>04/06/2025</a:t>
             </a:fld>
             <a:endParaRPr lang="es-ES"/>
           </a:p>
@@ -5309,7 +5314,7 @@
           <a:p>
             <a:fld id="{7EFCCA53-11C7-4627-936A-79881176CA9F}" type="datetime1">
               <a:rPr lang="es-ES" smtClean="0"/>
-              <a:t>02/06/2025</a:t>
+              <a:t>04/06/2025</a:t>
             </a:fld>
             <a:endParaRPr lang="es-ES"/>
           </a:p>
@@ -5399,7 +5404,7 @@
           <a:p>
             <a:fld id="{5DAFE5E1-20AD-4F66-9853-038A786E08A1}" type="datetime1">
               <a:rPr lang="es-ES" smtClean="0"/>
-              <a:t>02/06/2025</a:t>
+              <a:t>04/06/2025</a:t>
             </a:fld>
             <a:endParaRPr lang="es-ES"/>
           </a:p>
@@ -5669,7 +5674,7 @@
           <a:p>
             <a:fld id="{F3470BC8-43CE-409A-BE0C-FBE54D4B7D7F}" type="datetime1">
               <a:rPr lang="es-ES" smtClean="0"/>
-              <a:t>02/06/2025</a:t>
+              <a:t>04/06/2025</a:t>
             </a:fld>
             <a:endParaRPr lang="es-ES"/>
           </a:p>
@@ -5916,7 +5921,7 @@
           <a:p>
             <a:fld id="{4A0853D2-8CEB-49C0-B2DA-82EEA4C831AA}" type="datetime1">
               <a:rPr lang="es-ES" smtClean="0"/>
-              <a:t>02/06/2025</a:t>
+              <a:t>04/06/2025</a:t>
             </a:fld>
             <a:endParaRPr lang="es-ES"/>
           </a:p>
@@ -6122,7 +6127,7 @@
           <a:p>
             <a:fld id="{E055BF71-A5A3-4F60-820F-A4D41CCBAC58}" type="datetime1">
               <a:rPr lang="es-ES" smtClean="0"/>
-              <a:t>02/06/2025</a:t>
+              <a:t>04/06/2025</a:t>
             </a:fld>
             <a:endParaRPr lang="es-ES"/>
           </a:p>
@@ -8912,19 +8917,6 @@
               <a:t>Las historias técnicas o “Requisitos no funcionales” propiedades o cualidades que el producto debe tener.</a:t>
             </a:r>
           </a:p>
-          <a:p>
-            <a:pPr marL="0" lvl="0" indent="0" algn="just">
-              <a:lnSpc>
-                <a:spcPct val="115000"/>
-              </a:lnSpc>
-              <a:buNone/>
-            </a:pPr>
-            <a:endParaRPr lang="es-CU" sz="2400" dirty="0">
-              <a:effectLst/>
-              <a:latin typeface="Arial" panose="020B0604020202020204" pitchFamily="34" charset="0"/>
-              <a:ea typeface="Calibri" panose="020F0502020204030204" pitchFamily="34" charset="0"/>
-            </a:endParaRPr>
-          </a:p>
         </p:txBody>
       </p:sp>
       <p:pic>
@@ -8995,8 +8987,8 @@
         </p:nvSpPr>
         <p:spPr bwMode="auto">
           <a:xfrm rot="10800000" flipV="1">
-            <a:off x="107503" y="2028350"/>
-            <a:ext cx="9145016" cy="5170646"/>
+            <a:off x="107503" y="2145028"/>
+            <a:ext cx="9145016" cy="4154984"/>
           </a:xfrm>
           <a:prstGeom prst="rect">
             <a:avLst/>
@@ -9073,253 +9065,6 @@
               </a:rPr>
               <a:t>Seguro</a:t>
             </a:r>
-            <a:r>
-              <a:rPr kumimoji="0" lang="en-US" altLang="en-US" sz="2400" b="0" i="0" u="none" strike="noStrike" cap="none" normalizeH="0" baseline="0" dirty="0">
-                <a:ln>
-                  <a:noFill/>
-                </a:ln>
-                <a:solidFill>
-                  <a:schemeClr val="tx1"/>
-                </a:solidFill>
-                <a:effectLst/>
-                <a:latin typeface="Arial" panose="020B0604020202020204" pitchFamily="34" charset="0"/>
-              </a:rPr>
-              <a:t>, </a:t>
-            </a:r>
-            <a:r>
-              <a:rPr kumimoji="0" lang="en-US" altLang="en-US" sz="2400" b="0" i="0" u="none" strike="noStrike" cap="none" normalizeH="0" baseline="0" dirty="0" err="1">
-                <a:ln>
-                  <a:noFill/>
-                </a:ln>
-                <a:solidFill>
-                  <a:schemeClr val="tx1"/>
-                </a:solidFill>
-                <a:effectLst/>
-                <a:latin typeface="Arial" panose="020B0604020202020204" pitchFamily="34" charset="0"/>
-              </a:rPr>
-              <a:t>mediante</a:t>
-            </a:r>
-            <a:r>
-              <a:rPr kumimoji="0" lang="en-US" altLang="en-US" sz="2400" b="0" i="0" u="none" strike="noStrike" cap="none" normalizeH="0" baseline="0" dirty="0">
-                <a:ln>
-                  <a:noFill/>
-                </a:ln>
-                <a:solidFill>
-                  <a:schemeClr val="tx1"/>
-                </a:solidFill>
-                <a:effectLst/>
-                <a:latin typeface="Arial" panose="020B0604020202020204" pitchFamily="34" charset="0"/>
-              </a:rPr>
-              <a:t> </a:t>
-            </a:r>
-            <a:r>
-              <a:rPr kumimoji="0" lang="en-US" altLang="en-US" sz="2400" b="0" i="0" u="none" strike="noStrike" cap="none" normalizeH="0" baseline="0" dirty="0" err="1">
-                <a:ln>
-                  <a:noFill/>
-                </a:ln>
-                <a:solidFill>
-                  <a:schemeClr val="tx1"/>
-                </a:solidFill>
-                <a:effectLst/>
-                <a:latin typeface="Arial" panose="020B0604020202020204" pitchFamily="34" charset="0"/>
-              </a:rPr>
-              <a:t>autenticación</a:t>
-            </a:r>
-            <a:r>
-              <a:rPr kumimoji="0" lang="en-US" altLang="en-US" sz="2400" b="0" i="0" u="none" strike="noStrike" cap="none" normalizeH="0" baseline="0" dirty="0">
-                <a:ln>
-                  <a:noFill/>
-                </a:ln>
-                <a:solidFill>
-                  <a:schemeClr val="tx1"/>
-                </a:solidFill>
-                <a:effectLst/>
-                <a:latin typeface="Arial" panose="020B0604020202020204" pitchFamily="34" charset="0"/>
-              </a:rPr>
-              <a:t>, </a:t>
-            </a:r>
-            <a:r>
-              <a:rPr kumimoji="0" lang="en-US" altLang="en-US" sz="2400" b="0" i="0" u="none" strike="noStrike" cap="none" normalizeH="0" baseline="0" dirty="0" err="1">
-                <a:ln>
-                  <a:noFill/>
-                </a:ln>
-                <a:solidFill>
-                  <a:schemeClr val="tx1"/>
-                </a:solidFill>
-                <a:effectLst/>
-                <a:latin typeface="Arial" panose="020B0604020202020204" pitchFamily="34" charset="0"/>
-              </a:rPr>
-              <a:t>autorización</a:t>
-            </a:r>
-            <a:r>
-              <a:rPr kumimoji="0" lang="en-US" altLang="en-US" sz="2400" b="0" i="0" u="none" strike="noStrike" cap="none" normalizeH="0" baseline="0" dirty="0">
-                <a:ln>
-                  <a:noFill/>
-                </a:ln>
-                <a:solidFill>
-                  <a:schemeClr val="tx1"/>
-                </a:solidFill>
-                <a:effectLst/>
-                <a:latin typeface="Arial" panose="020B0604020202020204" pitchFamily="34" charset="0"/>
-              </a:rPr>
-              <a:t>, </a:t>
-            </a:r>
-            <a:r>
-              <a:rPr kumimoji="0" lang="en-US" altLang="en-US" sz="2400" b="0" i="0" u="none" strike="noStrike" cap="none" normalizeH="0" baseline="0" dirty="0" err="1">
-                <a:ln>
-                  <a:noFill/>
-                </a:ln>
-                <a:solidFill>
-                  <a:schemeClr val="tx1"/>
-                </a:solidFill>
-                <a:effectLst/>
-                <a:latin typeface="Arial" panose="020B0604020202020204" pitchFamily="34" charset="0"/>
-              </a:rPr>
-              <a:t>encriptación</a:t>
-            </a:r>
-            <a:r>
-              <a:rPr kumimoji="0" lang="en-US" altLang="en-US" sz="2400" b="0" i="0" u="none" strike="noStrike" cap="none" normalizeH="0" baseline="0" dirty="0">
-                <a:ln>
-                  <a:noFill/>
-                </a:ln>
-                <a:solidFill>
-                  <a:schemeClr val="tx1"/>
-                </a:solidFill>
-                <a:effectLst/>
-                <a:latin typeface="Arial" panose="020B0604020202020204" pitchFamily="34" charset="0"/>
-              </a:rPr>
-              <a:t> de </a:t>
-            </a:r>
-            <a:r>
-              <a:rPr kumimoji="0" lang="en-US" altLang="en-US" sz="2400" b="0" i="0" u="none" strike="noStrike" cap="none" normalizeH="0" baseline="0" dirty="0" err="1">
-                <a:ln>
-                  <a:noFill/>
-                </a:ln>
-                <a:solidFill>
-                  <a:schemeClr val="tx1"/>
-                </a:solidFill>
-                <a:effectLst/>
-                <a:latin typeface="Arial" panose="020B0604020202020204" pitchFamily="34" charset="0"/>
-              </a:rPr>
-              <a:t>contraseñas</a:t>
-            </a:r>
-            <a:r>
-              <a:rPr kumimoji="0" lang="en-US" altLang="en-US" sz="2400" b="0" i="0" u="none" strike="noStrike" cap="none" normalizeH="0" baseline="0" dirty="0">
-                <a:ln>
-                  <a:noFill/>
-                </a:ln>
-                <a:solidFill>
-                  <a:schemeClr val="tx1"/>
-                </a:solidFill>
-                <a:effectLst/>
-                <a:latin typeface="Arial" panose="020B0604020202020204" pitchFamily="34" charset="0"/>
-              </a:rPr>
-              <a:t>, </a:t>
-            </a:r>
-            <a:r>
-              <a:rPr kumimoji="0" lang="en-US" altLang="en-US" sz="2400" b="0" i="0" u="none" strike="noStrike" cap="none" normalizeH="0" baseline="0" dirty="0" err="1">
-                <a:ln>
-                  <a:noFill/>
-                </a:ln>
-                <a:solidFill>
-                  <a:schemeClr val="tx1"/>
-                </a:solidFill>
-                <a:effectLst/>
-                <a:latin typeface="Arial" panose="020B0604020202020204" pitchFamily="34" charset="0"/>
-              </a:rPr>
-              <a:t>protección</a:t>
-            </a:r>
-            <a:r>
-              <a:rPr kumimoji="0" lang="en-US" altLang="en-US" sz="2400" b="0" i="0" u="none" strike="noStrike" cap="none" normalizeH="0" baseline="0" dirty="0">
-                <a:ln>
-                  <a:noFill/>
-                </a:ln>
-                <a:solidFill>
-                  <a:schemeClr val="tx1"/>
-                </a:solidFill>
-                <a:effectLst/>
-                <a:latin typeface="Arial" panose="020B0604020202020204" pitchFamily="34" charset="0"/>
-              </a:rPr>
-              <a:t> contra </a:t>
-            </a:r>
-            <a:r>
-              <a:rPr kumimoji="0" lang="en-US" altLang="en-US" sz="2400" b="0" i="0" u="none" strike="noStrike" cap="none" normalizeH="0" baseline="0" dirty="0" err="1">
-                <a:ln>
-                  <a:noFill/>
-                </a:ln>
-                <a:solidFill>
-                  <a:schemeClr val="tx1"/>
-                </a:solidFill>
-                <a:effectLst/>
-                <a:latin typeface="Arial" panose="020B0604020202020204" pitchFamily="34" charset="0"/>
-              </a:rPr>
-              <a:t>vulnerabilidades</a:t>
-            </a:r>
-            <a:r>
-              <a:rPr kumimoji="0" lang="en-US" altLang="en-US" sz="2400" b="0" i="0" u="none" strike="noStrike" cap="none" normalizeH="0" baseline="0" dirty="0">
-                <a:ln>
-                  <a:noFill/>
-                </a:ln>
-                <a:solidFill>
-                  <a:schemeClr val="tx1"/>
-                </a:solidFill>
-                <a:effectLst/>
-                <a:latin typeface="Arial" panose="020B0604020202020204" pitchFamily="34" charset="0"/>
-              </a:rPr>
-              <a:t> y control de </a:t>
-            </a:r>
-            <a:r>
-              <a:rPr kumimoji="0" lang="en-US" altLang="en-US" sz="2400" b="0" i="0" u="none" strike="noStrike" cap="none" normalizeH="0" baseline="0" dirty="0" err="1">
-                <a:ln>
-                  <a:noFill/>
-                </a:ln>
-                <a:solidFill>
-                  <a:schemeClr val="tx1"/>
-                </a:solidFill>
-                <a:effectLst/>
-                <a:latin typeface="Arial" panose="020B0604020202020204" pitchFamily="34" charset="0"/>
-              </a:rPr>
-              <a:t>acceso</a:t>
-            </a:r>
-            <a:r>
-              <a:rPr kumimoji="0" lang="en-US" altLang="en-US" sz="2400" b="0" i="0" u="none" strike="noStrike" cap="none" normalizeH="0" baseline="0" dirty="0">
-                <a:ln>
-                  <a:noFill/>
-                </a:ln>
-                <a:solidFill>
-                  <a:schemeClr val="tx1"/>
-                </a:solidFill>
-                <a:effectLst/>
-                <a:latin typeface="Arial" panose="020B0604020202020204" pitchFamily="34" charset="0"/>
-              </a:rPr>
-              <a:t> a la base de </a:t>
-            </a:r>
-            <a:r>
-              <a:rPr kumimoji="0" lang="en-US" altLang="en-US" sz="2400" b="0" i="0" u="none" strike="noStrike" cap="none" normalizeH="0" baseline="0" dirty="0" err="1">
-                <a:ln>
-                  <a:noFill/>
-                </a:ln>
-                <a:solidFill>
-                  <a:schemeClr val="tx1"/>
-                </a:solidFill>
-                <a:effectLst/>
-                <a:latin typeface="Arial" panose="020B0604020202020204" pitchFamily="34" charset="0"/>
-              </a:rPr>
-              <a:t>datos</a:t>
-            </a:r>
-            <a:r>
-              <a:rPr kumimoji="0" lang="en-US" altLang="en-US" sz="2400" b="0" i="0" u="none" strike="noStrike" cap="none" normalizeH="0" baseline="0" dirty="0">
-                <a:ln>
-                  <a:noFill/>
-                </a:ln>
-                <a:solidFill>
-                  <a:schemeClr val="tx1"/>
-                </a:solidFill>
-                <a:effectLst/>
-                <a:latin typeface="Arial" panose="020B0604020202020204" pitchFamily="34" charset="0"/>
-              </a:rPr>
-              <a:t>.</a:t>
-            </a:r>
           </a:p>
           <a:p>
             <a:pPr marL="0" marR="0" lvl="0" indent="0" algn="l" defTabSz="914400" rtl="0" eaLnBrk="0" fontAlgn="base" latinLnBrk="0" hangingPunct="0">
@@ -9338,266 +9083,16 @@
               <a:buChar char="•"/>
               <a:tabLst/>
             </a:pPr>
-            <a:r>
-              <a:rPr kumimoji="0" lang="en-US" altLang="en-US" sz="2400" b="1" i="0" u="none" strike="noStrike" cap="none" normalizeH="0" baseline="0" dirty="0">
-                <a:ln>
-                  <a:noFill/>
-                </a:ln>
-                <a:solidFill>
-                  <a:schemeClr val="tx1"/>
-                </a:solidFill>
-                <a:effectLst/>
-                <a:latin typeface="Arial" panose="020B0604020202020204" pitchFamily="34" charset="0"/>
-              </a:rPr>
-              <a:t>Usable</a:t>
-            </a:r>
-            <a:r>
-              <a:rPr kumimoji="0" lang="en-US" altLang="en-US" sz="2400" b="0" i="0" u="none" strike="noStrike" cap="none" normalizeH="0" baseline="0" dirty="0">
-                <a:ln>
-                  <a:noFill/>
-                </a:ln>
-                <a:solidFill>
-                  <a:schemeClr val="tx1"/>
-                </a:solidFill>
-                <a:effectLst/>
-                <a:latin typeface="Arial" panose="020B0604020202020204" pitchFamily="34" charset="0"/>
-              </a:rPr>
-              <a:t>, con </a:t>
-            </a:r>
-            <a:r>
-              <a:rPr kumimoji="0" lang="en-US" altLang="en-US" sz="2400" b="0" i="0" u="none" strike="noStrike" cap="none" normalizeH="0" baseline="0" dirty="0" err="1">
-                <a:ln>
-                  <a:noFill/>
-                </a:ln>
-                <a:solidFill>
-                  <a:schemeClr val="tx1"/>
-                </a:solidFill>
-                <a:effectLst/>
-                <a:latin typeface="Arial" panose="020B0604020202020204" pitchFamily="34" charset="0"/>
-              </a:rPr>
-              <a:t>una</a:t>
-            </a:r>
-            <a:r>
-              <a:rPr kumimoji="0" lang="en-US" altLang="en-US" sz="2400" b="0" i="0" u="none" strike="noStrike" cap="none" normalizeH="0" baseline="0" dirty="0">
-                <a:ln>
-                  <a:noFill/>
-                </a:ln>
-                <a:solidFill>
-                  <a:schemeClr val="tx1"/>
-                </a:solidFill>
-                <a:effectLst/>
-                <a:latin typeface="Arial" panose="020B0604020202020204" pitchFamily="34" charset="0"/>
-              </a:rPr>
-              <a:t> </a:t>
-            </a:r>
-            <a:r>
-              <a:rPr kumimoji="0" lang="en-US" altLang="en-US" sz="2400" b="0" i="0" u="none" strike="noStrike" cap="none" normalizeH="0" baseline="0" dirty="0" err="1">
-                <a:ln>
-                  <a:noFill/>
-                </a:ln>
-                <a:solidFill>
-                  <a:schemeClr val="tx1"/>
-                </a:solidFill>
-                <a:effectLst/>
-                <a:latin typeface="Arial" panose="020B0604020202020204" pitchFamily="34" charset="0"/>
-              </a:rPr>
-              <a:t>interfaz</a:t>
-            </a:r>
-            <a:r>
-              <a:rPr kumimoji="0" lang="en-US" altLang="en-US" sz="2400" b="0" i="0" u="none" strike="noStrike" cap="none" normalizeH="0" baseline="0" dirty="0">
-                <a:ln>
-                  <a:noFill/>
-                </a:ln>
-                <a:solidFill>
-                  <a:schemeClr val="tx1"/>
-                </a:solidFill>
-                <a:effectLst/>
-                <a:latin typeface="Arial" panose="020B0604020202020204" pitchFamily="34" charset="0"/>
-              </a:rPr>
-              <a:t> </a:t>
-            </a:r>
-            <a:r>
-              <a:rPr kumimoji="0" lang="en-US" altLang="en-US" sz="2400" b="0" i="0" u="none" strike="noStrike" cap="none" normalizeH="0" baseline="0" dirty="0" err="1">
-                <a:ln>
-                  <a:noFill/>
-                </a:ln>
-                <a:solidFill>
-                  <a:schemeClr val="tx1"/>
-                </a:solidFill>
-                <a:effectLst/>
-                <a:latin typeface="Arial" panose="020B0604020202020204" pitchFamily="34" charset="0"/>
-              </a:rPr>
-              <a:t>intuitiva</a:t>
-            </a:r>
-            <a:r>
-              <a:rPr kumimoji="0" lang="en-US" altLang="en-US" sz="2400" b="0" i="0" u="none" strike="noStrike" cap="none" normalizeH="0" baseline="0" dirty="0">
-                <a:ln>
-                  <a:noFill/>
-                </a:ln>
-                <a:solidFill>
-                  <a:schemeClr val="tx1"/>
-                </a:solidFill>
-                <a:effectLst/>
-                <a:latin typeface="Arial" panose="020B0604020202020204" pitchFamily="34" charset="0"/>
-              </a:rPr>
-              <a:t>, </a:t>
-            </a:r>
-            <a:r>
-              <a:rPr kumimoji="0" lang="en-US" altLang="en-US" sz="2400" b="0" i="0" u="none" strike="noStrike" cap="none" normalizeH="0" baseline="0" dirty="0" err="1">
-                <a:ln>
-                  <a:noFill/>
-                </a:ln>
-                <a:solidFill>
-                  <a:schemeClr val="tx1"/>
-                </a:solidFill>
-                <a:effectLst/>
-                <a:latin typeface="Arial" panose="020B0604020202020204" pitchFamily="34" charset="0"/>
-              </a:rPr>
-              <a:t>accesible</a:t>
-            </a:r>
-            <a:r>
-              <a:rPr kumimoji="0" lang="en-US" altLang="en-US" sz="2400" b="0" i="0" u="none" strike="noStrike" cap="none" normalizeH="0" baseline="0" dirty="0">
-                <a:ln>
-                  <a:noFill/>
-                </a:ln>
-                <a:solidFill>
-                  <a:schemeClr val="tx1"/>
-                </a:solidFill>
-                <a:effectLst/>
-                <a:latin typeface="Arial" panose="020B0604020202020204" pitchFamily="34" charset="0"/>
-              </a:rPr>
-              <a:t>, </a:t>
-            </a:r>
-            <a:r>
-              <a:rPr kumimoji="0" lang="en-US" altLang="en-US" sz="2400" b="0" i="0" u="none" strike="noStrike" cap="none" normalizeH="0" baseline="0" dirty="0" err="1">
-                <a:ln>
-                  <a:noFill/>
-                </a:ln>
-                <a:solidFill>
-                  <a:schemeClr val="tx1"/>
-                </a:solidFill>
-                <a:effectLst/>
-                <a:latin typeface="Arial" panose="020B0604020202020204" pitchFamily="34" charset="0"/>
-              </a:rPr>
-              <a:t>fácil</a:t>
-            </a:r>
-            <a:r>
-              <a:rPr kumimoji="0" lang="en-US" altLang="en-US" sz="2400" b="0" i="0" u="none" strike="noStrike" cap="none" normalizeH="0" baseline="0" dirty="0">
-                <a:ln>
-                  <a:noFill/>
-                </a:ln>
-                <a:solidFill>
-                  <a:schemeClr val="tx1"/>
-                </a:solidFill>
-                <a:effectLst/>
-                <a:latin typeface="Arial" panose="020B0604020202020204" pitchFamily="34" charset="0"/>
-              </a:rPr>
-              <a:t> de usar y </a:t>
-            </a:r>
-            <a:r>
-              <a:rPr kumimoji="0" lang="en-US" altLang="en-US" sz="2400" b="0" i="0" u="none" strike="noStrike" cap="none" normalizeH="0" baseline="0" dirty="0" err="1">
-                <a:ln>
-                  <a:noFill/>
-                </a:ln>
-                <a:solidFill>
-                  <a:schemeClr val="tx1"/>
-                </a:solidFill>
-                <a:effectLst/>
-                <a:latin typeface="Arial" panose="020B0604020202020204" pitchFamily="34" charset="0"/>
-              </a:rPr>
-              <a:t>enfocada</a:t>
-            </a:r>
-            <a:r>
-              <a:rPr kumimoji="0" lang="en-US" altLang="en-US" sz="2400" b="0" i="0" u="none" strike="noStrike" cap="none" normalizeH="0" baseline="0" dirty="0">
-                <a:ln>
-                  <a:noFill/>
-                </a:ln>
-                <a:solidFill>
-                  <a:schemeClr val="tx1"/>
-                </a:solidFill>
-                <a:effectLst/>
-                <a:latin typeface="Arial" panose="020B0604020202020204" pitchFamily="34" charset="0"/>
-              </a:rPr>
-              <a:t> </a:t>
-            </a:r>
-            <a:r>
-              <a:rPr kumimoji="0" lang="en-US" altLang="en-US" sz="2400" b="0" i="0" u="none" strike="noStrike" cap="none" normalizeH="0" baseline="0" dirty="0" err="1">
-                <a:ln>
-                  <a:noFill/>
-                </a:ln>
-                <a:solidFill>
-                  <a:schemeClr val="tx1"/>
-                </a:solidFill>
-                <a:effectLst/>
-                <a:latin typeface="Arial" panose="020B0604020202020204" pitchFamily="34" charset="0"/>
-              </a:rPr>
-              <a:t>en</a:t>
-            </a:r>
-            <a:r>
-              <a:rPr kumimoji="0" lang="en-US" altLang="en-US" sz="2400" b="0" i="0" u="none" strike="noStrike" cap="none" normalizeH="0" baseline="0" dirty="0">
-                <a:ln>
-                  <a:noFill/>
-                </a:ln>
-                <a:solidFill>
-                  <a:schemeClr val="tx1"/>
-                </a:solidFill>
-                <a:effectLst/>
-                <a:latin typeface="Arial" panose="020B0604020202020204" pitchFamily="34" charset="0"/>
-              </a:rPr>
-              <a:t> la </a:t>
-            </a:r>
-            <a:r>
-              <a:rPr kumimoji="0" lang="en-US" altLang="en-US" sz="2400" b="0" i="0" u="none" strike="noStrike" cap="none" normalizeH="0" baseline="0" dirty="0" err="1">
-                <a:ln>
-                  <a:noFill/>
-                </a:ln>
-                <a:solidFill>
-                  <a:schemeClr val="tx1"/>
-                </a:solidFill>
-                <a:effectLst/>
-                <a:latin typeface="Arial" panose="020B0604020202020204" pitchFamily="34" charset="0"/>
-              </a:rPr>
-              <a:t>satisfacción</a:t>
-            </a:r>
-            <a:r>
-              <a:rPr kumimoji="0" lang="en-US" altLang="en-US" sz="2400" b="0" i="0" u="none" strike="noStrike" cap="none" normalizeH="0" baseline="0" dirty="0">
-                <a:ln>
-                  <a:noFill/>
-                </a:ln>
-                <a:solidFill>
-                  <a:schemeClr val="tx1"/>
-                </a:solidFill>
-                <a:effectLst/>
-                <a:latin typeface="Arial" panose="020B0604020202020204" pitchFamily="34" charset="0"/>
-              </a:rPr>
-              <a:t> del </a:t>
-            </a:r>
-            <a:r>
-              <a:rPr kumimoji="0" lang="en-US" altLang="en-US" sz="2400" b="0" i="0" u="none" strike="noStrike" cap="none" normalizeH="0" baseline="0" dirty="0" err="1">
-                <a:ln>
-                  <a:noFill/>
-                </a:ln>
-                <a:solidFill>
-                  <a:schemeClr val="tx1"/>
-                </a:solidFill>
-                <a:effectLst/>
-                <a:latin typeface="Arial" panose="020B0604020202020204" pitchFamily="34" charset="0"/>
-              </a:rPr>
-              <a:t>usuario</a:t>
-            </a:r>
-            <a:r>
-              <a:rPr kumimoji="0" lang="en-US" altLang="en-US" sz="2400" b="0" i="0" u="none" strike="noStrike" cap="none" normalizeH="0" baseline="0" dirty="0">
-                <a:ln>
-                  <a:noFill/>
-                </a:ln>
-                <a:solidFill>
-                  <a:schemeClr val="tx1"/>
-                </a:solidFill>
-                <a:effectLst/>
-                <a:latin typeface="Arial" panose="020B0604020202020204" pitchFamily="34" charset="0"/>
-              </a:rPr>
-              <a:t>.</a:t>
-            </a:r>
+            <a:endParaRPr kumimoji="0" lang="en-US" altLang="en-US" sz="2400" b="1" i="0" u="none" strike="noStrike" cap="none" normalizeH="0" baseline="0" dirty="0">
+              <a:ln>
+                <a:noFill/>
+              </a:ln>
+              <a:solidFill>
+                <a:schemeClr val="tx1"/>
+              </a:solidFill>
+              <a:effectLst/>
+              <a:latin typeface="Arial" panose="020B0604020202020204" pitchFamily="34" charset="0"/>
+            </a:endParaRPr>
           </a:p>
           <a:p>
             <a:pPr marL="0" marR="0" lvl="0" indent="0" algn="l" defTabSz="914400" rtl="0" eaLnBrk="0" fontAlgn="base" latinLnBrk="0" hangingPunct="0">
@@ -9627,176 +9122,7 @@
                 <a:effectLst/>
                 <a:latin typeface="Arial" panose="020B0604020202020204" pitchFamily="34" charset="0"/>
               </a:rPr>
-              <a:t>Disponible</a:t>
-            </a:r>
-            <a:r>
-              <a:rPr kumimoji="0" lang="en-US" altLang="en-US" sz="2400" b="0" i="0" u="none" strike="noStrike" cap="none" normalizeH="0" baseline="0" dirty="0">
-                <a:ln>
-                  <a:noFill/>
-                </a:ln>
-                <a:solidFill>
-                  <a:schemeClr val="tx1"/>
-                </a:solidFill>
-                <a:effectLst/>
-                <a:latin typeface="Arial" panose="020B0604020202020204" pitchFamily="34" charset="0"/>
-              </a:rPr>
-              <a:t>, </a:t>
-            </a:r>
-            <a:r>
-              <a:rPr kumimoji="0" lang="en-US" altLang="en-US" sz="2400" b="0" i="0" u="none" strike="noStrike" cap="none" normalizeH="0" baseline="0" dirty="0" err="1">
-                <a:ln>
-                  <a:noFill/>
-                </a:ln>
-                <a:solidFill>
-                  <a:schemeClr val="tx1"/>
-                </a:solidFill>
-                <a:effectLst/>
-                <a:latin typeface="Arial" panose="020B0604020202020204" pitchFamily="34" charset="0"/>
-              </a:rPr>
-              <a:t>garantizando</a:t>
-            </a:r>
-            <a:r>
-              <a:rPr kumimoji="0" lang="en-US" altLang="en-US" sz="2400" b="0" i="0" u="none" strike="noStrike" cap="none" normalizeH="0" baseline="0" dirty="0">
-                <a:ln>
-                  <a:noFill/>
-                </a:ln>
-                <a:solidFill>
-                  <a:schemeClr val="tx1"/>
-                </a:solidFill>
-                <a:effectLst/>
-                <a:latin typeface="Arial" panose="020B0604020202020204" pitchFamily="34" charset="0"/>
-              </a:rPr>
-              <a:t> </a:t>
-            </a:r>
-            <a:r>
-              <a:rPr kumimoji="0" lang="en-US" altLang="en-US" sz="2400" b="0" i="0" u="none" strike="noStrike" cap="none" normalizeH="0" baseline="0" dirty="0" err="1">
-                <a:ln>
-                  <a:noFill/>
-                </a:ln>
-                <a:solidFill>
-                  <a:schemeClr val="tx1"/>
-                </a:solidFill>
-                <a:effectLst/>
-                <a:latin typeface="Arial" panose="020B0604020202020204" pitchFamily="34" charset="0"/>
-              </a:rPr>
-              <a:t>tiempos</a:t>
-            </a:r>
-            <a:r>
-              <a:rPr kumimoji="0" lang="en-US" altLang="en-US" sz="2400" b="0" i="0" u="none" strike="noStrike" cap="none" normalizeH="0" baseline="0" dirty="0">
-                <a:ln>
-                  <a:noFill/>
-                </a:ln>
-                <a:solidFill>
-                  <a:schemeClr val="tx1"/>
-                </a:solidFill>
-                <a:effectLst/>
-                <a:latin typeface="Arial" panose="020B0604020202020204" pitchFamily="34" charset="0"/>
-              </a:rPr>
-              <a:t> de </a:t>
-            </a:r>
-            <a:r>
-              <a:rPr kumimoji="0" lang="en-US" altLang="en-US" sz="2400" b="0" i="0" u="none" strike="noStrike" cap="none" normalizeH="0" baseline="0" dirty="0" err="1">
-                <a:ln>
-                  <a:noFill/>
-                </a:ln>
-                <a:solidFill>
-                  <a:schemeClr val="tx1"/>
-                </a:solidFill>
-                <a:effectLst/>
-                <a:latin typeface="Arial" panose="020B0604020202020204" pitchFamily="34" charset="0"/>
-              </a:rPr>
-              <a:t>actividad</a:t>
-            </a:r>
-            <a:r>
-              <a:rPr kumimoji="0" lang="en-US" altLang="en-US" sz="2400" b="0" i="0" u="none" strike="noStrike" cap="none" normalizeH="0" baseline="0" dirty="0">
-                <a:ln>
-                  <a:noFill/>
-                </a:ln>
-                <a:solidFill>
-                  <a:schemeClr val="tx1"/>
-                </a:solidFill>
-                <a:effectLst/>
-                <a:latin typeface="Arial" panose="020B0604020202020204" pitchFamily="34" charset="0"/>
-              </a:rPr>
-              <a:t> </a:t>
-            </a:r>
-            <a:r>
-              <a:rPr kumimoji="0" lang="en-US" altLang="en-US" sz="2400" b="0" i="0" u="none" strike="noStrike" cap="none" normalizeH="0" baseline="0" dirty="0" err="1">
-                <a:ln>
-                  <a:noFill/>
-                </a:ln>
-                <a:solidFill>
-                  <a:schemeClr val="tx1"/>
-                </a:solidFill>
-                <a:effectLst/>
-                <a:latin typeface="Arial" panose="020B0604020202020204" pitchFamily="34" charset="0"/>
-              </a:rPr>
-              <a:t>constantes</a:t>
-            </a:r>
-            <a:r>
-              <a:rPr kumimoji="0" lang="en-US" altLang="en-US" sz="2400" b="0" i="0" u="none" strike="noStrike" cap="none" normalizeH="0" baseline="0" dirty="0">
-                <a:ln>
-                  <a:noFill/>
-                </a:ln>
-                <a:solidFill>
-                  <a:schemeClr val="tx1"/>
-                </a:solidFill>
-                <a:effectLst/>
-                <a:latin typeface="Arial" panose="020B0604020202020204" pitchFamily="34" charset="0"/>
-              </a:rPr>
-              <a:t>, con planes de </a:t>
-            </a:r>
-            <a:r>
-              <a:rPr kumimoji="0" lang="en-US" altLang="en-US" sz="2400" b="0" i="0" u="none" strike="noStrike" cap="none" normalizeH="0" baseline="0" dirty="0" err="1">
-                <a:ln>
-                  <a:noFill/>
-                </a:ln>
-                <a:solidFill>
-                  <a:schemeClr val="tx1"/>
-                </a:solidFill>
-                <a:effectLst/>
-                <a:latin typeface="Arial" panose="020B0604020202020204" pitchFamily="34" charset="0"/>
-              </a:rPr>
-              <a:t>recuperación</a:t>
-            </a:r>
-            <a:r>
-              <a:rPr kumimoji="0" lang="en-US" altLang="en-US" sz="2400" b="0" i="0" u="none" strike="noStrike" cap="none" normalizeH="0" baseline="0" dirty="0">
-                <a:ln>
-                  <a:noFill/>
-                </a:ln>
-                <a:solidFill>
-                  <a:schemeClr val="tx1"/>
-                </a:solidFill>
-                <a:effectLst/>
-                <a:latin typeface="Arial" panose="020B0604020202020204" pitchFamily="34" charset="0"/>
-              </a:rPr>
-              <a:t> ante </a:t>
-            </a:r>
-            <a:r>
-              <a:rPr kumimoji="0" lang="en-US" altLang="en-US" sz="2400" b="0" i="0" u="none" strike="noStrike" cap="none" normalizeH="0" baseline="0" dirty="0" err="1">
-                <a:ln>
-                  <a:noFill/>
-                </a:ln>
-                <a:solidFill>
-                  <a:schemeClr val="tx1"/>
-                </a:solidFill>
-                <a:effectLst/>
-                <a:latin typeface="Arial" panose="020B0604020202020204" pitchFamily="34" charset="0"/>
-              </a:rPr>
-              <a:t>fallos</a:t>
-            </a:r>
-            <a:r>
-              <a:rPr kumimoji="0" lang="en-US" altLang="en-US" sz="2400" b="0" i="0" u="none" strike="noStrike" cap="none" normalizeH="0" baseline="0" dirty="0">
-                <a:ln>
-                  <a:noFill/>
-                </a:ln>
-                <a:solidFill>
-                  <a:schemeClr val="tx1"/>
-                </a:solidFill>
-                <a:effectLst/>
-                <a:latin typeface="Arial" panose="020B0604020202020204" pitchFamily="34" charset="0"/>
-              </a:rPr>
-              <a:t>.</a:t>
+              <a:t>Usable</a:t>
             </a:r>
           </a:p>
           <a:p>
@@ -9816,536 +9142,16 @@
               <a:buChar char="•"/>
               <a:tabLst/>
             </a:pPr>
-            <a:r>
-              <a:rPr kumimoji="0" lang="en-US" altLang="en-US" sz="2400" b="1" i="0" u="none" strike="noStrike" cap="none" normalizeH="0" baseline="0" dirty="0" err="1">
-                <a:ln>
-                  <a:noFill/>
-                </a:ln>
-                <a:solidFill>
-                  <a:schemeClr val="tx1"/>
-                </a:solidFill>
-                <a:effectLst/>
-                <a:latin typeface="Arial" panose="020B0604020202020204" pitchFamily="34" charset="0"/>
-              </a:rPr>
-              <a:t>Fiable</a:t>
-            </a:r>
-            <a:r>
-              <a:rPr kumimoji="0" lang="en-US" altLang="en-US" sz="2400" b="0" i="0" u="none" strike="noStrike" cap="none" normalizeH="0" baseline="0" dirty="0">
-                <a:ln>
-                  <a:noFill/>
-                </a:ln>
-                <a:solidFill>
-                  <a:schemeClr val="tx1"/>
-                </a:solidFill>
-                <a:effectLst/>
-                <a:latin typeface="Arial" panose="020B0604020202020204" pitchFamily="34" charset="0"/>
-              </a:rPr>
-              <a:t>, </a:t>
-            </a:r>
-            <a:r>
-              <a:rPr kumimoji="0" lang="en-US" altLang="en-US" sz="2400" b="0" i="0" u="none" strike="noStrike" cap="none" normalizeH="0" baseline="0" dirty="0" err="1">
-                <a:ln>
-                  <a:noFill/>
-                </a:ln>
-                <a:solidFill>
-                  <a:schemeClr val="tx1"/>
-                </a:solidFill>
-                <a:effectLst/>
-                <a:latin typeface="Arial" panose="020B0604020202020204" pitchFamily="34" charset="0"/>
-              </a:rPr>
-              <a:t>ofreciendo</a:t>
-            </a:r>
-            <a:r>
-              <a:rPr kumimoji="0" lang="en-US" altLang="en-US" sz="2400" b="0" i="0" u="none" strike="noStrike" cap="none" normalizeH="0" baseline="0" dirty="0">
-                <a:ln>
-                  <a:noFill/>
-                </a:ln>
-                <a:solidFill>
-                  <a:schemeClr val="tx1"/>
-                </a:solidFill>
-                <a:effectLst/>
-                <a:latin typeface="Arial" panose="020B0604020202020204" pitchFamily="34" charset="0"/>
-              </a:rPr>
-              <a:t> </a:t>
-            </a:r>
-            <a:r>
-              <a:rPr kumimoji="0" lang="en-US" altLang="en-US" sz="2400" b="0" i="0" u="none" strike="noStrike" cap="none" normalizeH="0" baseline="0" dirty="0" err="1">
-                <a:ln>
-                  <a:noFill/>
-                </a:ln>
-                <a:solidFill>
-                  <a:schemeClr val="tx1"/>
-                </a:solidFill>
-                <a:effectLst/>
-                <a:latin typeface="Arial" panose="020B0604020202020204" pitchFamily="34" charset="0"/>
-              </a:rPr>
-              <a:t>tolerancia</a:t>
-            </a:r>
-            <a:r>
-              <a:rPr kumimoji="0" lang="en-US" altLang="en-US" sz="2400" b="0" i="0" u="none" strike="noStrike" cap="none" normalizeH="0" baseline="0" dirty="0">
-                <a:ln>
-                  <a:noFill/>
-                </a:ln>
-                <a:solidFill>
-                  <a:schemeClr val="tx1"/>
-                </a:solidFill>
-                <a:effectLst/>
-                <a:latin typeface="Arial" panose="020B0604020202020204" pitchFamily="34" charset="0"/>
-              </a:rPr>
-              <a:t> a </a:t>
-            </a:r>
-            <a:r>
-              <a:rPr kumimoji="0" lang="en-US" altLang="en-US" sz="2400" b="0" i="0" u="none" strike="noStrike" cap="none" normalizeH="0" baseline="0" dirty="0" err="1">
-                <a:ln>
-                  <a:noFill/>
-                </a:ln>
-                <a:solidFill>
-                  <a:schemeClr val="tx1"/>
-                </a:solidFill>
-                <a:effectLst/>
-                <a:latin typeface="Arial" panose="020B0604020202020204" pitchFamily="34" charset="0"/>
-              </a:rPr>
-              <a:t>errores</a:t>
-            </a:r>
-            <a:r>
-              <a:rPr kumimoji="0" lang="en-US" altLang="en-US" sz="2400" b="0" i="0" u="none" strike="noStrike" cap="none" normalizeH="0" baseline="0" dirty="0">
-                <a:ln>
-                  <a:noFill/>
-                </a:ln>
-                <a:solidFill>
-                  <a:schemeClr val="tx1"/>
-                </a:solidFill>
-                <a:effectLst/>
-                <a:latin typeface="Arial" panose="020B0604020202020204" pitchFamily="34" charset="0"/>
-              </a:rPr>
-              <a:t>, </a:t>
-            </a:r>
-            <a:r>
-              <a:rPr kumimoji="0" lang="en-US" altLang="en-US" sz="2400" b="0" i="0" u="none" strike="noStrike" cap="none" normalizeH="0" baseline="0" dirty="0" err="1">
-                <a:ln>
-                  <a:noFill/>
-                </a:ln>
-                <a:solidFill>
-                  <a:schemeClr val="tx1"/>
-                </a:solidFill>
-                <a:effectLst/>
-                <a:latin typeface="Arial" panose="020B0604020202020204" pitchFamily="34" charset="0"/>
-              </a:rPr>
-              <a:t>estabilidad</a:t>
-            </a:r>
-            <a:r>
-              <a:rPr kumimoji="0" lang="en-US" altLang="en-US" sz="2400" b="0" i="0" u="none" strike="noStrike" cap="none" normalizeH="0" baseline="0" dirty="0">
-                <a:ln>
-                  <a:noFill/>
-                </a:ln>
-                <a:solidFill>
-                  <a:schemeClr val="tx1"/>
-                </a:solidFill>
-                <a:effectLst/>
-                <a:latin typeface="Arial" panose="020B0604020202020204" pitchFamily="34" charset="0"/>
-              </a:rPr>
-              <a:t> y </a:t>
-            </a:r>
-            <a:r>
-              <a:rPr kumimoji="0" lang="en-US" altLang="en-US" sz="2400" b="0" i="0" u="none" strike="noStrike" cap="none" normalizeH="0" baseline="0" dirty="0" err="1">
-                <a:ln>
-                  <a:noFill/>
-                </a:ln>
-                <a:solidFill>
-                  <a:schemeClr val="tx1"/>
-                </a:solidFill>
-                <a:effectLst/>
-                <a:latin typeface="Arial" panose="020B0604020202020204" pitchFamily="34" charset="0"/>
-              </a:rPr>
-              <a:t>recuperación</a:t>
-            </a:r>
-            <a:r>
-              <a:rPr kumimoji="0" lang="en-US" altLang="en-US" sz="2400" b="0" i="0" u="none" strike="noStrike" cap="none" normalizeH="0" baseline="0" dirty="0">
-                <a:ln>
-                  <a:noFill/>
-                </a:ln>
-                <a:solidFill>
-                  <a:schemeClr val="tx1"/>
-                </a:solidFill>
-                <a:effectLst/>
-                <a:latin typeface="Arial" panose="020B0604020202020204" pitchFamily="34" charset="0"/>
-              </a:rPr>
-              <a:t> </a:t>
-            </a:r>
-            <a:r>
-              <a:rPr kumimoji="0" lang="en-US" altLang="en-US" sz="2400" b="0" i="0" u="none" strike="noStrike" cap="none" normalizeH="0" baseline="0" dirty="0" err="1">
-                <a:ln>
-                  <a:noFill/>
-                </a:ln>
-                <a:solidFill>
-                  <a:schemeClr val="tx1"/>
-                </a:solidFill>
-                <a:effectLst/>
-                <a:latin typeface="Arial" panose="020B0604020202020204" pitchFamily="34" charset="0"/>
-              </a:rPr>
-              <a:t>efectiva</a:t>
-            </a:r>
-            <a:r>
-              <a:rPr kumimoji="0" lang="en-US" altLang="en-US" sz="2400" b="0" i="0" u="none" strike="noStrike" cap="none" normalizeH="0" baseline="0" dirty="0">
-                <a:ln>
-                  <a:noFill/>
-                </a:ln>
-                <a:solidFill>
-                  <a:schemeClr val="tx1"/>
-                </a:solidFill>
-                <a:effectLst/>
-                <a:latin typeface="Arial" panose="020B0604020202020204" pitchFamily="34" charset="0"/>
-              </a:rPr>
-              <a:t>.</a:t>
-            </a:r>
-          </a:p>
-          <a:p>
-            <a:pPr eaLnBrk="0" fontAlgn="base" hangingPunct="0">
-              <a:spcBef>
-                <a:spcPct val="0"/>
-              </a:spcBef>
-              <a:spcAft>
-                <a:spcPct val="0"/>
-              </a:spcAft>
-              <a:buFontTx/>
-              <a:buChar char="•"/>
-            </a:pPr>
-            <a:r>
-              <a:rPr kumimoji="0" lang="en-US" altLang="en-US" sz="2400" b="1" i="0" u="none" strike="noStrike" cap="none" normalizeH="0" baseline="0" dirty="0" err="1">
-                <a:ln>
-                  <a:noFill/>
-                </a:ln>
-                <a:solidFill>
-                  <a:schemeClr val="tx1"/>
-                </a:solidFill>
-                <a:effectLst/>
-                <a:latin typeface="Arial" panose="020B0604020202020204" pitchFamily="34" charset="0"/>
-              </a:rPr>
-              <a:t>Mantenible</a:t>
-            </a:r>
-            <a:r>
-              <a:rPr kumimoji="0" lang="en-US" altLang="en-US" sz="2400" b="0" i="0" u="none" strike="noStrike" cap="none" normalizeH="0" baseline="0" dirty="0">
-                <a:ln>
-                  <a:noFill/>
-                </a:ln>
-                <a:solidFill>
-                  <a:schemeClr val="tx1"/>
-                </a:solidFill>
-                <a:effectLst/>
-                <a:latin typeface="Arial" panose="020B0604020202020204" pitchFamily="34" charset="0"/>
-              </a:rPr>
-              <a:t>, con </a:t>
-            </a:r>
-            <a:r>
-              <a:rPr kumimoji="0" lang="en-US" altLang="en-US" sz="2400" b="0" i="0" u="none" strike="noStrike" cap="none" normalizeH="0" baseline="0" dirty="0" err="1">
-                <a:ln>
-                  <a:noFill/>
-                </a:ln>
-                <a:solidFill>
-                  <a:schemeClr val="tx1"/>
-                </a:solidFill>
-                <a:effectLst/>
-                <a:latin typeface="Arial" panose="020B0604020202020204" pitchFamily="34" charset="0"/>
-              </a:rPr>
-              <a:t>facilidad</a:t>
-            </a:r>
-            <a:r>
-              <a:rPr kumimoji="0" lang="en-US" altLang="en-US" sz="2400" b="0" i="0" u="none" strike="noStrike" cap="none" normalizeH="0" baseline="0" dirty="0">
-                <a:ln>
-                  <a:noFill/>
-                </a:ln>
-                <a:solidFill>
-                  <a:schemeClr val="tx1"/>
-                </a:solidFill>
-                <a:effectLst/>
-                <a:latin typeface="Arial" panose="020B0604020202020204" pitchFamily="34" charset="0"/>
-              </a:rPr>
-              <a:t> para </a:t>
-            </a:r>
-            <a:r>
-              <a:rPr kumimoji="0" lang="en-US" altLang="en-US" sz="2400" b="0" i="0" u="none" strike="noStrike" cap="none" normalizeH="0" baseline="0" dirty="0" err="1">
-                <a:ln>
-                  <a:noFill/>
-                </a:ln>
-                <a:solidFill>
-                  <a:schemeClr val="tx1"/>
-                </a:solidFill>
-                <a:effectLst/>
-                <a:latin typeface="Arial" panose="020B0604020202020204" pitchFamily="34" charset="0"/>
-              </a:rPr>
-              <a:t>actualizaciones</a:t>
-            </a:r>
-            <a:r>
-              <a:rPr kumimoji="0" lang="en-US" altLang="en-US" sz="2400" b="0" i="0" u="none" strike="noStrike" cap="none" normalizeH="0" baseline="0" dirty="0">
-                <a:ln>
-                  <a:noFill/>
-                </a:ln>
-                <a:solidFill>
-                  <a:schemeClr val="tx1"/>
-                </a:solidFill>
-                <a:effectLst/>
-                <a:latin typeface="Arial" panose="020B0604020202020204" pitchFamily="34" charset="0"/>
-              </a:rPr>
-              <a:t>, </a:t>
-            </a:r>
-            <a:r>
-              <a:rPr kumimoji="0" lang="en-US" altLang="en-US" sz="2400" b="0" i="0" u="none" strike="noStrike" cap="none" normalizeH="0" baseline="0" dirty="0" err="1">
-                <a:ln>
-                  <a:noFill/>
-                </a:ln>
-                <a:solidFill>
-                  <a:schemeClr val="tx1"/>
-                </a:solidFill>
-                <a:effectLst/>
-                <a:latin typeface="Arial" panose="020B0604020202020204" pitchFamily="34" charset="0"/>
-              </a:rPr>
-              <a:t>buena</a:t>
-            </a:r>
-            <a:r>
-              <a:rPr kumimoji="0" lang="en-US" altLang="en-US" sz="2400" b="0" i="0" u="none" strike="noStrike" cap="none" normalizeH="0" baseline="0" dirty="0">
-                <a:ln>
-                  <a:noFill/>
-                </a:ln>
-                <a:solidFill>
-                  <a:schemeClr val="tx1"/>
-                </a:solidFill>
-                <a:effectLst/>
-                <a:latin typeface="Arial" panose="020B0604020202020204" pitchFamily="34" charset="0"/>
-              </a:rPr>
-              <a:t> </a:t>
-            </a:r>
-            <a:r>
-              <a:rPr kumimoji="0" lang="en-US" altLang="en-US" sz="2400" b="0" i="0" u="none" strike="noStrike" cap="none" normalizeH="0" baseline="0" dirty="0" err="1">
-                <a:ln>
-                  <a:noFill/>
-                </a:ln>
-                <a:solidFill>
-                  <a:schemeClr val="tx1"/>
-                </a:solidFill>
-                <a:effectLst/>
-                <a:latin typeface="Arial" panose="020B0604020202020204" pitchFamily="34" charset="0"/>
-              </a:rPr>
-              <a:t>documentación</a:t>
-            </a:r>
-            <a:r>
-              <a:rPr kumimoji="0" lang="en-US" altLang="en-US" sz="2400" b="0" i="0" u="none" strike="noStrike" cap="none" normalizeH="0" baseline="0" dirty="0">
-                <a:ln>
-                  <a:noFill/>
-                </a:ln>
-                <a:solidFill>
-                  <a:schemeClr val="tx1"/>
-                </a:solidFill>
-                <a:effectLst/>
-                <a:latin typeface="Arial" panose="020B0604020202020204" pitchFamily="34" charset="0"/>
-              </a:rPr>
-              <a:t> y </a:t>
-            </a:r>
-            <a:r>
-              <a:rPr kumimoji="0" lang="en-US" altLang="en-US" sz="2400" b="0" i="0" u="none" strike="noStrike" cap="none" normalizeH="0" baseline="0" dirty="0" err="1">
-                <a:ln>
-                  <a:noFill/>
-                </a:ln>
-                <a:solidFill>
-                  <a:schemeClr val="tx1"/>
-                </a:solidFill>
-                <a:effectLst/>
-                <a:latin typeface="Arial" panose="020B0604020202020204" pitchFamily="34" charset="0"/>
-              </a:rPr>
-              <a:t>capacidad</a:t>
-            </a:r>
-            <a:r>
-              <a:rPr kumimoji="0" lang="en-US" altLang="en-US" sz="2400" b="0" i="0" u="none" strike="noStrike" cap="none" normalizeH="0" baseline="0" dirty="0">
-                <a:ln>
-                  <a:noFill/>
-                </a:ln>
-                <a:solidFill>
-                  <a:schemeClr val="tx1"/>
-                </a:solidFill>
-                <a:effectLst/>
-                <a:latin typeface="Arial" panose="020B0604020202020204" pitchFamily="34" charset="0"/>
-              </a:rPr>
-              <a:t> de </a:t>
-            </a:r>
-            <a:r>
-              <a:rPr kumimoji="0" lang="en-US" altLang="en-US" sz="2400" b="0" i="0" u="none" strike="noStrike" cap="none" normalizeH="0" baseline="0" dirty="0" err="1">
-                <a:ln>
-                  <a:noFill/>
-                </a:ln>
-                <a:solidFill>
-                  <a:schemeClr val="tx1"/>
-                </a:solidFill>
-                <a:effectLst/>
-                <a:latin typeface="Arial" panose="020B0604020202020204" pitchFamily="34" charset="0"/>
-              </a:rPr>
-              <a:t>cambio</a:t>
-            </a:r>
-            <a:r>
-              <a:rPr kumimoji="0" lang="en-US" altLang="en-US" sz="2400" b="0" i="0" u="none" strike="noStrike" cap="none" normalizeH="0" baseline="0" dirty="0">
-                <a:ln>
-                  <a:noFill/>
-                </a:ln>
-                <a:solidFill>
-                  <a:schemeClr val="tx1"/>
-                </a:solidFill>
-                <a:effectLst/>
-                <a:latin typeface="Arial" panose="020B0604020202020204" pitchFamily="34" charset="0"/>
-              </a:rPr>
-              <a:t> sin </a:t>
-            </a:r>
-            <a:r>
-              <a:rPr kumimoji="0" lang="en-US" altLang="en-US" sz="2400" b="0" i="0" u="none" strike="noStrike" cap="none" normalizeH="0" baseline="0" dirty="0" err="1">
-                <a:ln>
-                  <a:noFill/>
-                </a:ln>
-                <a:solidFill>
-                  <a:schemeClr val="tx1"/>
-                </a:solidFill>
-                <a:effectLst/>
-                <a:latin typeface="Arial" panose="020B0604020202020204" pitchFamily="34" charset="0"/>
-              </a:rPr>
-              <a:t>afectar</a:t>
-            </a:r>
-            <a:r>
-              <a:rPr kumimoji="0" lang="en-US" altLang="en-US" sz="2400" b="0" i="0" u="none" strike="noStrike" cap="none" normalizeH="0" baseline="0" dirty="0">
-                <a:ln>
-                  <a:noFill/>
-                </a:ln>
-                <a:solidFill>
-                  <a:schemeClr val="tx1"/>
-                </a:solidFill>
-                <a:effectLst/>
-                <a:latin typeface="Arial" panose="020B0604020202020204" pitchFamily="34" charset="0"/>
-              </a:rPr>
-              <a:t> la </a:t>
-            </a:r>
-            <a:r>
-              <a:rPr kumimoji="0" lang="en-US" altLang="en-US" sz="2400" b="0" i="0" u="none" strike="noStrike" cap="none" normalizeH="0" baseline="0" dirty="0" err="1">
-                <a:ln>
-                  <a:noFill/>
-                </a:ln>
-                <a:solidFill>
-                  <a:schemeClr val="tx1"/>
-                </a:solidFill>
-                <a:effectLst/>
-                <a:latin typeface="Arial" panose="020B0604020202020204" pitchFamily="34" charset="0"/>
-              </a:rPr>
-              <a:t>estabilidad</a:t>
-            </a:r>
-            <a:r>
-              <a:rPr kumimoji="0" lang="en-US" altLang="en-US" sz="2400" b="0" i="0" u="none" strike="noStrike" cap="none" normalizeH="0" baseline="0" dirty="0">
-                <a:ln>
-                  <a:noFill/>
-                </a:ln>
-                <a:solidFill>
-                  <a:schemeClr val="tx1"/>
-                </a:solidFill>
-                <a:effectLst/>
-                <a:latin typeface="Arial" panose="020B0604020202020204" pitchFamily="34" charset="0"/>
-              </a:rPr>
-              <a:t>.</a:t>
-            </a:r>
-            <a:r>
-              <a:rPr lang="en-US" altLang="en-US" sz="2400" b="1" dirty="0">
-                <a:latin typeface="Arial" panose="020B0604020202020204" pitchFamily="34" charset="0"/>
-              </a:rPr>
-              <a:t> </a:t>
-            </a:r>
-          </a:p>
-          <a:p>
-            <a:pPr eaLnBrk="0" fontAlgn="base" hangingPunct="0">
-              <a:spcBef>
-                <a:spcPct val="0"/>
-              </a:spcBef>
-              <a:spcAft>
-                <a:spcPct val="0"/>
-              </a:spcAft>
-              <a:buFontTx/>
-              <a:buChar char="•"/>
-            </a:pPr>
-            <a:r>
-              <a:rPr lang="en-US" altLang="en-US" sz="2400" b="1" dirty="0" err="1">
-                <a:latin typeface="Arial" panose="020B0604020202020204" pitchFamily="34" charset="0"/>
-              </a:rPr>
-              <a:t>Rápido</a:t>
-            </a:r>
-            <a:r>
-              <a:rPr lang="en-US" altLang="en-US" sz="2400" b="1" dirty="0">
-                <a:latin typeface="Arial" panose="020B0604020202020204" pitchFamily="34" charset="0"/>
-              </a:rPr>
-              <a:t> y </a:t>
-            </a:r>
-            <a:r>
-              <a:rPr lang="en-US" altLang="en-US" sz="2400" b="1" dirty="0" err="1">
-                <a:latin typeface="Arial" panose="020B0604020202020204" pitchFamily="34" charset="0"/>
-              </a:rPr>
-              <a:t>eficiente</a:t>
-            </a:r>
-            <a:r>
-              <a:rPr lang="en-US" altLang="en-US" sz="2400" dirty="0">
-                <a:latin typeface="Arial" panose="020B0604020202020204" pitchFamily="34" charset="0"/>
-              </a:rPr>
-              <a:t>, con </a:t>
-            </a:r>
-            <a:r>
-              <a:rPr lang="en-US" altLang="en-US" sz="2400" dirty="0" err="1">
-                <a:latin typeface="Arial" panose="020B0604020202020204" pitchFamily="34" charset="0"/>
-              </a:rPr>
-              <a:t>tiempos</a:t>
-            </a:r>
-            <a:r>
-              <a:rPr lang="en-US" altLang="en-US" sz="2400" dirty="0">
-                <a:latin typeface="Arial" panose="020B0604020202020204" pitchFamily="34" charset="0"/>
-              </a:rPr>
-              <a:t> de </a:t>
-            </a:r>
-            <a:r>
-              <a:rPr lang="en-US" altLang="en-US" sz="2400" dirty="0" err="1">
-                <a:latin typeface="Arial" panose="020B0604020202020204" pitchFamily="34" charset="0"/>
-              </a:rPr>
-              <a:t>respuesta</a:t>
-            </a:r>
-            <a:r>
-              <a:rPr lang="en-US" altLang="en-US" sz="2400" dirty="0">
-                <a:latin typeface="Arial" panose="020B0604020202020204" pitchFamily="34" charset="0"/>
-              </a:rPr>
-              <a:t> entre 2 y 3 </a:t>
-            </a:r>
-            <a:r>
-              <a:rPr lang="en-US" altLang="en-US" sz="2400" dirty="0" err="1">
-                <a:latin typeface="Arial" panose="020B0604020202020204" pitchFamily="34" charset="0"/>
-              </a:rPr>
-              <a:t>segundos</a:t>
-            </a:r>
-            <a:r>
-              <a:rPr lang="en-US" altLang="en-US" sz="2400" dirty="0">
-                <a:latin typeface="Arial" panose="020B0604020202020204" pitchFamily="34" charset="0"/>
-              </a:rPr>
-              <a:t> para </a:t>
-            </a:r>
-            <a:r>
-              <a:rPr lang="en-US" altLang="en-US" sz="2400" dirty="0" err="1">
-                <a:latin typeface="Arial" panose="020B0604020202020204" pitchFamily="34" charset="0"/>
-              </a:rPr>
-              <a:t>consultas</a:t>
-            </a:r>
-            <a:r>
-              <a:rPr lang="en-US" altLang="en-US" sz="2400" dirty="0">
-                <a:latin typeface="Arial" panose="020B0604020202020204" pitchFamily="34" charset="0"/>
-              </a:rPr>
-              <a:t> y </a:t>
-            </a:r>
-            <a:r>
-              <a:rPr lang="en-US" altLang="en-US" sz="2400" dirty="0" err="1">
-                <a:latin typeface="Arial" panose="020B0604020202020204" pitchFamily="34" charset="0"/>
-              </a:rPr>
-              <a:t>operaciones</a:t>
-            </a:r>
-            <a:r>
-              <a:rPr lang="en-US" altLang="en-US" sz="2400" dirty="0">
-                <a:latin typeface="Arial" panose="020B0604020202020204" pitchFamily="34" charset="0"/>
-              </a:rPr>
-              <a:t>.</a:t>
-            </a:r>
+            <a:endParaRPr kumimoji="0" lang="en-US" altLang="en-US" sz="2400" b="0" i="0" u="none" strike="noStrike" cap="none" normalizeH="0" baseline="0" dirty="0">
+              <a:ln>
+                <a:noFill/>
+              </a:ln>
+              <a:solidFill>
+                <a:schemeClr val="tx1"/>
+              </a:solidFill>
+              <a:effectLst/>
+              <a:latin typeface="Arial" panose="020B0604020202020204" pitchFamily="34" charset="0"/>
+            </a:endParaRPr>
           </a:p>
           <a:p>
             <a:pPr marL="0" marR="0" lvl="0" indent="0" algn="l" defTabSz="914400" rtl="0" eaLnBrk="0" fontAlgn="base" latinLnBrk="0" hangingPunct="0">
@@ -10364,6 +9170,214 @@
               <a:buChar char="•"/>
               <a:tabLst/>
             </a:pPr>
+            <a:r>
+              <a:rPr kumimoji="0" lang="en-US" altLang="en-US" sz="2400" b="1" i="0" u="none" strike="noStrike" cap="none" normalizeH="0" baseline="0" dirty="0">
+                <a:ln>
+                  <a:noFill/>
+                </a:ln>
+                <a:solidFill>
+                  <a:schemeClr val="tx1"/>
+                </a:solidFill>
+                <a:effectLst/>
+                <a:latin typeface="Arial" panose="020B0604020202020204" pitchFamily="34" charset="0"/>
+              </a:rPr>
+              <a:t>Disponible</a:t>
+            </a:r>
+          </a:p>
+          <a:p>
+            <a:pPr marL="0" marR="0" lvl="0" indent="0" algn="l" defTabSz="914400" rtl="0" eaLnBrk="0" fontAlgn="base" latinLnBrk="0" hangingPunct="0">
+              <a:lnSpc>
+                <a:spcPct val="100000"/>
+              </a:lnSpc>
+              <a:spcBef>
+                <a:spcPct val="0"/>
+              </a:spcBef>
+              <a:spcAft>
+                <a:spcPct val="0"/>
+              </a:spcAft>
+              <a:buClrTx/>
+              <a:buSzTx/>
+              <a:buFontTx/>
+              <a:buChar char="•"/>
+              <a:tabLst/>
+            </a:pPr>
+            <a:endParaRPr kumimoji="0" lang="en-US" altLang="en-US" sz="2400" b="0" i="0" u="none" strike="noStrike" cap="none" normalizeH="0" baseline="0" dirty="0">
+              <a:ln>
+                <a:noFill/>
+              </a:ln>
+              <a:solidFill>
+                <a:schemeClr val="tx1"/>
+              </a:solidFill>
+              <a:effectLst/>
+              <a:latin typeface="Arial" panose="020B0604020202020204" pitchFamily="34" charset="0"/>
+            </a:endParaRPr>
+          </a:p>
+          <a:p>
+            <a:pPr marL="0" marR="0" lvl="0" indent="0" algn="l" defTabSz="914400" rtl="0" eaLnBrk="0" fontAlgn="base" latinLnBrk="0" hangingPunct="0">
+              <a:lnSpc>
+                <a:spcPct val="100000"/>
+              </a:lnSpc>
+              <a:spcBef>
+                <a:spcPct val="0"/>
+              </a:spcBef>
+              <a:spcAft>
+                <a:spcPct val="0"/>
+              </a:spcAft>
+              <a:buClrTx/>
+              <a:buSzTx/>
+              <a:buFontTx/>
+              <a:buChar char="•"/>
+              <a:tabLst/>
+            </a:pPr>
+            <a:r>
+              <a:rPr kumimoji="0" lang="en-US" altLang="en-US" sz="2400" b="1" i="0" u="none" strike="noStrike" cap="none" normalizeH="0" baseline="0" dirty="0" err="1">
+                <a:ln>
+                  <a:noFill/>
+                </a:ln>
+                <a:solidFill>
+                  <a:schemeClr val="tx1"/>
+                </a:solidFill>
+                <a:effectLst/>
+                <a:latin typeface="Arial" panose="020B0604020202020204" pitchFamily="34" charset="0"/>
+              </a:rPr>
+              <a:t>Fiable</a:t>
+            </a:r>
+            <a:endParaRPr kumimoji="0" lang="en-US" altLang="en-US" sz="2400" b="1" i="0" u="none" strike="noStrike" cap="none" normalizeH="0" baseline="0" dirty="0">
+              <a:ln>
+                <a:noFill/>
+              </a:ln>
+              <a:solidFill>
+                <a:schemeClr val="tx1"/>
+              </a:solidFill>
+              <a:effectLst/>
+              <a:latin typeface="Arial" panose="020B0604020202020204" pitchFamily="34" charset="0"/>
+            </a:endParaRPr>
+          </a:p>
+          <a:p>
+            <a:pPr marL="0" marR="0" lvl="0" indent="0" algn="l" defTabSz="914400" rtl="0" eaLnBrk="0" fontAlgn="base" latinLnBrk="0" hangingPunct="0">
+              <a:lnSpc>
+                <a:spcPct val="100000"/>
+              </a:lnSpc>
+              <a:spcBef>
+                <a:spcPct val="0"/>
+              </a:spcBef>
+              <a:spcAft>
+                <a:spcPct val="0"/>
+              </a:spcAft>
+              <a:buClrTx/>
+              <a:buSzTx/>
+              <a:buFontTx/>
+              <a:buChar char="•"/>
+              <a:tabLst/>
+            </a:pPr>
+            <a:endParaRPr kumimoji="0" lang="en-US" altLang="en-US" sz="2400" b="0" i="0" u="none" strike="noStrike" cap="none" normalizeH="0" baseline="0" dirty="0">
+              <a:ln>
+                <a:noFill/>
+              </a:ln>
+              <a:solidFill>
+                <a:schemeClr val="tx1"/>
+              </a:solidFill>
+              <a:effectLst/>
+              <a:latin typeface="Arial" panose="020B0604020202020204" pitchFamily="34" charset="0"/>
+            </a:endParaRPr>
+          </a:p>
+          <a:p>
+            <a:pPr marL="0" marR="0" lvl="0" indent="0" algn="l" defTabSz="914400" rtl="0" eaLnBrk="0" fontAlgn="base" latinLnBrk="0" hangingPunct="0">
+              <a:lnSpc>
+                <a:spcPct val="100000"/>
+              </a:lnSpc>
+              <a:spcBef>
+                <a:spcPct val="0"/>
+              </a:spcBef>
+              <a:spcAft>
+                <a:spcPct val="0"/>
+              </a:spcAft>
+              <a:buClrTx/>
+              <a:buSzTx/>
+              <a:buFontTx/>
+              <a:buChar char="•"/>
+              <a:tabLst/>
+            </a:pPr>
+            <a:r>
+              <a:rPr kumimoji="0" lang="en-US" altLang="en-US" sz="2400" b="1" i="0" u="none" strike="noStrike" cap="none" normalizeH="0" baseline="0" dirty="0" err="1">
+                <a:ln>
+                  <a:noFill/>
+                </a:ln>
+                <a:solidFill>
+                  <a:schemeClr val="tx1"/>
+                </a:solidFill>
+                <a:effectLst/>
+                <a:latin typeface="Arial" panose="020B0604020202020204" pitchFamily="34" charset="0"/>
+              </a:rPr>
+              <a:t>Mantenible</a:t>
+            </a:r>
+            <a:endParaRPr kumimoji="0" lang="en-US" altLang="en-US" sz="2400" b="1" i="0" u="none" strike="noStrike" cap="none" normalizeH="0" baseline="0" dirty="0">
+              <a:ln>
+                <a:noFill/>
+              </a:ln>
+              <a:solidFill>
+                <a:schemeClr val="tx1"/>
+              </a:solidFill>
+              <a:effectLst/>
+              <a:latin typeface="Arial" panose="020B0604020202020204" pitchFamily="34" charset="0"/>
+            </a:endParaRPr>
+          </a:p>
+          <a:p>
+            <a:pPr marL="0" marR="0" lvl="0" indent="0" algn="l" defTabSz="914400" rtl="0" eaLnBrk="0" fontAlgn="base" latinLnBrk="0" hangingPunct="0">
+              <a:lnSpc>
+                <a:spcPct val="100000"/>
+              </a:lnSpc>
+              <a:spcBef>
+                <a:spcPct val="0"/>
+              </a:spcBef>
+              <a:spcAft>
+                <a:spcPct val="0"/>
+              </a:spcAft>
+              <a:buClrTx/>
+              <a:buSzTx/>
+              <a:buFontTx/>
+              <a:buChar char="•"/>
+              <a:tabLst/>
+            </a:pPr>
+            <a:endParaRPr lang="en-US" altLang="en-US" sz="2400" b="1" dirty="0">
+              <a:latin typeface="Arial" panose="020B0604020202020204" pitchFamily="34" charset="0"/>
+            </a:endParaRPr>
+          </a:p>
+          <a:p>
+            <a:pPr eaLnBrk="0" fontAlgn="base" hangingPunct="0">
+              <a:spcBef>
+                <a:spcPct val="0"/>
+              </a:spcBef>
+              <a:spcAft>
+                <a:spcPct val="0"/>
+              </a:spcAft>
+              <a:buFontTx/>
+              <a:buChar char="•"/>
+            </a:pPr>
+            <a:r>
+              <a:rPr lang="en-US" altLang="en-US" sz="2400" b="1" dirty="0" err="1">
+                <a:latin typeface="Arial" panose="020B0604020202020204" pitchFamily="34" charset="0"/>
+              </a:rPr>
+              <a:t>Rápido</a:t>
+            </a:r>
+            <a:r>
+              <a:rPr lang="en-US" altLang="en-US" sz="2400" b="1" dirty="0">
+                <a:latin typeface="Arial" panose="020B0604020202020204" pitchFamily="34" charset="0"/>
+              </a:rPr>
+              <a:t> y </a:t>
+            </a:r>
+            <a:r>
+              <a:rPr lang="en-US" altLang="en-US" sz="2400" b="1" dirty="0" err="1">
+                <a:latin typeface="Arial" panose="020B0604020202020204" pitchFamily="34" charset="0"/>
+              </a:rPr>
+              <a:t>eficiente</a:t>
+            </a:r>
+            <a:r>
+              <a:rPr lang="en-US" altLang="en-US" sz="2400" dirty="0">
+                <a:latin typeface="Arial" panose="020B0604020202020204" pitchFamily="34" charset="0"/>
+              </a:rPr>
+              <a:t> </a:t>
+            </a:r>
             <a:endParaRPr kumimoji="0" lang="en-US" altLang="en-US" sz="1800" b="0" i="0" u="none" strike="noStrike" cap="none" normalizeH="0" baseline="0" dirty="0">
               <a:ln>
                 <a:noFill/>
@@ -10489,84 +9503,12 @@
                   <a:schemeClr val="bg1"/>
                 </a:solidFill>
               </a:rPr>
-              <a:t>Arquitectura del Sistema</a:t>
+              <a:t>Historias de Usuarios</a:t>
             </a:r>
             <a:endParaRPr lang="es-ES" sz="3200" dirty="0">
               <a:solidFill>
                 <a:schemeClr val="bg1"/>
               </a:solidFill>
-            </a:endParaRPr>
-          </a:p>
-        </p:txBody>
-      </p:sp>
-      <p:sp>
-        <p:nvSpPr>
-          <p:cNvPr id="3" name="2 Marcador de contenido"/>
-          <p:cNvSpPr>
-            <a:spLocks noGrp="1"/>
-          </p:cNvSpPr>
-          <p:nvPr>
-            <p:ph idx="1"/>
-          </p:nvPr>
-        </p:nvSpPr>
-        <p:spPr>
-          <a:xfrm>
-            <a:off x="457200" y="1546201"/>
-            <a:ext cx="8363271" cy="4814186"/>
-          </a:xfrm>
-        </p:spPr>
-        <p:txBody>
-          <a:bodyPr>
-            <a:normAutofit/>
-          </a:bodyPr>
-          <a:lstStyle/>
-          <a:p>
-            <a:pPr marL="342900" lvl="0" indent="-342900" algn="just">
-              <a:lnSpc>
-                <a:spcPct val="115000"/>
-              </a:lnSpc>
-              <a:buFont typeface="Wingdings" panose="05000000000000000000" pitchFamily="2" charset="2"/>
-              <a:buChar char=""/>
-            </a:pPr>
-            <a:r>
-              <a:rPr lang="es-ES" sz="2400" dirty="0">
-                <a:solidFill>
-                  <a:srgbClr val="000000"/>
-                </a:solidFill>
-                <a:effectLst/>
-                <a:latin typeface="Arial" panose="020B0604020202020204" pitchFamily="34" charset="0"/>
-                <a:ea typeface="Calibri" panose="020F0502020204030204" pitchFamily="34" charset="0"/>
-              </a:rPr>
-              <a:t>HU_1: Autenticarse.</a:t>
-            </a:r>
-            <a:endParaRPr lang="es-CU" sz="2400" dirty="0">
-              <a:effectLst/>
-              <a:latin typeface="Arial" panose="020B0604020202020204" pitchFamily="34" charset="0"/>
-              <a:ea typeface="Calibri" panose="020F0502020204030204" pitchFamily="34" charset="0"/>
-            </a:endParaRPr>
-          </a:p>
-          <a:p>
-            <a:pPr marL="0" lvl="0" indent="0" algn="just">
-              <a:lnSpc>
-                <a:spcPct val="115000"/>
-              </a:lnSpc>
-              <a:buNone/>
-            </a:pPr>
-            <a:r>
-              <a:rPr lang="es-ES" sz="2400" dirty="0">
-                <a:solidFill>
-                  <a:srgbClr val="000000"/>
-                </a:solidFill>
-                <a:effectLst/>
-                <a:latin typeface="Arial" panose="020B0604020202020204" pitchFamily="34" charset="0"/>
-                <a:ea typeface="Calibri" panose="020F0502020204030204" pitchFamily="34" charset="0"/>
-              </a:rPr>
-              <a:t>.</a:t>
-            </a:r>
-            <a:endParaRPr lang="es-CU" sz="2400" dirty="0">
-              <a:effectLst/>
-              <a:latin typeface="Arial" panose="020B0604020202020204" pitchFamily="34" charset="0"/>
-              <a:ea typeface="Calibri" panose="020F0502020204030204" pitchFamily="34" charset="0"/>
             </a:endParaRPr>
           </a:p>
         </p:txBody>
@@ -10623,10 +9565,46 @@
           </a:p>
         </p:txBody>
       </p:sp>
+      <p:pic>
+        <p:nvPicPr>
+          <p:cNvPr id="15" name="Imagen 14" descr="Texto&#10;&#10;El contenido generado por IA puede ser incorrecto.">
+            <a:extLst>
+              <a:ext uri="{FF2B5EF4-FFF2-40B4-BE49-F238E27FC236}">
+                <a16:creationId xmlns:a16="http://schemas.microsoft.com/office/drawing/2014/main" id="{2A8C4AF2-7800-FAB2-FAD1-7C3421954A0D}"/>
+              </a:ext>
+            </a:extLst>
+          </p:cNvPr>
+          <p:cNvPicPr>
+            <a:picLocks noChangeAspect="1"/>
+          </p:cNvPicPr>
+          <p:nvPr/>
+        </p:nvPicPr>
+        <p:blipFill>
+          <a:blip r:embed="rId4">
+            <a:extLst>
+              <a:ext uri="{28A0092B-C50C-407E-A947-70E740481C1C}">
+                <a14:useLocalDpi xmlns:a14="http://schemas.microsoft.com/office/drawing/2010/main" val="0"/>
+              </a:ext>
+            </a:extLst>
+          </a:blip>
+          <a:stretch>
+            <a:fillRect/>
+          </a:stretch>
+        </p:blipFill>
+        <p:spPr>
+          <a:xfrm>
+            <a:off x="1304044" y="1242020"/>
+            <a:ext cx="6315956" cy="5172797"/>
+          </a:xfrm>
+          <a:prstGeom prst="rect">
+            <a:avLst/>
+          </a:prstGeom>
+        </p:spPr>
+      </p:pic>
     </p:spTree>
     <p:extLst>
       <p:ext uri="{BB962C8B-B14F-4D97-AF65-F5344CB8AC3E}">
-        <p14:creationId xmlns:p14="http://schemas.microsoft.com/office/powerpoint/2010/main" val="3787424618"/>
+        <p14:creationId xmlns:p14="http://schemas.microsoft.com/office/powerpoint/2010/main" val="1772699935"/>
       </p:ext>
     </p:extLst>
   </p:cSld>
@@ -10735,84 +9713,12 @@
                   <a:schemeClr val="bg1"/>
                 </a:solidFill>
               </a:rPr>
-              <a:t>Estructura del Directorio</a:t>
+              <a:t>Historias de Usuarios</a:t>
             </a:r>
             <a:endParaRPr lang="es-ES" sz="3200" dirty="0">
               <a:solidFill>
                 <a:schemeClr val="bg1"/>
               </a:solidFill>
-            </a:endParaRPr>
-          </a:p>
-        </p:txBody>
-      </p:sp>
-      <p:sp>
-        <p:nvSpPr>
-          <p:cNvPr id="3" name="2 Marcador de contenido"/>
-          <p:cNvSpPr>
-            <a:spLocks noGrp="1"/>
-          </p:cNvSpPr>
-          <p:nvPr>
-            <p:ph idx="1"/>
-          </p:nvPr>
-        </p:nvSpPr>
-        <p:spPr>
-          <a:xfrm>
-            <a:off x="457200" y="1546201"/>
-            <a:ext cx="8363271" cy="4814186"/>
-          </a:xfrm>
-        </p:spPr>
-        <p:txBody>
-          <a:bodyPr>
-            <a:normAutofit/>
-          </a:bodyPr>
-          <a:lstStyle/>
-          <a:p>
-            <a:pPr marL="342900" lvl="0" indent="-342900" algn="just">
-              <a:lnSpc>
-                <a:spcPct val="115000"/>
-              </a:lnSpc>
-              <a:buFont typeface="Wingdings" panose="05000000000000000000" pitchFamily="2" charset="2"/>
-              <a:buChar char=""/>
-            </a:pPr>
-            <a:r>
-              <a:rPr lang="es-ES" sz="2400" dirty="0">
-                <a:solidFill>
-                  <a:srgbClr val="000000"/>
-                </a:solidFill>
-                <a:effectLst/>
-                <a:latin typeface="Arial" panose="020B0604020202020204" pitchFamily="34" charset="0"/>
-                <a:ea typeface="Calibri" panose="020F0502020204030204" pitchFamily="34" charset="0"/>
-              </a:rPr>
-              <a:t>HU_1: Autenticarse.</a:t>
-            </a:r>
-            <a:endParaRPr lang="es-CU" sz="2400" dirty="0">
-              <a:effectLst/>
-              <a:latin typeface="Arial" panose="020B0604020202020204" pitchFamily="34" charset="0"/>
-              <a:ea typeface="Calibri" panose="020F0502020204030204" pitchFamily="34" charset="0"/>
-            </a:endParaRPr>
-          </a:p>
-          <a:p>
-            <a:pPr marL="0" lvl="0" indent="0" algn="just">
-              <a:lnSpc>
-                <a:spcPct val="115000"/>
-              </a:lnSpc>
-              <a:buNone/>
-            </a:pPr>
-            <a:r>
-              <a:rPr lang="es-ES" sz="2400" dirty="0">
-                <a:solidFill>
-                  <a:srgbClr val="000000"/>
-                </a:solidFill>
-                <a:effectLst/>
-                <a:latin typeface="Arial" panose="020B0604020202020204" pitchFamily="34" charset="0"/>
-                <a:ea typeface="Calibri" panose="020F0502020204030204" pitchFamily="34" charset="0"/>
-              </a:rPr>
-              <a:t>.</a:t>
-            </a:r>
-            <a:endParaRPr lang="es-CU" sz="2400" dirty="0">
-              <a:effectLst/>
-              <a:latin typeface="Arial" panose="020B0604020202020204" pitchFamily="34" charset="0"/>
-              <a:ea typeface="Calibri" panose="020F0502020204030204" pitchFamily="34" charset="0"/>
             </a:endParaRPr>
           </a:p>
         </p:txBody>
@@ -10869,10 +9775,46 @@
           </a:p>
         </p:txBody>
       </p:sp>
+      <p:pic>
+        <p:nvPicPr>
+          <p:cNvPr id="5" name="Imagen 4" descr="Texto, Escala de tiempo&#10;&#10;El contenido generado por IA puede ser incorrecto.">
+            <a:extLst>
+              <a:ext uri="{FF2B5EF4-FFF2-40B4-BE49-F238E27FC236}">
+                <a16:creationId xmlns:a16="http://schemas.microsoft.com/office/drawing/2014/main" id="{D78F4414-2F2B-2EF9-328B-2306E2297362}"/>
+              </a:ext>
+            </a:extLst>
+          </p:cNvPr>
+          <p:cNvPicPr>
+            <a:picLocks noChangeAspect="1"/>
+          </p:cNvPicPr>
+          <p:nvPr/>
+        </p:nvPicPr>
+        <p:blipFill>
+          <a:blip r:embed="rId4">
+            <a:extLst>
+              <a:ext uri="{28A0092B-C50C-407E-A947-70E740481C1C}">
+                <a14:useLocalDpi xmlns:a14="http://schemas.microsoft.com/office/drawing/2010/main" val="0"/>
+              </a:ext>
+            </a:extLst>
+          </a:blip>
+          <a:stretch>
+            <a:fillRect/>
+          </a:stretch>
+        </p:blipFill>
+        <p:spPr>
+          <a:xfrm>
+            <a:off x="1409258" y="1237944"/>
+            <a:ext cx="6325483" cy="5118406"/>
+          </a:xfrm>
+          <a:prstGeom prst="rect">
+            <a:avLst/>
+          </a:prstGeom>
+        </p:spPr>
+      </p:pic>
     </p:spTree>
     <p:extLst>
       <p:ext uri="{BB962C8B-B14F-4D97-AF65-F5344CB8AC3E}">
-        <p14:creationId xmlns:p14="http://schemas.microsoft.com/office/powerpoint/2010/main" val="426018444"/>
+        <p14:creationId xmlns:p14="http://schemas.microsoft.com/office/powerpoint/2010/main" val="2692848511"/>
       </p:ext>
     </p:extLst>
   </p:cSld>
@@ -10981,84 +9923,12 @@
                   <a:schemeClr val="bg1"/>
                 </a:solidFill>
               </a:rPr>
-              <a:t>Validaciones</a:t>
+              <a:t>Historias de Usuarios</a:t>
             </a:r>
             <a:endParaRPr lang="es-ES" sz="3200" dirty="0">
               <a:solidFill>
                 <a:schemeClr val="bg1"/>
               </a:solidFill>
-            </a:endParaRPr>
-          </a:p>
-        </p:txBody>
-      </p:sp>
-      <p:sp>
-        <p:nvSpPr>
-          <p:cNvPr id="3" name="2 Marcador de contenido"/>
-          <p:cNvSpPr>
-            <a:spLocks noGrp="1"/>
-          </p:cNvSpPr>
-          <p:nvPr>
-            <p:ph idx="1"/>
-          </p:nvPr>
-        </p:nvSpPr>
-        <p:spPr>
-          <a:xfrm>
-            <a:off x="457200" y="1546201"/>
-            <a:ext cx="8363271" cy="4814186"/>
-          </a:xfrm>
-        </p:spPr>
-        <p:txBody>
-          <a:bodyPr>
-            <a:normAutofit/>
-          </a:bodyPr>
-          <a:lstStyle/>
-          <a:p>
-            <a:pPr marL="342900" lvl="0" indent="-342900" algn="just">
-              <a:lnSpc>
-                <a:spcPct val="115000"/>
-              </a:lnSpc>
-              <a:buFont typeface="Wingdings" panose="05000000000000000000" pitchFamily="2" charset="2"/>
-              <a:buChar char=""/>
-            </a:pPr>
-            <a:r>
-              <a:rPr lang="es-ES" sz="2400" dirty="0">
-                <a:solidFill>
-                  <a:srgbClr val="000000"/>
-                </a:solidFill>
-                <a:effectLst/>
-                <a:latin typeface="Arial" panose="020B0604020202020204" pitchFamily="34" charset="0"/>
-                <a:ea typeface="Calibri" panose="020F0502020204030204" pitchFamily="34" charset="0"/>
-              </a:rPr>
-              <a:t>HU_1: Autenticarse.</a:t>
-            </a:r>
-            <a:endParaRPr lang="es-CU" sz="2400" dirty="0">
-              <a:effectLst/>
-              <a:latin typeface="Arial" panose="020B0604020202020204" pitchFamily="34" charset="0"/>
-              <a:ea typeface="Calibri" panose="020F0502020204030204" pitchFamily="34" charset="0"/>
-            </a:endParaRPr>
-          </a:p>
-          <a:p>
-            <a:pPr marL="0" lvl="0" indent="0" algn="just">
-              <a:lnSpc>
-                <a:spcPct val="115000"/>
-              </a:lnSpc>
-              <a:buNone/>
-            </a:pPr>
-            <a:r>
-              <a:rPr lang="es-ES" sz="2400" dirty="0">
-                <a:solidFill>
-                  <a:srgbClr val="000000"/>
-                </a:solidFill>
-                <a:effectLst/>
-                <a:latin typeface="Arial" panose="020B0604020202020204" pitchFamily="34" charset="0"/>
-                <a:ea typeface="Calibri" panose="020F0502020204030204" pitchFamily="34" charset="0"/>
-              </a:rPr>
-              <a:t>.</a:t>
-            </a:r>
-            <a:endParaRPr lang="es-CU" sz="2400" dirty="0">
-              <a:effectLst/>
-              <a:latin typeface="Arial" panose="020B0604020202020204" pitchFamily="34" charset="0"/>
-              <a:ea typeface="Calibri" panose="020F0502020204030204" pitchFamily="34" charset="0"/>
             </a:endParaRPr>
           </a:p>
         </p:txBody>
@@ -11115,10 +9985,76 @@
           </a:p>
         </p:txBody>
       </p:sp>
+      <p:pic>
+        <p:nvPicPr>
+          <p:cNvPr id="5" name="Imagen 4" descr="Texto, Escala de tiempo&#10;&#10;El contenido generado por IA puede ser incorrecto.">
+            <a:extLst>
+              <a:ext uri="{FF2B5EF4-FFF2-40B4-BE49-F238E27FC236}">
+                <a16:creationId xmlns:a16="http://schemas.microsoft.com/office/drawing/2014/main" id="{D78F4414-2F2B-2EF9-328B-2306E2297362}"/>
+              </a:ext>
+            </a:extLst>
+          </p:cNvPr>
+          <p:cNvPicPr>
+            <a:picLocks noChangeAspect="1"/>
+          </p:cNvPicPr>
+          <p:nvPr/>
+        </p:nvPicPr>
+        <p:blipFill>
+          <a:blip r:embed="rId4">
+            <a:extLst>
+              <a:ext uri="{28A0092B-C50C-407E-A947-70E740481C1C}">
+                <a14:useLocalDpi xmlns:a14="http://schemas.microsoft.com/office/drawing/2010/main" val="0"/>
+              </a:ext>
+            </a:extLst>
+          </a:blip>
+          <a:stretch>
+            <a:fillRect/>
+          </a:stretch>
+        </p:blipFill>
+        <p:spPr>
+          <a:xfrm>
+            <a:off x="1409258" y="1237944"/>
+            <a:ext cx="6325483" cy="5118406"/>
+          </a:xfrm>
+          <a:prstGeom prst="rect">
+            <a:avLst/>
+          </a:prstGeom>
+        </p:spPr>
+      </p:pic>
+      <p:pic>
+        <p:nvPicPr>
+          <p:cNvPr id="8" name="Imagen 7">
+            <a:extLst>
+              <a:ext uri="{FF2B5EF4-FFF2-40B4-BE49-F238E27FC236}">
+                <a16:creationId xmlns:a16="http://schemas.microsoft.com/office/drawing/2014/main" id="{28E6CD89-0491-68F9-FB6C-666F04413AD1}"/>
+              </a:ext>
+            </a:extLst>
+          </p:cNvPr>
+          <p:cNvPicPr>
+            <a:picLocks noChangeAspect="1"/>
+          </p:cNvPicPr>
+          <p:nvPr/>
+        </p:nvPicPr>
+        <p:blipFill>
+          <a:blip r:embed="rId5"/>
+          <a:stretch>
+            <a:fillRect/>
+          </a:stretch>
+        </p:blipFill>
+        <p:spPr>
+          <a:xfrm>
+            <a:off x="1399732" y="1228418"/>
+            <a:ext cx="6344535" cy="4401164"/>
+          </a:xfrm>
+          <a:prstGeom prst="rect">
+            <a:avLst/>
+          </a:prstGeom>
+        </p:spPr>
+      </p:pic>
     </p:spTree>
     <p:extLst>
       <p:ext uri="{BB962C8B-B14F-4D97-AF65-F5344CB8AC3E}">
-        <p14:creationId xmlns:p14="http://schemas.microsoft.com/office/powerpoint/2010/main" val="31956804"/>
+        <p14:creationId xmlns:p14="http://schemas.microsoft.com/office/powerpoint/2010/main" val="1680482545"/>
       </p:ext>
     </p:extLst>
   </p:cSld>
@@ -11504,7 +10440,7 @@
                   <a:schemeClr val="bg1"/>
                 </a:solidFill>
               </a:rPr>
-              <a:t>Pruebas de Aceptación</a:t>
+              <a:t>Arquitectura del Sistema</a:t>
             </a:r>
             <a:endParaRPr lang="es-ES" sz="3200" dirty="0">
               <a:solidFill>
@@ -11526,7 +10462,7 @@
         </p:nvSpPr>
         <p:spPr>
           <a:xfrm>
-            <a:off x="457200" y="1546201"/>
+            <a:off x="390364" y="1076393"/>
             <a:ext cx="8363271" cy="4814186"/>
           </a:xfrm>
         </p:spPr>
@@ -11536,52 +10472,147 @@
           </a:bodyPr>
           <a:lstStyle/>
           <a:p>
-            <a:pPr marL="342900" lvl="0" indent="-342900" algn="just">
-              <a:lnSpc>
-                <a:spcPct val="115000"/>
-              </a:lnSpc>
-              <a:buFont typeface="Wingdings" panose="05000000000000000000" pitchFamily="2" charset="2"/>
-              <a:buChar char=""/>
-            </a:pPr>
-            <a:r>
-              <a:rPr lang="es-ES" sz="2400" dirty="0">
-                <a:solidFill>
-                  <a:srgbClr val="000000"/>
-                </a:solidFill>
-                <a:effectLst/>
-                <a:latin typeface="Arial" panose="020B0604020202020204" pitchFamily="34" charset="0"/>
-                <a:ea typeface="Calibri" panose="020F0502020204030204" pitchFamily="34" charset="0"/>
-              </a:rPr>
-              <a:t>HU_1: Autenticarse.</a:t>
-            </a:r>
-            <a:endParaRPr lang="es-CU" sz="2400" dirty="0">
-              <a:effectLst/>
-              <a:latin typeface="Arial" panose="020B0604020202020204" pitchFamily="34" charset="0"/>
-              <a:ea typeface="Calibri" panose="020F0502020204030204" pitchFamily="34" charset="0"/>
-            </a:endParaRPr>
-          </a:p>
-          <a:p>
-            <a:pPr marL="0" lvl="0" indent="0" algn="just">
-              <a:lnSpc>
-                <a:spcPct val="115000"/>
-              </a:lnSpc>
+            <a:pPr marL="0" indent="0" algn="l">
               <a:buNone/>
             </a:pPr>
             <a:r>
-              <a:rPr lang="es-ES" sz="2400" dirty="0">
-                <a:solidFill>
-                  <a:srgbClr val="000000"/>
-                </a:solidFill>
+              <a:rPr lang="es-ES" sz="2400" b="1" i="0" dirty="0">
                 <a:effectLst/>
-                <a:latin typeface="Arial" panose="020B0604020202020204" pitchFamily="34" charset="0"/>
-                <a:ea typeface="Calibri" panose="020F0502020204030204" pitchFamily="34" charset="0"/>
+                <a:latin typeface="quote-cjk-patch"/>
+              </a:rPr>
+              <a:t>Modelo Vistas Controlador </a:t>
+            </a:r>
+            <a:r>
+              <a:rPr lang="es-ES" sz="2400" b="0" i="0" dirty="0">
+                <a:effectLst/>
+                <a:latin typeface="quote-cjk-patch"/>
+              </a:rPr>
+              <a:t> es un patrón de arquitectura de software que organiza una aplicación en tres componentes principales:</a:t>
+            </a:r>
+          </a:p>
+          <a:p>
+            <a:pPr algn="l">
+              <a:buFont typeface="+mj-lt"/>
+              <a:buAutoNum type="arabicPeriod"/>
+            </a:pPr>
+            <a:r>
+              <a:rPr lang="es-ES" sz="2400" b="1" i="0" dirty="0">
+                <a:effectLst/>
+                <a:latin typeface="quote-cjk-patch"/>
+              </a:rPr>
+              <a:t>Modelo</a:t>
+            </a:r>
+            <a:r>
+              <a:rPr lang="es-ES" sz="2400" b="0" i="0" dirty="0">
+                <a:effectLst/>
+                <a:latin typeface="quote-cjk-patch"/>
+              </a:rPr>
+              <a:t>: Gestiona los </a:t>
+            </a:r>
+            <a:r>
+              <a:rPr lang="es-ES" sz="2400" b="1" i="0" dirty="0">
+                <a:effectLst/>
+                <a:latin typeface="quote-cjk-patch"/>
+              </a:rPr>
+              <a:t>datos</a:t>
+            </a:r>
+            <a:r>
+              <a:rPr lang="es-ES" sz="2400" b="0" i="0" dirty="0">
+                <a:effectLst/>
+                <a:latin typeface="quote-cjk-patch"/>
+              </a:rPr>
+              <a:t> y la </a:t>
+            </a:r>
+            <a:r>
+              <a:rPr lang="es-ES" sz="2400" b="1" i="0" dirty="0">
+                <a:effectLst/>
+                <a:latin typeface="quote-cjk-patch"/>
+              </a:rPr>
+              <a:t>lógica de negocio</a:t>
+            </a:r>
+            <a:r>
+              <a:rPr lang="es-ES" sz="2400" b="0" i="0" dirty="0">
+                <a:effectLst/>
+                <a:latin typeface="quote-cjk-patch"/>
               </a:rPr>
               <a:t>.</a:t>
             </a:r>
-            <a:endParaRPr lang="es-CU" sz="2400" dirty="0">
+          </a:p>
+          <a:p>
+            <a:pPr algn="l">
+              <a:buFont typeface="+mj-lt"/>
+              <a:buAutoNum type="arabicPeriod"/>
+            </a:pPr>
+            <a:r>
+              <a:rPr lang="es-ES" sz="2400" b="1" i="0" dirty="0">
+                <a:effectLst/>
+                <a:latin typeface="quote-cjk-patch"/>
+              </a:rPr>
+              <a:t>Vista</a:t>
+            </a:r>
+            <a:r>
+              <a:rPr lang="es-ES" sz="2400" b="0" i="0" dirty="0">
+                <a:effectLst/>
+                <a:latin typeface="quote-cjk-patch"/>
+              </a:rPr>
+              <a:t>: Muestra la </a:t>
+            </a:r>
+            <a:r>
+              <a:rPr lang="es-ES" sz="2400" b="1" i="0" dirty="0">
+                <a:effectLst/>
+                <a:latin typeface="quote-cjk-patch"/>
+              </a:rPr>
+              <a:t>interfaz gráfica</a:t>
+            </a:r>
+            <a:r>
+              <a:rPr lang="es-ES" sz="2400" b="0" i="0" dirty="0">
+                <a:effectLst/>
+                <a:latin typeface="quote-cjk-patch"/>
+              </a:rPr>
+              <a:t> al usuario.</a:t>
+            </a:r>
+          </a:p>
+          <a:p>
+            <a:pPr algn="l">
+              <a:buFont typeface="+mj-lt"/>
+              <a:buAutoNum type="arabicPeriod"/>
+            </a:pPr>
+            <a:r>
+              <a:rPr lang="es-ES" sz="2400" b="1" i="0" dirty="0">
+                <a:effectLst/>
+                <a:latin typeface="quote-cjk-patch"/>
+              </a:rPr>
+              <a:t>Controlador</a:t>
+            </a:r>
+            <a:r>
+              <a:rPr lang="es-ES" sz="2400" b="0" i="0" dirty="0">
+                <a:effectLst/>
+                <a:latin typeface="quote-cjk-patch"/>
+              </a:rPr>
+              <a:t>: </a:t>
+            </a:r>
+            <a:r>
+              <a:rPr lang="es-ES" sz="2400" b="1" i="0" dirty="0">
+                <a:effectLst/>
+                <a:latin typeface="quote-cjk-patch"/>
+              </a:rPr>
+              <a:t>Intermedia</a:t>
+            </a:r>
+            <a:r>
+              <a:rPr lang="es-ES" sz="2400" b="0" i="0" dirty="0">
+                <a:effectLst/>
+                <a:latin typeface="quote-cjk-patch"/>
+              </a:rPr>
+              <a:t> entre el Modelo y la Vista.</a:t>
+            </a:r>
+          </a:p>
+          <a:p>
+            <a:pPr marL="457200" lvl="1" indent="0" algn="l">
+              <a:buNone/>
+            </a:pPr>
+            <a:endParaRPr lang="es-ES" b="0" i="0" dirty="0">
               <a:effectLst/>
-              <a:latin typeface="Arial" panose="020B0604020202020204" pitchFamily="34" charset="0"/>
-              <a:ea typeface="Calibri" panose="020F0502020204030204" pitchFamily="34" charset="0"/>
+              <a:latin typeface="quote-cjk-patch"/>
             </a:endParaRPr>
           </a:p>
         </p:txBody>
@@ -11638,10 +10669,57 @@
           </a:p>
         </p:txBody>
       </p:sp>
+      <p:pic>
+        <p:nvPicPr>
+          <p:cNvPr id="5" name="Imagen 4">
+            <a:extLst>
+              <a:ext uri="{FF2B5EF4-FFF2-40B4-BE49-F238E27FC236}">
+                <a16:creationId xmlns:a16="http://schemas.microsoft.com/office/drawing/2014/main" id="{2E831681-87F0-B726-C8CF-C25514B79E50}"/>
+              </a:ext>
+            </a:extLst>
+          </p:cNvPr>
+          <p:cNvPicPr>
+            <a:picLocks noChangeAspect="1"/>
+          </p:cNvPicPr>
+          <p:nvPr/>
+        </p:nvPicPr>
+        <p:blipFill>
+          <a:blip r:embed="rId4">
+            <a:extLst>
+              <a:ext uri="{28A0092B-C50C-407E-A947-70E740481C1C}">
+                <a14:useLocalDpi xmlns:a14="http://schemas.microsoft.com/office/drawing/2010/main" val="0"/>
+              </a:ext>
+            </a:extLst>
+          </a:blip>
+          <a:srcRect/>
+          <a:stretch>
+            <a:fillRect/>
+          </a:stretch>
+        </p:blipFill>
+        <p:spPr bwMode="auto">
+          <a:xfrm>
+            <a:off x="1172357" y="3717032"/>
+            <a:ext cx="6214822" cy="2832904"/>
+          </a:xfrm>
+          <a:prstGeom prst="rect">
+            <a:avLst/>
+          </a:prstGeom>
+          <a:noFill/>
+          <a:ln w="3175" cmpd="sng">
+            <a:solidFill>
+              <a:srgbClr val="000000"/>
+            </a:solidFill>
+            <a:miter lim="800000"/>
+            <a:headEnd/>
+            <a:tailEnd/>
+          </a:ln>
+          <a:effectLst/>
+        </p:spPr>
+      </p:pic>
     </p:spTree>
     <p:extLst>
       <p:ext uri="{BB962C8B-B14F-4D97-AF65-F5344CB8AC3E}">
-        <p14:creationId xmlns:p14="http://schemas.microsoft.com/office/powerpoint/2010/main" val="182701599"/>
+        <p14:creationId xmlns:p14="http://schemas.microsoft.com/office/powerpoint/2010/main" val="3787424618"/>
       </p:ext>
     </p:extLst>
   </p:cSld>
@@ -11750,84 +10828,12 @@
                   <a:schemeClr val="bg1"/>
                 </a:solidFill>
               </a:rPr>
-              <a:t>Interfaces Del Sistema</a:t>
+              <a:t>Estructura del Directorio</a:t>
             </a:r>
             <a:endParaRPr lang="es-ES" sz="3200" dirty="0">
               <a:solidFill>
                 <a:schemeClr val="bg1"/>
               </a:solidFill>
-            </a:endParaRPr>
-          </a:p>
-        </p:txBody>
-      </p:sp>
-      <p:sp>
-        <p:nvSpPr>
-          <p:cNvPr id="3" name="2 Marcador de contenido"/>
-          <p:cNvSpPr>
-            <a:spLocks noGrp="1"/>
-          </p:cNvSpPr>
-          <p:nvPr>
-            <p:ph idx="1"/>
-          </p:nvPr>
-        </p:nvSpPr>
-        <p:spPr>
-          <a:xfrm>
-            <a:off x="457200" y="1546201"/>
-            <a:ext cx="8363271" cy="4814186"/>
-          </a:xfrm>
-        </p:spPr>
-        <p:txBody>
-          <a:bodyPr>
-            <a:normAutofit/>
-          </a:bodyPr>
-          <a:lstStyle/>
-          <a:p>
-            <a:pPr marL="342900" lvl="0" indent="-342900" algn="just">
-              <a:lnSpc>
-                <a:spcPct val="115000"/>
-              </a:lnSpc>
-              <a:buFont typeface="Wingdings" panose="05000000000000000000" pitchFamily="2" charset="2"/>
-              <a:buChar char=""/>
-            </a:pPr>
-            <a:r>
-              <a:rPr lang="es-ES" sz="2400" dirty="0">
-                <a:solidFill>
-                  <a:srgbClr val="000000"/>
-                </a:solidFill>
-                <a:effectLst/>
-                <a:latin typeface="Arial" panose="020B0604020202020204" pitchFamily="34" charset="0"/>
-                <a:ea typeface="Calibri" panose="020F0502020204030204" pitchFamily="34" charset="0"/>
-              </a:rPr>
-              <a:t>HU_1: Autenticarse.</a:t>
-            </a:r>
-            <a:endParaRPr lang="es-CU" sz="2400" dirty="0">
-              <a:effectLst/>
-              <a:latin typeface="Arial" panose="020B0604020202020204" pitchFamily="34" charset="0"/>
-              <a:ea typeface="Calibri" panose="020F0502020204030204" pitchFamily="34" charset="0"/>
-            </a:endParaRPr>
-          </a:p>
-          <a:p>
-            <a:pPr marL="0" lvl="0" indent="0" algn="just">
-              <a:lnSpc>
-                <a:spcPct val="115000"/>
-              </a:lnSpc>
-              <a:buNone/>
-            </a:pPr>
-            <a:r>
-              <a:rPr lang="es-ES" sz="2400" dirty="0">
-                <a:solidFill>
-                  <a:srgbClr val="000000"/>
-                </a:solidFill>
-                <a:effectLst/>
-                <a:latin typeface="Arial" panose="020B0604020202020204" pitchFamily="34" charset="0"/>
-                <a:ea typeface="Calibri" panose="020F0502020204030204" pitchFamily="34" charset="0"/>
-              </a:rPr>
-              <a:t>.</a:t>
-            </a:r>
-            <a:endParaRPr lang="es-CU" sz="2400" dirty="0">
-              <a:effectLst/>
-              <a:latin typeface="Arial" panose="020B0604020202020204" pitchFamily="34" charset="0"/>
-              <a:ea typeface="Calibri" panose="020F0502020204030204" pitchFamily="34" charset="0"/>
             </a:endParaRPr>
           </a:p>
         </p:txBody>
@@ -11884,10 +10890,1148 @@
           </a:p>
         </p:txBody>
       </p:sp>
+      <p:pic>
+        <p:nvPicPr>
+          <p:cNvPr id="5" name="Imagen 4">
+            <a:extLst>
+              <a:ext uri="{FF2B5EF4-FFF2-40B4-BE49-F238E27FC236}">
+                <a16:creationId xmlns:a16="http://schemas.microsoft.com/office/drawing/2014/main" id="{CB235F8B-1B77-E086-44F9-FAE61B9272E0}"/>
+              </a:ext>
+            </a:extLst>
+          </p:cNvPr>
+          <p:cNvPicPr>
+            <a:picLocks noChangeAspect="1"/>
+          </p:cNvPicPr>
+          <p:nvPr/>
+        </p:nvPicPr>
+        <p:blipFill>
+          <a:blip r:embed="rId4">
+            <a:extLst>
+              <a:ext uri="{28A0092B-C50C-407E-A947-70E740481C1C}">
+                <a14:useLocalDpi xmlns:a14="http://schemas.microsoft.com/office/drawing/2010/main" val="0"/>
+              </a:ext>
+            </a:extLst>
+          </a:blip>
+          <a:srcRect/>
+          <a:stretch>
+            <a:fillRect/>
+          </a:stretch>
+        </p:blipFill>
+        <p:spPr bwMode="auto">
+          <a:xfrm>
+            <a:off x="384049" y="1772816"/>
+            <a:ext cx="4043935" cy="4255770"/>
+          </a:xfrm>
+          <a:prstGeom prst="rect">
+            <a:avLst/>
+          </a:prstGeom>
+          <a:noFill/>
+          <a:ln>
+            <a:noFill/>
+          </a:ln>
+        </p:spPr>
+      </p:pic>
+      <p:pic>
+        <p:nvPicPr>
+          <p:cNvPr id="11" name="Imagen 10" descr="Interfaz de usuario gráfica, Texto&#10;&#10;El contenido generado por IA puede ser incorrecto.">
+            <a:extLst>
+              <a:ext uri="{FF2B5EF4-FFF2-40B4-BE49-F238E27FC236}">
+                <a16:creationId xmlns:a16="http://schemas.microsoft.com/office/drawing/2014/main" id="{F5C82691-3D07-2D53-860D-36545429052C}"/>
+              </a:ext>
+            </a:extLst>
+          </p:cNvPr>
+          <p:cNvPicPr>
+            <a:picLocks noChangeAspect="1"/>
+          </p:cNvPicPr>
+          <p:nvPr/>
+        </p:nvPicPr>
+        <p:blipFill>
+          <a:blip r:embed="rId5">
+            <a:extLst>
+              <a:ext uri="{28A0092B-C50C-407E-A947-70E740481C1C}">
+                <a14:useLocalDpi xmlns:a14="http://schemas.microsoft.com/office/drawing/2010/main" val="0"/>
+              </a:ext>
+            </a:extLst>
+          </a:blip>
+          <a:stretch>
+            <a:fillRect/>
+          </a:stretch>
+        </p:blipFill>
+        <p:spPr>
+          <a:xfrm>
+            <a:off x="5379821" y="1011463"/>
+            <a:ext cx="2259229" cy="5803312"/>
+          </a:xfrm>
+          <a:prstGeom prst="rect">
+            <a:avLst/>
+          </a:prstGeom>
+        </p:spPr>
+      </p:pic>
+    </p:spTree>
+    <p:extLst>
+      <p:ext uri="{BB962C8B-B14F-4D97-AF65-F5344CB8AC3E}">
+        <p14:creationId xmlns:p14="http://schemas.microsoft.com/office/powerpoint/2010/main" val="426018444"/>
+      </p:ext>
+    </p:extLst>
+  </p:cSld>
+  <p:clrMapOvr>
+    <a:masterClrMapping/>
+  </p:clrMapOvr>
+</p:sld>
+</file>
+
+<file path=ppt/slides/slide22.xml><?xml version="1.0" encoding="utf-8"?>
+<p:sld xmlns:a="http://schemas.openxmlformats.org/drawingml/2006/main" xmlns:r="http://schemas.openxmlformats.org/officeDocument/2006/relationships" xmlns:p="http://schemas.openxmlformats.org/presentationml/2006/main">
+  <p:cSld>
+    <p:spTree>
+      <p:nvGrpSpPr>
+        <p:cNvPr id="1" name=""/>
+        <p:cNvGrpSpPr/>
+        <p:nvPr/>
+      </p:nvGrpSpPr>
+      <p:grpSpPr>
+        <a:xfrm>
+          <a:off x="0" y="0"/>
+          <a:ext cx="0" cy="0"/>
+          <a:chOff x="0" y="0"/>
+          <a:chExt cx="0" cy="0"/>
+        </a:xfrm>
+      </p:grpSpPr>
+      <p:pic>
+        <p:nvPicPr>
+          <p:cNvPr id="2051" name="Picture 3"/>
+          <p:cNvPicPr>
+            <a:picLocks noChangeAspect="1" noChangeArrowheads="1"/>
+          </p:cNvPicPr>
+          <p:nvPr/>
+        </p:nvPicPr>
+        <p:blipFill>
+          <a:blip r:embed="rId2">
+            <a:extLst>
+              <a:ext uri="{28A0092B-C50C-407E-A947-70E740481C1C}">
+                <a14:useLocalDpi xmlns:a14="http://schemas.microsoft.com/office/drawing/2010/main" val="0"/>
+              </a:ext>
+            </a:extLst>
+          </a:blip>
+          <a:srcRect/>
+          <a:stretch>
+            <a:fillRect/>
+          </a:stretch>
+        </p:blipFill>
+        <p:spPr bwMode="auto">
+          <a:xfrm>
+            <a:off x="1475657" y="0"/>
+            <a:ext cx="7668344" cy="1011462"/>
+          </a:xfrm>
+          <a:prstGeom prst="rect">
+            <a:avLst/>
+          </a:prstGeom>
+          <a:noFill/>
+          <a:ln>
+            <a:noFill/>
+          </a:ln>
+          <a:extLst>
+            <a:ext uri="{909E8E84-426E-40DD-AFC4-6F175D3DCCD1}">
+              <a14:hiddenFill xmlns:a14="http://schemas.microsoft.com/office/drawing/2010/main">
+                <a:solidFill>
+                  <a:schemeClr val="accent1"/>
+                </a:solidFill>
+              </a14:hiddenFill>
+            </a:ext>
+            <a:ext uri="{91240B29-F687-4F45-9708-019B960494DF}">
+              <a14:hiddenLine xmlns:a14="http://schemas.microsoft.com/office/drawing/2010/main" w="9525">
+                <a:solidFill>
+                  <a:schemeClr val="tx1"/>
+                </a:solidFill>
+                <a:miter lim="800000"/>
+                <a:headEnd/>
+                <a:tailEnd/>
+              </a14:hiddenLine>
+            </a:ext>
+          </a:extLst>
+        </p:spPr>
+      </p:pic>
+      <p:sp>
+        <p:nvSpPr>
+          <p:cNvPr id="2" name="1 Título"/>
+          <p:cNvSpPr>
+            <a:spLocks noGrp="1"/>
+          </p:cNvSpPr>
+          <p:nvPr>
+            <p:ph type="title"/>
+          </p:nvPr>
+        </p:nvSpPr>
+        <p:spPr>
+          <a:xfrm>
+            <a:off x="2555776" y="-66607"/>
+            <a:ext cx="5410944" cy="1143000"/>
+          </a:xfrm>
+        </p:spPr>
+        <p:txBody>
+          <a:bodyPr>
+            <a:normAutofit/>
+          </a:bodyPr>
+          <a:lstStyle/>
+          <a:p>
+            <a:r>
+              <a:rPr lang="es-ES" sz="3200" b="1" dirty="0">
+                <a:solidFill>
+                  <a:schemeClr val="bg1"/>
+                </a:solidFill>
+              </a:rPr>
+              <a:t>Validaciones</a:t>
+            </a:r>
+            <a:endParaRPr lang="es-ES" sz="3200" dirty="0">
+              <a:solidFill>
+                <a:schemeClr val="bg1"/>
+              </a:solidFill>
+            </a:endParaRPr>
+          </a:p>
+        </p:txBody>
+      </p:sp>
+      <p:pic>
+        <p:nvPicPr>
+          <p:cNvPr id="6" name="Imagen 5"/>
+          <p:cNvPicPr>
+            <a:picLocks noChangeAspect="1"/>
+          </p:cNvPicPr>
+          <p:nvPr/>
+        </p:nvPicPr>
+        <p:blipFill rotWithShape="1">
+          <a:blip r:embed="rId3" cstate="print">
+            <a:extLst>
+              <a:ext uri="{28A0092B-C50C-407E-A947-70E740481C1C}">
+                <a14:useLocalDpi xmlns:a14="http://schemas.microsoft.com/office/drawing/2010/main" val="0"/>
+              </a:ext>
+            </a:extLst>
+          </a:blip>
+          <a:srcRect l="4235" t="5471" r="70358" b="63070"/>
+          <a:stretch/>
+        </p:blipFill>
+        <p:spPr>
+          <a:xfrm>
+            <a:off x="303249" y="0"/>
+            <a:ext cx="921475" cy="883080"/>
+          </a:xfrm>
+          <a:prstGeom prst="rect">
+            <a:avLst/>
+          </a:prstGeom>
+        </p:spPr>
+      </p:pic>
+      <p:sp>
+        <p:nvSpPr>
+          <p:cNvPr id="4" name="Marcador de número de diapositiva 3"/>
+          <p:cNvSpPr>
+            <a:spLocks noGrp="1"/>
+          </p:cNvSpPr>
+          <p:nvPr>
+            <p:ph type="sldNum" sz="quarter" idx="12"/>
+          </p:nvPr>
+        </p:nvSpPr>
+        <p:spPr/>
+        <p:txBody>
+          <a:bodyPr/>
+          <a:lstStyle/>
+          <a:p>
+            <a:fld id="{132FADFE-3B8F-471C-ABF0-DBC7717ECBBC}" type="slidenum">
+              <a:rPr lang="es-ES" smtClean="0"/>
+              <a:t>22</a:t>
+            </a:fld>
+            <a:endParaRPr lang="es-ES"/>
+          </a:p>
+        </p:txBody>
+      </p:sp>
+      <p:pic>
+        <p:nvPicPr>
+          <p:cNvPr id="8" name="Marcador de contenido 7">
+            <a:extLst>
+              <a:ext uri="{FF2B5EF4-FFF2-40B4-BE49-F238E27FC236}">
+                <a16:creationId xmlns:a16="http://schemas.microsoft.com/office/drawing/2014/main" id="{F3EC616C-FEDA-00A5-896C-2004ADB79A4F}"/>
+              </a:ext>
+            </a:extLst>
+          </p:cNvPr>
+          <p:cNvPicPr>
+            <a:picLocks noGrp="1" noChangeAspect="1"/>
+          </p:cNvPicPr>
+          <p:nvPr>
+            <p:ph idx="1"/>
+          </p:nvPr>
+        </p:nvPicPr>
+        <p:blipFill>
+          <a:blip r:embed="rId4">
+            <a:extLst>
+              <a:ext uri="{28A0092B-C50C-407E-A947-70E740481C1C}">
+                <a14:useLocalDpi xmlns:a14="http://schemas.microsoft.com/office/drawing/2010/main" val="0"/>
+              </a:ext>
+            </a:extLst>
+          </a:blip>
+          <a:srcRect/>
+          <a:stretch>
+            <a:fillRect/>
+          </a:stretch>
+        </p:blipFill>
+        <p:spPr bwMode="auto">
+          <a:xfrm>
+            <a:off x="945263" y="1600200"/>
+            <a:ext cx="7253473" cy="4525963"/>
+          </a:xfrm>
+          <a:prstGeom prst="rect">
+            <a:avLst/>
+          </a:prstGeom>
+          <a:noFill/>
+          <a:ln>
+            <a:noFill/>
+          </a:ln>
+        </p:spPr>
+      </p:pic>
+    </p:spTree>
+    <p:extLst>
+      <p:ext uri="{BB962C8B-B14F-4D97-AF65-F5344CB8AC3E}">
+        <p14:creationId xmlns:p14="http://schemas.microsoft.com/office/powerpoint/2010/main" val="31956804"/>
+      </p:ext>
+    </p:extLst>
+  </p:cSld>
+  <p:clrMapOvr>
+    <a:masterClrMapping/>
+  </p:clrMapOvr>
+</p:sld>
+</file>
+
+<file path=ppt/slides/slide23.xml><?xml version="1.0" encoding="utf-8"?>
+<p:sld xmlns:a="http://schemas.openxmlformats.org/drawingml/2006/main" xmlns:r="http://schemas.openxmlformats.org/officeDocument/2006/relationships" xmlns:p="http://schemas.openxmlformats.org/presentationml/2006/main">
+  <p:cSld>
+    <p:spTree>
+      <p:nvGrpSpPr>
+        <p:cNvPr id="1" name=""/>
+        <p:cNvGrpSpPr/>
+        <p:nvPr/>
+      </p:nvGrpSpPr>
+      <p:grpSpPr>
+        <a:xfrm>
+          <a:off x="0" y="0"/>
+          <a:ext cx="0" cy="0"/>
+          <a:chOff x="0" y="0"/>
+          <a:chExt cx="0" cy="0"/>
+        </a:xfrm>
+      </p:grpSpPr>
+      <p:pic>
+        <p:nvPicPr>
+          <p:cNvPr id="2051" name="Picture 3"/>
+          <p:cNvPicPr>
+            <a:picLocks noChangeAspect="1" noChangeArrowheads="1"/>
+          </p:cNvPicPr>
+          <p:nvPr/>
+        </p:nvPicPr>
+        <p:blipFill>
+          <a:blip r:embed="rId2">
+            <a:extLst>
+              <a:ext uri="{28A0092B-C50C-407E-A947-70E740481C1C}">
+                <a14:useLocalDpi xmlns:a14="http://schemas.microsoft.com/office/drawing/2010/main" val="0"/>
+              </a:ext>
+            </a:extLst>
+          </a:blip>
+          <a:srcRect/>
+          <a:stretch>
+            <a:fillRect/>
+          </a:stretch>
+        </p:blipFill>
+        <p:spPr bwMode="auto">
+          <a:xfrm>
+            <a:off x="1475657" y="0"/>
+            <a:ext cx="7668344" cy="1011462"/>
+          </a:xfrm>
+          <a:prstGeom prst="rect">
+            <a:avLst/>
+          </a:prstGeom>
+          <a:noFill/>
+          <a:ln>
+            <a:noFill/>
+          </a:ln>
+          <a:extLst>
+            <a:ext uri="{909E8E84-426E-40DD-AFC4-6F175D3DCCD1}">
+              <a14:hiddenFill xmlns:a14="http://schemas.microsoft.com/office/drawing/2010/main">
+                <a:solidFill>
+                  <a:schemeClr val="accent1"/>
+                </a:solidFill>
+              </a14:hiddenFill>
+            </a:ext>
+            <a:ext uri="{91240B29-F687-4F45-9708-019B960494DF}">
+              <a14:hiddenLine xmlns:a14="http://schemas.microsoft.com/office/drawing/2010/main" w="9525">
+                <a:solidFill>
+                  <a:schemeClr val="tx1"/>
+                </a:solidFill>
+                <a:miter lim="800000"/>
+                <a:headEnd/>
+                <a:tailEnd/>
+              </a14:hiddenLine>
+            </a:ext>
+          </a:extLst>
+        </p:spPr>
+      </p:pic>
+      <p:sp>
+        <p:nvSpPr>
+          <p:cNvPr id="2" name="1 Título"/>
+          <p:cNvSpPr>
+            <a:spLocks noGrp="1"/>
+          </p:cNvSpPr>
+          <p:nvPr>
+            <p:ph type="title"/>
+          </p:nvPr>
+        </p:nvSpPr>
+        <p:spPr>
+          <a:xfrm>
+            <a:off x="2555776" y="-66607"/>
+            <a:ext cx="5410944" cy="1143000"/>
+          </a:xfrm>
+        </p:spPr>
+        <p:txBody>
+          <a:bodyPr>
+            <a:normAutofit/>
+          </a:bodyPr>
+          <a:lstStyle/>
+          <a:p>
+            <a:r>
+              <a:rPr lang="es-ES" sz="3200" b="1" dirty="0">
+                <a:solidFill>
+                  <a:schemeClr val="bg1"/>
+                </a:solidFill>
+              </a:rPr>
+              <a:t>Validaciones</a:t>
+            </a:r>
+            <a:endParaRPr lang="es-ES" sz="3200" dirty="0">
+              <a:solidFill>
+                <a:schemeClr val="bg1"/>
+              </a:solidFill>
+            </a:endParaRPr>
+          </a:p>
+        </p:txBody>
+      </p:sp>
+      <p:pic>
+        <p:nvPicPr>
+          <p:cNvPr id="6" name="Imagen 5"/>
+          <p:cNvPicPr>
+            <a:picLocks noChangeAspect="1"/>
+          </p:cNvPicPr>
+          <p:nvPr/>
+        </p:nvPicPr>
+        <p:blipFill rotWithShape="1">
+          <a:blip r:embed="rId3" cstate="print">
+            <a:extLst>
+              <a:ext uri="{28A0092B-C50C-407E-A947-70E740481C1C}">
+                <a14:useLocalDpi xmlns:a14="http://schemas.microsoft.com/office/drawing/2010/main" val="0"/>
+              </a:ext>
+            </a:extLst>
+          </a:blip>
+          <a:srcRect l="4235" t="5471" r="70358" b="63070"/>
+          <a:stretch/>
+        </p:blipFill>
+        <p:spPr>
+          <a:xfrm>
+            <a:off x="303249" y="0"/>
+            <a:ext cx="921475" cy="883080"/>
+          </a:xfrm>
+          <a:prstGeom prst="rect">
+            <a:avLst/>
+          </a:prstGeom>
+        </p:spPr>
+      </p:pic>
+      <p:sp>
+        <p:nvSpPr>
+          <p:cNvPr id="4" name="Marcador de número de diapositiva 3"/>
+          <p:cNvSpPr>
+            <a:spLocks noGrp="1"/>
+          </p:cNvSpPr>
+          <p:nvPr>
+            <p:ph type="sldNum" sz="quarter" idx="12"/>
+          </p:nvPr>
+        </p:nvSpPr>
+        <p:spPr/>
+        <p:txBody>
+          <a:bodyPr/>
+          <a:lstStyle/>
+          <a:p>
+            <a:fld id="{132FADFE-3B8F-471C-ABF0-DBC7717ECBBC}" type="slidenum">
+              <a:rPr lang="es-ES" smtClean="0"/>
+              <a:t>23</a:t>
+            </a:fld>
+            <a:endParaRPr lang="es-ES"/>
+          </a:p>
+        </p:txBody>
+      </p:sp>
+      <p:pic>
+        <p:nvPicPr>
+          <p:cNvPr id="7" name="Imagen 6">
+            <a:extLst>
+              <a:ext uri="{FF2B5EF4-FFF2-40B4-BE49-F238E27FC236}">
+                <a16:creationId xmlns:a16="http://schemas.microsoft.com/office/drawing/2014/main" id="{58AB41B2-D528-5AF1-DCF4-B9E579275F3E}"/>
+              </a:ext>
+            </a:extLst>
+          </p:cNvPr>
+          <p:cNvPicPr>
+            <a:picLocks noChangeAspect="1"/>
+          </p:cNvPicPr>
+          <p:nvPr/>
+        </p:nvPicPr>
+        <p:blipFill>
+          <a:blip r:embed="rId4">
+            <a:extLst>
+              <a:ext uri="{28A0092B-C50C-407E-A947-70E740481C1C}">
+                <a14:useLocalDpi xmlns:a14="http://schemas.microsoft.com/office/drawing/2010/main" val="0"/>
+              </a:ext>
+            </a:extLst>
+          </a:blip>
+          <a:srcRect/>
+          <a:stretch>
+            <a:fillRect/>
+          </a:stretch>
+        </p:blipFill>
+        <p:spPr bwMode="auto">
+          <a:xfrm>
+            <a:off x="303249" y="2137941"/>
+            <a:ext cx="8595513" cy="3416411"/>
+          </a:xfrm>
+          <a:prstGeom prst="rect">
+            <a:avLst/>
+          </a:prstGeom>
+          <a:noFill/>
+          <a:ln>
+            <a:noFill/>
+          </a:ln>
+        </p:spPr>
+      </p:pic>
+    </p:spTree>
+    <p:extLst>
+      <p:ext uri="{BB962C8B-B14F-4D97-AF65-F5344CB8AC3E}">
+        <p14:creationId xmlns:p14="http://schemas.microsoft.com/office/powerpoint/2010/main" val="1299837795"/>
+      </p:ext>
+    </p:extLst>
+  </p:cSld>
+  <p:clrMapOvr>
+    <a:masterClrMapping/>
+  </p:clrMapOvr>
+</p:sld>
+</file>
+
+<file path=ppt/slides/slide24.xml><?xml version="1.0" encoding="utf-8"?>
+<p:sld xmlns:a="http://schemas.openxmlformats.org/drawingml/2006/main" xmlns:r="http://schemas.openxmlformats.org/officeDocument/2006/relationships" xmlns:p="http://schemas.openxmlformats.org/presentationml/2006/main">
+  <p:cSld>
+    <p:spTree>
+      <p:nvGrpSpPr>
+        <p:cNvPr id="1" name=""/>
+        <p:cNvGrpSpPr/>
+        <p:nvPr/>
+      </p:nvGrpSpPr>
+      <p:grpSpPr>
+        <a:xfrm>
+          <a:off x="0" y="0"/>
+          <a:ext cx="0" cy="0"/>
+          <a:chOff x="0" y="0"/>
+          <a:chExt cx="0" cy="0"/>
+        </a:xfrm>
+      </p:grpSpPr>
+      <p:pic>
+        <p:nvPicPr>
+          <p:cNvPr id="2051" name="Picture 3"/>
+          <p:cNvPicPr>
+            <a:picLocks noChangeAspect="1" noChangeArrowheads="1"/>
+          </p:cNvPicPr>
+          <p:nvPr/>
+        </p:nvPicPr>
+        <p:blipFill>
+          <a:blip r:embed="rId2">
+            <a:extLst>
+              <a:ext uri="{28A0092B-C50C-407E-A947-70E740481C1C}">
+                <a14:useLocalDpi xmlns:a14="http://schemas.microsoft.com/office/drawing/2010/main" val="0"/>
+              </a:ext>
+            </a:extLst>
+          </a:blip>
+          <a:srcRect/>
+          <a:stretch>
+            <a:fillRect/>
+          </a:stretch>
+        </p:blipFill>
+        <p:spPr bwMode="auto">
+          <a:xfrm>
+            <a:off x="1475657" y="0"/>
+            <a:ext cx="7668344" cy="1011462"/>
+          </a:xfrm>
+          <a:prstGeom prst="rect">
+            <a:avLst/>
+          </a:prstGeom>
+          <a:noFill/>
+          <a:ln>
+            <a:noFill/>
+          </a:ln>
+          <a:extLst>
+            <a:ext uri="{909E8E84-426E-40DD-AFC4-6F175D3DCCD1}">
+              <a14:hiddenFill xmlns:a14="http://schemas.microsoft.com/office/drawing/2010/main">
+                <a:solidFill>
+                  <a:schemeClr val="accent1"/>
+                </a:solidFill>
+              </a14:hiddenFill>
+            </a:ext>
+            <a:ext uri="{91240B29-F687-4F45-9708-019B960494DF}">
+              <a14:hiddenLine xmlns:a14="http://schemas.microsoft.com/office/drawing/2010/main" w="9525">
+                <a:solidFill>
+                  <a:schemeClr val="tx1"/>
+                </a:solidFill>
+                <a:miter lim="800000"/>
+                <a:headEnd/>
+                <a:tailEnd/>
+              </a14:hiddenLine>
+            </a:ext>
+          </a:extLst>
+        </p:spPr>
+      </p:pic>
+      <p:sp>
+        <p:nvSpPr>
+          <p:cNvPr id="2" name="1 Título"/>
+          <p:cNvSpPr>
+            <a:spLocks noGrp="1"/>
+          </p:cNvSpPr>
+          <p:nvPr>
+            <p:ph type="title"/>
+          </p:nvPr>
+        </p:nvSpPr>
+        <p:spPr>
+          <a:xfrm>
+            <a:off x="2555776" y="-66607"/>
+            <a:ext cx="5410944" cy="1143000"/>
+          </a:xfrm>
+        </p:spPr>
+        <p:txBody>
+          <a:bodyPr>
+            <a:normAutofit/>
+          </a:bodyPr>
+          <a:lstStyle/>
+          <a:p>
+            <a:r>
+              <a:rPr lang="es-ES" sz="3200" b="1" dirty="0">
+                <a:solidFill>
+                  <a:schemeClr val="bg1"/>
+                </a:solidFill>
+              </a:rPr>
+              <a:t>Pruebas de Aceptación</a:t>
+            </a:r>
+            <a:endParaRPr lang="es-ES" sz="3200" dirty="0">
+              <a:solidFill>
+                <a:schemeClr val="bg1"/>
+              </a:solidFill>
+            </a:endParaRPr>
+          </a:p>
+        </p:txBody>
+      </p:sp>
+      <p:pic>
+        <p:nvPicPr>
+          <p:cNvPr id="6" name="Imagen 5"/>
+          <p:cNvPicPr>
+            <a:picLocks noChangeAspect="1"/>
+          </p:cNvPicPr>
+          <p:nvPr/>
+        </p:nvPicPr>
+        <p:blipFill rotWithShape="1">
+          <a:blip r:embed="rId3" cstate="print">
+            <a:extLst>
+              <a:ext uri="{28A0092B-C50C-407E-A947-70E740481C1C}">
+                <a14:useLocalDpi xmlns:a14="http://schemas.microsoft.com/office/drawing/2010/main" val="0"/>
+              </a:ext>
+            </a:extLst>
+          </a:blip>
+          <a:srcRect l="4235" t="5471" r="70358" b="63070"/>
+          <a:stretch/>
+        </p:blipFill>
+        <p:spPr>
+          <a:xfrm>
+            <a:off x="303249" y="0"/>
+            <a:ext cx="921475" cy="883080"/>
+          </a:xfrm>
+          <a:prstGeom prst="rect">
+            <a:avLst/>
+          </a:prstGeom>
+        </p:spPr>
+      </p:pic>
+      <p:sp>
+        <p:nvSpPr>
+          <p:cNvPr id="4" name="Marcador de número de diapositiva 3"/>
+          <p:cNvSpPr>
+            <a:spLocks noGrp="1"/>
+          </p:cNvSpPr>
+          <p:nvPr>
+            <p:ph type="sldNum" sz="quarter" idx="12"/>
+          </p:nvPr>
+        </p:nvSpPr>
+        <p:spPr/>
+        <p:txBody>
+          <a:bodyPr/>
+          <a:lstStyle/>
+          <a:p>
+            <a:fld id="{132FADFE-3B8F-471C-ABF0-DBC7717ECBBC}" type="slidenum">
+              <a:rPr lang="es-ES" smtClean="0"/>
+              <a:t>24</a:t>
+            </a:fld>
+            <a:endParaRPr lang="es-ES"/>
+          </a:p>
+        </p:txBody>
+      </p:sp>
+      <p:pic>
+        <p:nvPicPr>
+          <p:cNvPr id="9" name="Marcador de contenido 8" descr="Texto&#10;&#10;El contenido generado por IA puede ser incorrecto.">
+            <a:extLst>
+              <a:ext uri="{FF2B5EF4-FFF2-40B4-BE49-F238E27FC236}">
+                <a16:creationId xmlns:a16="http://schemas.microsoft.com/office/drawing/2014/main" id="{E4913D87-377B-A201-E583-844BABA23E83}"/>
+              </a:ext>
+            </a:extLst>
+          </p:cNvPr>
+          <p:cNvPicPr>
+            <a:picLocks noGrp="1" noChangeAspect="1"/>
+          </p:cNvPicPr>
+          <p:nvPr>
+            <p:ph idx="1"/>
+          </p:nvPr>
+        </p:nvPicPr>
+        <p:blipFill>
+          <a:blip r:embed="rId4">
+            <a:extLst>
+              <a:ext uri="{28A0092B-C50C-407E-A947-70E740481C1C}">
+                <a14:useLocalDpi xmlns:a14="http://schemas.microsoft.com/office/drawing/2010/main" val="0"/>
+              </a:ext>
+            </a:extLst>
+          </a:blip>
+          <a:stretch>
+            <a:fillRect/>
+          </a:stretch>
+        </p:blipFill>
+        <p:spPr>
+          <a:xfrm>
+            <a:off x="763986" y="1725972"/>
+            <a:ext cx="7761129" cy="3406056"/>
+          </a:xfrm>
+        </p:spPr>
+      </p:pic>
+    </p:spTree>
+    <p:extLst>
+      <p:ext uri="{BB962C8B-B14F-4D97-AF65-F5344CB8AC3E}">
+        <p14:creationId xmlns:p14="http://schemas.microsoft.com/office/powerpoint/2010/main" val="182701599"/>
+      </p:ext>
+    </p:extLst>
+  </p:cSld>
+  <p:clrMapOvr>
+    <a:masterClrMapping/>
+  </p:clrMapOvr>
+</p:sld>
+</file>
+
+<file path=ppt/slides/slide25.xml><?xml version="1.0" encoding="utf-8"?>
+<p:sld xmlns:a="http://schemas.openxmlformats.org/drawingml/2006/main" xmlns:r="http://schemas.openxmlformats.org/officeDocument/2006/relationships" xmlns:p="http://schemas.openxmlformats.org/presentationml/2006/main">
+  <p:cSld>
+    <p:spTree>
+      <p:nvGrpSpPr>
+        <p:cNvPr id="1" name=""/>
+        <p:cNvGrpSpPr/>
+        <p:nvPr/>
+      </p:nvGrpSpPr>
+      <p:grpSpPr>
+        <a:xfrm>
+          <a:off x="0" y="0"/>
+          <a:ext cx="0" cy="0"/>
+          <a:chOff x="0" y="0"/>
+          <a:chExt cx="0" cy="0"/>
+        </a:xfrm>
+      </p:grpSpPr>
+      <p:pic>
+        <p:nvPicPr>
+          <p:cNvPr id="2051" name="Picture 3"/>
+          <p:cNvPicPr>
+            <a:picLocks noChangeAspect="1" noChangeArrowheads="1"/>
+          </p:cNvPicPr>
+          <p:nvPr/>
+        </p:nvPicPr>
+        <p:blipFill>
+          <a:blip r:embed="rId2">
+            <a:extLst>
+              <a:ext uri="{28A0092B-C50C-407E-A947-70E740481C1C}">
+                <a14:useLocalDpi xmlns:a14="http://schemas.microsoft.com/office/drawing/2010/main" val="0"/>
+              </a:ext>
+            </a:extLst>
+          </a:blip>
+          <a:srcRect/>
+          <a:stretch>
+            <a:fillRect/>
+          </a:stretch>
+        </p:blipFill>
+        <p:spPr bwMode="auto">
+          <a:xfrm>
+            <a:off x="1475657" y="0"/>
+            <a:ext cx="7668344" cy="1011462"/>
+          </a:xfrm>
+          <a:prstGeom prst="rect">
+            <a:avLst/>
+          </a:prstGeom>
+          <a:noFill/>
+          <a:ln>
+            <a:noFill/>
+          </a:ln>
+          <a:extLst>
+            <a:ext uri="{909E8E84-426E-40DD-AFC4-6F175D3DCCD1}">
+              <a14:hiddenFill xmlns:a14="http://schemas.microsoft.com/office/drawing/2010/main">
+                <a:solidFill>
+                  <a:schemeClr val="accent1"/>
+                </a:solidFill>
+              </a14:hiddenFill>
+            </a:ext>
+            <a:ext uri="{91240B29-F687-4F45-9708-019B960494DF}">
+              <a14:hiddenLine xmlns:a14="http://schemas.microsoft.com/office/drawing/2010/main" w="9525">
+                <a:solidFill>
+                  <a:schemeClr val="tx1"/>
+                </a:solidFill>
+                <a:miter lim="800000"/>
+                <a:headEnd/>
+                <a:tailEnd/>
+              </a14:hiddenLine>
+            </a:ext>
+          </a:extLst>
+        </p:spPr>
+      </p:pic>
+      <p:sp>
+        <p:nvSpPr>
+          <p:cNvPr id="2" name="1 Título"/>
+          <p:cNvSpPr>
+            <a:spLocks noGrp="1"/>
+          </p:cNvSpPr>
+          <p:nvPr>
+            <p:ph type="title"/>
+          </p:nvPr>
+        </p:nvSpPr>
+        <p:spPr>
+          <a:xfrm>
+            <a:off x="2555776" y="-66607"/>
+            <a:ext cx="5410944" cy="1143000"/>
+          </a:xfrm>
+        </p:spPr>
+        <p:txBody>
+          <a:bodyPr>
+            <a:normAutofit/>
+          </a:bodyPr>
+          <a:lstStyle/>
+          <a:p>
+            <a:r>
+              <a:rPr lang="es-ES" sz="3200" b="1" dirty="0">
+                <a:solidFill>
+                  <a:schemeClr val="bg1"/>
+                </a:solidFill>
+              </a:rPr>
+              <a:t>Interfaces Del Sistema</a:t>
+            </a:r>
+            <a:endParaRPr lang="es-ES" sz="3200" dirty="0">
+              <a:solidFill>
+                <a:schemeClr val="bg1"/>
+              </a:solidFill>
+            </a:endParaRPr>
+          </a:p>
+        </p:txBody>
+      </p:sp>
+      <p:pic>
+        <p:nvPicPr>
+          <p:cNvPr id="6" name="Imagen 5"/>
+          <p:cNvPicPr>
+            <a:picLocks noChangeAspect="1"/>
+          </p:cNvPicPr>
+          <p:nvPr/>
+        </p:nvPicPr>
+        <p:blipFill rotWithShape="1">
+          <a:blip r:embed="rId3" cstate="print">
+            <a:extLst>
+              <a:ext uri="{28A0092B-C50C-407E-A947-70E740481C1C}">
+                <a14:useLocalDpi xmlns:a14="http://schemas.microsoft.com/office/drawing/2010/main" val="0"/>
+              </a:ext>
+            </a:extLst>
+          </a:blip>
+          <a:srcRect l="4235" t="5471" r="70358" b="63070"/>
+          <a:stretch/>
+        </p:blipFill>
+        <p:spPr>
+          <a:xfrm>
+            <a:off x="303249" y="0"/>
+            <a:ext cx="921475" cy="883080"/>
+          </a:xfrm>
+          <a:prstGeom prst="rect">
+            <a:avLst/>
+          </a:prstGeom>
+        </p:spPr>
+      </p:pic>
+      <p:sp>
+        <p:nvSpPr>
+          <p:cNvPr id="4" name="Marcador de número de diapositiva 3"/>
+          <p:cNvSpPr>
+            <a:spLocks noGrp="1"/>
+          </p:cNvSpPr>
+          <p:nvPr>
+            <p:ph type="sldNum" sz="quarter" idx="12"/>
+          </p:nvPr>
+        </p:nvSpPr>
+        <p:spPr/>
+        <p:txBody>
+          <a:bodyPr/>
+          <a:lstStyle/>
+          <a:p>
+            <a:fld id="{132FADFE-3B8F-471C-ABF0-DBC7717ECBBC}" type="slidenum">
+              <a:rPr lang="es-ES" smtClean="0"/>
+              <a:t>25</a:t>
+            </a:fld>
+            <a:endParaRPr lang="es-ES"/>
+          </a:p>
+        </p:txBody>
+      </p:sp>
+      <p:pic>
+        <p:nvPicPr>
+          <p:cNvPr id="9" name="Imagen 8" descr="Interfaz de usuario gráfica, Aplicación">
+            <a:extLst>
+              <a:ext uri="{FF2B5EF4-FFF2-40B4-BE49-F238E27FC236}">
+                <a16:creationId xmlns:a16="http://schemas.microsoft.com/office/drawing/2014/main" id="{BC6286B3-27DE-B7EF-F4C7-CE6A28723B7B}"/>
+              </a:ext>
+            </a:extLst>
+          </p:cNvPr>
+          <p:cNvPicPr>
+            <a:picLocks noChangeAspect="1"/>
+          </p:cNvPicPr>
+          <p:nvPr/>
+        </p:nvPicPr>
+        <p:blipFill>
+          <a:blip r:embed="rId4">
+            <a:extLst>
+              <a:ext uri="{28A0092B-C50C-407E-A947-70E740481C1C}">
+                <a14:useLocalDpi xmlns:a14="http://schemas.microsoft.com/office/drawing/2010/main" val="0"/>
+              </a:ext>
+            </a:extLst>
+          </a:blip>
+          <a:stretch>
+            <a:fillRect/>
+          </a:stretch>
+        </p:blipFill>
+        <p:spPr>
+          <a:xfrm>
+            <a:off x="0" y="2201527"/>
+            <a:ext cx="9112456" cy="3961510"/>
+          </a:xfrm>
+          <a:prstGeom prst="rect">
+            <a:avLst/>
+          </a:prstGeom>
+        </p:spPr>
+      </p:pic>
     </p:spTree>
     <p:extLst>
       <p:ext uri="{BB962C8B-B14F-4D97-AF65-F5344CB8AC3E}">
         <p14:creationId xmlns:p14="http://schemas.microsoft.com/office/powerpoint/2010/main" val="329657551"/>
+      </p:ext>
+    </p:extLst>
+  </p:cSld>
+  <p:clrMapOvr>
+    <a:masterClrMapping/>
+  </p:clrMapOvr>
+</p:sld>
+</file>
+
+<file path=ppt/slides/slide26.xml><?xml version="1.0" encoding="utf-8"?>
+<p:sld xmlns:a="http://schemas.openxmlformats.org/drawingml/2006/main" xmlns:r="http://schemas.openxmlformats.org/officeDocument/2006/relationships" xmlns:p="http://schemas.openxmlformats.org/presentationml/2006/main">
+  <p:cSld>
+    <p:spTree>
+      <p:nvGrpSpPr>
+        <p:cNvPr id="1" name=""/>
+        <p:cNvGrpSpPr/>
+        <p:nvPr/>
+      </p:nvGrpSpPr>
+      <p:grpSpPr>
+        <a:xfrm>
+          <a:off x="0" y="0"/>
+          <a:ext cx="0" cy="0"/>
+          <a:chOff x="0" y="0"/>
+          <a:chExt cx="0" cy="0"/>
+        </a:xfrm>
+      </p:grpSpPr>
+      <p:pic>
+        <p:nvPicPr>
+          <p:cNvPr id="2051" name="Picture 3"/>
+          <p:cNvPicPr>
+            <a:picLocks noChangeAspect="1" noChangeArrowheads="1"/>
+          </p:cNvPicPr>
+          <p:nvPr/>
+        </p:nvPicPr>
+        <p:blipFill>
+          <a:blip r:embed="rId2">
+            <a:extLst>
+              <a:ext uri="{28A0092B-C50C-407E-A947-70E740481C1C}">
+                <a14:useLocalDpi xmlns:a14="http://schemas.microsoft.com/office/drawing/2010/main" val="0"/>
+              </a:ext>
+            </a:extLst>
+          </a:blip>
+          <a:srcRect/>
+          <a:stretch>
+            <a:fillRect/>
+          </a:stretch>
+        </p:blipFill>
+        <p:spPr bwMode="auto">
+          <a:xfrm>
+            <a:off x="1475657" y="0"/>
+            <a:ext cx="7668344" cy="1011462"/>
+          </a:xfrm>
+          <a:prstGeom prst="rect">
+            <a:avLst/>
+          </a:prstGeom>
+          <a:noFill/>
+          <a:ln>
+            <a:noFill/>
+          </a:ln>
+          <a:extLst>
+            <a:ext uri="{909E8E84-426E-40DD-AFC4-6F175D3DCCD1}">
+              <a14:hiddenFill xmlns:a14="http://schemas.microsoft.com/office/drawing/2010/main">
+                <a:solidFill>
+                  <a:schemeClr val="accent1"/>
+                </a:solidFill>
+              </a14:hiddenFill>
+            </a:ext>
+            <a:ext uri="{91240B29-F687-4F45-9708-019B960494DF}">
+              <a14:hiddenLine xmlns:a14="http://schemas.microsoft.com/office/drawing/2010/main" w="9525">
+                <a:solidFill>
+                  <a:schemeClr val="tx1"/>
+                </a:solidFill>
+                <a:miter lim="800000"/>
+                <a:headEnd/>
+                <a:tailEnd/>
+              </a14:hiddenLine>
+            </a:ext>
+          </a:extLst>
+        </p:spPr>
+      </p:pic>
+      <p:sp>
+        <p:nvSpPr>
+          <p:cNvPr id="2" name="1 Título"/>
+          <p:cNvSpPr>
+            <a:spLocks noGrp="1"/>
+          </p:cNvSpPr>
+          <p:nvPr>
+            <p:ph type="title"/>
+          </p:nvPr>
+        </p:nvSpPr>
+        <p:spPr>
+          <a:xfrm>
+            <a:off x="2555776" y="-66607"/>
+            <a:ext cx="5410944" cy="1143000"/>
+          </a:xfrm>
+        </p:spPr>
+        <p:txBody>
+          <a:bodyPr>
+            <a:normAutofit/>
+          </a:bodyPr>
+          <a:lstStyle/>
+          <a:p>
+            <a:r>
+              <a:rPr lang="es-ES" sz="3200" b="1" dirty="0">
+                <a:solidFill>
+                  <a:schemeClr val="bg1"/>
+                </a:solidFill>
+              </a:rPr>
+              <a:t>Interfaces Del Sistema</a:t>
+            </a:r>
+            <a:endParaRPr lang="es-ES" sz="3200" dirty="0">
+              <a:solidFill>
+                <a:schemeClr val="bg1"/>
+              </a:solidFill>
+            </a:endParaRPr>
+          </a:p>
+        </p:txBody>
+      </p:sp>
+      <p:pic>
+        <p:nvPicPr>
+          <p:cNvPr id="6" name="Imagen 5"/>
+          <p:cNvPicPr>
+            <a:picLocks noChangeAspect="1"/>
+          </p:cNvPicPr>
+          <p:nvPr/>
+        </p:nvPicPr>
+        <p:blipFill rotWithShape="1">
+          <a:blip r:embed="rId3" cstate="print">
+            <a:extLst>
+              <a:ext uri="{28A0092B-C50C-407E-A947-70E740481C1C}">
+                <a14:useLocalDpi xmlns:a14="http://schemas.microsoft.com/office/drawing/2010/main" val="0"/>
+              </a:ext>
+            </a:extLst>
+          </a:blip>
+          <a:srcRect l="4235" t="5471" r="70358" b="63070"/>
+          <a:stretch/>
+        </p:blipFill>
+        <p:spPr>
+          <a:xfrm>
+            <a:off x="303249" y="0"/>
+            <a:ext cx="921475" cy="883080"/>
+          </a:xfrm>
+          <a:prstGeom prst="rect">
+            <a:avLst/>
+          </a:prstGeom>
+        </p:spPr>
+      </p:pic>
+      <p:sp>
+        <p:nvSpPr>
+          <p:cNvPr id="4" name="Marcador de número de diapositiva 3"/>
+          <p:cNvSpPr>
+            <a:spLocks noGrp="1"/>
+          </p:cNvSpPr>
+          <p:nvPr>
+            <p:ph type="sldNum" sz="quarter" idx="12"/>
+          </p:nvPr>
+        </p:nvSpPr>
+        <p:spPr/>
+        <p:txBody>
+          <a:bodyPr/>
+          <a:lstStyle/>
+          <a:p>
+            <a:fld id="{132FADFE-3B8F-471C-ABF0-DBC7717ECBBC}" type="slidenum">
+              <a:rPr lang="es-ES" smtClean="0"/>
+              <a:t>26</a:t>
+            </a:fld>
+            <a:endParaRPr lang="es-ES"/>
+          </a:p>
+        </p:txBody>
+      </p:sp>
+      <p:pic>
+        <p:nvPicPr>
+          <p:cNvPr id="5" name="Imagen 4" descr="Captura de pantalla de un celular&#10;&#10;El contenido generado por IA puede ser incorrecto.">
+            <a:extLst>
+              <a:ext uri="{FF2B5EF4-FFF2-40B4-BE49-F238E27FC236}">
+                <a16:creationId xmlns:a16="http://schemas.microsoft.com/office/drawing/2014/main" id="{CA8A267A-2666-E415-9FA5-487C5C95906C}"/>
+              </a:ext>
+            </a:extLst>
+          </p:cNvPr>
+          <p:cNvPicPr>
+            <a:picLocks noChangeAspect="1"/>
+          </p:cNvPicPr>
+          <p:nvPr/>
+        </p:nvPicPr>
+        <p:blipFill>
+          <a:blip r:embed="rId4">
+            <a:extLst>
+              <a:ext uri="{28A0092B-C50C-407E-A947-70E740481C1C}">
+                <a14:useLocalDpi xmlns:a14="http://schemas.microsoft.com/office/drawing/2010/main" val="0"/>
+              </a:ext>
+            </a:extLst>
+          </a:blip>
+          <a:stretch>
+            <a:fillRect/>
+          </a:stretch>
+        </p:blipFill>
+        <p:spPr>
+          <a:xfrm>
+            <a:off x="0" y="1659828"/>
+            <a:ext cx="9144000" cy="4568140"/>
+          </a:xfrm>
+          <a:prstGeom prst="rect">
+            <a:avLst/>
+          </a:prstGeom>
+        </p:spPr>
+      </p:pic>
+    </p:spTree>
+    <p:extLst>
+      <p:ext uri="{BB962C8B-B14F-4D97-AF65-F5344CB8AC3E}">
+        <p14:creationId xmlns:p14="http://schemas.microsoft.com/office/powerpoint/2010/main" val="669480691"/>
       </p:ext>
     </p:extLst>
   </p:cSld>
@@ -12029,6 +12173,17 @@
               </a:spcAft>
             </a:pPr>
             <a:r>
+              <a:rPr lang="es-CU" sz="2400" dirty="0">
+                <a:solidFill>
+                  <a:srgbClr val="000000"/>
+                </a:solidFill>
+                <a:effectLst/>
+                <a:latin typeface="Arial" panose="020B0604020202020204" pitchFamily="34" charset="0"/>
+                <a:ea typeface="Arial" panose="020B0604020202020204" pitchFamily="34" charset="0"/>
+              </a:rPr>
+              <a:t>Ocurrencia de errores en la recogida de la </a:t>
+            </a:r>
+            <a:r>
               <a:rPr lang="es-ES" sz="2400" dirty="0">
                 <a:solidFill>
                   <a:srgbClr val="000000"/>
@@ -12037,7 +12192,7 @@
                 <a:latin typeface="Arial" panose="020B0604020202020204" pitchFamily="34" charset="0"/>
                 <a:ea typeface="Calibri" panose="020F0502020204030204" pitchFamily="34" charset="0"/>
               </a:rPr>
-              <a:t>Insuficiente control en la gestión de la información referente al cálculo del transporte de sedimentos en las costas cubanas de la región sur-oriental para garantizar acciones efectivas que prevengan los efectos de la erosión costera.</a:t>
+              <a:t>información referente al cálculo del transporte de sedimentos en las costas cubanas de la región sur-oriental para garantizar acciones efectivas que prevengan los efectos de la erosión costera.</a:t>
             </a:r>
             <a:endParaRPr lang="es-CU" sz="2400" dirty="0">
               <a:effectLst/>

--- a/DOC/Presentacion de Tesis Dariel Cabrera Lopez.pptx
+++ b/DOC/Presentacion de Tesis Dariel Cabrera Lopez.pptx
@@ -5,7 +5,7 @@
     <p:sldMasterId id="2147483648" r:id="rId1"/>
   </p:sldMasterIdLst>
   <p:notesMasterIdLst>
-    <p:notesMasterId r:id="rId28"/>
+    <p:notesMasterId r:id="rId27"/>
   </p:notesMasterIdLst>
   <p:sldIdLst>
     <p:sldId id="257" r:id="rId2"/>
@@ -18,22 +18,21 @@
     <p:sldId id="320" r:id="rId9"/>
     <p:sldId id="326" r:id="rId10"/>
     <p:sldId id="327" r:id="rId11"/>
-    <p:sldId id="321" r:id="rId12"/>
-    <p:sldId id="323" r:id="rId13"/>
-    <p:sldId id="322" r:id="rId14"/>
-    <p:sldId id="328" r:id="rId15"/>
-    <p:sldId id="324" r:id="rId16"/>
-    <p:sldId id="329" r:id="rId17"/>
-    <p:sldId id="338" r:id="rId18"/>
-    <p:sldId id="340" r:id="rId19"/>
-    <p:sldId id="339" r:id="rId20"/>
-    <p:sldId id="331" r:id="rId21"/>
-    <p:sldId id="330" r:id="rId22"/>
-    <p:sldId id="332" r:id="rId23"/>
-    <p:sldId id="341" r:id="rId24"/>
-    <p:sldId id="333" r:id="rId25"/>
-    <p:sldId id="334" r:id="rId26"/>
-    <p:sldId id="342" r:id="rId27"/>
+    <p:sldId id="323" r:id="rId12"/>
+    <p:sldId id="322" r:id="rId13"/>
+    <p:sldId id="328" r:id="rId14"/>
+    <p:sldId id="324" r:id="rId15"/>
+    <p:sldId id="329" r:id="rId16"/>
+    <p:sldId id="339" r:id="rId17"/>
+    <p:sldId id="331" r:id="rId18"/>
+    <p:sldId id="343" r:id="rId19"/>
+    <p:sldId id="344" r:id="rId20"/>
+    <p:sldId id="333" r:id="rId21"/>
+    <p:sldId id="342" r:id="rId22"/>
+    <p:sldId id="345" r:id="rId23"/>
+    <p:sldId id="346" r:id="rId24"/>
+    <p:sldId id="347" r:id="rId25"/>
+    <p:sldId id="348" r:id="rId26"/>
   </p:sldIdLst>
   <p:sldSz cx="9144000" cy="6858000" type="screen4x3"/>
   <p:notesSz cx="6858000" cy="9144000"/>
@@ -3238,7 +3237,7 @@
           <a:p>
             <a:fld id="{64803A06-23BD-4449-A1D1-6ADBCF91F056}" type="datetimeFigureOut">
               <a:rPr lang="es-ES_tradnl" smtClean="0"/>
-              <a:t>04/06/2025</a:t>
+              <a:t>26/06/2025</a:t>
             </a:fld>
             <a:endParaRPr lang="es-ES_tradnl"/>
           </a:p>
@@ -3769,7 +3768,7 @@
           <a:p>
             <a:fld id="{98963F9C-36B4-4ECD-BECC-604E57EA70AC}" type="datetime1">
               <a:rPr lang="es-ES" smtClean="0"/>
-              <a:t>04/06/2025</a:t>
+              <a:t>26/06/2025</a:t>
             </a:fld>
             <a:endParaRPr lang="es-ES"/>
           </a:p>
@@ -3932,7 +3931,7 @@
           <a:p>
             <a:fld id="{C72EFBCE-E3F3-42E3-AA42-D22E0C63B5E5}" type="datetime1">
               <a:rPr lang="es-ES" smtClean="0"/>
-              <a:t>04/06/2025</a:t>
+              <a:t>26/06/2025</a:t>
             </a:fld>
             <a:endParaRPr lang="es-ES"/>
           </a:p>
@@ -4105,7 +4104,7 @@
           <a:p>
             <a:fld id="{8569FFDC-06D8-42F3-B15A-134344304A07}" type="datetime1">
               <a:rPr lang="es-ES" smtClean="0"/>
-              <a:t>04/06/2025</a:t>
+              <a:t>26/06/2025</a:t>
             </a:fld>
             <a:endParaRPr lang="es-ES"/>
           </a:p>
@@ -4268,7 +4267,7 @@
           <a:p>
             <a:fld id="{2B3D0996-3F59-44A3-A62A-DD95A94764C7}" type="datetime1">
               <a:rPr lang="es-ES" smtClean="0"/>
-              <a:t>04/06/2025</a:t>
+              <a:t>26/06/2025</a:t>
             </a:fld>
             <a:endParaRPr lang="es-ES"/>
           </a:p>
@@ -4508,7 +4507,7 @@
           <a:p>
             <a:fld id="{52120030-6113-4ABE-B7D6-521760BB2F2A}" type="datetime1">
               <a:rPr lang="es-ES" smtClean="0"/>
-              <a:t>04/06/2025</a:t>
+              <a:t>26/06/2025</a:t>
             </a:fld>
             <a:endParaRPr lang="es-ES"/>
           </a:p>
@@ -4788,7 +4787,7 @@
           <a:p>
             <a:fld id="{A8AD0488-9BF8-4343-A7C8-334439AC023A}" type="datetime1">
               <a:rPr lang="es-ES" smtClean="0"/>
-              <a:t>04/06/2025</a:t>
+              <a:t>26/06/2025</a:t>
             </a:fld>
             <a:endParaRPr lang="es-ES"/>
           </a:p>
@@ -5202,7 +5201,7 @@
           <a:p>
             <a:fld id="{B91DCCD4-540D-42E8-A1D5-532A6F28BA54}" type="datetime1">
               <a:rPr lang="es-ES" smtClean="0"/>
-              <a:t>04/06/2025</a:t>
+              <a:t>26/06/2025</a:t>
             </a:fld>
             <a:endParaRPr lang="es-ES"/>
           </a:p>
@@ -5314,7 +5313,7 @@
           <a:p>
             <a:fld id="{7EFCCA53-11C7-4627-936A-79881176CA9F}" type="datetime1">
               <a:rPr lang="es-ES" smtClean="0"/>
-              <a:t>04/06/2025</a:t>
+              <a:t>26/06/2025</a:t>
             </a:fld>
             <a:endParaRPr lang="es-ES"/>
           </a:p>
@@ -5404,7 +5403,7 @@
           <a:p>
             <a:fld id="{5DAFE5E1-20AD-4F66-9853-038A786E08A1}" type="datetime1">
               <a:rPr lang="es-ES" smtClean="0"/>
-              <a:t>04/06/2025</a:t>
+              <a:t>26/06/2025</a:t>
             </a:fld>
             <a:endParaRPr lang="es-ES"/>
           </a:p>
@@ -5674,7 +5673,7 @@
           <a:p>
             <a:fld id="{F3470BC8-43CE-409A-BE0C-FBE54D4B7D7F}" type="datetime1">
               <a:rPr lang="es-ES" smtClean="0"/>
-              <a:t>04/06/2025</a:t>
+              <a:t>26/06/2025</a:t>
             </a:fld>
             <a:endParaRPr lang="es-ES"/>
           </a:p>
@@ -5921,7 +5920,7 @@
           <a:p>
             <a:fld id="{4A0853D2-8CEB-49C0-B2DA-82EEA4C831AA}" type="datetime1">
               <a:rPr lang="es-ES" smtClean="0"/>
-              <a:t>04/06/2025</a:t>
+              <a:t>26/06/2025</a:t>
             </a:fld>
             <a:endParaRPr lang="es-ES"/>
           </a:p>
@@ -6127,7 +6126,7 @@
           <a:p>
             <a:fld id="{E055BF71-A5A3-4F60-820F-A4D41CCBAC58}" type="datetime1">
               <a:rPr lang="es-ES" smtClean="0"/>
-              <a:t>04/06/2025</a:t>
+              <a:t>26/06/2025</a:t>
             </a:fld>
             <a:endParaRPr lang="es-ES"/>
           </a:p>
@@ -7148,16 +7147,13 @@
                   <a:schemeClr val="bg1"/>
                 </a:solidFill>
               </a:rPr>
-              <a:t>A</a:t>
-            </a:r>
-            <a:r>
-              <a:rPr lang="es-ES" sz="3200" dirty="0">
-                <a:solidFill>
-                  <a:schemeClr val="bg1"/>
-                </a:solidFill>
-              </a:rPr>
-              <a:t>rquitectura</a:t>
-            </a:r>
+              <a:t>Herramientas</a:t>
+            </a:r>
+            <a:endParaRPr lang="es-ES" sz="3200" dirty="0">
+              <a:solidFill>
+                <a:schemeClr val="bg1"/>
+              </a:solidFill>
+            </a:endParaRPr>
           </a:p>
         </p:txBody>
       </p:sp>
@@ -7173,19 +7169,18 @@
         </p:nvSpPr>
         <p:spPr>
           <a:xfrm>
-            <a:off x="4067944" y="1783166"/>
-            <a:ext cx="5081234" cy="4814186"/>
+            <a:off x="5132294" y="1724726"/>
+            <a:ext cx="5410944" cy="4814186"/>
           </a:xfrm>
         </p:spPr>
         <p:txBody>
           <a:bodyPr>
-            <a:normAutofit/>
+            <a:normAutofit lnSpcReduction="10000"/>
           </a:bodyPr>
           <a:lstStyle/>
           <a:p>
-            <a:pPr algn="just"/>
-            <a:r>
-              <a:rPr lang="es-ES" sz="2400" dirty="0">
+            <a:r>
+              <a:rPr lang="es-ES" sz="2400" dirty="0" err="1">
                 <a:solidFill>
                   <a:srgbClr val="000000"/>
                 </a:solidFill>
@@ -7193,32 +7188,19 @@
                 <a:latin typeface="Arial" panose="020B0604020202020204" pitchFamily="34" charset="0"/>
                 <a:ea typeface="Times New Roman" panose="02020603050405020304" pitchFamily="18" charset="0"/>
               </a:rPr>
-              <a:t>Cliente-Servidor </a:t>
-            </a:r>
-            <a:endParaRPr lang="es-CU" sz="2400" dirty="0">
+              <a:t>React</a:t>
+            </a:r>
+            <a:endParaRPr lang="es-US" sz="2400" dirty="0">
+              <a:solidFill>
+                <a:srgbClr val="000000"/>
+              </a:solidFill>
               <a:effectLst/>
-              <a:latin typeface="Times New Roman" panose="02020603050405020304" pitchFamily="18" charset="0"/>
-              <a:ea typeface="Times New Roman" panose="02020603050405020304" pitchFamily="18" charset="0"/>
+              <a:latin typeface="Arial" panose="020B0604020202020204" pitchFamily="34" charset="0"/>
+              <a:ea typeface="Arial" panose="020B0604020202020204" pitchFamily="34" charset="0"/>
             </a:endParaRPr>
           </a:p>
           <a:p>
-            <a:pPr marL="0" indent="0" algn="just">
-              <a:buNone/>
-            </a:pPr>
-            <a:r>
-              <a:rPr lang="es-US" sz="2400" dirty="0">
-                <a:solidFill>
-                  <a:srgbClr val="000000"/>
-                </a:solidFill>
-                <a:effectLst/>
-                <a:latin typeface="Arial" panose="020B0604020202020204" pitchFamily="34" charset="0"/>
-                <a:ea typeface="Arial" panose="020B0604020202020204" pitchFamily="34" charset="0"/>
-              </a:rPr>
-              <a:t>es un modelo para el desarrollo de sistemas de información en el que las transacciones se dividen en procesos independientes que cooperan entre sí para intercambiar información, servicios o recursos</a:t>
-            </a:r>
-          </a:p>
-          <a:p>
-            <a:pPr marL="0" indent="0" algn="just">
+            <a:pPr marL="0" indent="0">
               <a:buNone/>
             </a:pPr>
             <a:endParaRPr lang="es-US" sz="2400" dirty="0">
@@ -7231,9 +7213,8 @@
             </a:endParaRPr>
           </a:p>
           <a:p>
-            <a:pPr algn="just"/>
-            <a:r>
-              <a:rPr lang="es-CU" sz="2400" dirty="0">
+            <a:r>
+              <a:rPr lang="es-CU" sz="2400" dirty="0" err="1">
                 <a:solidFill>
                   <a:srgbClr val="000000"/>
                 </a:solidFill>
@@ -7241,7 +7222,125 @@
                 <a:latin typeface="Arial" panose="020B0604020202020204" pitchFamily="34" charset="0"/>
                 <a:ea typeface="Arial" panose="020B0604020202020204" pitchFamily="34" charset="0"/>
               </a:rPr>
-              <a:t>Un microservicio es un conjunto de pequeños servicios que pueden ser desarrollados independientemente</a:t>
+              <a:t>Nest</a:t>
+            </a:r>
+            <a:r>
+              <a:rPr lang="es-CU" sz="2400" dirty="0">
+                <a:solidFill>
+                  <a:srgbClr val="000000"/>
+                </a:solidFill>
+                <a:effectLst/>
+                <a:latin typeface="Arial" panose="020B0604020202020204" pitchFamily="34" charset="0"/>
+                <a:ea typeface="Arial" panose="020B0604020202020204" pitchFamily="34" charset="0"/>
+              </a:rPr>
+              <a:t> </a:t>
+            </a:r>
+            <a:r>
+              <a:rPr lang="es-CU" sz="2400" dirty="0" err="1">
+                <a:solidFill>
+                  <a:srgbClr val="000000"/>
+                </a:solidFill>
+                <a:effectLst/>
+                <a:latin typeface="Arial" panose="020B0604020202020204" pitchFamily="34" charset="0"/>
+                <a:ea typeface="Arial" panose="020B0604020202020204" pitchFamily="34" charset="0"/>
+              </a:rPr>
+              <a:t>Js</a:t>
+            </a:r>
+            <a:endParaRPr lang="es-CU" sz="2400" dirty="0">
+              <a:solidFill>
+                <a:srgbClr val="000000"/>
+              </a:solidFill>
+              <a:effectLst/>
+              <a:latin typeface="Arial" panose="020B0604020202020204" pitchFamily="34" charset="0"/>
+              <a:ea typeface="Arial" panose="020B0604020202020204" pitchFamily="34" charset="0"/>
+            </a:endParaRPr>
+          </a:p>
+          <a:p>
+            <a:endParaRPr lang="es-CU" sz="2400" dirty="0">
+              <a:solidFill>
+                <a:srgbClr val="000000"/>
+              </a:solidFill>
+              <a:latin typeface="Arial" panose="020B0604020202020204" pitchFamily="34" charset="0"/>
+              <a:ea typeface="Times New Roman" panose="02020603050405020304" pitchFamily="18" charset="0"/>
+            </a:endParaRPr>
+          </a:p>
+          <a:p>
+            <a:r>
+              <a:rPr lang="es-CU" sz="2400" dirty="0">
+                <a:solidFill>
+                  <a:srgbClr val="000000"/>
+                </a:solidFill>
+                <a:latin typeface="Arial" panose="020B0604020202020204" pitchFamily="34" charset="0"/>
+                <a:ea typeface="Times New Roman" panose="02020603050405020304" pitchFamily="18" charset="0"/>
+              </a:rPr>
+              <a:t>Mongo DB </a:t>
+            </a:r>
+          </a:p>
+          <a:p>
+            <a:endParaRPr lang="es-CU" sz="2400" dirty="0">
+              <a:solidFill>
+                <a:srgbClr val="000000"/>
+              </a:solidFill>
+              <a:effectLst/>
+              <a:latin typeface="Arial" panose="020B0604020202020204" pitchFamily="34" charset="0"/>
+              <a:ea typeface="Times New Roman" panose="02020603050405020304" pitchFamily="18" charset="0"/>
+            </a:endParaRPr>
+          </a:p>
+          <a:p>
+            <a:r>
+              <a:rPr lang="es-CU" sz="2400" dirty="0">
+                <a:solidFill>
+                  <a:srgbClr val="000000"/>
+                </a:solidFill>
+                <a:effectLst/>
+                <a:latin typeface="Arial" panose="020B0604020202020204" pitchFamily="34" charset="0"/>
+                <a:ea typeface="Times New Roman" panose="02020603050405020304" pitchFamily="18" charset="0"/>
+              </a:rPr>
+              <a:t>HTML</a:t>
+            </a:r>
+          </a:p>
+          <a:p>
+            <a:endParaRPr lang="es-CU" sz="2400" dirty="0">
+              <a:solidFill>
+                <a:srgbClr val="000000"/>
+              </a:solidFill>
+              <a:latin typeface="Arial" panose="020B0604020202020204" pitchFamily="34" charset="0"/>
+              <a:ea typeface="Times New Roman" panose="02020603050405020304" pitchFamily="18" charset="0"/>
+            </a:endParaRPr>
+          </a:p>
+          <a:p>
+            <a:r>
+              <a:rPr lang="es-CU" sz="2400" dirty="0">
+                <a:solidFill>
+                  <a:srgbClr val="000000"/>
+                </a:solidFill>
+                <a:effectLst/>
+                <a:latin typeface="Arial" panose="020B0604020202020204" pitchFamily="34" charset="0"/>
+                <a:ea typeface="Times New Roman" panose="02020603050405020304" pitchFamily="18" charset="0"/>
+              </a:rPr>
+              <a:t>CSS </a:t>
+            </a:r>
+          </a:p>
+          <a:p>
+            <a:endParaRPr lang="es-CU" sz="2400" dirty="0">
+              <a:solidFill>
+                <a:srgbClr val="000000"/>
+              </a:solidFill>
+              <a:latin typeface="Arial" panose="020B0604020202020204" pitchFamily="34" charset="0"/>
+              <a:ea typeface="Times New Roman" panose="02020603050405020304" pitchFamily="18" charset="0"/>
+            </a:endParaRPr>
+          </a:p>
+          <a:p>
+            <a:r>
+              <a:rPr lang="es-CU" sz="2400" dirty="0" err="1">
+                <a:solidFill>
+                  <a:srgbClr val="000000"/>
+                </a:solidFill>
+                <a:effectLst/>
+                <a:latin typeface="Arial" panose="020B0604020202020204" pitchFamily="34" charset="0"/>
+                <a:ea typeface="Times New Roman" panose="02020603050405020304" pitchFamily="18" charset="0"/>
+              </a:rPr>
+              <a:t>Javascript</a:t>
             </a:r>
             <a:endParaRPr lang="es-CU" sz="2400" dirty="0">
               <a:effectLst/>
@@ -7303,63 +7402,12 @@
           </a:p>
         </p:txBody>
       </p:sp>
-      <p:sp>
-        <p:nvSpPr>
-          <p:cNvPr id="8" name="1 Título">
+      <p:pic>
+        <p:nvPicPr>
+          <p:cNvPr id="7" name="Imagen 6">
             <a:extLst>
               <a:ext uri="{FF2B5EF4-FFF2-40B4-BE49-F238E27FC236}">
-                <a16:creationId xmlns:a16="http://schemas.microsoft.com/office/drawing/2014/main" id="{2300A554-AA78-4661-A0D7-1C18D37529E9}"/>
-              </a:ext>
-            </a:extLst>
-          </p:cNvPr>
-          <p:cNvSpPr txBox="1">
-            <a:spLocks/>
-          </p:cNvSpPr>
-          <p:nvPr/>
-        </p:nvSpPr>
-        <p:spPr>
-          <a:xfrm>
-            <a:off x="1582124" y="910399"/>
-            <a:ext cx="7104676" cy="1143000"/>
-          </a:xfrm>
-          <a:prstGeom prst="rect">
-            <a:avLst/>
-          </a:prstGeom>
-        </p:spPr>
-        <p:txBody>
-          <a:bodyPr vert="horz" lIns="91440" tIns="45720" rIns="91440" bIns="45720" rtlCol="0" anchor="ctr">
-            <a:normAutofit/>
-          </a:bodyPr>
-          <a:lstStyle>
-            <a:lvl1pPr algn="ctr" defTabSz="914400" rtl="0" eaLnBrk="1" latinLnBrk="0" hangingPunct="1">
-              <a:spcBef>
-                <a:spcPct val="0"/>
-              </a:spcBef>
-              <a:buNone/>
-              <a:defRPr sz="4400" kern="1200">
-                <a:solidFill>
-                  <a:schemeClr val="tx1"/>
-                </a:solidFill>
-                <a:latin typeface="+mj-lt"/>
-                <a:ea typeface="+mj-ea"/>
-                <a:cs typeface="+mj-cs"/>
-              </a:defRPr>
-            </a:lvl1pPr>
-          </a:lstStyle>
-          <a:p>
-            <a:r>
-              <a:rPr lang="es-ES" sz="3200" dirty="0"/>
-              <a:t>Cliente-Servidor con Microservicios</a:t>
-            </a:r>
-          </a:p>
-        </p:txBody>
-      </p:sp>
-      <p:pic>
-        <p:nvPicPr>
-          <p:cNvPr id="9" name="Imagen 8">
-            <a:extLst>
-              <a:ext uri="{FF2B5EF4-FFF2-40B4-BE49-F238E27FC236}">
-                <a16:creationId xmlns:a16="http://schemas.microsoft.com/office/drawing/2014/main" id="{FAB7706B-DC4A-465A-97AF-2A9294688C55}"/>
+                <a16:creationId xmlns:a16="http://schemas.microsoft.com/office/drawing/2014/main" id="{89E25356-88A0-48BD-B977-AB7456E6A937}"/>
               </a:ext>
             </a:extLst>
           </p:cNvPr>
@@ -7382,8 +7430,8 @@
         </p:blipFill>
         <p:spPr>
           <a:xfrm>
-            <a:off x="0" y="2204864"/>
-            <a:ext cx="4067944" cy="3096344"/>
+            <a:off x="-29979" y="1833873"/>
+            <a:ext cx="4932040" cy="3474328"/>
           </a:xfrm>
           <a:prstGeom prst="rect">
             <a:avLst/>
@@ -7393,7 +7441,7 @@
     </p:spTree>
     <p:extLst>
       <p:ext uri="{BB962C8B-B14F-4D97-AF65-F5344CB8AC3E}">
-        <p14:creationId xmlns:p14="http://schemas.microsoft.com/office/powerpoint/2010/main" val="956112997"/>
+        <p14:creationId xmlns:p14="http://schemas.microsoft.com/office/powerpoint/2010/main" val="1121728421"/>
       </p:ext>
     </p:extLst>
   </p:cSld>
@@ -7502,7 +7550,7 @@
                   <a:schemeClr val="bg1"/>
                 </a:solidFill>
               </a:rPr>
-              <a:t>Herramientas</a:t>
+              <a:t>Metodología de Desarrollo</a:t>
             </a:r>
             <a:endParaRPr lang="es-ES" sz="3200" dirty="0">
               <a:solidFill>
@@ -7524,18 +7572,19 @@
         </p:nvSpPr>
         <p:spPr>
           <a:xfrm>
-            <a:off x="5132294" y="1724726"/>
+            <a:off x="3738234" y="1783166"/>
             <a:ext cx="5410944" cy="4814186"/>
           </a:xfrm>
         </p:spPr>
         <p:txBody>
           <a:bodyPr>
-            <a:normAutofit lnSpcReduction="10000"/>
+            <a:normAutofit/>
           </a:bodyPr>
           <a:lstStyle/>
           <a:p>
-            <a:r>
-              <a:rPr lang="es-ES" sz="2400" dirty="0" err="1">
+            <a:pPr algn="just"/>
+            <a:r>
+              <a:rPr lang="es-ES" sz="2400" dirty="0">
                 <a:solidFill>
                   <a:srgbClr val="000000"/>
                 </a:solidFill>
@@ -7543,96 +7592,12 @@
                 <a:latin typeface="Arial" panose="020B0604020202020204" pitchFamily="34" charset="0"/>
                 <a:ea typeface="Times New Roman" panose="02020603050405020304" pitchFamily="18" charset="0"/>
               </a:rPr>
-              <a:t>React</a:t>
-            </a:r>
-            <a:endParaRPr lang="es-US" sz="2400" dirty="0">
-              <a:solidFill>
-                <a:srgbClr val="000000"/>
-              </a:solidFill>
-              <a:effectLst/>
-              <a:latin typeface="Arial" panose="020B0604020202020204" pitchFamily="34" charset="0"/>
-              <a:ea typeface="Arial" panose="020B0604020202020204" pitchFamily="34" charset="0"/>
-            </a:endParaRPr>
-          </a:p>
-          <a:p>
-            <a:pPr marL="0" indent="0">
-              <a:buNone/>
-            </a:pPr>
-            <a:endParaRPr lang="es-US" sz="2400" dirty="0">
-              <a:solidFill>
-                <a:srgbClr val="000000"/>
-              </a:solidFill>
-              <a:effectLst/>
-              <a:latin typeface="Arial" panose="020B0604020202020204" pitchFamily="34" charset="0"/>
-              <a:ea typeface="Arial" panose="020B0604020202020204" pitchFamily="34" charset="0"/>
-            </a:endParaRPr>
-          </a:p>
-          <a:p>
-            <a:r>
-              <a:rPr lang="es-CU" sz="2400" dirty="0" err="1">
-                <a:solidFill>
-                  <a:srgbClr val="000000"/>
-                </a:solidFill>
-                <a:effectLst/>
-                <a:latin typeface="Arial" panose="020B0604020202020204" pitchFamily="34" charset="0"/>
-                <a:ea typeface="Arial" panose="020B0604020202020204" pitchFamily="34" charset="0"/>
-              </a:rPr>
-              <a:t>Nest</a:t>
-            </a:r>
-            <a:r>
-              <a:rPr lang="es-CU" sz="2400" dirty="0">
-                <a:solidFill>
-                  <a:srgbClr val="000000"/>
-                </a:solidFill>
-                <a:effectLst/>
-                <a:latin typeface="Arial" panose="020B0604020202020204" pitchFamily="34" charset="0"/>
-                <a:ea typeface="Arial" panose="020B0604020202020204" pitchFamily="34" charset="0"/>
-              </a:rPr>
-              <a:t> </a:t>
-            </a:r>
-            <a:r>
-              <a:rPr lang="es-CU" sz="2400" dirty="0" err="1">
-                <a:solidFill>
-                  <a:srgbClr val="000000"/>
-                </a:solidFill>
-                <a:effectLst/>
-                <a:latin typeface="Arial" panose="020B0604020202020204" pitchFamily="34" charset="0"/>
-                <a:ea typeface="Arial" panose="020B0604020202020204" pitchFamily="34" charset="0"/>
-              </a:rPr>
-              <a:t>Js</a:t>
-            </a:r>
-            <a:endParaRPr lang="es-CU" sz="2400" dirty="0">
-              <a:solidFill>
-                <a:srgbClr val="000000"/>
-              </a:solidFill>
-              <a:effectLst/>
-              <a:latin typeface="Arial" panose="020B0604020202020204" pitchFamily="34" charset="0"/>
-              <a:ea typeface="Arial" panose="020B0604020202020204" pitchFamily="34" charset="0"/>
-            </a:endParaRPr>
-          </a:p>
-          <a:p>
-            <a:endParaRPr lang="es-CU" sz="2400" dirty="0">
-              <a:solidFill>
-                <a:srgbClr val="000000"/>
-              </a:solidFill>
-              <a:latin typeface="Arial" panose="020B0604020202020204" pitchFamily="34" charset="0"/>
-              <a:ea typeface="Times New Roman" panose="02020603050405020304" pitchFamily="18" charset="0"/>
-            </a:endParaRPr>
-          </a:p>
-          <a:p>
-            <a:r>
-              <a:rPr lang="es-CU" sz="2400" dirty="0">
-                <a:solidFill>
-                  <a:srgbClr val="000000"/>
-                </a:solidFill>
-                <a:latin typeface="Arial" panose="020B0604020202020204" pitchFamily="34" charset="0"/>
-                <a:ea typeface="Times New Roman" panose="02020603050405020304" pitchFamily="18" charset="0"/>
-              </a:rPr>
-              <a:t>Mongo DB </a:t>
-            </a:r>
-          </a:p>
-          <a:p>
-            <a:endParaRPr lang="es-CU" sz="2400" dirty="0">
+              <a:t>Programación Extrema (XP)</a:t>
+            </a:r>
+          </a:p>
+          <a:p>
+            <a:pPr algn="just"/>
+            <a:endParaRPr lang="es-ES" sz="2400" dirty="0">
               <a:solidFill>
                 <a:srgbClr val="000000"/>
               </a:solidFill>
@@ -7642,6 +7607,9 @@
             </a:endParaRPr>
           </a:p>
           <a:p>
+            <a:pPr marL="0" indent="0" algn="just">
+              <a:buNone/>
+            </a:pPr>
             <a:r>
               <a:rPr lang="es-CU" sz="2400" dirty="0">
                 <a:solidFill>
@@ -7649,57 +7617,16 @@
                 </a:solidFill>
                 <a:effectLst/>
                 <a:latin typeface="Arial" panose="020B0604020202020204" pitchFamily="34" charset="0"/>
-                <a:ea typeface="Times New Roman" panose="02020603050405020304" pitchFamily="18" charset="0"/>
+                <a:ea typeface="Arial" panose="020B0604020202020204" pitchFamily="34" charset="0"/>
               </a:rPr>
-              <a:t>HTML</a:t>
-            </a:r>
-          </a:p>
-          <a:p>
-            <a:endParaRPr lang="es-CU" sz="2400" dirty="0">
+              <a:t>es una metodología de desarrollo ligera (o ágil) basada en una serie de valores y de prácticas de buenas maneras que persigue el objetivo de aumentar la productividad a la hora de desarrollar programas</a:t>
+            </a:r>
+            <a:endParaRPr lang="es-ES" sz="2400" dirty="0">
               <a:solidFill>
                 <a:srgbClr val="000000"/>
               </a:solidFill>
+              <a:effectLst/>
               <a:latin typeface="Arial" panose="020B0604020202020204" pitchFamily="34" charset="0"/>
-              <a:ea typeface="Times New Roman" panose="02020603050405020304" pitchFamily="18" charset="0"/>
-            </a:endParaRPr>
-          </a:p>
-          <a:p>
-            <a:r>
-              <a:rPr lang="es-CU" sz="2400" dirty="0">
-                <a:solidFill>
-                  <a:srgbClr val="000000"/>
-                </a:solidFill>
-                <a:effectLst/>
-                <a:latin typeface="Arial" panose="020B0604020202020204" pitchFamily="34" charset="0"/>
-                <a:ea typeface="Times New Roman" panose="02020603050405020304" pitchFamily="18" charset="0"/>
-              </a:rPr>
-              <a:t>CSS </a:t>
-            </a:r>
-          </a:p>
-          <a:p>
-            <a:endParaRPr lang="es-CU" sz="2400" dirty="0">
-              <a:solidFill>
-                <a:srgbClr val="000000"/>
-              </a:solidFill>
-              <a:latin typeface="Arial" panose="020B0604020202020204" pitchFamily="34" charset="0"/>
-              <a:ea typeface="Times New Roman" panose="02020603050405020304" pitchFamily="18" charset="0"/>
-            </a:endParaRPr>
-          </a:p>
-          <a:p>
-            <a:r>
-              <a:rPr lang="es-CU" sz="2400" dirty="0" err="1">
-                <a:solidFill>
-                  <a:srgbClr val="000000"/>
-                </a:solidFill>
-                <a:effectLst/>
-                <a:latin typeface="Arial" panose="020B0604020202020204" pitchFamily="34" charset="0"/>
-                <a:ea typeface="Times New Roman" panose="02020603050405020304" pitchFamily="18" charset="0"/>
-              </a:rPr>
-              <a:t>Javascript</a:t>
-            </a:r>
-            <a:endParaRPr lang="es-CU" sz="2400" dirty="0">
-              <a:effectLst/>
-              <a:latin typeface="Times New Roman" panose="02020603050405020304" pitchFamily="18" charset="0"/>
               <a:ea typeface="Times New Roman" panose="02020603050405020304" pitchFamily="18" charset="0"/>
             </a:endParaRPr>
           </a:p>
@@ -7752,288 +7679,6 @@
             <a:fld id="{132FADFE-3B8F-471C-ABF0-DBC7717ECBBC}" type="slidenum">
               <a:rPr lang="es-ES" smtClean="0"/>
               <a:t>12</a:t>
-            </a:fld>
-            <a:endParaRPr lang="es-ES"/>
-          </a:p>
-        </p:txBody>
-      </p:sp>
-      <p:pic>
-        <p:nvPicPr>
-          <p:cNvPr id="7" name="Imagen 6">
-            <a:extLst>
-              <a:ext uri="{FF2B5EF4-FFF2-40B4-BE49-F238E27FC236}">
-                <a16:creationId xmlns:a16="http://schemas.microsoft.com/office/drawing/2014/main" id="{89E25356-88A0-48BD-B977-AB7456E6A937}"/>
-              </a:ext>
-            </a:extLst>
-          </p:cNvPr>
-          <p:cNvPicPr>
-            <a:picLocks noChangeAspect="1"/>
-          </p:cNvPicPr>
-          <p:nvPr/>
-        </p:nvPicPr>
-        <p:blipFill>
-          <a:blip r:embed="rId4" cstate="print">
-            <a:extLst>
-              <a:ext uri="{28A0092B-C50C-407E-A947-70E740481C1C}">
-                <a14:useLocalDpi xmlns:a14="http://schemas.microsoft.com/office/drawing/2010/main" val="0"/>
-              </a:ext>
-            </a:extLst>
-          </a:blip>
-          <a:stretch>
-            <a:fillRect/>
-          </a:stretch>
-        </p:blipFill>
-        <p:spPr>
-          <a:xfrm>
-            <a:off x="-29979" y="1833873"/>
-            <a:ext cx="4932040" cy="3474328"/>
-          </a:xfrm>
-          <a:prstGeom prst="rect">
-            <a:avLst/>
-          </a:prstGeom>
-        </p:spPr>
-      </p:pic>
-    </p:spTree>
-    <p:extLst>
-      <p:ext uri="{BB962C8B-B14F-4D97-AF65-F5344CB8AC3E}">
-        <p14:creationId xmlns:p14="http://schemas.microsoft.com/office/powerpoint/2010/main" val="1121728421"/>
-      </p:ext>
-    </p:extLst>
-  </p:cSld>
-  <p:clrMapOvr>
-    <a:masterClrMapping/>
-  </p:clrMapOvr>
-</p:sld>
-</file>
-
-<file path=ppt/slides/slide13.xml><?xml version="1.0" encoding="utf-8"?>
-<p:sld xmlns:a="http://schemas.openxmlformats.org/drawingml/2006/main" xmlns:r="http://schemas.openxmlformats.org/officeDocument/2006/relationships" xmlns:p="http://schemas.openxmlformats.org/presentationml/2006/main">
-  <p:cSld>
-    <p:spTree>
-      <p:nvGrpSpPr>
-        <p:cNvPr id="1" name=""/>
-        <p:cNvGrpSpPr/>
-        <p:nvPr/>
-      </p:nvGrpSpPr>
-      <p:grpSpPr>
-        <a:xfrm>
-          <a:off x="0" y="0"/>
-          <a:ext cx="0" cy="0"/>
-          <a:chOff x="0" y="0"/>
-          <a:chExt cx="0" cy="0"/>
-        </a:xfrm>
-      </p:grpSpPr>
-      <p:pic>
-        <p:nvPicPr>
-          <p:cNvPr id="2051" name="Picture 3"/>
-          <p:cNvPicPr>
-            <a:picLocks noChangeAspect="1" noChangeArrowheads="1"/>
-          </p:cNvPicPr>
-          <p:nvPr/>
-        </p:nvPicPr>
-        <p:blipFill>
-          <a:blip r:embed="rId2">
-            <a:extLst>
-              <a:ext uri="{28A0092B-C50C-407E-A947-70E740481C1C}">
-                <a14:useLocalDpi xmlns:a14="http://schemas.microsoft.com/office/drawing/2010/main" val="0"/>
-              </a:ext>
-            </a:extLst>
-          </a:blip>
-          <a:srcRect/>
-          <a:stretch>
-            <a:fillRect/>
-          </a:stretch>
-        </p:blipFill>
-        <p:spPr bwMode="auto">
-          <a:xfrm>
-            <a:off x="1475657" y="0"/>
-            <a:ext cx="7668344" cy="1011462"/>
-          </a:xfrm>
-          <a:prstGeom prst="rect">
-            <a:avLst/>
-          </a:prstGeom>
-          <a:noFill/>
-          <a:ln>
-            <a:noFill/>
-          </a:ln>
-          <a:extLst>
-            <a:ext uri="{909E8E84-426E-40DD-AFC4-6F175D3DCCD1}">
-              <a14:hiddenFill xmlns:a14="http://schemas.microsoft.com/office/drawing/2010/main">
-                <a:solidFill>
-                  <a:schemeClr val="accent1"/>
-                </a:solidFill>
-              </a14:hiddenFill>
-            </a:ext>
-            <a:ext uri="{91240B29-F687-4F45-9708-019B960494DF}">
-              <a14:hiddenLine xmlns:a14="http://schemas.microsoft.com/office/drawing/2010/main" w="9525">
-                <a:solidFill>
-                  <a:schemeClr val="tx1"/>
-                </a:solidFill>
-                <a:miter lim="800000"/>
-                <a:headEnd/>
-                <a:tailEnd/>
-              </a14:hiddenLine>
-            </a:ext>
-          </a:extLst>
-        </p:spPr>
-      </p:pic>
-      <p:sp>
-        <p:nvSpPr>
-          <p:cNvPr id="2" name="1 Título"/>
-          <p:cNvSpPr>
-            <a:spLocks noGrp="1"/>
-          </p:cNvSpPr>
-          <p:nvPr>
-            <p:ph type="title"/>
-          </p:nvPr>
-        </p:nvSpPr>
-        <p:spPr>
-          <a:xfrm>
-            <a:off x="2555776" y="-66607"/>
-            <a:ext cx="5410944" cy="1143000"/>
-          </a:xfrm>
-        </p:spPr>
-        <p:txBody>
-          <a:bodyPr>
-            <a:normAutofit/>
-          </a:bodyPr>
-          <a:lstStyle/>
-          <a:p>
-            <a:r>
-              <a:rPr lang="es-ES" sz="3200" b="1" dirty="0">
-                <a:solidFill>
-                  <a:schemeClr val="bg1"/>
-                </a:solidFill>
-              </a:rPr>
-              <a:t>Metodología de Desarrollo</a:t>
-            </a:r>
-            <a:endParaRPr lang="es-ES" sz="3200" dirty="0">
-              <a:solidFill>
-                <a:schemeClr val="bg1"/>
-              </a:solidFill>
-            </a:endParaRPr>
-          </a:p>
-        </p:txBody>
-      </p:sp>
-      <p:sp>
-        <p:nvSpPr>
-          <p:cNvPr id="3" name="2 Marcador de contenido"/>
-          <p:cNvSpPr>
-            <a:spLocks noGrp="1"/>
-          </p:cNvSpPr>
-          <p:nvPr>
-            <p:ph idx="1"/>
-          </p:nvPr>
-        </p:nvSpPr>
-        <p:spPr>
-          <a:xfrm>
-            <a:off x="3738234" y="1783166"/>
-            <a:ext cx="5410944" cy="4814186"/>
-          </a:xfrm>
-        </p:spPr>
-        <p:txBody>
-          <a:bodyPr>
-            <a:normAutofit/>
-          </a:bodyPr>
-          <a:lstStyle/>
-          <a:p>
-            <a:pPr algn="just"/>
-            <a:r>
-              <a:rPr lang="es-ES" sz="2400" dirty="0">
-                <a:solidFill>
-                  <a:srgbClr val="000000"/>
-                </a:solidFill>
-                <a:effectLst/>
-                <a:latin typeface="Arial" panose="020B0604020202020204" pitchFamily="34" charset="0"/>
-                <a:ea typeface="Times New Roman" panose="02020603050405020304" pitchFamily="18" charset="0"/>
-              </a:rPr>
-              <a:t>Programación Extrema (XP)</a:t>
-            </a:r>
-          </a:p>
-          <a:p>
-            <a:pPr algn="just"/>
-            <a:endParaRPr lang="es-ES" sz="2400" dirty="0">
-              <a:solidFill>
-                <a:srgbClr val="000000"/>
-              </a:solidFill>
-              <a:effectLst/>
-              <a:latin typeface="Arial" panose="020B0604020202020204" pitchFamily="34" charset="0"/>
-              <a:ea typeface="Times New Roman" panose="02020603050405020304" pitchFamily="18" charset="0"/>
-            </a:endParaRPr>
-          </a:p>
-          <a:p>
-            <a:pPr marL="0" indent="0" algn="just">
-              <a:buNone/>
-            </a:pPr>
-            <a:r>
-              <a:rPr lang="es-CU" sz="2400" dirty="0">
-                <a:solidFill>
-                  <a:srgbClr val="000000"/>
-                </a:solidFill>
-                <a:effectLst/>
-                <a:latin typeface="Arial" panose="020B0604020202020204" pitchFamily="34" charset="0"/>
-                <a:ea typeface="Arial" panose="020B0604020202020204" pitchFamily="34" charset="0"/>
-              </a:rPr>
-              <a:t>es una metodología de desarrollo ligera (o ágil) basada en una serie de valores y de prácticas de buenas maneras que persigue el objetivo de aumentar la productividad a la hora de desarrollar programas</a:t>
-            </a:r>
-            <a:endParaRPr lang="es-ES" sz="2400" dirty="0">
-              <a:solidFill>
-                <a:srgbClr val="000000"/>
-              </a:solidFill>
-              <a:effectLst/>
-              <a:latin typeface="Arial" panose="020B0604020202020204" pitchFamily="34" charset="0"/>
-              <a:ea typeface="Times New Roman" panose="02020603050405020304" pitchFamily="18" charset="0"/>
-            </a:endParaRPr>
-          </a:p>
-        </p:txBody>
-      </p:sp>
-      <p:pic>
-        <p:nvPicPr>
-          <p:cNvPr id="6" name="Imagen 5"/>
-          <p:cNvPicPr>
-            <a:picLocks noChangeAspect="1"/>
-          </p:cNvPicPr>
-          <p:nvPr/>
-        </p:nvPicPr>
-        <p:blipFill rotWithShape="1">
-          <a:blip r:embed="rId3" cstate="print">
-            <a:extLst>
-              <a:ext uri="{28A0092B-C50C-407E-A947-70E740481C1C}">
-                <a14:useLocalDpi xmlns:a14="http://schemas.microsoft.com/office/drawing/2010/main" val="0"/>
-              </a:ext>
-            </a:extLst>
-          </a:blip>
-          <a:srcRect l="4235" t="5471" r="70358" b="63070"/>
-          <a:stretch/>
-        </p:blipFill>
-        <p:spPr>
-          <a:xfrm>
-            <a:off x="303249" y="0"/>
-            <a:ext cx="921475" cy="883080"/>
-          </a:xfrm>
-          <a:prstGeom prst="rect">
-            <a:avLst/>
-          </a:prstGeom>
-        </p:spPr>
-      </p:pic>
-      <p:sp>
-        <p:nvSpPr>
-          <p:cNvPr id="4" name="Marcador de número de diapositiva 3"/>
-          <p:cNvSpPr>
-            <a:spLocks noGrp="1"/>
-          </p:cNvSpPr>
-          <p:nvPr>
-            <p:ph type="sldNum" sz="quarter" idx="12"/>
-          </p:nvPr>
-        </p:nvSpPr>
-        <p:spPr/>
-        <p:txBody>
-          <a:bodyPr/>
-          <a:lstStyle/>
-          <a:p>
-            <a:fld id="{132FADFE-3B8F-471C-ABF0-DBC7717ECBBC}" type="slidenum">
-              <a:rPr lang="es-ES" smtClean="0"/>
-              <a:t>13</a:t>
             </a:fld>
             <a:endParaRPr lang="es-ES"/>
           </a:p>
@@ -8116,6 +7761,351 @@
 </p:sld>
 </file>
 
+<file path=ppt/slides/slide13.xml><?xml version="1.0" encoding="utf-8"?>
+<p:sld xmlns:a="http://schemas.openxmlformats.org/drawingml/2006/main" xmlns:r="http://schemas.openxmlformats.org/officeDocument/2006/relationships" xmlns:p="http://schemas.openxmlformats.org/presentationml/2006/main">
+  <p:cSld>
+    <p:spTree>
+      <p:nvGrpSpPr>
+        <p:cNvPr id="1" name=""/>
+        <p:cNvGrpSpPr/>
+        <p:nvPr/>
+      </p:nvGrpSpPr>
+      <p:grpSpPr>
+        <a:xfrm>
+          <a:off x="0" y="0"/>
+          <a:ext cx="0" cy="0"/>
+          <a:chOff x="0" y="0"/>
+          <a:chExt cx="0" cy="0"/>
+        </a:xfrm>
+      </p:grpSpPr>
+      <p:pic>
+        <p:nvPicPr>
+          <p:cNvPr id="2051" name="Picture 3"/>
+          <p:cNvPicPr>
+            <a:picLocks noChangeAspect="1" noChangeArrowheads="1"/>
+          </p:cNvPicPr>
+          <p:nvPr/>
+        </p:nvPicPr>
+        <p:blipFill>
+          <a:blip r:embed="rId2">
+            <a:extLst>
+              <a:ext uri="{28A0092B-C50C-407E-A947-70E740481C1C}">
+                <a14:useLocalDpi xmlns:a14="http://schemas.microsoft.com/office/drawing/2010/main" val="0"/>
+              </a:ext>
+            </a:extLst>
+          </a:blip>
+          <a:srcRect/>
+          <a:stretch>
+            <a:fillRect/>
+          </a:stretch>
+        </p:blipFill>
+        <p:spPr bwMode="auto">
+          <a:xfrm>
+            <a:off x="1475657" y="0"/>
+            <a:ext cx="7668344" cy="1011462"/>
+          </a:xfrm>
+          <a:prstGeom prst="rect">
+            <a:avLst/>
+          </a:prstGeom>
+          <a:noFill/>
+          <a:ln>
+            <a:noFill/>
+          </a:ln>
+          <a:extLst>
+            <a:ext uri="{909E8E84-426E-40DD-AFC4-6F175D3DCCD1}">
+              <a14:hiddenFill xmlns:a14="http://schemas.microsoft.com/office/drawing/2010/main">
+                <a:solidFill>
+                  <a:schemeClr val="accent1"/>
+                </a:solidFill>
+              </a14:hiddenFill>
+            </a:ext>
+            <a:ext uri="{91240B29-F687-4F45-9708-019B960494DF}">
+              <a14:hiddenLine xmlns:a14="http://schemas.microsoft.com/office/drawing/2010/main" w="9525">
+                <a:solidFill>
+                  <a:schemeClr val="tx1"/>
+                </a:solidFill>
+                <a:miter lim="800000"/>
+                <a:headEnd/>
+                <a:tailEnd/>
+              </a14:hiddenLine>
+            </a:ext>
+          </a:extLst>
+        </p:spPr>
+      </p:pic>
+      <p:sp>
+        <p:nvSpPr>
+          <p:cNvPr id="2" name="1 Título"/>
+          <p:cNvSpPr>
+            <a:spLocks noGrp="1"/>
+          </p:cNvSpPr>
+          <p:nvPr>
+            <p:ph type="title"/>
+          </p:nvPr>
+        </p:nvSpPr>
+        <p:spPr>
+          <a:xfrm>
+            <a:off x="2555776" y="-66607"/>
+            <a:ext cx="5410944" cy="1143000"/>
+          </a:xfrm>
+        </p:spPr>
+        <p:txBody>
+          <a:bodyPr>
+            <a:normAutofit/>
+          </a:bodyPr>
+          <a:lstStyle/>
+          <a:p>
+            <a:r>
+              <a:rPr lang="es-ES" sz="3200" b="1" dirty="0">
+                <a:solidFill>
+                  <a:schemeClr val="bg1"/>
+                </a:solidFill>
+              </a:rPr>
+              <a:t>Propuesta del Sistema</a:t>
+            </a:r>
+            <a:endParaRPr lang="es-ES" sz="3200" dirty="0">
+              <a:solidFill>
+                <a:schemeClr val="bg1"/>
+              </a:solidFill>
+            </a:endParaRPr>
+          </a:p>
+        </p:txBody>
+      </p:sp>
+      <p:sp>
+        <p:nvSpPr>
+          <p:cNvPr id="3" name="2 Marcador de contenido"/>
+          <p:cNvSpPr>
+            <a:spLocks noGrp="1"/>
+          </p:cNvSpPr>
+          <p:nvPr>
+            <p:ph idx="1"/>
+          </p:nvPr>
+        </p:nvSpPr>
+        <p:spPr>
+          <a:xfrm>
+            <a:off x="69475" y="1493696"/>
+            <a:ext cx="9005050" cy="4734272"/>
+          </a:xfrm>
+        </p:spPr>
+        <p:txBody>
+          <a:bodyPr>
+            <a:normAutofit fontScale="92500" lnSpcReduction="10000"/>
+          </a:bodyPr>
+          <a:lstStyle/>
+          <a:p>
+            <a:pPr marL="0" indent="0" algn="just">
+              <a:buNone/>
+            </a:pPr>
+            <a:r>
+              <a:rPr lang="es-ES" sz="2400" dirty="0">
+                <a:latin typeface="Arial" panose="020B0604020202020204" pitchFamily="34" charset="0"/>
+                <a:cs typeface="Arial" panose="020B0604020202020204" pitchFamily="34" charset="0"/>
+              </a:rPr>
+              <a:t>Esta investigación se centra en desarrollar una aplicación web especializada para informatizar el cálculo del transporte sedimentos, eliminando errores y demoras de los métodos manuales actuales. </a:t>
+            </a:r>
+          </a:p>
+          <a:p>
+            <a:pPr marL="0" indent="0" algn="just">
+              <a:buNone/>
+            </a:pPr>
+            <a:endParaRPr lang="es-ES" sz="2400" dirty="0">
+              <a:latin typeface="Arial" panose="020B0604020202020204" pitchFamily="34" charset="0"/>
+              <a:cs typeface="Arial" panose="020B0604020202020204" pitchFamily="34" charset="0"/>
+            </a:endParaRPr>
+          </a:p>
+          <a:p>
+            <a:pPr marL="0" indent="0" algn="just">
+              <a:buNone/>
+            </a:pPr>
+            <a:r>
+              <a:rPr lang="es-ES" sz="2400" dirty="0">
+                <a:latin typeface="Arial" panose="020B0604020202020204" pitchFamily="34" charset="0"/>
+                <a:cs typeface="Arial" panose="020B0604020202020204" pitchFamily="34" charset="0"/>
+              </a:rPr>
+              <a:t>El sistema incluirá:</a:t>
+            </a:r>
+          </a:p>
+          <a:p>
+            <a:pPr marL="0" indent="0" algn="just">
+              <a:buNone/>
+            </a:pPr>
+            <a:r>
+              <a:rPr lang="es-ES" sz="2400" dirty="0">
+                <a:latin typeface="Arial" panose="020B0604020202020204" pitchFamily="34" charset="0"/>
+                <a:cs typeface="Arial" panose="020B0604020202020204" pitchFamily="34" charset="0"/>
+              </a:rPr>
+              <a:t> </a:t>
+            </a:r>
+          </a:p>
+          <a:p>
+            <a:pPr algn="just">
+              <a:buFont typeface="Wingdings" panose="05000000000000000000" pitchFamily="2" charset="2"/>
+              <a:buChar char="Ø"/>
+            </a:pPr>
+            <a:r>
+              <a:rPr lang="es-ES" sz="2400" dirty="0">
+                <a:latin typeface="Arial" panose="020B0604020202020204" pitchFamily="34" charset="0"/>
+                <a:cs typeface="Arial" panose="020B0604020202020204" pitchFamily="34" charset="0"/>
+              </a:rPr>
+              <a:t>registro digital de mediciones.</a:t>
+            </a:r>
+          </a:p>
+          <a:p>
+            <a:pPr algn="just">
+              <a:buFont typeface="Wingdings" panose="05000000000000000000" pitchFamily="2" charset="2"/>
+              <a:buChar char="Ø"/>
+            </a:pPr>
+            <a:endParaRPr lang="es-ES" sz="2400" dirty="0">
+              <a:latin typeface="Arial" panose="020B0604020202020204" pitchFamily="34" charset="0"/>
+              <a:cs typeface="Arial" panose="020B0604020202020204" pitchFamily="34" charset="0"/>
+            </a:endParaRPr>
+          </a:p>
+          <a:p>
+            <a:pPr algn="just">
+              <a:buFont typeface="Wingdings" panose="05000000000000000000" pitchFamily="2" charset="2"/>
+              <a:buChar char="Ø"/>
+            </a:pPr>
+            <a:r>
+              <a:rPr lang="es-ES" sz="2400" dirty="0">
+                <a:latin typeface="Arial" panose="020B0604020202020204" pitchFamily="34" charset="0"/>
+                <a:cs typeface="Arial" panose="020B0604020202020204" pitchFamily="34" charset="0"/>
+              </a:rPr>
+              <a:t>cálculos con modelos matemáticos validados.</a:t>
+            </a:r>
+          </a:p>
+          <a:p>
+            <a:pPr algn="just">
+              <a:buFont typeface="Wingdings" panose="05000000000000000000" pitchFamily="2" charset="2"/>
+              <a:buChar char="Ø"/>
+            </a:pPr>
+            <a:endParaRPr lang="es-ES" sz="2400" dirty="0">
+              <a:latin typeface="Arial" panose="020B0604020202020204" pitchFamily="34" charset="0"/>
+              <a:cs typeface="Arial" panose="020B0604020202020204" pitchFamily="34" charset="0"/>
+            </a:endParaRPr>
+          </a:p>
+          <a:p>
+            <a:pPr algn="just">
+              <a:buFont typeface="Wingdings" panose="05000000000000000000" pitchFamily="2" charset="2"/>
+              <a:buChar char="Ø"/>
+            </a:pPr>
+            <a:r>
+              <a:rPr lang="es-ES" sz="2400" dirty="0">
+                <a:latin typeface="Arial" panose="020B0604020202020204" pitchFamily="34" charset="0"/>
+                <a:cs typeface="Arial" panose="020B0604020202020204" pitchFamily="34" charset="0"/>
+              </a:rPr>
+              <a:t>visualización georreferenciada de datos.</a:t>
+            </a:r>
+          </a:p>
+          <a:p>
+            <a:pPr algn="just">
+              <a:buFont typeface="Wingdings" panose="05000000000000000000" pitchFamily="2" charset="2"/>
+              <a:buChar char="Ø"/>
+            </a:pPr>
+            <a:endParaRPr lang="es-ES" sz="2400" dirty="0">
+              <a:latin typeface="Arial" panose="020B0604020202020204" pitchFamily="34" charset="0"/>
+              <a:cs typeface="Arial" panose="020B0604020202020204" pitchFamily="34" charset="0"/>
+            </a:endParaRPr>
+          </a:p>
+          <a:p>
+            <a:pPr algn="just">
+              <a:buFont typeface="Wingdings" panose="05000000000000000000" pitchFamily="2" charset="2"/>
+              <a:buChar char="Ø"/>
+            </a:pPr>
+            <a:r>
+              <a:rPr lang="es-ES" sz="2400" dirty="0">
+                <a:latin typeface="Arial" panose="020B0604020202020204" pitchFamily="34" charset="0"/>
+                <a:cs typeface="Arial" panose="020B0604020202020204" pitchFamily="34" charset="0"/>
+              </a:rPr>
+              <a:t>generación de reportes comparativos.</a:t>
+            </a:r>
+          </a:p>
+          <a:p>
+            <a:pPr algn="just">
+              <a:buFont typeface="Wingdings" panose="05000000000000000000" pitchFamily="2" charset="2"/>
+              <a:buChar char="Ø"/>
+            </a:pPr>
+            <a:endParaRPr lang="es-ES" sz="2400" dirty="0">
+              <a:latin typeface="Arial" panose="020B0604020202020204" pitchFamily="34" charset="0"/>
+              <a:cs typeface="Arial" panose="020B0604020202020204" pitchFamily="34" charset="0"/>
+            </a:endParaRPr>
+          </a:p>
+          <a:p>
+            <a:pPr algn="just"/>
+            <a:endParaRPr lang="es-ES" sz="2400" dirty="0">
+              <a:solidFill>
+                <a:srgbClr val="000000"/>
+              </a:solidFill>
+              <a:effectLst/>
+              <a:latin typeface="Arial" panose="020B0604020202020204" pitchFamily="34" charset="0"/>
+              <a:ea typeface="Times New Roman" panose="02020603050405020304" pitchFamily="18" charset="0"/>
+            </a:endParaRPr>
+          </a:p>
+        </p:txBody>
+      </p:sp>
+      <p:pic>
+        <p:nvPicPr>
+          <p:cNvPr id="6" name="Imagen 5"/>
+          <p:cNvPicPr>
+            <a:picLocks noChangeAspect="1"/>
+          </p:cNvPicPr>
+          <p:nvPr/>
+        </p:nvPicPr>
+        <p:blipFill rotWithShape="1">
+          <a:blip r:embed="rId3" cstate="print">
+            <a:extLst>
+              <a:ext uri="{28A0092B-C50C-407E-A947-70E740481C1C}">
+                <a14:useLocalDpi xmlns:a14="http://schemas.microsoft.com/office/drawing/2010/main" val="0"/>
+              </a:ext>
+            </a:extLst>
+          </a:blip>
+          <a:srcRect l="4235" t="5471" r="70358" b="63070"/>
+          <a:stretch/>
+        </p:blipFill>
+        <p:spPr>
+          <a:xfrm>
+            <a:off x="303249" y="0"/>
+            <a:ext cx="921475" cy="883080"/>
+          </a:xfrm>
+          <a:prstGeom prst="rect">
+            <a:avLst/>
+          </a:prstGeom>
+        </p:spPr>
+      </p:pic>
+      <p:sp>
+        <p:nvSpPr>
+          <p:cNvPr id="4" name="Marcador de número de diapositiva 3"/>
+          <p:cNvSpPr>
+            <a:spLocks noGrp="1"/>
+          </p:cNvSpPr>
+          <p:nvPr>
+            <p:ph type="sldNum" sz="quarter" idx="12"/>
+          </p:nvPr>
+        </p:nvSpPr>
+        <p:spPr/>
+        <p:txBody>
+          <a:bodyPr/>
+          <a:lstStyle/>
+          <a:p>
+            <a:fld id="{132FADFE-3B8F-471C-ABF0-DBC7717ECBBC}" type="slidenum">
+              <a:rPr lang="es-ES" smtClean="0"/>
+              <a:t>13</a:t>
+            </a:fld>
+            <a:endParaRPr lang="es-ES"/>
+          </a:p>
+        </p:txBody>
+      </p:sp>
+    </p:spTree>
+    <p:extLst>
+      <p:ext uri="{BB962C8B-B14F-4D97-AF65-F5344CB8AC3E}">
+        <p14:creationId xmlns:p14="http://schemas.microsoft.com/office/powerpoint/2010/main" val="1276137444"/>
+      </p:ext>
+    </p:extLst>
+  </p:cSld>
+  <p:clrMapOvr>
+    <a:masterClrMapping/>
+  </p:clrMapOvr>
+</p:sld>
+</file>
+
 <file path=ppt/slides/slide14.xml><?xml version="1.0" encoding="utf-8"?>
 <p:sld xmlns:a="http://schemas.openxmlformats.org/drawingml/2006/main" xmlns:r="http://schemas.openxmlformats.org/officeDocument/2006/relationships" xmlns:p="http://schemas.openxmlformats.org/presentationml/2006/main">
   <p:cSld>
@@ -8215,7 +8205,7 @@
                   <a:schemeClr val="bg1"/>
                 </a:solidFill>
               </a:rPr>
-              <a:t>Propuesta del Sistema</a:t>
+              <a:t>Funcionalidades del Sistema</a:t>
             </a:r>
             <a:endParaRPr lang="es-ES" sz="3200" dirty="0">
               <a:solidFill>
@@ -8237,8 +8227,8 @@
         </p:nvSpPr>
         <p:spPr>
           <a:xfrm>
-            <a:off x="539552" y="1316770"/>
-            <a:ext cx="8465610" cy="4734272"/>
+            <a:off x="4427984" y="1607095"/>
+            <a:ext cx="5410944" cy="4814186"/>
           </a:xfrm>
         </p:spPr>
         <p:txBody>
@@ -8247,26 +8237,206 @@
           </a:bodyPr>
           <a:lstStyle/>
           <a:p>
-            <a:pPr marL="0" indent="0" algn="just">
-              <a:buNone/>
+            <a:pPr marL="342900" lvl="0" indent="-342900" algn="just">
+              <a:lnSpc>
+                <a:spcPct val="115000"/>
+              </a:lnSpc>
+              <a:buFont typeface="Wingdings" panose="05000000000000000000" pitchFamily="2" charset="2"/>
+              <a:buChar char=""/>
             </a:pPr>
             <a:r>
               <a:rPr lang="es-ES" sz="2400" dirty="0">
+                <a:solidFill>
+                  <a:srgbClr val="000000"/>
+                </a:solidFill>
+                <a:effectLst/>
                 <a:latin typeface="Arial" panose="020B0604020202020204" pitchFamily="34" charset="0"/>
-                <a:cs typeface="Arial" panose="020B0604020202020204" pitchFamily="34" charset="0"/>
+                <a:ea typeface="Calibri" panose="020F0502020204030204" pitchFamily="34" charset="0"/>
               </a:rPr>
-              <a:t>Esta investigación se centra en desarrollar una aplicación web especializada para automatizar el cálculo del transporte longitudinal de sedimentos en las zonas costeras sur-orientales, eliminando errores y demoras de los métodos manuales actuales. El sistema incluirá registro digital de mediciones, cálculos con modelos matemáticos validados, visualización georreferenciada de datos y generación de reportes comparativos.</a:t>
-            </a:r>
-          </a:p>
-          <a:p>
-            <a:pPr algn="just"/>
-            <a:endParaRPr lang="es-ES" sz="2400" dirty="0">
-              <a:solidFill>
-                <a:srgbClr val="000000"/>
-              </a:solidFill>
+              <a:t>HU_1: Autenticarse.</a:t>
+            </a:r>
+            <a:endParaRPr lang="es-CU" sz="2400" dirty="0">
               <a:effectLst/>
               <a:latin typeface="Arial" panose="020B0604020202020204" pitchFamily="34" charset="0"/>
-              <a:ea typeface="Times New Roman" panose="02020603050405020304" pitchFamily="18" charset="0"/>
+              <a:ea typeface="Calibri" panose="020F0502020204030204" pitchFamily="34" charset="0"/>
+            </a:endParaRPr>
+          </a:p>
+          <a:p>
+            <a:pPr marL="342900" lvl="0" indent="-342900" algn="just">
+              <a:lnSpc>
+                <a:spcPct val="115000"/>
+              </a:lnSpc>
+              <a:buFont typeface="Wingdings" panose="05000000000000000000" pitchFamily="2" charset="2"/>
+              <a:buChar char=""/>
+            </a:pPr>
+            <a:r>
+              <a:rPr lang="es-ES" sz="2400" dirty="0">
+                <a:solidFill>
+                  <a:srgbClr val="000000"/>
+                </a:solidFill>
+                <a:effectLst/>
+                <a:latin typeface="Arial" panose="020B0604020202020204" pitchFamily="34" charset="0"/>
+                <a:ea typeface="Calibri" panose="020F0502020204030204" pitchFamily="34" charset="0"/>
+              </a:rPr>
+              <a:t>HU_2: Inicio.</a:t>
+            </a:r>
+            <a:endParaRPr lang="es-CU" sz="2400" dirty="0">
+              <a:effectLst/>
+              <a:latin typeface="Arial" panose="020B0604020202020204" pitchFamily="34" charset="0"/>
+              <a:ea typeface="Calibri" panose="020F0502020204030204" pitchFamily="34" charset="0"/>
+            </a:endParaRPr>
+          </a:p>
+          <a:p>
+            <a:pPr marL="342900" lvl="0" indent="-342900" algn="just">
+              <a:lnSpc>
+                <a:spcPct val="115000"/>
+              </a:lnSpc>
+              <a:buFont typeface="Wingdings" panose="05000000000000000000" pitchFamily="2" charset="2"/>
+              <a:buChar char=""/>
+            </a:pPr>
+            <a:r>
+              <a:rPr lang="es-ES" sz="2400" dirty="0">
+                <a:solidFill>
+                  <a:srgbClr val="000000"/>
+                </a:solidFill>
+                <a:effectLst/>
+                <a:latin typeface="Arial" panose="020B0604020202020204" pitchFamily="34" charset="0"/>
+                <a:ea typeface="Calibri" panose="020F0502020204030204" pitchFamily="34" charset="0"/>
+              </a:rPr>
+              <a:t>HU_3: Gestionar Cálculos.</a:t>
+            </a:r>
+            <a:endParaRPr lang="es-CU" sz="2400" dirty="0">
+              <a:effectLst/>
+              <a:latin typeface="Arial" panose="020B0604020202020204" pitchFamily="34" charset="0"/>
+              <a:ea typeface="Calibri" panose="020F0502020204030204" pitchFamily="34" charset="0"/>
+            </a:endParaRPr>
+          </a:p>
+          <a:p>
+            <a:pPr marL="342900" lvl="0" indent="-342900" algn="just">
+              <a:lnSpc>
+                <a:spcPct val="115000"/>
+              </a:lnSpc>
+              <a:buFont typeface="Wingdings" panose="05000000000000000000" pitchFamily="2" charset="2"/>
+              <a:buChar char=""/>
+            </a:pPr>
+            <a:r>
+              <a:rPr lang="es-ES" sz="2400" dirty="0">
+                <a:solidFill>
+                  <a:srgbClr val="000000"/>
+                </a:solidFill>
+                <a:effectLst/>
+                <a:latin typeface="Arial" panose="020B0604020202020204" pitchFamily="34" charset="0"/>
+                <a:ea typeface="Calibri" panose="020F0502020204030204" pitchFamily="34" charset="0"/>
+              </a:rPr>
+              <a:t>HU_4: Gestionar Usuarios.</a:t>
+            </a:r>
+            <a:endParaRPr lang="es-CU" sz="2400" dirty="0">
+              <a:effectLst/>
+              <a:latin typeface="Arial" panose="020B0604020202020204" pitchFamily="34" charset="0"/>
+              <a:ea typeface="Calibri" panose="020F0502020204030204" pitchFamily="34" charset="0"/>
+            </a:endParaRPr>
+          </a:p>
+          <a:p>
+            <a:pPr marL="342900" lvl="0" indent="-342900" algn="just">
+              <a:lnSpc>
+                <a:spcPct val="115000"/>
+              </a:lnSpc>
+              <a:buFont typeface="Wingdings" panose="05000000000000000000" pitchFamily="2" charset="2"/>
+              <a:buChar char=""/>
+            </a:pPr>
+            <a:r>
+              <a:rPr lang="es-ES" sz="2400" dirty="0">
+                <a:solidFill>
+                  <a:srgbClr val="000000"/>
+                </a:solidFill>
+                <a:effectLst/>
+                <a:latin typeface="Arial" panose="020B0604020202020204" pitchFamily="34" charset="0"/>
+                <a:ea typeface="Calibri" panose="020F0502020204030204" pitchFamily="34" charset="0"/>
+              </a:rPr>
+              <a:t>HU_5: Gestionar Trazas.</a:t>
+            </a:r>
+            <a:endParaRPr lang="es-CU" sz="2400" dirty="0">
+              <a:effectLst/>
+              <a:latin typeface="Arial" panose="020B0604020202020204" pitchFamily="34" charset="0"/>
+              <a:ea typeface="Calibri" panose="020F0502020204030204" pitchFamily="34" charset="0"/>
+            </a:endParaRPr>
+          </a:p>
+          <a:p>
+            <a:pPr marL="342900" lvl="0" indent="-342900" algn="just">
+              <a:lnSpc>
+                <a:spcPct val="115000"/>
+              </a:lnSpc>
+              <a:buFont typeface="Wingdings" panose="05000000000000000000" pitchFamily="2" charset="2"/>
+              <a:buChar char=""/>
+            </a:pPr>
+            <a:r>
+              <a:rPr lang="es-ES" sz="2400" dirty="0">
+                <a:solidFill>
+                  <a:srgbClr val="000000"/>
+                </a:solidFill>
+                <a:effectLst/>
+                <a:latin typeface="Arial" panose="020B0604020202020204" pitchFamily="34" charset="0"/>
+                <a:ea typeface="Calibri" panose="020F0502020204030204" pitchFamily="34" charset="0"/>
+              </a:rPr>
+              <a:t>HU_6: Búsqueda Avanzada.</a:t>
+            </a:r>
+            <a:endParaRPr lang="es-CU" sz="2400" dirty="0">
+              <a:effectLst/>
+              <a:latin typeface="Arial" panose="020B0604020202020204" pitchFamily="34" charset="0"/>
+              <a:ea typeface="Calibri" panose="020F0502020204030204" pitchFamily="34" charset="0"/>
+            </a:endParaRPr>
+          </a:p>
+          <a:p>
+            <a:pPr marL="342900" lvl="0" indent="-342900" algn="just">
+              <a:lnSpc>
+                <a:spcPct val="115000"/>
+              </a:lnSpc>
+              <a:buFont typeface="Wingdings" panose="05000000000000000000" pitchFamily="2" charset="2"/>
+              <a:buChar char=""/>
+            </a:pPr>
+            <a:r>
+              <a:rPr lang="es-ES" sz="2400" dirty="0">
+                <a:solidFill>
+                  <a:srgbClr val="000000"/>
+                </a:solidFill>
+                <a:effectLst/>
+                <a:latin typeface="Arial" panose="020B0604020202020204" pitchFamily="34" charset="0"/>
+                <a:ea typeface="Calibri" panose="020F0502020204030204" pitchFamily="34" charset="0"/>
+              </a:rPr>
+              <a:t>HU_7: Gestionar Ubicaciones.</a:t>
+            </a:r>
+            <a:endParaRPr lang="es-CU" sz="2400" dirty="0">
+              <a:effectLst/>
+              <a:latin typeface="Arial" panose="020B0604020202020204" pitchFamily="34" charset="0"/>
+              <a:ea typeface="Calibri" panose="020F0502020204030204" pitchFamily="34" charset="0"/>
+            </a:endParaRPr>
+          </a:p>
+          <a:p>
+            <a:pPr marL="342900" lvl="0" indent="-342900" algn="just">
+              <a:lnSpc>
+                <a:spcPct val="115000"/>
+              </a:lnSpc>
+              <a:spcAft>
+                <a:spcPts val="1000"/>
+              </a:spcAft>
+              <a:buFont typeface="Wingdings" panose="05000000000000000000" pitchFamily="2" charset="2"/>
+              <a:buChar char=""/>
+            </a:pPr>
+            <a:r>
+              <a:rPr lang="es-ES" sz="2400" dirty="0">
+                <a:solidFill>
+                  <a:srgbClr val="000000"/>
+                </a:solidFill>
+                <a:effectLst/>
+                <a:latin typeface="Arial" panose="020B0604020202020204" pitchFamily="34" charset="0"/>
+                <a:ea typeface="Calibri" panose="020F0502020204030204" pitchFamily="34" charset="0"/>
+              </a:rPr>
+              <a:t>HU_8: Ver reportes en gráficas.</a:t>
+            </a:r>
+            <a:endParaRPr lang="es-CU" sz="2400" dirty="0">
+              <a:effectLst/>
+              <a:latin typeface="Arial" panose="020B0604020202020204" pitchFamily="34" charset="0"/>
+              <a:ea typeface="Calibri" panose="020F0502020204030204" pitchFamily="34" charset="0"/>
             </a:endParaRPr>
           </a:p>
         </p:txBody>
@@ -8323,10 +8493,46 @@
           </a:p>
         </p:txBody>
       </p:sp>
+      <p:pic>
+        <p:nvPicPr>
+          <p:cNvPr id="9" name="Imagen 8">
+            <a:extLst>
+              <a:ext uri="{FF2B5EF4-FFF2-40B4-BE49-F238E27FC236}">
+                <a16:creationId xmlns:a16="http://schemas.microsoft.com/office/drawing/2014/main" id="{47F82248-DC8A-43DA-8999-F316FBC618E0}"/>
+              </a:ext>
+            </a:extLst>
+          </p:cNvPr>
+          <p:cNvPicPr>
+            <a:picLocks noChangeAspect="1"/>
+          </p:cNvPicPr>
+          <p:nvPr/>
+        </p:nvPicPr>
+        <p:blipFill>
+          <a:blip r:embed="rId4">
+            <a:extLst>
+              <a:ext uri="{28A0092B-C50C-407E-A947-70E740481C1C}">
+                <a14:useLocalDpi xmlns:a14="http://schemas.microsoft.com/office/drawing/2010/main" val="0"/>
+              </a:ext>
+            </a:extLst>
+          </a:blip>
+          <a:stretch>
+            <a:fillRect/>
+          </a:stretch>
+        </p:blipFill>
+        <p:spPr>
+          <a:xfrm>
+            <a:off x="17537" y="2045189"/>
+            <a:ext cx="4410447" cy="3061291"/>
+          </a:xfrm>
+          <a:prstGeom prst="rect">
+            <a:avLst/>
+          </a:prstGeom>
+        </p:spPr>
+      </p:pic>
     </p:spTree>
     <p:extLst>
       <p:ext uri="{BB962C8B-B14F-4D97-AF65-F5344CB8AC3E}">
-        <p14:creationId xmlns:p14="http://schemas.microsoft.com/office/powerpoint/2010/main" val="1276137444"/>
+        <p14:creationId xmlns:p14="http://schemas.microsoft.com/office/powerpoint/2010/main" val="3487225913"/>
       </p:ext>
     </p:extLst>
   </p:cSld>
@@ -8435,7 +8641,7 @@
                   <a:schemeClr val="bg1"/>
                 </a:solidFill>
               </a:rPr>
-              <a:t>Funcionalidades del Sistema</a:t>
+              <a:t>Historias Técnicas</a:t>
             </a:r>
             <a:endParaRPr lang="es-ES" sz="3200" dirty="0">
               <a:solidFill>
@@ -8457,8 +8663,8 @@
         </p:nvSpPr>
         <p:spPr>
           <a:xfrm>
-            <a:off x="4427984" y="1607095"/>
-            <a:ext cx="5410944" cy="4814186"/>
+            <a:off x="87225" y="1143000"/>
+            <a:ext cx="8949272" cy="5145564"/>
           </a:xfrm>
         </p:spPr>
         <p:txBody>
@@ -8467,207 +8673,19 @@
           </a:bodyPr>
           <a:lstStyle/>
           <a:p>
-            <a:pPr marL="342900" lvl="0" indent="-342900" algn="just">
+            <a:pPr marL="0" lvl="0" indent="0" algn="just">
               <a:lnSpc>
                 <a:spcPct val="115000"/>
               </a:lnSpc>
-              <a:buFont typeface="Wingdings" panose="05000000000000000000" pitchFamily="2" charset="2"/>
-              <a:buChar char=""/>
+              <a:buNone/>
             </a:pPr>
             <a:r>
-              <a:rPr lang="es-ES" sz="2400" dirty="0">
-                <a:solidFill>
-                  <a:srgbClr val="000000"/>
-                </a:solidFill>
-                <a:effectLst/>
+              <a:rPr lang="es-CU" sz="2400" dirty="0">
                 <a:latin typeface="Arial" panose="020B0604020202020204" pitchFamily="34" charset="0"/>
                 <a:ea typeface="Calibri" panose="020F0502020204030204" pitchFamily="34" charset="0"/>
               </a:rPr>
-              <a:t>HU_1: Autenticarse.</a:t>
-            </a:r>
-            <a:endParaRPr lang="es-CU" sz="2400" dirty="0">
-              <a:effectLst/>
-              <a:latin typeface="Arial" panose="020B0604020202020204" pitchFamily="34" charset="0"/>
-              <a:ea typeface="Calibri" panose="020F0502020204030204" pitchFamily="34" charset="0"/>
-            </a:endParaRPr>
-          </a:p>
-          <a:p>
-            <a:pPr marL="342900" lvl="0" indent="-342900" algn="just">
-              <a:lnSpc>
-                <a:spcPct val="115000"/>
-              </a:lnSpc>
-              <a:buFont typeface="Wingdings" panose="05000000000000000000" pitchFamily="2" charset="2"/>
-              <a:buChar char=""/>
-            </a:pPr>
-            <a:r>
-              <a:rPr lang="es-ES" sz="2400" dirty="0">
-                <a:solidFill>
-                  <a:srgbClr val="000000"/>
-                </a:solidFill>
-                <a:effectLst/>
-                <a:latin typeface="Arial" panose="020B0604020202020204" pitchFamily="34" charset="0"/>
-                <a:ea typeface="Calibri" panose="020F0502020204030204" pitchFamily="34" charset="0"/>
-              </a:rPr>
-              <a:t>HU_2: Inicio.</a:t>
-            </a:r>
-            <a:endParaRPr lang="es-CU" sz="2400" dirty="0">
-              <a:effectLst/>
-              <a:latin typeface="Arial" panose="020B0604020202020204" pitchFamily="34" charset="0"/>
-              <a:ea typeface="Calibri" panose="020F0502020204030204" pitchFamily="34" charset="0"/>
-            </a:endParaRPr>
-          </a:p>
-          <a:p>
-            <a:pPr marL="342900" lvl="0" indent="-342900" algn="just">
-              <a:lnSpc>
-                <a:spcPct val="115000"/>
-              </a:lnSpc>
-              <a:buFont typeface="Wingdings" panose="05000000000000000000" pitchFamily="2" charset="2"/>
-              <a:buChar char=""/>
-            </a:pPr>
-            <a:r>
-              <a:rPr lang="es-ES" sz="2400" dirty="0">
-                <a:solidFill>
-                  <a:srgbClr val="000000"/>
-                </a:solidFill>
-                <a:effectLst/>
-                <a:latin typeface="Arial" panose="020B0604020202020204" pitchFamily="34" charset="0"/>
-                <a:ea typeface="Calibri" panose="020F0502020204030204" pitchFamily="34" charset="0"/>
-              </a:rPr>
-              <a:t>HU_3: Gestionar Cálculos.</a:t>
-            </a:r>
-            <a:endParaRPr lang="es-CU" sz="2400" dirty="0">
-              <a:effectLst/>
-              <a:latin typeface="Arial" panose="020B0604020202020204" pitchFamily="34" charset="0"/>
-              <a:ea typeface="Calibri" panose="020F0502020204030204" pitchFamily="34" charset="0"/>
-            </a:endParaRPr>
-          </a:p>
-          <a:p>
-            <a:pPr marL="342900" lvl="0" indent="-342900" algn="just">
-              <a:lnSpc>
-                <a:spcPct val="115000"/>
-              </a:lnSpc>
-              <a:buFont typeface="Wingdings" panose="05000000000000000000" pitchFamily="2" charset="2"/>
-              <a:buChar char=""/>
-            </a:pPr>
-            <a:r>
-              <a:rPr lang="es-ES" sz="2400" dirty="0">
-                <a:solidFill>
-                  <a:srgbClr val="000000"/>
-                </a:solidFill>
-                <a:effectLst/>
-                <a:latin typeface="Arial" panose="020B0604020202020204" pitchFamily="34" charset="0"/>
-                <a:ea typeface="Calibri" panose="020F0502020204030204" pitchFamily="34" charset="0"/>
-              </a:rPr>
-              <a:t>HU_4: Gestionar Usuarios.</a:t>
-            </a:r>
-            <a:endParaRPr lang="es-CU" sz="2400" dirty="0">
-              <a:effectLst/>
-              <a:latin typeface="Arial" panose="020B0604020202020204" pitchFamily="34" charset="0"/>
-              <a:ea typeface="Calibri" panose="020F0502020204030204" pitchFamily="34" charset="0"/>
-            </a:endParaRPr>
-          </a:p>
-          <a:p>
-            <a:pPr marL="342900" lvl="0" indent="-342900" algn="just">
-              <a:lnSpc>
-                <a:spcPct val="115000"/>
-              </a:lnSpc>
-              <a:buFont typeface="Wingdings" panose="05000000000000000000" pitchFamily="2" charset="2"/>
-              <a:buChar char=""/>
-            </a:pPr>
-            <a:r>
-              <a:rPr lang="es-ES" sz="2400" dirty="0">
-                <a:solidFill>
-                  <a:srgbClr val="000000"/>
-                </a:solidFill>
-                <a:effectLst/>
-                <a:latin typeface="Arial" panose="020B0604020202020204" pitchFamily="34" charset="0"/>
-                <a:ea typeface="Calibri" panose="020F0502020204030204" pitchFamily="34" charset="0"/>
-              </a:rPr>
-              <a:t>HU_5: Gestionar Trazas.</a:t>
-            </a:r>
-            <a:endParaRPr lang="es-CU" sz="2400" dirty="0">
-              <a:effectLst/>
-              <a:latin typeface="Arial" panose="020B0604020202020204" pitchFamily="34" charset="0"/>
-              <a:ea typeface="Calibri" panose="020F0502020204030204" pitchFamily="34" charset="0"/>
-            </a:endParaRPr>
-          </a:p>
-          <a:p>
-            <a:pPr marL="342900" lvl="0" indent="-342900" algn="just">
-              <a:lnSpc>
-                <a:spcPct val="115000"/>
-              </a:lnSpc>
-              <a:buFont typeface="Wingdings" panose="05000000000000000000" pitchFamily="2" charset="2"/>
-              <a:buChar char=""/>
-            </a:pPr>
-            <a:r>
-              <a:rPr lang="es-ES" sz="2400" dirty="0">
-                <a:solidFill>
-                  <a:srgbClr val="000000"/>
-                </a:solidFill>
-                <a:effectLst/>
-                <a:latin typeface="Arial" panose="020B0604020202020204" pitchFamily="34" charset="0"/>
-                <a:ea typeface="Calibri" panose="020F0502020204030204" pitchFamily="34" charset="0"/>
-              </a:rPr>
-              <a:t>HU_6: Búsqueda Avanzada.</a:t>
-            </a:r>
-            <a:endParaRPr lang="es-CU" sz="2400" dirty="0">
-              <a:effectLst/>
-              <a:latin typeface="Arial" panose="020B0604020202020204" pitchFamily="34" charset="0"/>
-              <a:ea typeface="Calibri" panose="020F0502020204030204" pitchFamily="34" charset="0"/>
-            </a:endParaRPr>
-          </a:p>
-          <a:p>
-            <a:pPr marL="342900" lvl="0" indent="-342900" algn="just">
-              <a:lnSpc>
-                <a:spcPct val="115000"/>
-              </a:lnSpc>
-              <a:buFont typeface="Wingdings" panose="05000000000000000000" pitchFamily="2" charset="2"/>
-              <a:buChar char=""/>
-            </a:pPr>
-            <a:r>
-              <a:rPr lang="es-ES" sz="2400" dirty="0">
-                <a:solidFill>
-                  <a:srgbClr val="000000"/>
-                </a:solidFill>
-                <a:effectLst/>
-                <a:latin typeface="Arial" panose="020B0604020202020204" pitchFamily="34" charset="0"/>
-                <a:ea typeface="Calibri" panose="020F0502020204030204" pitchFamily="34" charset="0"/>
-              </a:rPr>
-              <a:t>HU_7: Gestionar Ubicaciones.</a:t>
-            </a:r>
-            <a:endParaRPr lang="es-CU" sz="2400" dirty="0">
-              <a:effectLst/>
-              <a:latin typeface="Arial" panose="020B0604020202020204" pitchFamily="34" charset="0"/>
-              <a:ea typeface="Calibri" panose="020F0502020204030204" pitchFamily="34" charset="0"/>
-            </a:endParaRPr>
-          </a:p>
-          <a:p>
-            <a:pPr marL="342900" lvl="0" indent="-342900" algn="just">
-              <a:lnSpc>
-                <a:spcPct val="115000"/>
-              </a:lnSpc>
-              <a:spcAft>
-                <a:spcPts val="1000"/>
-              </a:spcAft>
-              <a:buFont typeface="Wingdings" panose="05000000000000000000" pitchFamily="2" charset="2"/>
-              <a:buChar char=""/>
-            </a:pPr>
-            <a:r>
-              <a:rPr lang="es-ES" sz="2400" dirty="0">
-                <a:solidFill>
-                  <a:srgbClr val="000000"/>
-                </a:solidFill>
-                <a:effectLst/>
-                <a:latin typeface="Arial" panose="020B0604020202020204" pitchFamily="34" charset="0"/>
-                <a:ea typeface="Calibri" panose="020F0502020204030204" pitchFamily="34" charset="0"/>
-              </a:rPr>
-              <a:t>HU_8: Ver reportes en gráficas.</a:t>
-            </a:r>
-            <a:endParaRPr lang="es-CU" sz="2400" dirty="0">
-              <a:effectLst/>
-              <a:latin typeface="Arial" panose="020B0604020202020204" pitchFamily="34" charset="0"/>
-              <a:ea typeface="Calibri" panose="020F0502020204030204" pitchFamily="34" charset="0"/>
-            </a:endParaRPr>
+              <a:t>Las historias técnicas o “Requisitos no funcionales” propiedades o cualidades que el producto debe tener.</a:t>
+            </a:r>
           </a:p>
         </p:txBody>
       </p:sp>
@@ -8723,12 +8741,432 @@
           </a:p>
         </p:txBody>
       </p:sp>
+      <p:sp>
+        <p:nvSpPr>
+          <p:cNvPr id="5" name="Rectangle 1">
+            <a:extLst>
+              <a:ext uri="{FF2B5EF4-FFF2-40B4-BE49-F238E27FC236}">
+                <a16:creationId xmlns:a16="http://schemas.microsoft.com/office/drawing/2014/main" id="{B9132FF8-7028-0C0B-203C-BE109252354F}"/>
+              </a:ext>
+            </a:extLst>
+          </p:cNvPr>
+          <p:cNvSpPr>
+            <a:spLocks noChangeArrowheads="1"/>
+          </p:cNvSpPr>
+          <p:nvPr/>
+        </p:nvSpPr>
+        <p:spPr bwMode="auto">
+          <a:xfrm rot="10800000" flipV="1">
+            <a:off x="107503" y="2145028"/>
+            <a:ext cx="9145016" cy="4154984"/>
+          </a:xfrm>
+          <a:prstGeom prst="rect">
+            <a:avLst/>
+          </a:prstGeom>
+          <a:noFill/>
+          <a:ln>
+            <a:noFill/>
+          </a:ln>
+          <a:effectLst/>
+          <a:extLst>
+            <a:ext uri="{909E8E84-426E-40DD-AFC4-6F175D3DCCD1}">
+              <a14:hiddenFill xmlns:a14="http://schemas.microsoft.com/office/drawing/2010/main">
+                <a:solidFill>
+                  <a:schemeClr val="accent1"/>
+                </a:solidFill>
+              </a14:hiddenFill>
+            </a:ext>
+            <a:ext uri="{91240B29-F687-4F45-9708-019B960494DF}">
+              <a14:hiddenLine xmlns:a14="http://schemas.microsoft.com/office/drawing/2010/main" w="9525">
+                <a:solidFill>
+                  <a:schemeClr val="tx1"/>
+                </a:solidFill>
+                <a:miter lim="800000"/>
+                <a:headEnd/>
+                <a:tailEnd/>
+              </a14:hiddenLine>
+            </a:ext>
+            <a:ext uri="{AF507438-7753-43E0-B8FC-AC1667EBCBE1}">
+              <a14:hiddenEffects xmlns:a14="http://schemas.microsoft.com/office/drawing/2010/main">
+                <a:effectLst>
+                  <a:outerShdw dist="35921" dir="2700000" algn="ctr" rotWithShape="0">
+                    <a:schemeClr val="bg2"/>
+                  </a:outerShdw>
+                </a:effectLst>
+              </a14:hiddenEffects>
+            </a:ext>
+          </a:extLst>
+        </p:spPr>
+        <p:txBody>
+          <a:bodyPr vert="horz" wrap="square" lIns="91440" tIns="45720" rIns="91440" bIns="45720" numCol="1" anchor="ctr" anchorCtr="0" compatLnSpc="1">
+            <a:prstTxWarp prst="textNoShape">
+              <a:avLst/>
+            </a:prstTxWarp>
+            <a:spAutoFit/>
+          </a:bodyPr>
+          <a:lstStyle/>
+          <a:p>
+            <a:pPr marL="0" marR="0" lvl="0" indent="0" algn="l" defTabSz="914400" rtl="0" eaLnBrk="0" fontAlgn="base" latinLnBrk="0" hangingPunct="0">
+              <a:lnSpc>
+                <a:spcPct val="100000"/>
+              </a:lnSpc>
+              <a:spcBef>
+                <a:spcPct val="0"/>
+              </a:spcBef>
+              <a:spcAft>
+                <a:spcPct val="0"/>
+              </a:spcAft>
+              <a:buClrTx/>
+              <a:buSzTx/>
+              <a:buFontTx/>
+              <a:buChar char="•"/>
+              <a:tabLst/>
+            </a:pPr>
+            <a:r>
+              <a:rPr kumimoji="0" lang="en-US" altLang="en-US" sz="2400" b="1" i="0" u="none" strike="noStrike" cap="none" normalizeH="0" baseline="0" dirty="0">
+                <a:ln>
+                  <a:noFill/>
+                </a:ln>
+                <a:solidFill>
+                  <a:schemeClr val="tx1"/>
+                </a:solidFill>
+                <a:effectLst/>
+                <a:latin typeface="Arial" panose="020B0604020202020204" pitchFamily="34" charset="0"/>
+              </a:rPr>
+              <a:t>Seguro</a:t>
+            </a:r>
+          </a:p>
+          <a:p>
+            <a:pPr marL="0" marR="0" lvl="0" indent="0" algn="l" defTabSz="914400" rtl="0" eaLnBrk="0" fontAlgn="base" latinLnBrk="0" hangingPunct="0">
+              <a:lnSpc>
+                <a:spcPct val="100000"/>
+              </a:lnSpc>
+              <a:spcBef>
+                <a:spcPct val="0"/>
+              </a:spcBef>
+              <a:spcAft>
+                <a:spcPct val="0"/>
+              </a:spcAft>
+              <a:buClrTx/>
+              <a:buSzTx/>
+              <a:buFontTx/>
+              <a:buChar char="•"/>
+              <a:tabLst/>
+            </a:pPr>
+            <a:endParaRPr kumimoji="0" lang="en-US" altLang="en-US" sz="2400" b="1" i="0" u="none" strike="noStrike" cap="none" normalizeH="0" baseline="0" dirty="0">
+              <a:ln>
+                <a:noFill/>
+              </a:ln>
+              <a:solidFill>
+                <a:schemeClr val="tx1"/>
+              </a:solidFill>
+              <a:effectLst/>
+              <a:latin typeface="Arial" panose="020B0604020202020204" pitchFamily="34" charset="0"/>
+            </a:endParaRPr>
+          </a:p>
+          <a:p>
+            <a:pPr marL="0" marR="0" lvl="0" indent="0" algn="l" defTabSz="914400" rtl="0" eaLnBrk="0" fontAlgn="base" latinLnBrk="0" hangingPunct="0">
+              <a:lnSpc>
+                <a:spcPct val="100000"/>
+              </a:lnSpc>
+              <a:spcBef>
+                <a:spcPct val="0"/>
+              </a:spcBef>
+              <a:spcAft>
+                <a:spcPct val="0"/>
+              </a:spcAft>
+              <a:buClrTx/>
+              <a:buSzTx/>
+              <a:buFontTx/>
+              <a:buChar char="•"/>
+              <a:tabLst/>
+            </a:pPr>
+            <a:r>
+              <a:rPr kumimoji="0" lang="en-US" altLang="en-US" sz="2400" b="1" i="0" u="none" strike="noStrike" cap="none" normalizeH="0" baseline="0" dirty="0">
+                <a:ln>
+                  <a:noFill/>
+                </a:ln>
+                <a:solidFill>
+                  <a:schemeClr val="tx1"/>
+                </a:solidFill>
+                <a:effectLst/>
+                <a:latin typeface="Arial" panose="020B0604020202020204" pitchFamily="34" charset="0"/>
+              </a:rPr>
+              <a:t>Usable</a:t>
+            </a:r>
+          </a:p>
+          <a:p>
+            <a:pPr marL="0" marR="0" lvl="0" indent="0" algn="l" defTabSz="914400" rtl="0" eaLnBrk="0" fontAlgn="base" latinLnBrk="0" hangingPunct="0">
+              <a:lnSpc>
+                <a:spcPct val="100000"/>
+              </a:lnSpc>
+              <a:spcBef>
+                <a:spcPct val="0"/>
+              </a:spcBef>
+              <a:spcAft>
+                <a:spcPct val="0"/>
+              </a:spcAft>
+              <a:buClrTx/>
+              <a:buSzTx/>
+              <a:buFontTx/>
+              <a:buChar char="•"/>
+              <a:tabLst/>
+            </a:pPr>
+            <a:endParaRPr kumimoji="0" lang="en-US" altLang="en-US" sz="2400" b="0" i="0" u="none" strike="noStrike" cap="none" normalizeH="0" baseline="0" dirty="0">
+              <a:ln>
+                <a:noFill/>
+              </a:ln>
+              <a:solidFill>
+                <a:schemeClr val="tx1"/>
+              </a:solidFill>
+              <a:effectLst/>
+              <a:latin typeface="Arial" panose="020B0604020202020204" pitchFamily="34" charset="0"/>
+            </a:endParaRPr>
+          </a:p>
+          <a:p>
+            <a:pPr marL="0" marR="0" lvl="0" indent="0" algn="l" defTabSz="914400" rtl="0" eaLnBrk="0" fontAlgn="base" latinLnBrk="0" hangingPunct="0">
+              <a:lnSpc>
+                <a:spcPct val="100000"/>
+              </a:lnSpc>
+              <a:spcBef>
+                <a:spcPct val="0"/>
+              </a:spcBef>
+              <a:spcAft>
+                <a:spcPct val="0"/>
+              </a:spcAft>
+              <a:buClrTx/>
+              <a:buSzTx/>
+              <a:buFontTx/>
+              <a:buChar char="•"/>
+              <a:tabLst/>
+            </a:pPr>
+            <a:r>
+              <a:rPr kumimoji="0" lang="en-US" altLang="en-US" sz="2400" b="1" i="0" u="none" strike="noStrike" cap="none" normalizeH="0" baseline="0" dirty="0">
+                <a:ln>
+                  <a:noFill/>
+                </a:ln>
+                <a:solidFill>
+                  <a:schemeClr val="tx1"/>
+                </a:solidFill>
+                <a:effectLst/>
+                <a:latin typeface="Arial" panose="020B0604020202020204" pitchFamily="34" charset="0"/>
+              </a:rPr>
+              <a:t>Disponible</a:t>
+            </a:r>
+          </a:p>
+          <a:p>
+            <a:pPr marL="0" marR="0" lvl="0" indent="0" algn="l" defTabSz="914400" rtl="0" eaLnBrk="0" fontAlgn="base" latinLnBrk="0" hangingPunct="0">
+              <a:lnSpc>
+                <a:spcPct val="100000"/>
+              </a:lnSpc>
+              <a:spcBef>
+                <a:spcPct val="0"/>
+              </a:spcBef>
+              <a:spcAft>
+                <a:spcPct val="0"/>
+              </a:spcAft>
+              <a:buClrTx/>
+              <a:buSzTx/>
+              <a:buFontTx/>
+              <a:buChar char="•"/>
+              <a:tabLst/>
+            </a:pPr>
+            <a:endParaRPr kumimoji="0" lang="en-US" altLang="en-US" sz="2400" b="0" i="0" u="none" strike="noStrike" cap="none" normalizeH="0" baseline="0" dirty="0">
+              <a:ln>
+                <a:noFill/>
+              </a:ln>
+              <a:solidFill>
+                <a:schemeClr val="tx1"/>
+              </a:solidFill>
+              <a:effectLst/>
+              <a:latin typeface="Arial" panose="020B0604020202020204" pitchFamily="34" charset="0"/>
+            </a:endParaRPr>
+          </a:p>
+          <a:p>
+            <a:pPr marL="0" marR="0" lvl="0" indent="0" algn="l" defTabSz="914400" rtl="0" eaLnBrk="0" fontAlgn="base" latinLnBrk="0" hangingPunct="0">
+              <a:lnSpc>
+                <a:spcPct val="100000"/>
+              </a:lnSpc>
+              <a:spcBef>
+                <a:spcPct val="0"/>
+              </a:spcBef>
+              <a:spcAft>
+                <a:spcPct val="0"/>
+              </a:spcAft>
+              <a:buClrTx/>
+              <a:buSzTx/>
+              <a:buFontTx/>
+              <a:buChar char="•"/>
+              <a:tabLst/>
+            </a:pPr>
+            <a:r>
+              <a:rPr kumimoji="0" lang="en-US" altLang="en-US" sz="2400" b="1" i="0" u="none" strike="noStrike" cap="none" normalizeH="0" baseline="0" dirty="0" err="1">
+                <a:ln>
+                  <a:noFill/>
+                </a:ln>
+                <a:solidFill>
+                  <a:schemeClr val="tx1"/>
+                </a:solidFill>
+                <a:effectLst/>
+                <a:latin typeface="Arial" panose="020B0604020202020204" pitchFamily="34" charset="0"/>
+              </a:rPr>
+              <a:t>Fiable</a:t>
+            </a:r>
+            <a:endParaRPr kumimoji="0" lang="en-US" altLang="en-US" sz="2400" b="1" i="0" u="none" strike="noStrike" cap="none" normalizeH="0" baseline="0" dirty="0">
+              <a:ln>
+                <a:noFill/>
+              </a:ln>
+              <a:solidFill>
+                <a:schemeClr val="tx1"/>
+              </a:solidFill>
+              <a:effectLst/>
+              <a:latin typeface="Arial" panose="020B0604020202020204" pitchFamily="34" charset="0"/>
+            </a:endParaRPr>
+          </a:p>
+          <a:p>
+            <a:pPr marL="0" marR="0" lvl="0" indent="0" algn="l" defTabSz="914400" rtl="0" eaLnBrk="0" fontAlgn="base" latinLnBrk="0" hangingPunct="0">
+              <a:lnSpc>
+                <a:spcPct val="100000"/>
+              </a:lnSpc>
+              <a:spcBef>
+                <a:spcPct val="0"/>
+              </a:spcBef>
+              <a:spcAft>
+                <a:spcPct val="0"/>
+              </a:spcAft>
+              <a:buClrTx/>
+              <a:buSzTx/>
+              <a:buFontTx/>
+              <a:buChar char="•"/>
+              <a:tabLst/>
+            </a:pPr>
+            <a:endParaRPr kumimoji="0" lang="en-US" altLang="en-US" sz="2400" b="0" i="0" u="none" strike="noStrike" cap="none" normalizeH="0" baseline="0" dirty="0">
+              <a:ln>
+                <a:noFill/>
+              </a:ln>
+              <a:solidFill>
+                <a:schemeClr val="tx1"/>
+              </a:solidFill>
+              <a:effectLst/>
+              <a:latin typeface="Arial" panose="020B0604020202020204" pitchFamily="34" charset="0"/>
+            </a:endParaRPr>
+          </a:p>
+          <a:p>
+            <a:pPr marL="0" marR="0" lvl="0" indent="0" algn="l" defTabSz="914400" rtl="0" eaLnBrk="0" fontAlgn="base" latinLnBrk="0" hangingPunct="0">
+              <a:lnSpc>
+                <a:spcPct val="100000"/>
+              </a:lnSpc>
+              <a:spcBef>
+                <a:spcPct val="0"/>
+              </a:spcBef>
+              <a:spcAft>
+                <a:spcPct val="0"/>
+              </a:spcAft>
+              <a:buClrTx/>
+              <a:buSzTx/>
+              <a:buFontTx/>
+              <a:buChar char="•"/>
+              <a:tabLst/>
+            </a:pPr>
+            <a:r>
+              <a:rPr kumimoji="0" lang="en-US" altLang="en-US" sz="2400" b="1" i="0" u="none" strike="noStrike" cap="none" normalizeH="0" baseline="0" dirty="0" err="1">
+                <a:ln>
+                  <a:noFill/>
+                </a:ln>
+                <a:solidFill>
+                  <a:schemeClr val="tx1"/>
+                </a:solidFill>
+                <a:effectLst/>
+                <a:latin typeface="Arial" panose="020B0604020202020204" pitchFamily="34" charset="0"/>
+              </a:rPr>
+              <a:t>Mantenible</a:t>
+            </a:r>
+            <a:endParaRPr kumimoji="0" lang="en-US" altLang="en-US" sz="2400" b="1" i="0" u="none" strike="noStrike" cap="none" normalizeH="0" baseline="0" dirty="0">
+              <a:ln>
+                <a:noFill/>
+              </a:ln>
+              <a:solidFill>
+                <a:schemeClr val="tx1"/>
+              </a:solidFill>
+              <a:effectLst/>
+              <a:latin typeface="Arial" panose="020B0604020202020204" pitchFamily="34" charset="0"/>
+            </a:endParaRPr>
+          </a:p>
+          <a:p>
+            <a:pPr marL="0" marR="0" lvl="0" indent="0" algn="l" defTabSz="914400" rtl="0" eaLnBrk="0" fontAlgn="base" latinLnBrk="0" hangingPunct="0">
+              <a:lnSpc>
+                <a:spcPct val="100000"/>
+              </a:lnSpc>
+              <a:spcBef>
+                <a:spcPct val="0"/>
+              </a:spcBef>
+              <a:spcAft>
+                <a:spcPct val="0"/>
+              </a:spcAft>
+              <a:buClrTx/>
+              <a:buSzTx/>
+              <a:buFontTx/>
+              <a:buChar char="•"/>
+              <a:tabLst/>
+            </a:pPr>
+            <a:endParaRPr lang="en-US" altLang="en-US" sz="2400" b="1" dirty="0">
+              <a:latin typeface="Arial" panose="020B0604020202020204" pitchFamily="34" charset="0"/>
+            </a:endParaRPr>
+          </a:p>
+          <a:p>
+            <a:pPr eaLnBrk="0" fontAlgn="base" hangingPunct="0">
+              <a:spcBef>
+                <a:spcPct val="0"/>
+              </a:spcBef>
+              <a:spcAft>
+                <a:spcPct val="0"/>
+              </a:spcAft>
+              <a:buFontTx/>
+              <a:buChar char="•"/>
+            </a:pPr>
+            <a:r>
+              <a:rPr lang="en-US" altLang="en-US" sz="2400" b="1" dirty="0" err="1">
+                <a:latin typeface="Arial" panose="020B0604020202020204" pitchFamily="34" charset="0"/>
+              </a:rPr>
+              <a:t>Rápido</a:t>
+            </a:r>
+            <a:r>
+              <a:rPr lang="en-US" altLang="en-US" sz="2400" b="1" dirty="0">
+                <a:latin typeface="Arial" panose="020B0604020202020204" pitchFamily="34" charset="0"/>
+              </a:rPr>
+              <a:t> y </a:t>
+            </a:r>
+            <a:r>
+              <a:rPr lang="en-US" altLang="en-US" sz="2400" b="1" dirty="0" err="1">
+                <a:latin typeface="Arial" panose="020B0604020202020204" pitchFamily="34" charset="0"/>
+              </a:rPr>
+              <a:t>eficiente</a:t>
+            </a:r>
+            <a:r>
+              <a:rPr lang="en-US" altLang="en-US" sz="2400" dirty="0">
+                <a:latin typeface="Arial" panose="020B0604020202020204" pitchFamily="34" charset="0"/>
+              </a:rPr>
+              <a:t> </a:t>
+            </a:r>
+            <a:endParaRPr kumimoji="0" lang="en-US" altLang="en-US" sz="1800" b="0" i="0" u="none" strike="noStrike" cap="none" normalizeH="0" baseline="0" dirty="0">
+              <a:ln>
+                <a:noFill/>
+              </a:ln>
+              <a:solidFill>
+                <a:schemeClr val="tx1"/>
+              </a:solidFill>
+              <a:effectLst/>
+              <a:latin typeface="Arial" panose="020B0604020202020204" pitchFamily="34" charset="0"/>
+            </a:endParaRPr>
+          </a:p>
+        </p:txBody>
+      </p:sp>
       <p:pic>
         <p:nvPicPr>
-          <p:cNvPr id="9" name="Imagen 8">
+          <p:cNvPr id="7" name="Imagen 6">
             <a:extLst>
               <a:ext uri="{FF2B5EF4-FFF2-40B4-BE49-F238E27FC236}">
-                <a16:creationId xmlns:a16="http://schemas.microsoft.com/office/drawing/2014/main" id="{47F82248-DC8A-43DA-8999-F316FBC618E0}"/>
+                <a16:creationId xmlns:a16="http://schemas.microsoft.com/office/drawing/2014/main" id="{95DBAF12-D682-A362-46F0-2657FAD2B012}"/>
               </a:ext>
             </a:extLst>
           </p:cNvPr>
@@ -8738,7 +9176,7 @@
           <p:nvPr/>
         </p:nvPicPr>
         <p:blipFill>
-          <a:blip r:embed="rId4">
+          <a:blip r:embed="rId4" cstate="print">
             <a:extLst>
               <a:ext uri="{28A0092B-C50C-407E-A947-70E740481C1C}">
                 <a14:useLocalDpi xmlns:a14="http://schemas.microsoft.com/office/drawing/2010/main" val="0"/>
@@ -8751,8 +9189,8 @@
         </p:blipFill>
         <p:spPr>
           <a:xfrm>
-            <a:off x="17537" y="2045189"/>
-            <a:ext cx="4410447" cy="3061291"/>
+            <a:off x="4276121" y="2039030"/>
+            <a:ext cx="4799551" cy="3653211"/>
           </a:xfrm>
           <a:prstGeom prst="rect">
             <a:avLst/>
@@ -8762,7 +9200,7 @@
     </p:spTree>
     <p:extLst>
       <p:ext uri="{BB962C8B-B14F-4D97-AF65-F5344CB8AC3E}">
-        <p14:creationId xmlns:p14="http://schemas.microsoft.com/office/powerpoint/2010/main" val="3487225913"/>
+        <p14:creationId xmlns:p14="http://schemas.microsoft.com/office/powerpoint/2010/main" val="3108110054"/>
       </p:ext>
     </p:extLst>
   </p:cSld>
@@ -8871,51 +9309,13 @@
                   <a:schemeClr val="bg1"/>
                 </a:solidFill>
               </a:rPr>
-              <a:t>Historias Técnicas</a:t>
+              <a:t>Historias de Usuarios</a:t>
             </a:r>
             <a:endParaRPr lang="es-ES" sz="3200" dirty="0">
               <a:solidFill>
                 <a:schemeClr val="bg1"/>
               </a:solidFill>
             </a:endParaRPr>
-          </a:p>
-        </p:txBody>
-      </p:sp>
-      <p:sp>
-        <p:nvSpPr>
-          <p:cNvPr id="3" name="2 Marcador de contenido"/>
-          <p:cNvSpPr>
-            <a:spLocks noGrp="1"/>
-          </p:cNvSpPr>
-          <p:nvPr>
-            <p:ph idx="1"/>
-          </p:nvPr>
-        </p:nvSpPr>
-        <p:spPr>
-          <a:xfrm>
-            <a:off x="87225" y="1143000"/>
-            <a:ext cx="8949272" cy="5145564"/>
-          </a:xfrm>
-        </p:spPr>
-        <p:txBody>
-          <a:bodyPr>
-            <a:normAutofit/>
-          </a:bodyPr>
-          <a:lstStyle/>
-          <a:p>
-            <a:pPr marL="0" lvl="0" indent="0" algn="just">
-              <a:lnSpc>
-                <a:spcPct val="115000"/>
-              </a:lnSpc>
-              <a:buNone/>
-            </a:pPr>
-            <a:r>
-              <a:rPr lang="es-CU" sz="2400" dirty="0">
-                <a:latin typeface="Arial" panose="020B0604020202020204" pitchFamily="34" charset="0"/>
-                <a:ea typeface="Calibri" panose="020F0502020204030204" pitchFamily="34" charset="0"/>
-              </a:rPr>
-              <a:t>Las historias técnicas o “Requisitos no funcionales” propiedades o cualidades que el producto debe tener.</a:t>
-            </a:r>
           </a:p>
         </p:txBody>
       </p:sp>
@@ -8966,1020 +9366,6 @@
             <a:fld id="{132FADFE-3B8F-471C-ABF0-DBC7717ECBBC}" type="slidenum">
               <a:rPr lang="es-ES" smtClean="0"/>
               <a:t>16</a:t>
-            </a:fld>
-            <a:endParaRPr lang="es-ES"/>
-          </a:p>
-        </p:txBody>
-      </p:sp>
-      <p:sp>
-        <p:nvSpPr>
-          <p:cNvPr id="5" name="Rectangle 1">
-            <a:extLst>
-              <a:ext uri="{FF2B5EF4-FFF2-40B4-BE49-F238E27FC236}">
-                <a16:creationId xmlns:a16="http://schemas.microsoft.com/office/drawing/2014/main" id="{B9132FF8-7028-0C0B-203C-BE109252354F}"/>
-              </a:ext>
-            </a:extLst>
-          </p:cNvPr>
-          <p:cNvSpPr>
-            <a:spLocks noChangeArrowheads="1"/>
-          </p:cNvSpPr>
-          <p:nvPr/>
-        </p:nvSpPr>
-        <p:spPr bwMode="auto">
-          <a:xfrm rot="10800000" flipV="1">
-            <a:off x="107503" y="2145028"/>
-            <a:ext cx="9145016" cy="4154984"/>
-          </a:xfrm>
-          <a:prstGeom prst="rect">
-            <a:avLst/>
-          </a:prstGeom>
-          <a:noFill/>
-          <a:ln>
-            <a:noFill/>
-          </a:ln>
-          <a:effectLst/>
-          <a:extLst>
-            <a:ext uri="{909E8E84-426E-40DD-AFC4-6F175D3DCCD1}">
-              <a14:hiddenFill xmlns:a14="http://schemas.microsoft.com/office/drawing/2010/main">
-                <a:solidFill>
-                  <a:schemeClr val="accent1"/>
-                </a:solidFill>
-              </a14:hiddenFill>
-            </a:ext>
-            <a:ext uri="{91240B29-F687-4F45-9708-019B960494DF}">
-              <a14:hiddenLine xmlns:a14="http://schemas.microsoft.com/office/drawing/2010/main" w="9525">
-                <a:solidFill>
-                  <a:schemeClr val="tx1"/>
-                </a:solidFill>
-                <a:miter lim="800000"/>
-                <a:headEnd/>
-                <a:tailEnd/>
-              </a14:hiddenLine>
-            </a:ext>
-            <a:ext uri="{AF507438-7753-43E0-B8FC-AC1667EBCBE1}">
-              <a14:hiddenEffects xmlns:a14="http://schemas.microsoft.com/office/drawing/2010/main">
-                <a:effectLst>
-                  <a:outerShdw dist="35921" dir="2700000" algn="ctr" rotWithShape="0">
-                    <a:schemeClr val="bg2"/>
-                  </a:outerShdw>
-                </a:effectLst>
-              </a14:hiddenEffects>
-            </a:ext>
-          </a:extLst>
-        </p:spPr>
-        <p:txBody>
-          <a:bodyPr vert="horz" wrap="square" lIns="91440" tIns="45720" rIns="91440" bIns="45720" numCol="1" anchor="ctr" anchorCtr="0" compatLnSpc="1">
-            <a:prstTxWarp prst="textNoShape">
-              <a:avLst/>
-            </a:prstTxWarp>
-            <a:spAutoFit/>
-          </a:bodyPr>
-          <a:lstStyle/>
-          <a:p>
-            <a:pPr marL="0" marR="0" lvl="0" indent="0" algn="l" defTabSz="914400" rtl="0" eaLnBrk="0" fontAlgn="base" latinLnBrk="0" hangingPunct="0">
-              <a:lnSpc>
-                <a:spcPct val="100000"/>
-              </a:lnSpc>
-              <a:spcBef>
-                <a:spcPct val="0"/>
-              </a:spcBef>
-              <a:spcAft>
-                <a:spcPct val="0"/>
-              </a:spcAft>
-              <a:buClrTx/>
-              <a:buSzTx/>
-              <a:buFontTx/>
-              <a:buChar char="•"/>
-              <a:tabLst/>
-            </a:pPr>
-            <a:r>
-              <a:rPr kumimoji="0" lang="en-US" altLang="en-US" sz="2400" b="1" i="0" u="none" strike="noStrike" cap="none" normalizeH="0" baseline="0" dirty="0">
-                <a:ln>
-                  <a:noFill/>
-                </a:ln>
-                <a:solidFill>
-                  <a:schemeClr val="tx1"/>
-                </a:solidFill>
-                <a:effectLst/>
-                <a:latin typeface="Arial" panose="020B0604020202020204" pitchFamily="34" charset="0"/>
-              </a:rPr>
-              <a:t>Seguro</a:t>
-            </a:r>
-          </a:p>
-          <a:p>
-            <a:pPr marL="0" marR="0" lvl="0" indent="0" algn="l" defTabSz="914400" rtl="0" eaLnBrk="0" fontAlgn="base" latinLnBrk="0" hangingPunct="0">
-              <a:lnSpc>
-                <a:spcPct val="100000"/>
-              </a:lnSpc>
-              <a:spcBef>
-                <a:spcPct val="0"/>
-              </a:spcBef>
-              <a:spcAft>
-                <a:spcPct val="0"/>
-              </a:spcAft>
-              <a:buClrTx/>
-              <a:buSzTx/>
-              <a:buFontTx/>
-              <a:buChar char="•"/>
-              <a:tabLst/>
-            </a:pPr>
-            <a:endParaRPr kumimoji="0" lang="en-US" altLang="en-US" sz="2400" b="1" i="0" u="none" strike="noStrike" cap="none" normalizeH="0" baseline="0" dirty="0">
-              <a:ln>
-                <a:noFill/>
-              </a:ln>
-              <a:solidFill>
-                <a:schemeClr val="tx1"/>
-              </a:solidFill>
-              <a:effectLst/>
-              <a:latin typeface="Arial" panose="020B0604020202020204" pitchFamily="34" charset="0"/>
-            </a:endParaRPr>
-          </a:p>
-          <a:p>
-            <a:pPr marL="0" marR="0" lvl="0" indent="0" algn="l" defTabSz="914400" rtl="0" eaLnBrk="0" fontAlgn="base" latinLnBrk="0" hangingPunct="0">
-              <a:lnSpc>
-                <a:spcPct val="100000"/>
-              </a:lnSpc>
-              <a:spcBef>
-                <a:spcPct val="0"/>
-              </a:spcBef>
-              <a:spcAft>
-                <a:spcPct val="0"/>
-              </a:spcAft>
-              <a:buClrTx/>
-              <a:buSzTx/>
-              <a:buFontTx/>
-              <a:buChar char="•"/>
-              <a:tabLst/>
-            </a:pPr>
-            <a:r>
-              <a:rPr kumimoji="0" lang="en-US" altLang="en-US" sz="2400" b="1" i="0" u="none" strike="noStrike" cap="none" normalizeH="0" baseline="0" dirty="0">
-                <a:ln>
-                  <a:noFill/>
-                </a:ln>
-                <a:solidFill>
-                  <a:schemeClr val="tx1"/>
-                </a:solidFill>
-                <a:effectLst/>
-                <a:latin typeface="Arial" panose="020B0604020202020204" pitchFamily="34" charset="0"/>
-              </a:rPr>
-              <a:t>Usable</a:t>
-            </a:r>
-          </a:p>
-          <a:p>
-            <a:pPr marL="0" marR="0" lvl="0" indent="0" algn="l" defTabSz="914400" rtl="0" eaLnBrk="0" fontAlgn="base" latinLnBrk="0" hangingPunct="0">
-              <a:lnSpc>
-                <a:spcPct val="100000"/>
-              </a:lnSpc>
-              <a:spcBef>
-                <a:spcPct val="0"/>
-              </a:spcBef>
-              <a:spcAft>
-                <a:spcPct val="0"/>
-              </a:spcAft>
-              <a:buClrTx/>
-              <a:buSzTx/>
-              <a:buFontTx/>
-              <a:buChar char="•"/>
-              <a:tabLst/>
-            </a:pPr>
-            <a:endParaRPr kumimoji="0" lang="en-US" altLang="en-US" sz="2400" b="0" i="0" u="none" strike="noStrike" cap="none" normalizeH="0" baseline="0" dirty="0">
-              <a:ln>
-                <a:noFill/>
-              </a:ln>
-              <a:solidFill>
-                <a:schemeClr val="tx1"/>
-              </a:solidFill>
-              <a:effectLst/>
-              <a:latin typeface="Arial" panose="020B0604020202020204" pitchFamily="34" charset="0"/>
-            </a:endParaRPr>
-          </a:p>
-          <a:p>
-            <a:pPr marL="0" marR="0" lvl="0" indent="0" algn="l" defTabSz="914400" rtl="0" eaLnBrk="0" fontAlgn="base" latinLnBrk="0" hangingPunct="0">
-              <a:lnSpc>
-                <a:spcPct val="100000"/>
-              </a:lnSpc>
-              <a:spcBef>
-                <a:spcPct val="0"/>
-              </a:spcBef>
-              <a:spcAft>
-                <a:spcPct val="0"/>
-              </a:spcAft>
-              <a:buClrTx/>
-              <a:buSzTx/>
-              <a:buFontTx/>
-              <a:buChar char="•"/>
-              <a:tabLst/>
-            </a:pPr>
-            <a:r>
-              <a:rPr kumimoji="0" lang="en-US" altLang="en-US" sz="2400" b="1" i="0" u="none" strike="noStrike" cap="none" normalizeH="0" baseline="0" dirty="0">
-                <a:ln>
-                  <a:noFill/>
-                </a:ln>
-                <a:solidFill>
-                  <a:schemeClr val="tx1"/>
-                </a:solidFill>
-                <a:effectLst/>
-                <a:latin typeface="Arial" panose="020B0604020202020204" pitchFamily="34" charset="0"/>
-              </a:rPr>
-              <a:t>Disponible</a:t>
-            </a:r>
-          </a:p>
-          <a:p>
-            <a:pPr marL="0" marR="0" lvl="0" indent="0" algn="l" defTabSz="914400" rtl="0" eaLnBrk="0" fontAlgn="base" latinLnBrk="0" hangingPunct="0">
-              <a:lnSpc>
-                <a:spcPct val="100000"/>
-              </a:lnSpc>
-              <a:spcBef>
-                <a:spcPct val="0"/>
-              </a:spcBef>
-              <a:spcAft>
-                <a:spcPct val="0"/>
-              </a:spcAft>
-              <a:buClrTx/>
-              <a:buSzTx/>
-              <a:buFontTx/>
-              <a:buChar char="•"/>
-              <a:tabLst/>
-            </a:pPr>
-            <a:endParaRPr kumimoji="0" lang="en-US" altLang="en-US" sz="2400" b="0" i="0" u="none" strike="noStrike" cap="none" normalizeH="0" baseline="0" dirty="0">
-              <a:ln>
-                <a:noFill/>
-              </a:ln>
-              <a:solidFill>
-                <a:schemeClr val="tx1"/>
-              </a:solidFill>
-              <a:effectLst/>
-              <a:latin typeface="Arial" panose="020B0604020202020204" pitchFamily="34" charset="0"/>
-            </a:endParaRPr>
-          </a:p>
-          <a:p>
-            <a:pPr marL="0" marR="0" lvl="0" indent="0" algn="l" defTabSz="914400" rtl="0" eaLnBrk="0" fontAlgn="base" latinLnBrk="0" hangingPunct="0">
-              <a:lnSpc>
-                <a:spcPct val="100000"/>
-              </a:lnSpc>
-              <a:spcBef>
-                <a:spcPct val="0"/>
-              </a:spcBef>
-              <a:spcAft>
-                <a:spcPct val="0"/>
-              </a:spcAft>
-              <a:buClrTx/>
-              <a:buSzTx/>
-              <a:buFontTx/>
-              <a:buChar char="•"/>
-              <a:tabLst/>
-            </a:pPr>
-            <a:r>
-              <a:rPr kumimoji="0" lang="en-US" altLang="en-US" sz="2400" b="1" i="0" u="none" strike="noStrike" cap="none" normalizeH="0" baseline="0" dirty="0" err="1">
-                <a:ln>
-                  <a:noFill/>
-                </a:ln>
-                <a:solidFill>
-                  <a:schemeClr val="tx1"/>
-                </a:solidFill>
-                <a:effectLst/>
-                <a:latin typeface="Arial" panose="020B0604020202020204" pitchFamily="34" charset="0"/>
-              </a:rPr>
-              <a:t>Fiable</a:t>
-            </a:r>
-            <a:endParaRPr kumimoji="0" lang="en-US" altLang="en-US" sz="2400" b="1" i="0" u="none" strike="noStrike" cap="none" normalizeH="0" baseline="0" dirty="0">
-              <a:ln>
-                <a:noFill/>
-              </a:ln>
-              <a:solidFill>
-                <a:schemeClr val="tx1"/>
-              </a:solidFill>
-              <a:effectLst/>
-              <a:latin typeface="Arial" panose="020B0604020202020204" pitchFamily="34" charset="0"/>
-            </a:endParaRPr>
-          </a:p>
-          <a:p>
-            <a:pPr marL="0" marR="0" lvl="0" indent="0" algn="l" defTabSz="914400" rtl="0" eaLnBrk="0" fontAlgn="base" latinLnBrk="0" hangingPunct="0">
-              <a:lnSpc>
-                <a:spcPct val="100000"/>
-              </a:lnSpc>
-              <a:spcBef>
-                <a:spcPct val="0"/>
-              </a:spcBef>
-              <a:spcAft>
-                <a:spcPct val="0"/>
-              </a:spcAft>
-              <a:buClrTx/>
-              <a:buSzTx/>
-              <a:buFontTx/>
-              <a:buChar char="•"/>
-              <a:tabLst/>
-            </a:pPr>
-            <a:endParaRPr kumimoji="0" lang="en-US" altLang="en-US" sz="2400" b="0" i="0" u="none" strike="noStrike" cap="none" normalizeH="0" baseline="0" dirty="0">
-              <a:ln>
-                <a:noFill/>
-              </a:ln>
-              <a:solidFill>
-                <a:schemeClr val="tx1"/>
-              </a:solidFill>
-              <a:effectLst/>
-              <a:latin typeface="Arial" panose="020B0604020202020204" pitchFamily="34" charset="0"/>
-            </a:endParaRPr>
-          </a:p>
-          <a:p>
-            <a:pPr marL="0" marR="0" lvl="0" indent="0" algn="l" defTabSz="914400" rtl="0" eaLnBrk="0" fontAlgn="base" latinLnBrk="0" hangingPunct="0">
-              <a:lnSpc>
-                <a:spcPct val="100000"/>
-              </a:lnSpc>
-              <a:spcBef>
-                <a:spcPct val="0"/>
-              </a:spcBef>
-              <a:spcAft>
-                <a:spcPct val="0"/>
-              </a:spcAft>
-              <a:buClrTx/>
-              <a:buSzTx/>
-              <a:buFontTx/>
-              <a:buChar char="•"/>
-              <a:tabLst/>
-            </a:pPr>
-            <a:r>
-              <a:rPr kumimoji="0" lang="en-US" altLang="en-US" sz="2400" b="1" i="0" u="none" strike="noStrike" cap="none" normalizeH="0" baseline="0" dirty="0" err="1">
-                <a:ln>
-                  <a:noFill/>
-                </a:ln>
-                <a:solidFill>
-                  <a:schemeClr val="tx1"/>
-                </a:solidFill>
-                <a:effectLst/>
-                <a:latin typeface="Arial" panose="020B0604020202020204" pitchFamily="34" charset="0"/>
-              </a:rPr>
-              <a:t>Mantenible</a:t>
-            </a:r>
-            <a:endParaRPr kumimoji="0" lang="en-US" altLang="en-US" sz="2400" b="1" i="0" u="none" strike="noStrike" cap="none" normalizeH="0" baseline="0" dirty="0">
-              <a:ln>
-                <a:noFill/>
-              </a:ln>
-              <a:solidFill>
-                <a:schemeClr val="tx1"/>
-              </a:solidFill>
-              <a:effectLst/>
-              <a:latin typeface="Arial" panose="020B0604020202020204" pitchFamily="34" charset="0"/>
-            </a:endParaRPr>
-          </a:p>
-          <a:p>
-            <a:pPr marL="0" marR="0" lvl="0" indent="0" algn="l" defTabSz="914400" rtl="0" eaLnBrk="0" fontAlgn="base" latinLnBrk="0" hangingPunct="0">
-              <a:lnSpc>
-                <a:spcPct val="100000"/>
-              </a:lnSpc>
-              <a:spcBef>
-                <a:spcPct val="0"/>
-              </a:spcBef>
-              <a:spcAft>
-                <a:spcPct val="0"/>
-              </a:spcAft>
-              <a:buClrTx/>
-              <a:buSzTx/>
-              <a:buFontTx/>
-              <a:buChar char="•"/>
-              <a:tabLst/>
-            </a:pPr>
-            <a:endParaRPr lang="en-US" altLang="en-US" sz="2400" b="1" dirty="0">
-              <a:latin typeface="Arial" panose="020B0604020202020204" pitchFamily="34" charset="0"/>
-            </a:endParaRPr>
-          </a:p>
-          <a:p>
-            <a:pPr eaLnBrk="0" fontAlgn="base" hangingPunct="0">
-              <a:spcBef>
-                <a:spcPct val="0"/>
-              </a:spcBef>
-              <a:spcAft>
-                <a:spcPct val="0"/>
-              </a:spcAft>
-              <a:buFontTx/>
-              <a:buChar char="•"/>
-            </a:pPr>
-            <a:r>
-              <a:rPr lang="en-US" altLang="en-US" sz="2400" b="1" dirty="0" err="1">
-                <a:latin typeface="Arial" panose="020B0604020202020204" pitchFamily="34" charset="0"/>
-              </a:rPr>
-              <a:t>Rápido</a:t>
-            </a:r>
-            <a:r>
-              <a:rPr lang="en-US" altLang="en-US" sz="2400" b="1" dirty="0">
-                <a:latin typeface="Arial" panose="020B0604020202020204" pitchFamily="34" charset="0"/>
-              </a:rPr>
-              <a:t> y </a:t>
-            </a:r>
-            <a:r>
-              <a:rPr lang="en-US" altLang="en-US" sz="2400" b="1" dirty="0" err="1">
-                <a:latin typeface="Arial" panose="020B0604020202020204" pitchFamily="34" charset="0"/>
-              </a:rPr>
-              <a:t>eficiente</a:t>
-            </a:r>
-            <a:r>
-              <a:rPr lang="en-US" altLang="en-US" sz="2400" dirty="0">
-                <a:latin typeface="Arial" panose="020B0604020202020204" pitchFamily="34" charset="0"/>
-              </a:rPr>
-              <a:t> </a:t>
-            </a:r>
-            <a:endParaRPr kumimoji="0" lang="en-US" altLang="en-US" sz="1800" b="0" i="0" u="none" strike="noStrike" cap="none" normalizeH="0" baseline="0" dirty="0">
-              <a:ln>
-                <a:noFill/>
-              </a:ln>
-              <a:solidFill>
-                <a:schemeClr val="tx1"/>
-              </a:solidFill>
-              <a:effectLst/>
-              <a:latin typeface="Arial" panose="020B0604020202020204" pitchFamily="34" charset="0"/>
-            </a:endParaRPr>
-          </a:p>
-        </p:txBody>
-      </p:sp>
-    </p:spTree>
-    <p:extLst>
-      <p:ext uri="{BB962C8B-B14F-4D97-AF65-F5344CB8AC3E}">
-        <p14:creationId xmlns:p14="http://schemas.microsoft.com/office/powerpoint/2010/main" val="3108110054"/>
-      </p:ext>
-    </p:extLst>
-  </p:cSld>
-  <p:clrMapOvr>
-    <a:masterClrMapping/>
-  </p:clrMapOvr>
-</p:sld>
-</file>
-
-<file path=ppt/slides/slide17.xml><?xml version="1.0" encoding="utf-8"?>
-<p:sld xmlns:a="http://schemas.openxmlformats.org/drawingml/2006/main" xmlns:r="http://schemas.openxmlformats.org/officeDocument/2006/relationships" xmlns:p="http://schemas.openxmlformats.org/presentationml/2006/main">
-  <p:cSld>
-    <p:spTree>
-      <p:nvGrpSpPr>
-        <p:cNvPr id="1" name=""/>
-        <p:cNvGrpSpPr/>
-        <p:nvPr/>
-      </p:nvGrpSpPr>
-      <p:grpSpPr>
-        <a:xfrm>
-          <a:off x="0" y="0"/>
-          <a:ext cx="0" cy="0"/>
-          <a:chOff x="0" y="0"/>
-          <a:chExt cx="0" cy="0"/>
-        </a:xfrm>
-      </p:grpSpPr>
-      <p:pic>
-        <p:nvPicPr>
-          <p:cNvPr id="2051" name="Picture 3"/>
-          <p:cNvPicPr>
-            <a:picLocks noChangeAspect="1" noChangeArrowheads="1"/>
-          </p:cNvPicPr>
-          <p:nvPr/>
-        </p:nvPicPr>
-        <p:blipFill>
-          <a:blip r:embed="rId2">
-            <a:extLst>
-              <a:ext uri="{28A0092B-C50C-407E-A947-70E740481C1C}">
-                <a14:useLocalDpi xmlns:a14="http://schemas.microsoft.com/office/drawing/2010/main" val="0"/>
-              </a:ext>
-            </a:extLst>
-          </a:blip>
-          <a:srcRect/>
-          <a:stretch>
-            <a:fillRect/>
-          </a:stretch>
-        </p:blipFill>
-        <p:spPr bwMode="auto">
-          <a:xfrm>
-            <a:off x="1475657" y="0"/>
-            <a:ext cx="7668344" cy="1011462"/>
-          </a:xfrm>
-          <a:prstGeom prst="rect">
-            <a:avLst/>
-          </a:prstGeom>
-          <a:noFill/>
-          <a:ln>
-            <a:noFill/>
-          </a:ln>
-          <a:extLst>
-            <a:ext uri="{909E8E84-426E-40DD-AFC4-6F175D3DCCD1}">
-              <a14:hiddenFill xmlns:a14="http://schemas.microsoft.com/office/drawing/2010/main">
-                <a:solidFill>
-                  <a:schemeClr val="accent1"/>
-                </a:solidFill>
-              </a14:hiddenFill>
-            </a:ext>
-            <a:ext uri="{91240B29-F687-4F45-9708-019B960494DF}">
-              <a14:hiddenLine xmlns:a14="http://schemas.microsoft.com/office/drawing/2010/main" w="9525">
-                <a:solidFill>
-                  <a:schemeClr val="tx1"/>
-                </a:solidFill>
-                <a:miter lim="800000"/>
-                <a:headEnd/>
-                <a:tailEnd/>
-              </a14:hiddenLine>
-            </a:ext>
-          </a:extLst>
-        </p:spPr>
-      </p:pic>
-      <p:sp>
-        <p:nvSpPr>
-          <p:cNvPr id="2" name="1 Título"/>
-          <p:cNvSpPr>
-            <a:spLocks noGrp="1"/>
-          </p:cNvSpPr>
-          <p:nvPr>
-            <p:ph type="title"/>
-          </p:nvPr>
-        </p:nvSpPr>
-        <p:spPr>
-          <a:xfrm>
-            <a:off x="2555776" y="-66607"/>
-            <a:ext cx="5410944" cy="1143000"/>
-          </a:xfrm>
-        </p:spPr>
-        <p:txBody>
-          <a:bodyPr>
-            <a:normAutofit/>
-          </a:bodyPr>
-          <a:lstStyle/>
-          <a:p>
-            <a:r>
-              <a:rPr lang="es-ES" sz="3200" b="1" dirty="0">
-                <a:solidFill>
-                  <a:schemeClr val="bg1"/>
-                </a:solidFill>
-              </a:rPr>
-              <a:t>Historias de Usuarios</a:t>
-            </a:r>
-            <a:endParaRPr lang="es-ES" sz="3200" dirty="0">
-              <a:solidFill>
-                <a:schemeClr val="bg1"/>
-              </a:solidFill>
-            </a:endParaRPr>
-          </a:p>
-        </p:txBody>
-      </p:sp>
-      <p:pic>
-        <p:nvPicPr>
-          <p:cNvPr id="6" name="Imagen 5"/>
-          <p:cNvPicPr>
-            <a:picLocks noChangeAspect="1"/>
-          </p:cNvPicPr>
-          <p:nvPr/>
-        </p:nvPicPr>
-        <p:blipFill rotWithShape="1">
-          <a:blip r:embed="rId3" cstate="print">
-            <a:extLst>
-              <a:ext uri="{28A0092B-C50C-407E-A947-70E740481C1C}">
-                <a14:useLocalDpi xmlns:a14="http://schemas.microsoft.com/office/drawing/2010/main" val="0"/>
-              </a:ext>
-            </a:extLst>
-          </a:blip>
-          <a:srcRect l="4235" t="5471" r="70358" b="63070"/>
-          <a:stretch/>
-        </p:blipFill>
-        <p:spPr>
-          <a:xfrm>
-            <a:off x="303249" y="0"/>
-            <a:ext cx="921475" cy="883080"/>
-          </a:xfrm>
-          <a:prstGeom prst="rect">
-            <a:avLst/>
-          </a:prstGeom>
-        </p:spPr>
-      </p:pic>
-      <p:sp>
-        <p:nvSpPr>
-          <p:cNvPr id="4" name="Marcador de número de diapositiva 3"/>
-          <p:cNvSpPr>
-            <a:spLocks noGrp="1"/>
-          </p:cNvSpPr>
-          <p:nvPr>
-            <p:ph type="sldNum" sz="quarter" idx="12"/>
-          </p:nvPr>
-        </p:nvSpPr>
-        <p:spPr/>
-        <p:txBody>
-          <a:bodyPr/>
-          <a:lstStyle/>
-          <a:p>
-            <a:fld id="{132FADFE-3B8F-471C-ABF0-DBC7717ECBBC}" type="slidenum">
-              <a:rPr lang="es-ES" smtClean="0"/>
-              <a:t>17</a:t>
-            </a:fld>
-            <a:endParaRPr lang="es-ES"/>
-          </a:p>
-        </p:txBody>
-      </p:sp>
-      <p:pic>
-        <p:nvPicPr>
-          <p:cNvPr id="15" name="Imagen 14" descr="Texto&#10;&#10;El contenido generado por IA puede ser incorrecto.">
-            <a:extLst>
-              <a:ext uri="{FF2B5EF4-FFF2-40B4-BE49-F238E27FC236}">
-                <a16:creationId xmlns:a16="http://schemas.microsoft.com/office/drawing/2014/main" id="{2A8C4AF2-7800-FAB2-FAD1-7C3421954A0D}"/>
-              </a:ext>
-            </a:extLst>
-          </p:cNvPr>
-          <p:cNvPicPr>
-            <a:picLocks noChangeAspect="1"/>
-          </p:cNvPicPr>
-          <p:nvPr/>
-        </p:nvPicPr>
-        <p:blipFill>
-          <a:blip r:embed="rId4">
-            <a:extLst>
-              <a:ext uri="{28A0092B-C50C-407E-A947-70E740481C1C}">
-                <a14:useLocalDpi xmlns:a14="http://schemas.microsoft.com/office/drawing/2010/main" val="0"/>
-              </a:ext>
-            </a:extLst>
-          </a:blip>
-          <a:stretch>
-            <a:fillRect/>
-          </a:stretch>
-        </p:blipFill>
-        <p:spPr>
-          <a:xfrm>
-            <a:off x="1304044" y="1242020"/>
-            <a:ext cx="6315956" cy="5172797"/>
-          </a:xfrm>
-          <a:prstGeom prst="rect">
-            <a:avLst/>
-          </a:prstGeom>
-        </p:spPr>
-      </p:pic>
-    </p:spTree>
-    <p:extLst>
-      <p:ext uri="{BB962C8B-B14F-4D97-AF65-F5344CB8AC3E}">
-        <p14:creationId xmlns:p14="http://schemas.microsoft.com/office/powerpoint/2010/main" val="1772699935"/>
-      </p:ext>
-    </p:extLst>
-  </p:cSld>
-  <p:clrMapOvr>
-    <a:masterClrMapping/>
-  </p:clrMapOvr>
-</p:sld>
-</file>
-
-<file path=ppt/slides/slide18.xml><?xml version="1.0" encoding="utf-8"?>
-<p:sld xmlns:a="http://schemas.openxmlformats.org/drawingml/2006/main" xmlns:r="http://schemas.openxmlformats.org/officeDocument/2006/relationships" xmlns:p="http://schemas.openxmlformats.org/presentationml/2006/main">
-  <p:cSld>
-    <p:spTree>
-      <p:nvGrpSpPr>
-        <p:cNvPr id="1" name=""/>
-        <p:cNvGrpSpPr/>
-        <p:nvPr/>
-      </p:nvGrpSpPr>
-      <p:grpSpPr>
-        <a:xfrm>
-          <a:off x="0" y="0"/>
-          <a:ext cx="0" cy="0"/>
-          <a:chOff x="0" y="0"/>
-          <a:chExt cx="0" cy="0"/>
-        </a:xfrm>
-      </p:grpSpPr>
-      <p:pic>
-        <p:nvPicPr>
-          <p:cNvPr id="2051" name="Picture 3"/>
-          <p:cNvPicPr>
-            <a:picLocks noChangeAspect="1" noChangeArrowheads="1"/>
-          </p:cNvPicPr>
-          <p:nvPr/>
-        </p:nvPicPr>
-        <p:blipFill>
-          <a:blip r:embed="rId2">
-            <a:extLst>
-              <a:ext uri="{28A0092B-C50C-407E-A947-70E740481C1C}">
-                <a14:useLocalDpi xmlns:a14="http://schemas.microsoft.com/office/drawing/2010/main" val="0"/>
-              </a:ext>
-            </a:extLst>
-          </a:blip>
-          <a:srcRect/>
-          <a:stretch>
-            <a:fillRect/>
-          </a:stretch>
-        </p:blipFill>
-        <p:spPr bwMode="auto">
-          <a:xfrm>
-            <a:off x="1475657" y="0"/>
-            <a:ext cx="7668344" cy="1011462"/>
-          </a:xfrm>
-          <a:prstGeom prst="rect">
-            <a:avLst/>
-          </a:prstGeom>
-          <a:noFill/>
-          <a:ln>
-            <a:noFill/>
-          </a:ln>
-          <a:extLst>
-            <a:ext uri="{909E8E84-426E-40DD-AFC4-6F175D3DCCD1}">
-              <a14:hiddenFill xmlns:a14="http://schemas.microsoft.com/office/drawing/2010/main">
-                <a:solidFill>
-                  <a:schemeClr val="accent1"/>
-                </a:solidFill>
-              </a14:hiddenFill>
-            </a:ext>
-            <a:ext uri="{91240B29-F687-4F45-9708-019B960494DF}">
-              <a14:hiddenLine xmlns:a14="http://schemas.microsoft.com/office/drawing/2010/main" w="9525">
-                <a:solidFill>
-                  <a:schemeClr val="tx1"/>
-                </a:solidFill>
-                <a:miter lim="800000"/>
-                <a:headEnd/>
-                <a:tailEnd/>
-              </a14:hiddenLine>
-            </a:ext>
-          </a:extLst>
-        </p:spPr>
-      </p:pic>
-      <p:sp>
-        <p:nvSpPr>
-          <p:cNvPr id="2" name="1 Título"/>
-          <p:cNvSpPr>
-            <a:spLocks noGrp="1"/>
-          </p:cNvSpPr>
-          <p:nvPr>
-            <p:ph type="title"/>
-          </p:nvPr>
-        </p:nvSpPr>
-        <p:spPr>
-          <a:xfrm>
-            <a:off x="2555776" y="-66607"/>
-            <a:ext cx="5410944" cy="1143000"/>
-          </a:xfrm>
-        </p:spPr>
-        <p:txBody>
-          <a:bodyPr>
-            <a:normAutofit/>
-          </a:bodyPr>
-          <a:lstStyle/>
-          <a:p>
-            <a:r>
-              <a:rPr lang="es-ES" sz="3200" b="1" dirty="0">
-                <a:solidFill>
-                  <a:schemeClr val="bg1"/>
-                </a:solidFill>
-              </a:rPr>
-              <a:t>Historias de Usuarios</a:t>
-            </a:r>
-            <a:endParaRPr lang="es-ES" sz="3200" dirty="0">
-              <a:solidFill>
-                <a:schemeClr val="bg1"/>
-              </a:solidFill>
-            </a:endParaRPr>
-          </a:p>
-        </p:txBody>
-      </p:sp>
-      <p:pic>
-        <p:nvPicPr>
-          <p:cNvPr id="6" name="Imagen 5"/>
-          <p:cNvPicPr>
-            <a:picLocks noChangeAspect="1"/>
-          </p:cNvPicPr>
-          <p:nvPr/>
-        </p:nvPicPr>
-        <p:blipFill rotWithShape="1">
-          <a:blip r:embed="rId3" cstate="print">
-            <a:extLst>
-              <a:ext uri="{28A0092B-C50C-407E-A947-70E740481C1C}">
-                <a14:useLocalDpi xmlns:a14="http://schemas.microsoft.com/office/drawing/2010/main" val="0"/>
-              </a:ext>
-            </a:extLst>
-          </a:blip>
-          <a:srcRect l="4235" t="5471" r="70358" b="63070"/>
-          <a:stretch/>
-        </p:blipFill>
-        <p:spPr>
-          <a:xfrm>
-            <a:off x="303249" y="0"/>
-            <a:ext cx="921475" cy="883080"/>
-          </a:xfrm>
-          <a:prstGeom prst="rect">
-            <a:avLst/>
-          </a:prstGeom>
-        </p:spPr>
-      </p:pic>
-      <p:sp>
-        <p:nvSpPr>
-          <p:cNvPr id="4" name="Marcador de número de diapositiva 3"/>
-          <p:cNvSpPr>
-            <a:spLocks noGrp="1"/>
-          </p:cNvSpPr>
-          <p:nvPr>
-            <p:ph type="sldNum" sz="quarter" idx="12"/>
-          </p:nvPr>
-        </p:nvSpPr>
-        <p:spPr/>
-        <p:txBody>
-          <a:bodyPr/>
-          <a:lstStyle/>
-          <a:p>
-            <a:fld id="{132FADFE-3B8F-471C-ABF0-DBC7717ECBBC}" type="slidenum">
-              <a:rPr lang="es-ES" smtClean="0"/>
-              <a:t>18</a:t>
-            </a:fld>
-            <a:endParaRPr lang="es-ES"/>
-          </a:p>
-        </p:txBody>
-      </p:sp>
-      <p:pic>
-        <p:nvPicPr>
-          <p:cNvPr id="5" name="Imagen 4" descr="Texto, Escala de tiempo&#10;&#10;El contenido generado por IA puede ser incorrecto.">
-            <a:extLst>
-              <a:ext uri="{FF2B5EF4-FFF2-40B4-BE49-F238E27FC236}">
-                <a16:creationId xmlns:a16="http://schemas.microsoft.com/office/drawing/2014/main" id="{D78F4414-2F2B-2EF9-328B-2306E2297362}"/>
-              </a:ext>
-            </a:extLst>
-          </p:cNvPr>
-          <p:cNvPicPr>
-            <a:picLocks noChangeAspect="1"/>
-          </p:cNvPicPr>
-          <p:nvPr/>
-        </p:nvPicPr>
-        <p:blipFill>
-          <a:blip r:embed="rId4">
-            <a:extLst>
-              <a:ext uri="{28A0092B-C50C-407E-A947-70E740481C1C}">
-                <a14:useLocalDpi xmlns:a14="http://schemas.microsoft.com/office/drawing/2010/main" val="0"/>
-              </a:ext>
-            </a:extLst>
-          </a:blip>
-          <a:stretch>
-            <a:fillRect/>
-          </a:stretch>
-        </p:blipFill>
-        <p:spPr>
-          <a:xfrm>
-            <a:off x="1409258" y="1237944"/>
-            <a:ext cx="6325483" cy="5118406"/>
-          </a:xfrm>
-          <a:prstGeom prst="rect">
-            <a:avLst/>
-          </a:prstGeom>
-        </p:spPr>
-      </p:pic>
-    </p:spTree>
-    <p:extLst>
-      <p:ext uri="{BB962C8B-B14F-4D97-AF65-F5344CB8AC3E}">
-        <p14:creationId xmlns:p14="http://schemas.microsoft.com/office/powerpoint/2010/main" val="2692848511"/>
-      </p:ext>
-    </p:extLst>
-  </p:cSld>
-  <p:clrMapOvr>
-    <a:masterClrMapping/>
-  </p:clrMapOvr>
-</p:sld>
-</file>
-
-<file path=ppt/slides/slide19.xml><?xml version="1.0" encoding="utf-8"?>
-<p:sld xmlns:a="http://schemas.openxmlformats.org/drawingml/2006/main" xmlns:r="http://schemas.openxmlformats.org/officeDocument/2006/relationships" xmlns:p="http://schemas.openxmlformats.org/presentationml/2006/main">
-  <p:cSld>
-    <p:spTree>
-      <p:nvGrpSpPr>
-        <p:cNvPr id="1" name=""/>
-        <p:cNvGrpSpPr/>
-        <p:nvPr/>
-      </p:nvGrpSpPr>
-      <p:grpSpPr>
-        <a:xfrm>
-          <a:off x="0" y="0"/>
-          <a:ext cx="0" cy="0"/>
-          <a:chOff x="0" y="0"/>
-          <a:chExt cx="0" cy="0"/>
-        </a:xfrm>
-      </p:grpSpPr>
-      <p:pic>
-        <p:nvPicPr>
-          <p:cNvPr id="2051" name="Picture 3"/>
-          <p:cNvPicPr>
-            <a:picLocks noChangeAspect="1" noChangeArrowheads="1"/>
-          </p:cNvPicPr>
-          <p:nvPr/>
-        </p:nvPicPr>
-        <p:blipFill>
-          <a:blip r:embed="rId2">
-            <a:extLst>
-              <a:ext uri="{28A0092B-C50C-407E-A947-70E740481C1C}">
-                <a14:useLocalDpi xmlns:a14="http://schemas.microsoft.com/office/drawing/2010/main" val="0"/>
-              </a:ext>
-            </a:extLst>
-          </a:blip>
-          <a:srcRect/>
-          <a:stretch>
-            <a:fillRect/>
-          </a:stretch>
-        </p:blipFill>
-        <p:spPr bwMode="auto">
-          <a:xfrm>
-            <a:off x="1475657" y="0"/>
-            <a:ext cx="7668344" cy="1011462"/>
-          </a:xfrm>
-          <a:prstGeom prst="rect">
-            <a:avLst/>
-          </a:prstGeom>
-          <a:noFill/>
-          <a:ln>
-            <a:noFill/>
-          </a:ln>
-          <a:extLst>
-            <a:ext uri="{909E8E84-426E-40DD-AFC4-6F175D3DCCD1}">
-              <a14:hiddenFill xmlns:a14="http://schemas.microsoft.com/office/drawing/2010/main">
-                <a:solidFill>
-                  <a:schemeClr val="accent1"/>
-                </a:solidFill>
-              </a14:hiddenFill>
-            </a:ext>
-            <a:ext uri="{91240B29-F687-4F45-9708-019B960494DF}">
-              <a14:hiddenLine xmlns:a14="http://schemas.microsoft.com/office/drawing/2010/main" w="9525">
-                <a:solidFill>
-                  <a:schemeClr val="tx1"/>
-                </a:solidFill>
-                <a:miter lim="800000"/>
-                <a:headEnd/>
-                <a:tailEnd/>
-              </a14:hiddenLine>
-            </a:ext>
-          </a:extLst>
-        </p:spPr>
-      </p:pic>
-      <p:sp>
-        <p:nvSpPr>
-          <p:cNvPr id="2" name="1 Título"/>
-          <p:cNvSpPr>
-            <a:spLocks noGrp="1"/>
-          </p:cNvSpPr>
-          <p:nvPr>
-            <p:ph type="title"/>
-          </p:nvPr>
-        </p:nvSpPr>
-        <p:spPr>
-          <a:xfrm>
-            <a:off x="2555776" y="-66607"/>
-            <a:ext cx="5410944" cy="1143000"/>
-          </a:xfrm>
-        </p:spPr>
-        <p:txBody>
-          <a:bodyPr>
-            <a:normAutofit/>
-          </a:bodyPr>
-          <a:lstStyle/>
-          <a:p>
-            <a:r>
-              <a:rPr lang="es-ES" sz="3200" b="1" dirty="0">
-                <a:solidFill>
-                  <a:schemeClr val="bg1"/>
-                </a:solidFill>
-              </a:rPr>
-              <a:t>Historias de Usuarios</a:t>
-            </a:r>
-            <a:endParaRPr lang="es-ES" sz="3200" dirty="0">
-              <a:solidFill>
-                <a:schemeClr val="bg1"/>
-              </a:solidFill>
-            </a:endParaRPr>
-          </a:p>
-        </p:txBody>
-      </p:sp>
-      <p:pic>
-        <p:nvPicPr>
-          <p:cNvPr id="6" name="Imagen 5"/>
-          <p:cNvPicPr>
-            <a:picLocks noChangeAspect="1"/>
-          </p:cNvPicPr>
-          <p:nvPr/>
-        </p:nvPicPr>
-        <p:blipFill rotWithShape="1">
-          <a:blip r:embed="rId3" cstate="print">
-            <a:extLst>
-              <a:ext uri="{28A0092B-C50C-407E-A947-70E740481C1C}">
-                <a14:useLocalDpi xmlns:a14="http://schemas.microsoft.com/office/drawing/2010/main" val="0"/>
-              </a:ext>
-            </a:extLst>
-          </a:blip>
-          <a:srcRect l="4235" t="5471" r="70358" b="63070"/>
-          <a:stretch/>
-        </p:blipFill>
-        <p:spPr>
-          <a:xfrm>
-            <a:off x="303249" y="0"/>
-            <a:ext cx="921475" cy="883080"/>
-          </a:xfrm>
-          <a:prstGeom prst="rect">
-            <a:avLst/>
-          </a:prstGeom>
-        </p:spPr>
-      </p:pic>
-      <p:sp>
-        <p:nvSpPr>
-          <p:cNvPr id="4" name="Marcador de número de diapositiva 3"/>
-          <p:cNvSpPr>
-            <a:spLocks noGrp="1"/>
-          </p:cNvSpPr>
-          <p:nvPr>
-            <p:ph type="sldNum" sz="quarter" idx="12"/>
-          </p:nvPr>
-        </p:nvSpPr>
-        <p:spPr/>
-        <p:txBody>
-          <a:bodyPr/>
-          <a:lstStyle/>
-          <a:p>
-            <a:fld id="{132FADFE-3B8F-471C-ABF0-DBC7717ECBBC}" type="slidenum">
-              <a:rPr lang="es-ES" smtClean="0"/>
-              <a:t>19</a:t>
             </a:fld>
             <a:endParaRPr lang="es-ES"/>
           </a:p>
@@ -10064,6 +9450,904 @@
 </p:sld>
 </file>
 
+<file path=ppt/slides/slide17.xml><?xml version="1.0" encoding="utf-8"?>
+<p:sld xmlns:a="http://schemas.openxmlformats.org/drawingml/2006/main" xmlns:r="http://schemas.openxmlformats.org/officeDocument/2006/relationships" xmlns:p="http://schemas.openxmlformats.org/presentationml/2006/main">
+  <p:cSld>
+    <p:spTree>
+      <p:nvGrpSpPr>
+        <p:cNvPr id="1" name=""/>
+        <p:cNvGrpSpPr/>
+        <p:nvPr/>
+      </p:nvGrpSpPr>
+      <p:grpSpPr>
+        <a:xfrm>
+          <a:off x="0" y="0"/>
+          <a:ext cx="0" cy="0"/>
+          <a:chOff x="0" y="0"/>
+          <a:chExt cx="0" cy="0"/>
+        </a:xfrm>
+      </p:grpSpPr>
+      <p:pic>
+        <p:nvPicPr>
+          <p:cNvPr id="2051" name="Picture 3"/>
+          <p:cNvPicPr>
+            <a:picLocks noChangeAspect="1" noChangeArrowheads="1"/>
+          </p:cNvPicPr>
+          <p:nvPr/>
+        </p:nvPicPr>
+        <p:blipFill>
+          <a:blip r:embed="rId2">
+            <a:extLst>
+              <a:ext uri="{28A0092B-C50C-407E-A947-70E740481C1C}">
+                <a14:useLocalDpi xmlns:a14="http://schemas.microsoft.com/office/drawing/2010/main" val="0"/>
+              </a:ext>
+            </a:extLst>
+          </a:blip>
+          <a:srcRect/>
+          <a:stretch>
+            <a:fillRect/>
+          </a:stretch>
+        </p:blipFill>
+        <p:spPr bwMode="auto">
+          <a:xfrm>
+            <a:off x="1475657" y="0"/>
+            <a:ext cx="7668344" cy="1011462"/>
+          </a:xfrm>
+          <a:prstGeom prst="rect">
+            <a:avLst/>
+          </a:prstGeom>
+          <a:noFill/>
+          <a:ln>
+            <a:noFill/>
+          </a:ln>
+          <a:extLst>
+            <a:ext uri="{909E8E84-426E-40DD-AFC4-6F175D3DCCD1}">
+              <a14:hiddenFill xmlns:a14="http://schemas.microsoft.com/office/drawing/2010/main">
+                <a:solidFill>
+                  <a:schemeClr val="accent1"/>
+                </a:solidFill>
+              </a14:hiddenFill>
+            </a:ext>
+            <a:ext uri="{91240B29-F687-4F45-9708-019B960494DF}">
+              <a14:hiddenLine xmlns:a14="http://schemas.microsoft.com/office/drawing/2010/main" w="9525">
+                <a:solidFill>
+                  <a:schemeClr val="tx1"/>
+                </a:solidFill>
+                <a:miter lim="800000"/>
+                <a:headEnd/>
+                <a:tailEnd/>
+              </a14:hiddenLine>
+            </a:ext>
+          </a:extLst>
+        </p:spPr>
+      </p:pic>
+      <p:sp>
+        <p:nvSpPr>
+          <p:cNvPr id="2" name="1 Título"/>
+          <p:cNvSpPr>
+            <a:spLocks noGrp="1"/>
+          </p:cNvSpPr>
+          <p:nvPr>
+            <p:ph type="title"/>
+          </p:nvPr>
+        </p:nvSpPr>
+        <p:spPr>
+          <a:xfrm>
+            <a:off x="2555776" y="-66607"/>
+            <a:ext cx="5410944" cy="1143000"/>
+          </a:xfrm>
+        </p:spPr>
+        <p:txBody>
+          <a:bodyPr>
+            <a:normAutofit/>
+          </a:bodyPr>
+          <a:lstStyle/>
+          <a:p>
+            <a:r>
+              <a:rPr lang="es-ES" sz="3200" b="1" dirty="0">
+                <a:solidFill>
+                  <a:schemeClr val="bg1"/>
+                </a:solidFill>
+              </a:rPr>
+              <a:t>Arquitectura del Sistema</a:t>
+            </a:r>
+            <a:endParaRPr lang="es-ES" sz="3200" dirty="0">
+              <a:solidFill>
+                <a:schemeClr val="bg1"/>
+              </a:solidFill>
+            </a:endParaRPr>
+          </a:p>
+        </p:txBody>
+      </p:sp>
+      <p:sp>
+        <p:nvSpPr>
+          <p:cNvPr id="3" name="2 Marcador de contenido"/>
+          <p:cNvSpPr>
+            <a:spLocks noGrp="1"/>
+          </p:cNvSpPr>
+          <p:nvPr>
+            <p:ph idx="1"/>
+          </p:nvPr>
+        </p:nvSpPr>
+        <p:spPr>
+          <a:xfrm>
+            <a:off x="390364" y="1076393"/>
+            <a:ext cx="8363271" cy="4814186"/>
+          </a:xfrm>
+        </p:spPr>
+        <p:txBody>
+          <a:bodyPr>
+            <a:normAutofit/>
+          </a:bodyPr>
+          <a:lstStyle/>
+          <a:p>
+            <a:pPr marL="0" indent="0" algn="l">
+              <a:buNone/>
+            </a:pPr>
+            <a:r>
+              <a:rPr lang="es-ES" sz="2400" b="1" i="0" dirty="0">
+                <a:effectLst/>
+                <a:latin typeface="quote-cjk-patch"/>
+              </a:rPr>
+              <a:t>Modelo Vistas Controlador </a:t>
+            </a:r>
+            <a:r>
+              <a:rPr lang="es-ES" sz="2400" b="0" i="0" dirty="0">
+                <a:effectLst/>
+                <a:latin typeface="quote-cjk-patch"/>
+              </a:rPr>
+              <a:t> es un patrón de arquitectura de software que organiza una aplicación en tres componentes principales:</a:t>
+            </a:r>
+          </a:p>
+          <a:p>
+            <a:pPr algn="l">
+              <a:buFont typeface="+mj-lt"/>
+              <a:buAutoNum type="arabicPeriod"/>
+            </a:pPr>
+            <a:r>
+              <a:rPr lang="es-ES" sz="2400" b="1" i="0" dirty="0">
+                <a:effectLst/>
+                <a:latin typeface="quote-cjk-patch"/>
+              </a:rPr>
+              <a:t>Modelo</a:t>
+            </a:r>
+            <a:r>
+              <a:rPr lang="es-ES" sz="2400" b="0" i="0" dirty="0">
+                <a:effectLst/>
+                <a:latin typeface="quote-cjk-patch"/>
+              </a:rPr>
+              <a:t>: Gestiona los </a:t>
+            </a:r>
+            <a:r>
+              <a:rPr lang="es-ES" sz="2400" b="1" i="0" dirty="0">
+                <a:effectLst/>
+                <a:latin typeface="quote-cjk-patch"/>
+              </a:rPr>
+              <a:t>datos</a:t>
+            </a:r>
+            <a:r>
+              <a:rPr lang="es-ES" sz="2400" b="0" i="0" dirty="0">
+                <a:effectLst/>
+                <a:latin typeface="quote-cjk-patch"/>
+              </a:rPr>
+              <a:t> y la </a:t>
+            </a:r>
+            <a:r>
+              <a:rPr lang="es-ES" sz="2400" b="1" i="0" dirty="0">
+                <a:effectLst/>
+                <a:latin typeface="quote-cjk-patch"/>
+              </a:rPr>
+              <a:t>lógica de negocio</a:t>
+            </a:r>
+            <a:r>
+              <a:rPr lang="es-ES" sz="2400" b="0" i="0" dirty="0">
+                <a:effectLst/>
+                <a:latin typeface="quote-cjk-patch"/>
+              </a:rPr>
+              <a:t>.</a:t>
+            </a:r>
+          </a:p>
+          <a:p>
+            <a:pPr algn="l">
+              <a:buFont typeface="+mj-lt"/>
+              <a:buAutoNum type="arabicPeriod"/>
+            </a:pPr>
+            <a:r>
+              <a:rPr lang="es-ES" sz="2400" b="1" i="0" dirty="0">
+                <a:effectLst/>
+                <a:latin typeface="quote-cjk-patch"/>
+              </a:rPr>
+              <a:t>Vista</a:t>
+            </a:r>
+            <a:r>
+              <a:rPr lang="es-ES" sz="2400" b="0" i="0" dirty="0">
+                <a:effectLst/>
+                <a:latin typeface="quote-cjk-patch"/>
+              </a:rPr>
+              <a:t>: Muestra la </a:t>
+            </a:r>
+            <a:r>
+              <a:rPr lang="es-ES" sz="2400" b="1" i="0" dirty="0">
+                <a:effectLst/>
+                <a:latin typeface="quote-cjk-patch"/>
+              </a:rPr>
+              <a:t>interfaz gráfica</a:t>
+            </a:r>
+            <a:r>
+              <a:rPr lang="es-ES" sz="2400" b="0" i="0" dirty="0">
+                <a:effectLst/>
+                <a:latin typeface="quote-cjk-patch"/>
+              </a:rPr>
+              <a:t> al usuario.</a:t>
+            </a:r>
+          </a:p>
+          <a:p>
+            <a:pPr algn="l">
+              <a:buFont typeface="+mj-lt"/>
+              <a:buAutoNum type="arabicPeriod"/>
+            </a:pPr>
+            <a:r>
+              <a:rPr lang="es-ES" sz="2400" b="1" i="0" dirty="0">
+                <a:effectLst/>
+                <a:latin typeface="quote-cjk-patch"/>
+              </a:rPr>
+              <a:t>Controlador</a:t>
+            </a:r>
+            <a:r>
+              <a:rPr lang="es-ES" sz="2400" b="0" i="0" dirty="0">
+                <a:effectLst/>
+                <a:latin typeface="quote-cjk-patch"/>
+              </a:rPr>
+              <a:t>: </a:t>
+            </a:r>
+            <a:r>
+              <a:rPr lang="es-ES" sz="2400" b="1" i="0" dirty="0">
+                <a:effectLst/>
+                <a:latin typeface="quote-cjk-patch"/>
+              </a:rPr>
+              <a:t>Intermedia</a:t>
+            </a:r>
+            <a:r>
+              <a:rPr lang="es-ES" sz="2400" b="0" i="0" dirty="0">
+                <a:effectLst/>
+                <a:latin typeface="quote-cjk-patch"/>
+              </a:rPr>
+              <a:t> entre el Modelo y la Vista.</a:t>
+            </a:r>
+          </a:p>
+          <a:p>
+            <a:pPr marL="457200" lvl="1" indent="0" algn="l">
+              <a:buNone/>
+            </a:pPr>
+            <a:endParaRPr lang="es-ES" b="0" i="0" dirty="0">
+              <a:effectLst/>
+              <a:latin typeface="quote-cjk-patch"/>
+            </a:endParaRPr>
+          </a:p>
+        </p:txBody>
+      </p:sp>
+      <p:pic>
+        <p:nvPicPr>
+          <p:cNvPr id="6" name="Imagen 5"/>
+          <p:cNvPicPr>
+            <a:picLocks noChangeAspect="1"/>
+          </p:cNvPicPr>
+          <p:nvPr/>
+        </p:nvPicPr>
+        <p:blipFill rotWithShape="1">
+          <a:blip r:embed="rId3" cstate="print">
+            <a:extLst>
+              <a:ext uri="{28A0092B-C50C-407E-A947-70E740481C1C}">
+                <a14:useLocalDpi xmlns:a14="http://schemas.microsoft.com/office/drawing/2010/main" val="0"/>
+              </a:ext>
+            </a:extLst>
+          </a:blip>
+          <a:srcRect l="4235" t="5471" r="70358" b="63070"/>
+          <a:stretch/>
+        </p:blipFill>
+        <p:spPr>
+          <a:xfrm>
+            <a:off x="303249" y="0"/>
+            <a:ext cx="921475" cy="883080"/>
+          </a:xfrm>
+          <a:prstGeom prst="rect">
+            <a:avLst/>
+          </a:prstGeom>
+        </p:spPr>
+      </p:pic>
+      <p:sp>
+        <p:nvSpPr>
+          <p:cNvPr id="4" name="Marcador de número de diapositiva 3"/>
+          <p:cNvSpPr>
+            <a:spLocks noGrp="1"/>
+          </p:cNvSpPr>
+          <p:nvPr>
+            <p:ph type="sldNum" sz="quarter" idx="12"/>
+          </p:nvPr>
+        </p:nvSpPr>
+        <p:spPr/>
+        <p:txBody>
+          <a:bodyPr/>
+          <a:lstStyle/>
+          <a:p>
+            <a:fld id="{132FADFE-3B8F-471C-ABF0-DBC7717ECBBC}" type="slidenum">
+              <a:rPr lang="es-ES" smtClean="0"/>
+              <a:t>17</a:t>
+            </a:fld>
+            <a:endParaRPr lang="es-ES"/>
+          </a:p>
+        </p:txBody>
+      </p:sp>
+      <p:pic>
+        <p:nvPicPr>
+          <p:cNvPr id="5" name="Imagen 4">
+            <a:extLst>
+              <a:ext uri="{FF2B5EF4-FFF2-40B4-BE49-F238E27FC236}">
+                <a16:creationId xmlns:a16="http://schemas.microsoft.com/office/drawing/2014/main" id="{2E831681-87F0-B726-C8CF-C25514B79E50}"/>
+              </a:ext>
+            </a:extLst>
+          </p:cNvPr>
+          <p:cNvPicPr>
+            <a:picLocks noChangeAspect="1"/>
+          </p:cNvPicPr>
+          <p:nvPr/>
+        </p:nvPicPr>
+        <p:blipFill>
+          <a:blip r:embed="rId4">
+            <a:extLst>
+              <a:ext uri="{28A0092B-C50C-407E-A947-70E740481C1C}">
+                <a14:useLocalDpi xmlns:a14="http://schemas.microsoft.com/office/drawing/2010/main" val="0"/>
+              </a:ext>
+            </a:extLst>
+          </a:blip>
+          <a:srcRect/>
+          <a:stretch>
+            <a:fillRect/>
+          </a:stretch>
+        </p:blipFill>
+        <p:spPr bwMode="auto">
+          <a:xfrm>
+            <a:off x="1172357" y="3717032"/>
+            <a:ext cx="6214822" cy="2832904"/>
+          </a:xfrm>
+          <a:prstGeom prst="rect">
+            <a:avLst/>
+          </a:prstGeom>
+          <a:noFill/>
+          <a:ln w="3175" cmpd="sng">
+            <a:solidFill>
+              <a:srgbClr val="000000"/>
+            </a:solidFill>
+            <a:miter lim="800000"/>
+            <a:headEnd/>
+            <a:tailEnd/>
+          </a:ln>
+          <a:effectLst/>
+        </p:spPr>
+      </p:pic>
+    </p:spTree>
+    <p:extLst>
+      <p:ext uri="{BB962C8B-B14F-4D97-AF65-F5344CB8AC3E}">
+        <p14:creationId xmlns:p14="http://schemas.microsoft.com/office/powerpoint/2010/main" val="3787424618"/>
+      </p:ext>
+    </p:extLst>
+  </p:cSld>
+  <p:clrMapOvr>
+    <a:masterClrMapping/>
+  </p:clrMapOvr>
+</p:sld>
+</file>
+
+<file path=ppt/slides/slide18.xml><?xml version="1.0" encoding="utf-8"?>
+<p:sld xmlns:a="http://schemas.openxmlformats.org/drawingml/2006/main" xmlns:r="http://schemas.openxmlformats.org/officeDocument/2006/relationships" xmlns:p="http://schemas.openxmlformats.org/presentationml/2006/main">
+  <p:cSld>
+    <p:spTree>
+      <p:nvGrpSpPr>
+        <p:cNvPr id="1" name="">
+          <a:extLst>
+            <a:ext uri="{FF2B5EF4-FFF2-40B4-BE49-F238E27FC236}">
+              <a16:creationId xmlns:a16="http://schemas.microsoft.com/office/drawing/2014/main" id="{D21DF9AF-A900-2C6A-9258-413905233273}"/>
+            </a:ext>
+          </a:extLst>
+        </p:cNvPr>
+        <p:cNvGrpSpPr/>
+        <p:nvPr/>
+      </p:nvGrpSpPr>
+      <p:grpSpPr>
+        <a:xfrm>
+          <a:off x="0" y="0"/>
+          <a:ext cx="0" cy="0"/>
+          <a:chOff x="0" y="0"/>
+          <a:chExt cx="0" cy="0"/>
+        </a:xfrm>
+      </p:grpSpPr>
+      <p:pic>
+        <p:nvPicPr>
+          <p:cNvPr id="2051" name="Picture 3">
+            <a:extLst>
+              <a:ext uri="{FF2B5EF4-FFF2-40B4-BE49-F238E27FC236}">
+                <a16:creationId xmlns:a16="http://schemas.microsoft.com/office/drawing/2014/main" id="{7DF0E05C-6282-9938-ADAC-54200CF18846}"/>
+              </a:ext>
+            </a:extLst>
+          </p:cNvPr>
+          <p:cNvPicPr>
+            <a:picLocks noChangeAspect="1" noChangeArrowheads="1"/>
+          </p:cNvPicPr>
+          <p:nvPr/>
+        </p:nvPicPr>
+        <p:blipFill>
+          <a:blip r:embed="rId2">
+            <a:extLst>
+              <a:ext uri="{28A0092B-C50C-407E-A947-70E740481C1C}">
+                <a14:useLocalDpi xmlns:a14="http://schemas.microsoft.com/office/drawing/2010/main" val="0"/>
+              </a:ext>
+            </a:extLst>
+          </a:blip>
+          <a:srcRect/>
+          <a:stretch>
+            <a:fillRect/>
+          </a:stretch>
+        </p:blipFill>
+        <p:spPr bwMode="auto">
+          <a:xfrm>
+            <a:off x="1475657" y="0"/>
+            <a:ext cx="7668344" cy="1011462"/>
+          </a:xfrm>
+          <a:prstGeom prst="rect">
+            <a:avLst/>
+          </a:prstGeom>
+          <a:noFill/>
+          <a:ln>
+            <a:noFill/>
+          </a:ln>
+          <a:extLst>
+            <a:ext uri="{909E8E84-426E-40DD-AFC4-6F175D3DCCD1}">
+              <a14:hiddenFill xmlns:a14="http://schemas.microsoft.com/office/drawing/2010/main">
+                <a:solidFill>
+                  <a:schemeClr val="accent1"/>
+                </a:solidFill>
+              </a14:hiddenFill>
+            </a:ext>
+            <a:ext uri="{91240B29-F687-4F45-9708-019B960494DF}">
+              <a14:hiddenLine xmlns:a14="http://schemas.microsoft.com/office/drawing/2010/main" w="9525">
+                <a:solidFill>
+                  <a:schemeClr val="tx1"/>
+                </a:solidFill>
+                <a:miter lim="800000"/>
+                <a:headEnd/>
+                <a:tailEnd/>
+              </a14:hiddenLine>
+            </a:ext>
+          </a:extLst>
+        </p:spPr>
+      </p:pic>
+      <p:sp>
+        <p:nvSpPr>
+          <p:cNvPr id="2" name="1 Título">
+            <a:extLst>
+              <a:ext uri="{FF2B5EF4-FFF2-40B4-BE49-F238E27FC236}">
+                <a16:creationId xmlns:a16="http://schemas.microsoft.com/office/drawing/2014/main" id="{BD9ECABC-78E9-2D54-33F3-EC202AD630C6}"/>
+              </a:ext>
+            </a:extLst>
+          </p:cNvPr>
+          <p:cNvSpPr>
+            <a:spLocks noGrp="1"/>
+          </p:cNvSpPr>
+          <p:nvPr>
+            <p:ph type="title"/>
+          </p:nvPr>
+        </p:nvSpPr>
+        <p:spPr>
+          <a:xfrm>
+            <a:off x="2555776" y="-66607"/>
+            <a:ext cx="5410944" cy="1143000"/>
+          </a:xfrm>
+        </p:spPr>
+        <p:txBody>
+          <a:bodyPr>
+            <a:normAutofit/>
+          </a:bodyPr>
+          <a:lstStyle/>
+          <a:p>
+            <a:r>
+              <a:rPr lang="es-ES" sz="3200" b="1" dirty="0">
+                <a:solidFill>
+                  <a:schemeClr val="bg1"/>
+                </a:solidFill>
+              </a:rPr>
+              <a:t>Diagrama de Clase</a:t>
+            </a:r>
+            <a:endParaRPr lang="es-ES" sz="3200" dirty="0">
+              <a:solidFill>
+                <a:schemeClr val="bg1"/>
+              </a:solidFill>
+            </a:endParaRPr>
+          </a:p>
+        </p:txBody>
+      </p:sp>
+      <p:pic>
+        <p:nvPicPr>
+          <p:cNvPr id="6" name="Imagen 5">
+            <a:extLst>
+              <a:ext uri="{FF2B5EF4-FFF2-40B4-BE49-F238E27FC236}">
+                <a16:creationId xmlns:a16="http://schemas.microsoft.com/office/drawing/2014/main" id="{81C8510A-2485-FA22-EF1F-4E6579187B34}"/>
+              </a:ext>
+            </a:extLst>
+          </p:cNvPr>
+          <p:cNvPicPr>
+            <a:picLocks noChangeAspect="1"/>
+          </p:cNvPicPr>
+          <p:nvPr/>
+        </p:nvPicPr>
+        <p:blipFill rotWithShape="1">
+          <a:blip r:embed="rId3" cstate="print">
+            <a:extLst>
+              <a:ext uri="{28A0092B-C50C-407E-A947-70E740481C1C}">
+                <a14:useLocalDpi xmlns:a14="http://schemas.microsoft.com/office/drawing/2010/main" val="0"/>
+              </a:ext>
+            </a:extLst>
+          </a:blip>
+          <a:srcRect l="4235" t="5471" r="70358" b="63070"/>
+          <a:stretch/>
+        </p:blipFill>
+        <p:spPr>
+          <a:xfrm>
+            <a:off x="303249" y="0"/>
+            <a:ext cx="921475" cy="883080"/>
+          </a:xfrm>
+          <a:prstGeom prst="rect">
+            <a:avLst/>
+          </a:prstGeom>
+        </p:spPr>
+      </p:pic>
+      <p:sp>
+        <p:nvSpPr>
+          <p:cNvPr id="4" name="Marcador de número de diapositiva 3">
+            <a:extLst>
+              <a:ext uri="{FF2B5EF4-FFF2-40B4-BE49-F238E27FC236}">
+                <a16:creationId xmlns:a16="http://schemas.microsoft.com/office/drawing/2014/main" id="{F932BFE7-6EAC-D277-C358-E0B67212B14E}"/>
+              </a:ext>
+            </a:extLst>
+          </p:cNvPr>
+          <p:cNvSpPr>
+            <a:spLocks noGrp="1"/>
+          </p:cNvSpPr>
+          <p:nvPr>
+            <p:ph type="sldNum" sz="quarter" idx="12"/>
+          </p:nvPr>
+        </p:nvSpPr>
+        <p:spPr/>
+        <p:txBody>
+          <a:bodyPr/>
+          <a:lstStyle/>
+          <a:p>
+            <a:fld id="{132FADFE-3B8F-471C-ABF0-DBC7717ECBBC}" type="slidenum">
+              <a:rPr lang="es-ES" smtClean="0"/>
+              <a:t>18</a:t>
+            </a:fld>
+            <a:endParaRPr lang="es-ES"/>
+          </a:p>
+        </p:txBody>
+      </p:sp>
+      <p:pic>
+        <p:nvPicPr>
+          <p:cNvPr id="8" name="Imagen 7">
+            <a:extLst>
+              <a:ext uri="{FF2B5EF4-FFF2-40B4-BE49-F238E27FC236}">
+                <a16:creationId xmlns:a16="http://schemas.microsoft.com/office/drawing/2014/main" id="{F19CF6F5-435B-45FE-79EC-CBEF2BA70357}"/>
+              </a:ext>
+            </a:extLst>
+          </p:cNvPr>
+          <p:cNvPicPr>
+            <a:picLocks noChangeAspect="1"/>
+          </p:cNvPicPr>
+          <p:nvPr/>
+        </p:nvPicPr>
+        <p:blipFill>
+          <a:blip r:embed="rId4">
+            <a:extLst>
+              <a:ext uri="{28A0092B-C50C-407E-A947-70E740481C1C}">
+                <a14:useLocalDpi xmlns:a14="http://schemas.microsoft.com/office/drawing/2010/main" val="0"/>
+              </a:ext>
+            </a:extLst>
+          </a:blip>
+          <a:srcRect/>
+          <a:stretch>
+            <a:fillRect/>
+          </a:stretch>
+        </p:blipFill>
+        <p:spPr bwMode="auto">
+          <a:xfrm>
+            <a:off x="198315" y="2210328"/>
+            <a:ext cx="8747369" cy="3952709"/>
+          </a:xfrm>
+          <a:prstGeom prst="rect">
+            <a:avLst/>
+          </a:prstGeom>
+          <a:ln w="38100" cap="sq">
+            <a:solidFill>
+              <a:srgbClr val="000000"/>
+            </a:solidFill>
+            <a:prstDash val="solid"/>
+            <a:miter lim="800000"/>
+          </a:ln>
+          <a:effectLst>
+            <a:outerShdw blurRad="50800" dist="38100" dir="2700000" algn="tl" rotWithShape="0">
+              <a:srgbClr val="000000">
+                <a:alpha val="43000"/>
+              </a:srgbClr>
+            </a:outerShdw>
+          </a:effectLst>
+        </p:spPr>
+      </p:pic>
+    </p:spTree>
+    <p:extLst>
+      <p:ext uri="{BB962C8B-B14F-4D97-AF65-F5344CB8AC3E}">
+        <p14:creationId xmlns:p14="http://schemas.microsoft.com/office/powerpoint/2010/main" val="701422511"/>
+      </p:ext>
+    </p:extLst>
+  </p:cSld>
+  <p:clrMapOvr>
+    <a:masterClrMapping/>
+  </p:clrMapOvr>
+</p:sld>
+</file>
+
+<file path=ppt/slides/slide19.xml><?xml version="1.0" encoding="utf-8"?>
+<p:sld xmlns:a="http://schemas.openxmlformats.org/drawingml/2006/main" xmlns:r="http://schemas.openxmlformats.org/officeDocument/2006/relationships" xmlns:p="http://schemas.openxmlformats.org/presentationml/2006/main">
+  <p:cSld>
+    <p:spTree>
+      <p:nvGrpSpPr>
+        <p:cNvPr id="1" name="">
+          <a:extLst>
+            <a:ext uri="{FF2B5EF4-FFF2-40B4-BE49-F238E27FC236}">
+              <a16:creationId xmlns:a16="http://schemas.microsoft.com/office/drawing/2014/main" id="{3C638939-866D-2637-A3B5-7E8A45E55A5C}"/>
+            </a:ext>
+          </a:extLst>
+        </p:cNvPr>
+        <p:cNvGrpSpPr/>
+        <p:nvPr/>
+      </p:nvGrpSpPr>
+      <p:grpSpPr>
+        <a:xfrm>
+          <a:off x="0" y="0"/>
+          <a:ext cx="0" cy="0"/>
+          <a:chOff x="0" y="0"/>
+          <a:chExt cx="0" cy="0"/>
+        </a:xfrm>
+      </p:grpSpPr>
+      <p:pic>
+        <p:nvPicPr>
+          <p:cNvPr id="2051" name="Picture 3">
+            <a:extLst>
+              <a:ext uri="{FF2B5EF4-FFF2-40B4-BE49-F238E27FC236}">
+                <a16:creationId xmlns:a16="http://schemas.microsoft.com/office/drawing/2014/main" id="{F663C5BF-8855-5031-76DA-6122DD1CB59F}"/>
+              </a:ext>
+            </a:extLst>
+          </p:cNvPr>
+          <p:cNvPicPr>
+            <a:picLocks noChangeAspect="1" noChangeArrowheads="1"/>
+          </p:cNvPicPr>
+          <p:nvPr/>
+        </p:nvPicPr>
+        <p:blipFill>
+          <a:blip r:embed="rId2">
+            <a:extLst>
+              <a:ext uri="{28A0092B-C50C-407E-A947-70E740481C1C}">
+                <a14:useLocalDpi xmlns:a14="http://schemas.microsoft.com/office/drawing/2010/main" val="0"/>
+              </a:ext>
+            </a:extLst>
+          </a:blip>
+          <a:srcRect/>
+          <a:stretch>
+            <a:fillRect/>
+          </a:stretch>
+        </p:blipFill>
+        <p:spPr bwMode="auto">
+          <a:xfrm>
+            <a:off x="1475657" y="0"/>
+            <a:ext cx="7668344" cy="1011462"/>
+          </a:xfrm>
+          <a:prstGeom prst="rect">
+            <a:avLst/>
+          </a:prstGeom>
+          <a:noFill/>
+          <a:ln>
+            <a:noFill/>
+          </a:ln>
+          <a:extLst>
+            <a:ext uri="{909E8E84-426E-40DD-AFC4-6F175D3DCCD1}">
+              <a14:hiddenFill xmlns:a14="http://schemas.microsoft.com/office/drawing/2010/main">
+                <a:solidFill>
+                  <a:schemeClr val="accent1"/>
+                </a:solidFill>
+              </a14:hiddenFill>
+            </a:ext>
+            <a:ext uri="{91240B29-F687-4F45-9708-019B960494DF}">
+              <a14:hiddenLine xmlns:a14="http://schemas.microsoft.com/office/drawing/2010/main" w="9525">
+                <a:solidFill>
+                  <a:schemeClr val="tx1"/>
+                </a:solidFill>
+                <a:miter lim="800000"/>
+                <a:headEnd/>
+                <a:tailEnd/>
+              </a14:hiddenLine>
+            </a:ext>
+          </a:extLst>
+        </p:spPr>
+      </p:pic>
+      <p:sp>
+        <p:nvSpPr>
+          <p:cNvPr id="2" name="1 Título">
+            <a:extLst>
+              <a:ext uri="{FF2B5EF4-FFF2-40B4-BE49-F238E27FC236}">
+                <a16:creationId xmlns:a16="http://schemas.microsoft.com/office/drawing/2014/main" id="{28193A7F-6EF9-859F-BF91-F4B2E6D278C2}"/>
+              </a:ext>
+            </a:extLst>
+          </p:cNvPr>
+          <p:cNvSpPr>
+            <a:spLocks noGrp="1"/>
+          </p:cNvSpPr>
+          <p:nvPr>
+            <p:ph type="title"/>
+          </p:nvPr>
+        </p:nvSpPr>
+        <p:spPr>
+          <a:xfrm>
+            <a:off x="2555776" y="-66607"/>
+            <a:ext cx="5410944" cy="1143000"/>
+          </a:xfrm>
+        </p:spPr>
+        <p:txBody>
+          <a:bodyPr>
+            <a:normAutofit/>
+          </a:bodyPr>
+          <a:lstStyle/>
+          <a:p>
+            <a:r>
+              <a:rPr lang="es-ES" sz="3200" b="1" dirty="0">
+                <a:solidFill>
+                  <a:schemeClr val="bg1"/>
+                </a:solidFill>
+              </a:rPr>
+              <a:t>Diagrama de Base de Datos</a:t>
+            </a:r>
+            <a:endParaRPr lang="es-ES" sz="3200" dirty="0">
+              <a:solidFill>
+                <a:schemeClr val="bg1"/>
+              </a:solidFill>
+            </a:endParaRPr>
+          </a:p>
+        </p:txBody>
+      </p:sp>
+      <p:pic>
+        <p:nvPicPr>
+          <p:cNvPr id="6" name="Imagen 5">
+            <a:extLst>
+              <a:ext uri="{FF2B5EF4-FFF2-40B4-BE49-F238E27FC236}">
+                <a16:creationId xmlns:a16="http://schemas.microsoft.com/office/drawing/2014/main" id="{5903C6CC-A1F7-F753-30E1-FEEC6D61A45C}"/>
+              </a:ext>
+            </a:extLst>
+          </p:cNvPr>
+          <p:cNvPicPr>
+            <a:picLocks noChangeAspect="1"/>
+          </p:cNvPicPr>
+          <p:nvPr/>
+        </p:nvPicPr>
+        <p:blipFill rotWithShape="1">
+          <a:blip r:embed="rId3" cstate="print">
+            <a:extLst>
+              <a:ext uri="{28A0092B-C50C-407E-A947-70E740481C1C}">
+                <a14:useLocalDpi xmlns:a14="http://schemas.microsoft.com/office/drawing/2010/main" val="0"/>
+              </a:ext>
+            </a:extLst>
+          </a:blip>
+          <a:srcRect l="4235" t="5471" r="70358" b="63070"/>
+          <a:stretch/>
+        </p:blipFill>
+        <p:spPr>
+          <a:xfrm>
+            <a:off x="303249" y="0"/>
+            <a:ext cx="921475" cy="883080"/>
+          </a:xfrm>
+          <a:prstGeom prst="rect">
+            <a:avLst/>
+          </a:prstGeom>
+        </p:spPr>
+      </p:pic>
+      <p:sp>
+        <p:nvSpPr>
+          <p:cNvPr id="4" name="Marcador de número de diapositiva 3">
+            <a:extLst>
+              <a:ext uri="{FF2B5EF4-FFF2-40B4-BE49-F238E27FC236}">
+                <a16:creationId xmlns:a16="http://schemas.microsoft.com/office/drawing/2014/main" id="{EE3D403A-B725-A9CF-C0F7-81A1AA9E2A50}"/>
+              </a:ext>
+            </a:extLst>
+          </p:cNvPr>
+          <p:cNvSpPr>
+            <a:spLocks noGrp="1"/>
+          </p:cNvSpPr>
+          <p:nvPr>
+            <p:ph type="sldNum" sz="quarter" idx="12"/>
+          </p:nvPr>
+        </p:nvSpPr>
+        <p:spPr/>
+        <p:txBody>
+          <a:bodyPr/>
+          <a:lstStyle/>
+          <a:p>
+            <a:fld id="{132FADFE-3B8F-471C-ABF0-DBC7717ECBBC}" type="slidenum">
+              <a:rPr lang="es-ES" smtClean="0"/>
+              <a:t>19</a:t>
+            </a:fld>
+            <a:endParaRPr lang="es-ES"/>
+          </a:p>
+        </p:txBody>
+      </p:sp>
+      <p:pic>
+        <p:nvPicPr>
+          <p:cNvPr id="3" name="Imagen 2">
+            <a:extLst>
+              <a:ext uri="{FF2B5EF4-FFF2-40B4-BE49-F238E27FC236}">
+                <a16:creationId xmlns:a16="http://schemas.microsoft.com/office/drawing/2014/main" id="{A629404C-73B6-9896-0A71-24B37887D6DD}"/>
+              </a:ext>
+            </a:extLst>
+          </p:cNvPr>
+          <p:cNvPicPr>
+            <a:picLocks noChangeAspect="1"/>
+          </p:cNvPicPr>
+          <p:nvPr/>
+        </p:nvPicPr>
+        <p:blipFill>
+          <a:blip r:embed="rId4">
+            <a:extLst>
+              <a:ext uri="{28A0092B-C50C-407E-A947-70E740481C1C}">
+                <a14:useLocalDpi xmlns:a14="http://schemas.microsoft.com/office/drawing/2010/main" val="0"/>
+              </a:ext>
+            </a:extLst>
+          </a:blip>
+          <a:srcRect/>
+          <a:stretch>
+            <a:fillRect/>
+          </a:stretch>
+        </p:blipFill>
+        <p:spPr bwMode="auto">
+          <a:xfrm>
+            <a:off x="0" y="1484784"/>
+            <a:ext cx="9144000" cy="4259374"/>
+          </a:xfrm>
+          <a:prstGeom prst="rect">
+            <a:avLst/>
+          </a:prstGeom>
+          <a:ln w="38100" cap="sq">
+            <a:solidFill>
+              <a:srgbClr val="000000"/>
+            </a:solidFill>
+            <a:prstDash val="solid"/>
+            <a:miter lim="800000"/>
+          </a:ln>
+          <a:effectLst>
+            <a:outerShdw blurRad="50800" dist="38100" dir="2700000" algn="tl" rotWithShape="0">
+              <a:srgbClr val="000000">
+                <a:alpha val="43000"/>
+              </a:srgbClr>
+            </a:outerShdw>
+          </a:effectLst>
+        </p:spPr>
+      </p:pic>
+    </p:spTree>
+    <p:extLst>
+      <p:ext uri="{BB962C8B-B14F-4D97-AF65-F5344CB8AC3E}">
+        <p14:creationId xmlns:p14="http://schemas.microsoft.com/office/powerpoint/2010/main" val="4113214024"/>
+      </p:ext>
+    </p:extLst>
+  </p:cSld>
+  <p:clrMapOvr>
+    <a:masterClrMapping/>
+  </p:clrMapOvr>
+</p:sld>
+</file>
+
 <file path=ppt/slides/slide2.xml><?xml version="1.0" encoding="utf-8"?>
 <p:sld xmlns:a="http://schemas.openxmlformats.org/drawingml/2006/main" xmlns:r="http://schemas.openxmlformats.org/officeDocument/2006/relationships" xmlns:p="http://schemas.openxmlformats.org/presentationml/2006/main">
   <p:cSld>
@@ -10248,8 +10532,8 @@
         </p:blipFill>
         <p:spPr>
           <a:xfrm>
-            <a:off x="116321" y="1056898"/>
-            <a:ext cx="4483671" cy="3216703"/>
+            <a:off x="0" y="1011462"/>
+            <a:ext cx="4483671" cy="3442742"/>
           </a:xfrm>
           <a:prstGeom prst="rect">
             <a:avLst/>
@@ -10320,8 +10604,8 @@
         </p:blipFill>
         <p:spPr>
           <a:xfrm>
-            <a:off x="5011257" y="1056898"/>
-            <a:ext cx="4016422" cy="3261469"/>
+            <a:off x="4904345" y="1011462"/>
+            <a:ext cx="4239655" cy="3442742"/>
           </a:xfrm>
           <a:prstGeom prst="rect">
             <a:avLst/>
@@ -10440,179 +10724,12 @@
                   <a:schemeClr val="bg1"/>
                 </a:solidFill>
               </a:rPr>
-              <a:t>Arquitectura del Sistema</a:t>
+              <a:t>Pruebas de Aceptación</a:t>
             </a:r>
             <a:endParaRPr lang="es-ES" sz="3200" dirty="0">
               <a:solidFill>
                 <a:schemeClr val="bg1"/>
               </a:solidFill>
-            </a:endParaRPr>
-          </a:p>
-        </p:txBody>
-      </p:sp>
-      <p:sp>
-        <p:nvSpPr>
-          <p:cNvPr id="3" name="2 Marcador de contenido"/>
-          <p:cNvSpPr>
-            <a:spLocks noGrp="1"/>
-          </p:cNvSpPr>
-          <p:nvPr>
-            <p:ph idx="1"/>
-          </p:nvPr>
-        </p:nvSpPr>
-        <p:spPr>
-          <a:xfrm>
-            <a:off x="390364" y="1076393"/>
-            <a:ext cx="8363271" cy="4814186"/>
-          </a:xfrm>
-        </p:spPr>
-        <p:txBody>
-          <a:bodyPr>
-            <a:normAutofit/>
-          </a:bodyPr>
-          <a:lstStyle/>
-          <a:p>
-            <a:pPr marL="0" indent="0" algn="l">
-              <a:buNone/>
-            </a:pPr>
-            <a:r>
-              <a:rPr lang="es-ES" sz="2400" b="1" i="0" dirty="0">
-                <a:effectLst/>
-                <a:latin typeface="quote-cjk-patch"/>
-              </a:rPr>
-              <a:t>Modelo Vistas Controlador </a:t>
-            </a:r>
-            <a:r>
-              <a:rPr lang="es-ES" sz="2400" b="0" i="0" dirty="0">
-                <a:effectLst/>
-                <a:latin typeface="quote-cjk-patch"/>
-              </a:rPr>
-              <a:t> es un patrón de arquitectura de software que organiza una aplicación en tres componentes principales:</a:t>
-            </a:r>
-          </a:p>
-          <a:p>
-            <a:pPr algn="l">
-              <a:buFont typeface="+mj-lt"/>
-              <a:buAutoNum type="arabicPeriod"/>
-            </a:pPr>
-            <a:r>
-              <a:rPr lang="es-ES" sz="2400" b="1" i="0" dirty="0">
-                <a:effectLst/>
-                <a:latin typeface="quote-cjk-patch"/>
-              </a:rPr>
-              <a:t>Modelo</a:t>
-            </a:r>
-            <a:r>
-              <a:rPr lang="es-ES" sz="2400" b="0" i="0" dirty="0">
-                <a:effectLst/>
-                <a:latin typeface="quote-cjk-patch"/>
-              </a:rPr>
-              <a:t>: Gestiona los </a:t>
-            </a:r>
-            <a:r>
-              <a:rPr lang="es-ES" sz="2400" b="1" i="0" dirty="0">
-                <a:effectLst/>
-                <a:latin typeface="quote-cjk-patch"/>
-              </a:rPr>
-              <a:t>datos</a:t>
-            </a:r>
-            <a:r>
-              <a:rPr lang="es-ES" sz="2400" b="0" i="0" dirty="0">
-                <a:effectLst/>
-                <a:latin typeface="quote-cjk-patch"/>
-              </a:rPr>
-              <a:t> y la </a:t>
-            </a:r>
-            <a:r>
-              <a:rPr lang="es-ES" sz="2400" b="1" i="0" dirty="0">
-                <a:effectLst/>
-                <a:latin typeface="quote-cjk-patch"/>
-              </a:rPr>
-              <a:t>lógica de negocio</a:t>
-            </a:r>
-            <a:r>
-              <a:rPr lang="es-ES" sz="2400" b="0" i="0" dirty="0">
-                <a:effectLst/>
-                <a:latin typeface="quote-cjk-patch"/>
-              </a:rPr>
-              <a:t>.</a:t>
-            </a:r>
-          </a:p>
-          <a:p>
-            <a:pPr algn="l">
-              <a:buFont typeface="+mj-lt"/>
-              <a:buAutoNum type="arabicPeriod"/>
-            </a:pPr>
-            <a:r>
-              <a:rPr lang="es-ES" sz="2400" b="1" i="0" dirty="0">
-                <a:effectLst/>
-                <a:latin typeface="quote-cjk-patch"/>
-              </a:rPr>
-              <a:t>Vista</a:t>
-            </a:r>
-            <a:r>
-              <a:rPr lang="es-ES" sz="2400" b="0" i="0" dirty="0">
-                <a:effectLst/>
-                <a:latin typeface="quote-cjk-patch"/>
-              </a:rPr>
-              <a:t>: Muestra la </a:t>
-            </a:r>
-            <a:r>
-              <a:rPr lang="es-ES" sz="2400" b="1" i="0" dirty="0">
-                <a:effectLst/>
-                <a:latin typeface="quote-cjk-patch"/>
-              </a:rPr>
-              <a:t>interfaz gráfica</a:t>
-            </a:r>
-            <a:r>
-              <a:rPr lang="es-ES" sz="2400" b="0" i="0" dirty="0">
-                <a:effectLst/>
-                <a:latin typeface="quote-cjk-patch"/>
-              </a:rPr>
-              <a:t> al usuario.</a:t>
-            </a:r>
-          </a:p>
-          <a:p>
-            <a:pPr algn="l">
-              <a:buFont typeface="+mj-lt"/>
-              <a:buAutoNum type="arabicPeriod"/>
-            </a:pPr>
-            <a:r>
-              <a:rPr lang="es-ES" sz="2400" b="1" i="0" dirty="0">
-                <a:effectLst/>
-                <a:latin typeface="quote-cjk-patch"/>
-              </a:rPr>
-              <a:t>Controlador</a:t>
-            </a:r>
-            <a:r>
-              <a:rPr lang="es-ES" sz="2400" b="0" i="0" dirty="0">
-                <a:effectLst/>
-                <a:latin typeface="quote-cjk-patch"/>
-              </a:rPr>
-              <a:t>: </a:t>
-            </a:r>
-            <a:r>
-              <a:rPr lang="es-ES" sz="2400" b="1" i="0" dirty="0">
-                <a:effectLst/>
-                <a:latin typeface="quote-cjk-patch"/>
-              </a:rPr>
-              <a:t>Intermedia</a:t>
-            </a:r>
-            <a:r>
-              <a:rPr lang="es-ES" sz="2400" b="0" i="0" dirty="0">
-                <a:effectLst/>
-                <a:latin typeface="quote-cjk-patch"/>
-              </a:rPr>
-              <a:t> entre el Modelo y la Vista.</a:t>
-            </a:r>
-          </a:p>
-          <a:p>
-            <a:pPr marL="457200" lvl="1" indent="0" algn="l">
-              <a:buNone/>
-            </a:pPr>
-            <a:endParaRPr lang="es-ES" b="0" i="0" dirty="0">
-              <a:effectLst/>
-              <a:latin typeface="quote-cjk-patch"/>
             </a:endParaRPr>
           </a:p>
         </p:txBody>
@@ -10671,17 +10788,19 @@
       </p:sp>
       <p:pic>
         <p:nvPicPr>
-          <p:cNvPr id="5" name="Imagen 4">
+          <p:cNvPr id="9" name="Marcador de contenido 8" descr="Texto&#10;&#10;El contenido generado por IA puede ser incorrecto.">
             <a:extLst>
               <a:ext uri="{FF2B5EF4-FFF2-40B4-BE49-F238E27FC236}">
-                <a16:creationId xmlns:a16="http://schemas.microsoft.com/office/drawing/2014/main" id="{2E831681-87F0-B726-C8CF-C25514B79E50}"/>
+                <a16:creationId xmlns:a16="http://schemas.microsoft.com/office/drawing/2014/main" id="{E4913D87-377B-A201-E583-844BABA23E83}"/>
               </a:ext>
             </a:extLst>
           </p:cNvPr>
           <p:cNvPicPr>
-            <a:picLocks noChangeAspect="1"/>
+            <a:picLocks noGrp="1" noChangeAspect="1"/>
           </p:cNvPicPr>
-          <p:nvPr/>
+          <p:nvPr>
+            <p:ph idx="1"/>
+          </p:nvPr>
         </p:nvPicPr>
         <p:blipFill>
           <a:blip r:embed="rId4">
@@ -10691,35 +10810,21 @@
               </a:ext>
             </a:extLst>
           </a:blip>
-          <a:srcRect/>
           <a:stretch>
             <a:fillRect/>
           </a:stretch>
         </p:blipFill>
-        <p:spPr bwMode="auto">
+        <p:spPr>
           <a:xfrm>
-            <a:off x="1172357" y="3717032"/>
-            <a:ext cx="6214822" cy="2832904"/>
+            <a:off x="763986" y="1725972"/>
+            <a:ext cx="7761129" cy="3406056"/>
           </a:xfrm>
-          <a:prstGeom prst="rect">
-            <a:avLst/>
-          </a:prstGeom>
-          <a:noFill/>
-          <a:ln w="3175" cmpd="sng">
-            <a:solidFill>
-              <a:srgbClr val="000000"/>
-            </a:solidFill>
-            <a:miter lim="800000"/>
-            <a:headEnd/>
-            <a:tailEnd/>
-          </a:ln>
-          <a:effectLst/>
         </p:spPr>
       </p:pic>
     </p:spTree>
     <p:extLst>
       <p:ext uri="{BB962C8B-B14F-4D97-AF65-F5344CB8AC3E}">
-        <p14:creationId xmlns:p14="http://schemas.microsoft.com/office/powerpoint/2010/main" val="3787424618"/>
+        <p14:creationId xmlns:p14="http://schemas.microsoft.com/office/powerpoint/2010/main" val="182701599"/>
       </p:ext>
     </p:extLst>
   </p:cSld>
@@ -10828,7 +10933,7 @@
                   <a:schemeClr val="bg1"/>
                 </a:solidFill>
               </a:rPr>
-              <a:t>Estructura del Directorio</a:t>
+              <a:t>Interfaz Del Sistema</a:t>
             </a:r>
             <a:endParaRPr lang="es-ES" sz="3200" dirty="0">
               <a:solidFill>
@@ -10892,1108 +10997,6 @@
       </p:sp>
       <p:pic>
         <p:nvPicPr>
-          <p:cNvPr id="5" name="Imagen 4">
-            <a:extLst>
-              <a:ext uri="{FF2B5EF4-FFF2-40B4-BE49-F238E27FC236}">
-                <a16:creationId xmlns:a16="http://schemas.microsoft.com/office/drawing/2014/main" id="{CB235F8B-1B77-E086-44F9-FAE61B9272E0}"/>
-              </a:ext>
-            </a:extLst>
-          </p:cNvPr>
-          <p:cNvPicPr>
-            <a:picLocks noChangeAspect="1"/>
-          </p:cNvPicPr>
-          <p:nvPr/>
-        </p:nvPicPr>
-        <p:blipFill>
-          <a:blip r:embed="rId4">
-            <a:extLst>
-              <a:ext uri="{28A0092B-C50C-407E-A947-70E740481C1C}">
-                <a14:useLocalDpi xmlns:a14="http://schemas.microsoft.com/office/drawing/2010/main" val="0"/>
-              </a:ext>
-            </a:extLst>
-          </a:blip>
-          <a:srcRect/>
-          <a:stretch>
-            <a:fillRect/>
-          </a:stretch>
-        </p:blipFill>
-        <p:spPr bwMode="auto">
-          <a:xfrm>
-            <a:off x="384049" y="1772816"/>
-            <a:ext cx="4043935" cy="4255770"/>
-          </a:xfrm>
-          <a:prstGeom prst="rect">
-            <a:avLst/>
-          </a:prstGeom>
-          <a:noFill/>
-          <a:ln>
-            <a:noFill/>
-          </a:ln>
-        </p:spPr>
-      </p:pic>
-      <p:pic>
-        <p:nvPicPr>
-          <p:cNvPr id="11" name="Imagen 10" descr="Interfaz de usuario gráfica, Texto&#10;&#10;El contenido generado por IA puede ser incorrecto.">
-            <a:extLst>
-              <a:ext uri="{FF2B5EF4-FFF2-40B4-BE49-F238E27FC236}">
-                <a16:creationId xmlns:a16="http://schemas.microsoft.com/office/drawing/2014/main" id="{F5C82691-3D07-2D53-860D-36545429052C}"/>
-              </a:ext>
-            </a:extLst>
-          </p:cNvPr>
-          <p:cNvPicPr>
-            <a:picLocks noChangeAspect="1"/>
-          </p:cNvPicPr>
-          <p:nvPr/>
-        </p:nvPicPr>
-        <p:blipFill>
-          <a:blip r:embed="rId5">
-            <a:extLst>
-              <a:ext uri="{28A0092B-C50C-407E-A947-70E740481C1C}">
-                <a14:useLocalDpi xmlns:a14="http://schemas.microsoft.com/office/drawing/2010/main" val="0"/>
-              </a:ext>
-            </a:extLst>
-          </a:blip>
-          <a:stretch>
-            <a:fillRect/>
-          </a:stretch>
-        </p:blipFill>
-        <p:spPr>
-          <a:xfrm>
-            <a:off x="5379821" y="1011463"/>
-            <a:ext cx="2259229" cy="5803312"/>
-          </a:xfrm>
-          <a:prstGeom prst="rect">
-            <a:avLst/>
-          </a:prstGeom>
-        </p:spPr>
-      </p:pic>
-    </p:spTree>
-    <p:extLst>
-      <p:ext uri="{BB962C8B-B14F-4D97-AF65-F5344CB8AC3E}">
-        <p14:creationId xmlns:p14="http://schemas.microsoft.com/office/powerpoint/2010/main" val="426018444"/>
-      </p:ext>
-    </p:extLst>
-  </p:cSld>
-  <p:clrMapOvr>
-    <a:masterClrMapping/>
-  </p:clrMapOvr>
-</p:sld>
-</file>
-
-<file path=ppt/slides/slide22.xml><?xml version="1.0" encoding="utf-8"?>
-<p:sld xmlns:a="http://schemas.openxmlformats.org/drawingml/2006/main" xmlns:r="http://schemas.openxmlformats.org/officeDocument/2006/relationships" xmlns:p="http://schemas.openxmlformats.org/presentationml/2006/main">
-  <p:cSld>
-    <p:spTree>
-      <p:nvGrpSpPr>
-        <p:cNvPr id="1" name=""/>
-        <p:cNvGrpSpPr/>
-        <p:nvPr/>
-      </p:nvGrpSpPr>
-      <p:grpSpPr>
-        <a:xfrm>
-          <a:off x="0" y="0"/>
-          <a:ext cx="0" cy="0"/>
-          <a:chOff x="0" y="0"/>
-          <a:chExt cx="0" cy="0"/>
-        </a:xfrm>
-      </p:grpSpPr>
-      <p:pic>
-        <p:nvPicPr>
-          <p:cNvPr id="2051" name="Picture 3"/>
-          <p:cNvPicPr>
-            <a:picLocks noChangeAspect="1" noChangeArrowheads="1"/>
-          </p:cNvPicPr>
-          <p:nvPr/>
-        </p:nvPicPr>
-        <p:blipFill>
-          <a:blip r:embed="rId2">
-            <a:extLst>
-              <a:ext uri="{28A0092B-C50C-407E-A947-70E740481C1C}">
-                <a14:useLocalDpi xmlns:a14="http://schemas.microsoft.com/office/drawing/2010/main" val="0"/>
-              </a:ext>
-            </a:extLst>
-          </a:blip>
-          <a:srcRect/>
-          <a:stretch>
-            <a:fillRect/>
-          </a:stretch>
-        </p:blipFill>
-        <p:spPr bwMode="auto">
-          <a:xfrm>
-            <a:off x="1475657" y="0"/>
-            <a:ext cx="7668344" cy="1011462"/>
-          </a:xfrm>
-          <a:prstGeom prst="rect">
-            <a:avLst/>
-          </a:prstGeom>
-          <a:noFill/>
-          <a:ln>
-            <a:noFill/>
-          </a:ln>
-          <a:extLst>
-            <a:ext uri="{909E8E84-426E-40DD-AFC4-6F175D3DCCD1}">
-              <a14:hiddenFill xmlns:a14="http://schemas.microsoft.com/office/drawing/2010/main">
-                <a:solidFill>
-                  <a:schemeClr val="accent1"/>
-                </a:solidFill>
-              </a14:hiddenFill>
-            </a:ext>
-            <a:ext uri="{91240B29-F687-4F45-9708-019B960494DF}">
-              <a14:hiddenLine xmlns:a14="http://schemas.microsoft.com/office/drawing/2010/main" w="9525">
-                <a:solidFill>
-                  <a:schemeClr val="tx1"/>
-                </a:solidFill>
-                <a:miter lim="800000"/>
-                <a:headEnd/>
-                <a:tailEnd/>
-              </a14:hiddenLine>
-            </a:ext>
-          </a:extLst>
-        </p:spPr>
-      </p:pic>
-      <p:sp>
-        <p:nvSpPr>
-          <p:cNvPr id="2" name="1 Título"/>
-          <p:cNvSpPr>
-            <a:spLocks noGrp="1"/>
-          </p:cNvSpPr>
-          <p:nvPr>
-            <p:ph type="title"/>
-          </p:nvPr>
-        </p:nvSpPr>
-        <p:spPr>
-          <a:xfrm>
-            <a:off x="2555776" y="-66607"/>
-            <a:ext cx="5410944" cy="1143000"/>
-          </a:xfrm>
-        </p:spPr>
-        <p:txBody>
-          <a:bodyPr>
-            <a:normAutofit/>
-          </a:bodyPr>
-          <a:lstStyle/>
-          <a:p>
-            <a:r>
-              <a:rPr lang="es-ES" sz="3200" b="1" dirty="0">
-                <a:solidFill>
-                  <a:schemeClr val="bg1"/>
-                </a:solidFill>
-              </a:rPr>
-              <a:t>Validaciones</a:t>
-            </a:r>
-            <a:endParaRPr lang="es-ES" sz="3200" dirty="0">
-              <a:solidFill>
-                <a:schemeClr val="bg1"/>
-              </a:solidFill>
-            </a:endParaRPr>
-          </a:p>
-        </p:txBody>
-      </p:sp>
-      <p:pic>
-        <p:nvPicPr>
-          <p:cNvPr id="6" name="Imagen 5"/>
-          <p:cNvPicPr>
-            <a:picLocks noChangeAspect="1"/>
-          </p:cNvPicPr>
-          <p:nvPr/>
-        </p:nvPicPr>
-        <p:blipFill rotWithShape="1">
-          <a:blip r:embed="rId3" cstate="print">
-            <a:extLst>
-              <a:ext uri="{28A0092B-C50C-407E-A947-70E740481C1C}">
-                <a14:useLocalDpi xmlns:a14="http://schemas.microsoft.com/office/drawing/2010/main" val="0"/>
-              </a:ext>
-            </a:extLst>
-          </a:blip>
-          <a:srcRect l="4235" t="5471" r="70358" b="63070"/>
-          <a:stretch/>
-        </p:blipFill>
-        <p:spPr>
-          <a:xfrm>
-            <a:off x="303249" y="0"/>
-            <a:ext cx="921475" cy="883080"/>
-          </a:xfrm>
-          <a:prstGeom prst="rect">
-            <a:avLst/>
-          </a:prstGeom>
-        </p:spPr>
-      </p:pic>
-      <p:sp>
-        <p:nvSpPr>
-          <p:cNvPr id="4" name="Marcador de número de diapositiva 3"/>
-          <p:cNvSpPr>
-            <a:spLocks noGrp="1"/>
-          </p:cNvSpPr>
-          <p:nvPr>
-            <p:ph type="sldNum" sz="quarter" idx="12"/>
-          </p:nvPr>
-        </p:nvSpPr>
-        <p:spPr/>
-        <p:txBody>
-          <a:bodyPr/>
-          <a:lstStyle/>
-          <a:p>
-            <a:fld id="{132FADFE-3B8F-471C-ABF0-DBC7717ECBBC}" type="slidenum">
-              <a:rPr lang="es-ES" smtClean="0"/>
-              <a:t>22</a:t>
-            </a:fld>
-            <a:endParaRPr lang="es-ES"/>
-          </a:p>
-        </p:txBody>
-      </p:sp>
-      <p:pic>
-        <p:nvPicPr>
-          <p:cNvPr id="8" name="Marcador de contenido 7">
-            <a:extLst>
-              <a:ext uri="{FF2B5EF4-FFF2-40B4-BE49-F238E27FC236}">
-                <a16:creationId xmlns:a16="http://schemas.microsoft.com/office/drawing/2014/main" id="{F3EC616C-FEDA-00A5-896C-2004ADB79A4F}"/>
-              </a:ext>
-            </a:extLst>
-          </p:cNvPr>
-          <p:cNvPicPr>
-            <a:picLocks noGrp="1" noChangeAspect="1"/>
-          </p:cNvPicPr>
-          <p:nvPr>
-            <p:ph idx="1"/>
-          </p:nvPr>
-        </p:nvPicPr>
-        <p:blipFill>
-          <a:blip r:embed="rId4">
-            <a:extLst>
-              <a:ext uri="{28A0092B-C50C-407E-A947-70E740481C1C}">
-                <a14:useLocalDpi xmlns:a14="http://schemas.microsoft.com/office/drawing/2010/main" val="0"/>
-              </a:ext>
-            </a:extLst>
-          </a:blip>
-          <a:srcRect/>
-          <a:stretch>
-            <a:fillRect/>
-          </a:stretch>
-        </p:blipFill>
-        <p:spPr bwMode="auto">
-          <a:xfrm>
-            <a:off x="945263" y="1600200"/>
-            <a:ext cx="7253473" cy="4525963"/>
-          </a:xfrm>
-          <a:prstGeom prst="rect">
-            <a:avLst/>
-          </a:prstGeom>
-          <a:noFill/>
-          <a:ln>
-            <a:noFill/>
-          </a:ln>
-        </p:spPr>
-      </p:pic>
-    </p:spTree>
-    <p:extLst>
-      <p:ext uri="{BB962C8B-B14F-4D97-AF65-F5344CB8AC3E}">
-        <p14:creationId xmlns:p14="http://schemas.microsoft.com/office/powerpoint/2010/main" val="31956804"/>
-      </p:ext>
-    </p:extLst>
-  </p:cSld>
-  <p:clrMapOvr>
-    <a:masterClrMapping/>
-  </p:clrMapOvr>
-</p:sld>
-</file>
-
-<file path=ppt/slides/slide23.xml><?xml version="1.0" encoding="utf-8"?>
-<p:sld xmlns:a="http://schemas.openxmlformats.org/drawingml/2006/main" xmlns:r="http://schemas.openxmlformats.org/officeDocument/2006/relationships" xmlns:p="http://schemas.openxmlformats.org/presentationml/2006/main">
-  <p:cSld>
-    <p:spTree>
-      <p:nvGrpSpPr>
-        <p:cNvPr id="1" name=""/>
-        <p:cNvGrpSpPr/>
-        <p:nvPr/>
-      </p:nvGrpSpPr>
-      <p:grpSpPr>
-        <a:xfrm>
-          <a:off x="0" y="0"/>
-          <a:ext cx="0" cy="0"/>
-          <a:chOff x="0" y="0"/>
-          <a:chExt cx="0" cy="0"/>
-        </a:xfrm>
-      </p:grpSpPr>
-      <p:pic>
-        <p:nvPicPr>
-          <p:cNvPr id="2051" name="Picture 3"/>
-          <p:cNvPicPr>
-            <a:picLocks noChangeAspect="1" noChangeArrowheads="1"/>
-          </p:cNvPicPr>
-          <p:nvPr/>
-        </p:nvPicPr>
-        <p:blipFill>
-          <a:blip r:embed="rId2">
-            <a:extLst>
-              <a:ext uri="{28A0092B-C50C-407E-A947-70E740481C1C}">
-                <a14:useLocalDpi xmlns:a14="http://schemas.microsoft.com/office/drawing/2010/main" val="0"/>
-              </a:ext>
-            </a:extLst>
-          </a:blip>
-          <a:srcRect/>
-          <a:stretch>
-            <a:fillRect/>
-          </a:stretch>
-        </p:blipFill>
-        <p:spPr bwMode="auto">
-          <a:xfrm>
-            <a:off x="1475657" y="0"/>
-            <a:ext cx="7668344" cy="1011462"/>
-          </a:xfrm>
-          <a:prstGeom prst="rect">
-            <a:avLst/>
-          </a:prstGeom>
-          <a:noFill/>
-          <a:ln>
-            <a:noFill/>
-          </a:ln>
-          <a:extLst>
-            <a:ext uri="{909E8E84-426E-40DD-AFC4-6F175D3DCCD1}">
-              <a14:hiddenFill xmlns:a14="http://schemas.microsoft.com/office/drawing/2010/main">
-                <a:solidFill>
-                  <a:schemeClr val="accent1"/>
-                </a:solidFill>
-              </a14:hiddenFill>
-            </a:ext>
-            <a:ext uri="{91240B29-F687-4F45-9708-019B960494DF}">
-              <a14:hiddenLine xmlns:a14="http://schemas.microsoft.com/office/drawing/2010/main" w="9525">
-                <a:solidFill>
-                  <a:schemeClr val="tx1"/>
-                </a:solidFill>
-                <a:miter lim="800000"/>
-                <a:headEnd/>
-                <a:tailEnd/>
-              </a14:hiddenLine>
-            </a:ext>
-          </a:extLst>
-        </p:spPr>
-      </p:pic>
-      <p:sp>
-        <p:nvSpPr>
-          <p:cNvPr id="2" name="1 Título"/>
-          <p:cNvSpPr>
-            <a:spLocks noGrp="1"/>
-          </p:cNvSpPr>
-          <p:nvPr>
-            <p:ph type="title"/>
-          </p:nvPr>
-        </p:nvSpPr>
-        <p:spPr>
-          <a:xfrm>
-            <a:off x="2555776" y="-66607"/>
-            <a:ext cx="5410944" cy="1143000"/>
-          </a:xfrm>
-        </p:spPr>
-        <p:txBody>
-          <a:bodyPr>
-            <a:normAutofit/>
-          </a:bodyPr>
-          <a:lstStyle/>
-          <a:p>
-            <a:r>
-              <a:rPr lang="es-ES" sz="3200" b="1" dirty="0">
-                <a:solidFill>
-                  <a:schemeClr val="bg1"/>
-                </a:solidFill>
-              </a:rPr>
-              <a:t>Validaciones</a:t>
-            </a:r>
-            <a:endParaRPr lang="es-ES" sz="3200" dirty="0">
-              <a:solidFill>
-                <a:schemeClr val="bg1"/>
-              </a:solidFill>
-            </a:endParaRPr>
-          </a:p>
-        </p:txBody>
-      </p:sp>
-      <p:pic>
-        <p:nvPicPr>
-          <p:cNvPr id="6" name="Imagen 5"/>
-          <p:cNvPicPr>
-            <a:picLocks noChangeAspect="1"/>
-          </p:cNvPicPr>
-          <p:nvPr/>
-        </p:nvPicPr>
-        <p:blipFill rotWithShape="1">
-          <a:blip r:embed="rId3" cstate="print">
-            <a:extLst>
-              <a:ext uri="{28A0092B-C50C-407E-A947-70E740481C1C}">
-                <a14:useLocalDpi xmlns:a14="http://schemas.microsoft.com/office/drawing/2010/main" val="0"/>
-              </a:ext>
-            </a:extLst>
-          </a:blip>
-          <a:srcRect l="4235" t="5471" r="70358" b="63070"/>
-          <a:stretch/>
-        </p:blipFill>
-        <p:spPr>
-          <a:xfrm>
-            <a:off x="303249" y="0"/>
-            <a:ext cx="921475" cy="883080"/>
-          </a:xfrm>
-          <a:prstGeom prst="rect">
-            <a:avLst/>
-          </a:prstGeom>
-        </p:spPr>
-      </p:pic>
-      <p:sp>
-        <p:nvSpPr>
-          <p:cNvPr id="4" name="Marcador de número de diapositiva 3"/>
-          <p:cNvSpPr>
-            <a:spLocks noGrp="1"/>
-          </p:cNvSpPr>
-          <p:nvPr>
-            <p:ph type="sldNum" sz="quarter" idx="12"/>
-          </p:nvPr>
-        </p:nvSpPr>
-        <p:spPr/>
-        <p:txBody>
-          <a:bodyPr/>
-          <a:lstStyle/>
-          <a:p>
-            <a:fld id="{132FADFE-3B8F-471C-ABF0-DBC7717ECBBC}" type="slidenum">
-              <a:rPr lang="es-ES" smtClean="0"/>
-              <a:t>23</a:t>
-            </a:fld>
-            <a:endParaRPr lang="es-ES"/>
-          </a:p>
-        </p:txBody>
-      </p:sp>
-      <p:pic>
-        <p:nvPicPr>
-          <p:cNvPr id="7" name="Imagen 6">
-            <a:extLst>
-              <a:ext uri="{FF2B5EF4-FFF2-40B4-BE49-F238E27FC236}">
-                <a16:creationId xmlns:a16="http://schemas.microsoft.com/office/drawing/2014/main" id="{58AB41B2-D528-5AF1-DCF4-B9E579275F3E}"/>
-              </a:ext>
-            </a:extLst>
-          </p:cNvPr>
-          <p:cNvPicPr>
-            <a:picLocks noChangeAspect="1"/>
-          </p:cNvPicPr>
-          <p:nvPr/>
-        </p:nvPicPr>
-        <p:blipFill>
-          <a:blip r:embed="rId4">
-            <a:extLst>
-              <a:ext uri="{28A0092B-C50C-407E-A947-70E740481C1C}">
-                <a14:useLocalDpi xmlns:a14="http://schemas.microsoft.com/office/drawing/2010/main" val="0"/>
-              </a:ext>
-            </a:extLst>
-          </a:blip>
-          <a:srcRect/>
-          <a:stretch>
-            <a:fillRect/>
-          </a:stretch>
-        </p:blipFill>
-        <p:spPr bwMode="auto">
-          <a:xfrm>
-            <a:off x="303249" y="2137941"/>
-            <a:ext cx="8595513" cy="3416411"/>
-          </a:xfrm>
-          <a:prstGeom prst="rect">
-            <a:avLst/>
-          </a:prstGeom>
-          <a:noFill/>
-          <a:ln>
-            <a:noFill/>
-          </a:ln>
-        </p:spPr>
-      </p:pic>
-    </p:spTree>
-    <p:extLst>
-      <p:ext uri="{BB962C8B-B14F-4D97-AF65-F5344CB8AC3E}">
-        <p14:creationId xmlns:p14="http://schemas.microsoft.com/office/powerpoint/2010/main" val="1299837795"/>
-      </p:ext>
-    </p:extLst>
-  </p:cSld>
-  <p:clrMapOvr>
-    <a:masterClrMapping/>
-  </p:clrMapOvr>
-</p:sld>
-</file>
-
-<file path=ppt/slides/slide24.xml><?xml version="1.0" encoding="utf-8"?>
-<p:sld xmlns:a="http://schemas.openxmlformats.org/drawingml/2006/main" xmlns:r="http://schemas.openxmlformats.org/officeDocument/2006/relationships" xmlns:p="http://schemas.openxmlformats.org/presentationml/2006/main">
-  <p:cSld>
-    <p:spTree>
-      <p:nvGrpSpPr>
-        <p:cNvPr id="1" name=""/>
-        <p:cNvGrpSpPr/>
-        <p:nvPr/>
-      </p:nvGrpSpPr>
-      <p:grpSpPr>
-        <a:xfrm>
-          <a:off x="0" y="0"/>
-          <a:ext cx="0" cy="0"/>
-          <a:chOff x="0" y="0"/>
-          <a:chExt cx="0" cy="0"/>
-        </a:xfrm>
-      </p:grpSpPr>
-      <p:pic>
-        <p:nvPicPr>
-          <p:cNvPr id="2051" name="Picture 3"/>
-          <p:cNvPicPr>
-            <a:picLocks noChangeAspect="1" noChangeArrowheads="1"/>
-          </p:cNvPicPr>
-          <p:nvPr/>
-        </p:nvPicPr>
-        <p:blipFill>
-          <a:blip r:embed="rId2">
-            <a:extLst>
-              <a:ext uri="{28A0092B-C50C-407E-A947-70E740481C1C}">
-                <a14:useLocalDpi xmlns:a14="http://schemas.microsoft.com/office/drawing/2010/main" val="0"/>
-              </a:ext>
-            </a:extLst>
-          </a:blip>
-          <a:srcRect/>
-          <a:stretch>
-            <a:fillRect/>
-          </a:stretch>
-        </p:blipFill>
-        <p:spPr bwMode="auto">
-          <a:xfrm>
-            <a:off x="1475657" y="0"/>
-            <a:ext cx="7668344" cy="1011462"/>
-          </a:xfrm>
-          <a:prstGeom prst="rect">
-            <a:avLst/>
-          </a:prstGeom>
-          <a:noFill/>
-          <a:ln>
-            <a:noFill/>
-          </a:ln>
-          <a:extLst>
-            <a:ext uri="{909E8E84-426E-40DD-AFC4-6F175D3DCCD1}">
-              <a14:hiddenFill xmlns:a14="http://schemas.microsoft.com/office/drawing/2010/main">
-                <a:solidFill>
-                  <a:schemeClr val="accent1"/>
-                </a:solidFill>
-              </a14:hiddenFill>
-            </a:ext>
-            <a:ext uri="{91240B29-F687-4F45-9708-019B960494DF}">
-              <a14:hiddenLine xmlns:a14="http://schemas.microsoft.com/office/drawing/2010/main" w="9525">
-                <a:solidFill>
-                  <a:schemeClr val="tx1"/>
-                </a:solidFill>
-                <a:miter lim="800000"/>
-                <a:headEnd/>
-                <a:tailEnd/>
-              </a14:hiddenLine>
-            </a:ext>
-          </a:extLst>
-        </p:spPr>
-      </p:pic>
-      <p:sp>
-        <p:nvSpPr>
-          <p:cNvPr id="2" name="1 Título"/>
-          <p:cNvSpPr>
-            <a:spLocks noGrp="1"/>
-          </p:cNvSpPr>
-          <p:nvPr>
-            <p:ph type="title"/>
-          </p:nvPr>
-        </p:nvSpPr>
-        <p:spPr>
-          <a:xfrm>
-            <a:off x="2555776" y="-66607"/>
-            <a:ext cx="5410944" cy="1143000"/>
-          </a:xfrm>
-        </p:spPr>
-        <p:txBody>
-          <a:bodyPr>
-            <a:normAutofit/>
-          </a:bodyPr>
-          <a:lstStyle/>
-          <a:p>
-            <a:r>
-              <a:rPr lang="es-ES" sz="3200" b="1" dirty="0">
-                <a:solidFill>
-                  <a:schemeClr val="bg1"/>
-                </a:solidFill>
-              </a:rPr>
-              <a:t>Pruebas de Aceptación</a:t>
-            </a:r>
-            <a:endParaRPr lang="es-ES" sz="3200" dirty="0">
-              <a:solidFill>
-                <a:schemeClr val="bg1"/>
-              </a:solidFill>
-            </a:endParaRPr>
-          </a:p>
-        </p:txBody>
-      </p:sp>
-      <p:pic>
-        <p:nvPicPr>
-          <p:cNvPr id="6" name="Imagen 5"/>
-          <p:cNvPicPr>
-            <a:picLocks noChangeAspect="1"/>
-          </p:cNvPicPr>
-          <p:nvPr/>
-        </p:nvPicPr>
-        <p:blipFill rotWithShape="1">
-          <a:blip r:embed="rId3" cstate="print">
-            <a:extLst>
-              <a:ext uri="{28A0092B-C50C-407E-A947-70E740481C1C}">
-                <a14:useLocalDpi xmlns:a14="http://schemas.microsoft.com/office/drawing/2010/main" val="0"/>
-              </a:ext>
-            </a:extLst>
-          </a:blip>
-          <a:srcRect l="4235" t="5471" r="70358" b="63070"/>
-          <a:stretch/>
-        </p:blipFill>
-        <p:spPr>
-          <a:xfrm>
-            <a:off x="303249" y="0"/>
-            <a:ext cx="921475" cy="883080"/>
-          </a:xfrm>
-          <a:prstGeom prst="rect">
-            <a:avLst/>
-          </a:prstGeom>
-        </p:spPr>
-      </p:pic>
-      <p:sp>
-        <p:nvSpPr>
-          <p:cNvPr id="4" name="Marcador de número de diapositiva 3"/>
-          <p:cNvSpPr>
-            <a:spLocks noGrp="1"/>
-          </p:cNvSpPr>
-          <p:nvPr>
-            <p:ph type="sldNum" sz="quarter" idx="12"/>
-          </p:nvPr>
-        </p:nvSpPr>
-        <p:spPr/>
-        <p:txBody>
-          <a:bodyPr/>
-          <a:lstStyle/>
-          <a:p>
-            <a:fld id="{132FADFE-3B8F-471C-ABF0-DBC7717ECBBC}" type="slidenum">
-              <a:rPr lang="es-ES" smtClean="0"/>
-              <a:t>24</a:t>
-            </a:fld>
-            <a:endParaRPr lang="es-ES"/>
-          </a:p>
-        </p:txBody>
-      </p:sp>
-      <p:pic>
-        <p:nvPicPr>
-          <p:cNvPr id="9" name="Marcador de contenido 8" descr="Texto&#10;&#10;El contenido generado por IA puede ser incorrecto.">
-            <a:extLst>
-              <a:ext uri="{FF2B5EF4-FFF2-40B4-BE49-F238E27FC236}">
-                <a16:creationId xmlns:a16="http://schemas.microsoft.com/office/drawing/2014/main" id="{E4913D87-377B-A201-E583-844BABA23E83}"/>
-              </a:ext>
-            </a:extLst>
-          </p:cNvPr>
-          <p:cNvPicPr>
-            <a:picLocks noGrp="1" noChangeAspect="1"/>
-          </p:cNvPicPr>
-          <p:nvPr>
-            <p:ph idx="1"/>
-          </p:nvPr>
-        </p:nvPicPr>
-        <p:blipFill>
-          <a:blip r:embed="rId4">
-            <a:extLst>
-              <a:ext uri="{28A0092B-C50C-407E-A947-70E740481C1C}">
-                <a14:useLocalDpi xmlns:a14="http://schemas.microsoft.com/office/drawing/2010/main" val="0"/>
-              </a:ext>
-            </a:extLst>
-          </a:blip>
-          <a:stretch>
-            <a:fillRect/>
-          </a:stretch>
-        </p:blipFill>
-        <p:spPr>
-          <a:xfrm>
-            <a:off x="763986" y="1725972"/>
-            <a:ext cx="7761129" cy="3406056"/>
-          </a:xfrm>
-        </p:spPr>
-      </p:pic>
-    </p:spTree>
-    <p:extLst>
-      <p:ext uri="{BB962C8B-B14F-4D97-AF65-F5344CB8AC3E}">
-        <p14:creationId xmlns:p14="http://schemas.microsoft.com/office/powerpoint/2010/main" val="182701599"/>
-      </p:ext>
-    </p:extLst>
-  </p:cSld>
-  <p:clrMapOvr>
-    <a:masterClrMapping/>
-  </p:clrMapOvr>
-</p:sld>
-</file>
-
-<file path=ppt/slides/slide25.xml><?xml version="1.0" encoding="utf-8"?>
-<p:sld xmlns:a="http://schemas.openxmlformats.org/drawingml/2006/main" xmlns:r="http://schemas.openxmlformats.org/officeDocument/2006/relationships" xmlns:p="http://schemas.openxmlformats.org/presentationml/2006/main">
-  <p:cSld>
-    <p:spTree>
-      <p:nvGrpSpPr>
-        <p:cNvPr id="1" name=""/>
-        <p:cNvGrpSpPr/>
-        <p:nvPr/>
-      </p:nvGrpSpPr>
-      <p:grpSpPr>
-        <a:xfrm>
-          <a:off x="0" y="0"/>
-          <a:ext cx="0" cy="0"/>
-          <a:chOff x="0" y="0"/>
-          <a:chExt cx="0" cy="0"/>
-        </a:xfrm>
-      </p:grpSpPr>
-      <p:pic>
-        <p:nvPicPr>
-          <p:cNvPr id="2051" name="Picture 3"/>
-          <p:cNvPicPr>
-            <a:picLocks noChangeAspect="1" noChangeArrowheads="1"/>
-          </p:cNvPicPr>
-          <p:nvPr/>
-        </p:nvPicPr>
-        <p:blipFill>
-          <a:blip r:embed="rId2">
-            <a:extLst>
-              <a:ext uri="{28A0092B-C50C-407E-A947-70E740481C1C}">
-                <a14:useLocalDpi xmlns:a14="http://schemas.microsoft.com/office/drawing/2010/main" val="0"/>
-              </a:ext>
-            </a:extLst>
-          </a:blip>
-          <a:srcRect/>
-          <a:stretch>
-            <a:fillRect/>
-          </a:stretch>
-        </p:blipFill>
-        <p:spPr bwMode="auto">
-          <a:xfrm>
-            <a:off x="1475657" y="0"/>
-            <a:ext cx="7668344" cy="1011462"/>
-          </a:xfrm>
-          <a:prstGeom prst="rect">
-            <a:avLst/>
-          </a:prstGeom>
-          <a:noFill/>
-          <a:ln>
-            <a:noFill/>
-          </a:ln>
-          <a:extLst>
-            <a:ext uri="{909E8E84-426E-40DD-AFC4-6F175D3DCCD1}">
-              <a14:hiddenFill xmlns:a14="http://schemas.microsoft.com/office/drawing/2010/main">
-                <a:solidFill>
-                  <a:schemeClr val="accent1"/>
-                </a:solidFill>
-              </a14:hiddenFill>
-            </a:ext>
-            <a:ext uri="{91240B29-F687-4F45-9708-019B960494DF}">
-              <a14:hiddenLine xmlns:a14="http://schemas.microsoft.com/office/drawing/2010/main" w="9525">
-                <a:solidFill>
-                  <a:schemeClr val="tx1"/>
-                </a:solidFill>
-                <a:miter lim="800000"/>
-                <a:headEnd/>
-                <a:tailEnd/>
-              </a14:hiddenLine>
-            </a:ext>
-          </a:extLst>
-        </p:spPr>
-      </p:pic>
-      <p:sp>
-        <p:nvSpPr>
-          <p:cNvPr id="2" name="1 Título"/>
-          <p:cNvSpPr>
-            <a:spLocks noGrp="1"/>
-          </p:cNvSpPr>
-          <p:nvPr>
-            <p:ph type="title"/>
-          </p:nvPr>
-        </p:nvSpPr>
-        <p:spPr>
-          <a:xfrm>
-            <a:off x="2555776" y="-66607"/>
-            <a:ext cx="5410944" cy="1143000"/>
-          </a:xfrm>
-        </p:spPr>
-        <p:txBody>
-          <a:bodyPr>
-            <a:normAutofit/>
-          </a:bodyPr>
-          <a:lstStyle/>
-          <a:p>
-            <a:r>
-              <a:rPr lang="es-ES" sz="3200" b="1" dirty="0">
-                <a:solidFill>
-                  <a:schemeClr val="bg1"/>
-                </a:solidFill>
-              </a:rPr>
-              <a:t>Interfaces Del Sistema</a:t>
-            </a:r>
-            <a:endParaRPr lang="es-ES" sz="3200" dirty="0">
-              <a:solidFill>
-                <a:schemeClr val="bg1"/>
-              </a:solidFill>
-            </a:endParaRPr>
-          </a:p>
-        </p:txBody>
-      </p:sp>
-      <p:pic>
-        <p:nvPicPr>
-          <p:cNvPr id="6" name="Imagen 5"/>
-          <p:cNvPicPr>
-            <a:picLocks noChangeAspect="1"/>
-          </p:cNvPicPr>
-          <p:nvPr/>
-        </p:nvPicPr>
-        <p:blipFill rotWithShape="1">
-          <a:blip r:embed="rId3" cstate="print">
-            <a:extLst>
-              <a:ext uri="{28A0092B-C50C-407E-A947-70E740481C1C}">
-                <a14:useLocalDpi xmlns:a14="http://schemas.microsoft.com/office/drawing/2010/main" val="0"/>
-              </a:ext>
-            </a:extLst>
-          </a:blip>
-          <a:srcRect l="4235" t="5471" r="70358" b="63070"/>
-          <a:stretch/>
-        </p:blipFill>
-        <p:spPr>
-          <a:xfrm>
-            <a:off x="303249" y="0"/>
-            <a:ext cx="921475" cy="883080"/>
-          </a:xfrm>
-          <a:prstGeom prst="rect">
-            <a:avLst/>
-          </a:prstGeom>
-        </p:spPr>
-      </p:pic>
-      <p:sp>
-        <p:nvSpPr>
-          <p:cNvPr id="4" name="Marcador de número de diapositiva 3"/>
-          <p:cNvSpPr>
-            <a:spLocks noGrp="1"/>
-          </p:cNvSpPr>
-          <p:nvPr>
-            <p:ph type="sldNum" sz="quarter" idx="12"/>
-          </p:nvPr>
-        </p:nvSpPr>
-        <p:spPr/>
-        <p:txBody>
-          <a:bodyPr/>
-          <a:lstStyle/>
-          <a:p>
-            <a:fld id="{132FADFE-3B8F-471C-ABF0-DBC7717ECBBC}" type="slidenum">
-              <a:rPr lang="es-ES" smtClean="0"/>
-              <a:t>25</a:t>
-            </a:fld>
-            <a:endParaRPr lang="es-ES"/>
-          </a:p>
-        </p:txBody>
-      </p:sp>
-      <p:pic>
-        <p:nvPicPr>
-          <p:cNvPr id="9" name="Imagen 8" descr="Interfaz de usuario gráfica, Aplicación">
-            <a:extLst>
-              <a:ext uri="{FF2B5EF4-FFF2-40B4-BE49-F238E27FC236}">
-                <a16:creationId xmlns:a16="http://schemas.microsoft.com/office/drawing/2014/main" id="{BC6286B3-27DE-B7EF-F4C7-CE6A28723B7B}"/>
-              </a:ext>
-            </a:extLst>
-          </p:cNvPr>
-          <p:cNvPicPr>
-            <a:picLocks noChangeAspect="1"/>
-          </p:cNvPicPr>
-          <p:nvPr/>
-        </p:nvPicPr>
-        <p:blipFill>
-          <a:blip r:embed="rId4">
-            <a:extLst>
-              <a:ext uri="{28A0092B-C50C-407E-A947-70E740481C1C}">
-                <a14:useLocalDpi xmlns:a14="http://schemas.microsoft.com/office/drawing/2010/main" val="0"/>
-              </a:ext>
-            </a:extLst>
-          </a:blip>
-          <a:stretch>
-            <a:fillRect/>
-          </a:stretch>
-        </p:blipFill>
-        <p:spPr>
-          <a:xfrm>
-            <a:off x="0" y="2201527"/>
-            <a:ext cx="9112456" cy="3961510"/>
-          </a:xfrm>
-          <a:prstGeom prst="rect">
-            <a:avLst/>
-          </a:prstGeom>
-        </p:spPr>
-      </p:pic>
-    </p:spTree>
-    <p:extLst>
-      <p:ext uri="{BB962C8B-B14F-4D97-AF65-F5344CB8AC3E}">
-        <p14:creationId xmlns:p14="http://schemas.microsoft.com/office/powerpoint/2010/main" val="329657551"/>
-      </p:ext>
-    </p:extLst>
-  </p:cSld>
-  <p:clrMapOvr>
-    <a:masterClrMapping/>
-  </p:clrMapOvr>
-</p:sld>
-</file>
-
-<file path=ppt/slides/slide26.xml><?xml version="1.0" encoding="utf-8"?>
-<p:sld xmlns:a="http://schemas.openxmlformats.org/drawingml/2006/main" xmlns:r="http://schemas.openxmlformats.org/officeDocument/2006/relationships" xmlns:p="http://schemas.openxmlformats.org/presentationml/2006/main">
-  <p:cSld>
-    <p:spTree>
-      <p:nvGrpSpPr>
-        <p:cNvPr id="1" name=""/>
-        <p:cNvGrpSpPr/>
-        <p:nvPr/>
-      </p:nvGrpSpPr>
-      <p:grpSpPr>
-        <a:xfrm>
-          <a:off x="0" y="0"/>
-          <a:ext cx="0" cy="0"/>
-          <a:chOff x="0" y="0"/>
-          <a:chExt cx="0" cy="0"/>
-        </a:xfrm>
-      </p:grpSpPr>
-      <p:pic>
-        <p:nvPicPr>
-          <p:cNvPr id="2051" name="Picture 3"/>
-          <p:cNvPicPr>
-            <a:picLocks noChangeAspect="1" noChangeArrowheads="1"/>
-          </p:cNvPicPr>
-          <p:nvPr/>
-        </p:nvPicPr>
-        <p:blipFill>
-          <a:blip r:embed="rId2">
-            <a:extLst>
-              <a:ext uri="{28A0092B-C50C-407E-A947-70E740481C1C}">
-                <a14:useLocalDpi xmlns:a14="http://schemas.microsoft.com/office/drawing/2010/main" val="0"/>
-              </a:ext>
-            </a:extLst>
-          </a:blip>
-          <a:srcRect/>
-          <a:stretch>
-            <a:fillRect/>
-          </a:stretch>
-        </p:blipFill>
-        <p:spPr bwMode="auto">
-          <a:xfrm>
-            <a:off x="1475657" y="0"/>
-            <a:ext cx="7668344" cy="1011462"/>
-          </a:xfrm>
-          <a:prstGeom prst="rect">
-            <a:avLst/>
-          </a:prstGeom>
-          <a:noFill/>
-          <a:ln>
-            <a:noFill/>
-          </a:ln>
-          <a:extLst>
-            <a:ext uri="{909E8E84-426E-40DD-AFC4-6F175D3DCCD1}">
-              <a14:hiddenFill xmlns:a14="http://schemas.microsoft.com/office/drawing/2010/main">
-                <a:solidFill>
-                  <a:schemeClr val="accent1"/>
-                </a:solidFill>
-              </a14:hiddenFill>
-            </a:ext>
-            <a:ext uri="{91240B29-F687-4F45-9708-019B960494DF}">
-              <a14:hiddenLine xmlns:a14="http://schemas.microsoft.com/office/drawing/2010/main" w="9525">
-                <a:solidFill>
-                  <a:schemeClr val="tx1"/>
-                </a:solidFill>
-                <a:miter lim="800000"/>
-                <a:headEnd/>
-                <a:tailEnd/>
-              </a14:hiddenLine>
-            </a:ext>
-          </a:extLst>
-        </p:spPr>
-      </p:pic>
-      <p:sp>
-        <p:nvSpPr>
-          <p:cNvPr id="2" name="1 Título"/>
-          <p:cNvSpPr>
-            <a:spLocks noGrp="1"/>
-          </p:cNvSpPr>
-          <p:nvPr>
-            <p:ph type="title"/>
-          </p:nvPr>
-        </p:nvSpPr>
-        <p:spPr>
-          <a:xfrm>
-            <a:off x="2555776" y="-66607"/>
-            <a:ext cx="5410944" cy="1143000"/>
-          </a:xfrm>
-        </p:spPr>
-        <p:txBody>
-          <a:bodyPr>
-            <a:normAutofit/>
-          </a:bodyPr>
-          <a:lstStyle/>
-          <a:p>
-            <a:r>
-              <a:rPr lang="es-ES" sz="3200" b="1" dirty="0">
-                <a:solidFill>
-                  <a:schemeClr val="bg1"/>
-                </a:solidFill>
-              </a:rPr>
-              <a:t>Interfaces Del Sistema</a:t>
-            </a:r>
-            <a:endParaRPr lang="es-ES" sz="3200" dirty="0">
-              <a:solidFill>
-                <a:schemeClr val="bg1"/>
-              </a:solidFill>
-            </a:endParaRPr>
-          </a:p>
-        </p:txBody>
-      </p:sp>
-      <p:pic>
-        <p:nvPicPr>
-          <p:cNvPr id="6" name="Imagen 5"/>
-          <p:cNvPicPr>
-            <a:picLocks noChangeAspect="1"/>
-          </p:cNvPicPr>
-          <p:nvPr/>
-        </p:nvPicPr>
-        <p:blipFill rotWithShape="1">
-          <a:blip r:embed="rId3" cstate="print">
-            <a:extLst>
-              <a:ext uri="{28A0092B-C50C-407E-A947-70E740481C1C}">
-                <a14:useLocalDpi xmlns:a14="http://schemas.microsoft.com/office/drawing/2010/main" val="0"/>
-              </a:ext>
-            </a:extLst>
-          </a:blip>
-          <a:srcRect l="4235" t="5471" r="70358" b="63070"/>
-          <a:stretch/>
-        </p:blipFill>
-        <p:spPr>
-          <a:xfrm>
-            <a:off x="303249" y="0"/>
-            <a:ext cx="921475" cy="883080"/>
-          </a:xfrm>
-          <a:prstGeom prst="rect">
-            <a:avLst/>
-          </a:prstGeom>
-        </p:spPr>
-      </p:pic>
-      <p:sp>
-        <p:nvSpPr>
-          <p:cNvPr id="4" name="Marcador de número de diapositiva 3"/>
-          <p:cNvSpPr>
-            <a:spLocks noGrp="1"/>
-          </p:cNvSpPr>
-          <p:nvPr>
-            <p:ph type="sldNum" sz="quarter" idx="12"/>
-          </p:nvPr>
-        </p:nvSpPr>
-        <p:spPr/>
-        <p:txBody>
-          <a:bodyPr/>
-          <a:lstStyle/>
-          <a:p>
-            <a:fld id="{132FADFE-3B8F-471C-ABF0-DBC7717ECBBC}" type="slidenum">
-              <a:rPr lang="es-ES" smtClean="0"/>
-              <a:t>26</a:t>
-            </a:fld>
-            <a:endParaRPr lang="es-ES"/>
-          </a:p>
-        </p:txBody>
-      </p:sp>
-      <p:pic>
-        <p:nvPicPr>
           <p:cNvPr id="5" name="Imagen 4" descr="Captura de pantalla de un celular&#10;&#10;El contenido generado por IA puede ser incorrecto.">
             <a:extLst>
               <a:ext uri="{FF2B5EF4-FFF2-40B4-BE49-F238E27FC236}">
@@ -12032,6 +11035,1339 @@
     <p:extLst>
       <p:ext uri="{BB962C8B-B14F-4D97-AF65-F5344CB8AC3E}">
         <p14:creationId xmlns:p14="http://schemas.microsoft.com/office/powerpoint/2010/main" val="669480691"/>
+      </p:ext>
+    </p:extLst>
+  </p:cSld>
+  <p:clrMapOvr>
+    <a:masterClrMapping/>
+  </p:clrMapOvr>
+</p:sld>
+</file>
+
+<file path=ppt/slides/slide22.xml><?xml version="1.0" encoding="utf-8"?>
+<p:sld xmlns:a="http://schemas.openxmlformats.org/drawingml/2006/main" xmlns:r="http://schemas.openxmlformats.org/officeDocument/2006/relationships" xmlns:p="http://schemas.openxmlformats.org/presentationml/2006/main">
+  <p:cSld>
+    <p:spTree>
+      <p:nvGrpSpPr>
+        <p:cNvPr id="1" name="">
+          <a:extLst>
+            <a:ext uri="{FF2B5EF4-FFF2-40B4-BE49-F238E27FC236}">
+              <a16:creationId xmlns:a16="http://schemas.microsoft.com/office/drawing/2014/main" id="{7BA9601A-BF2D-58EC-C684-BA01BEA14A39}"/>
+            </a:ext>
+          </a:extLst>
+        </p:cNvPr>
+        <p:cNvGrpSpPr/>
+        <p:nvPr/>
+      </p:nvGrpSpPr>
+      <p:grpSpPr>
+        <a:xfrm>
+          <a:off x="0" y="0"/>
+          <a:ext cx="0" cy="0"/>
+          <a:chOff x="0" y="0"/>
+          <a:chExt cx="0" cy="0"/>
+        </a:xfrm>
+      </p:grpSpPr>
+      <p:pic>
+        <p:nvPicPr>
+          <p:cNvPr id="2051" name="Picture 3">
+            <a:extLst>
+              <a:ext uri="{FF2B5EF4-FFF2-40B4-BE49-F238E27FC236}">
+                <a16:creationId xmlns:a16="http://schemas.microsoft.com/office/drawing/2014/main" id="{722236E3-E8D9-C745-2569-7D3BEA05C3A2}"/>
+              </a:ext>
+            </a:extLst>
+          </p:cNvPr>
+          <p:cNvPicPr>
+            <a:picLocks noChangeAspect="1" noChangeArrowheads="1"/>
+          </p:cNvPicPr>
+          <p:nvPr/>
+        </p:nvPicPr>
+        <p:blipFill>
+          <a:blip r:embed="rId2">
+            <a:extLst>
+              <a:ext uri="{28A0092B-C50C-407E-A947-70E740481C1C}">
+                <a14:useLocalDpi xmlns:a14="http://schemas.microsoft.com/office/drawing/2010/main" val="0"/>
+              </a:ext>
+            </a:extLst>
+          </a:blip>
+          <a:srcRect/>
+          <a:stretch>
+            <a:fillRect/>
+          </a:stretch>
+        </p:blipFill>
+        <p:spPr bwMode="auto">
+          <a:xfrm>
+            <a:off x="1475657" y="0"/>
+            <a:ext cx="7668344" cy="1011462"/>
+          </a:xfrm>
+          <a:prstGeom prst="rect">
+            <a:avLst/>
+          </a:prstGeom>
+          <a:noFill/>
+          <a:ln>
+            <a:noFill/>
+          </a:ln>
+          <a:extLst>
+            <a:ext uri="{909E8E84-426E-40DD-AFC4-6F175D3DCCD1}">
+              <a14:hiddenFill xmlns:a14="http://schemas.microsoft.com/office/drawing/2010/main">
+                <a:solidFill>
+                  <a:schemeClr val="accent1"/>
+                </a:solidFill>
+              </a14:hiddenFill>
+            </a:ext>
+            <a:ext uri="{91240B29-F687-4F45-9708-019B960494DF}">
+              <a14:hiddenLine xmlns:a14="http://schemas.microsoft.com/office/drawing/2010/main" w="9525">
+                <a:solidFill>
+                  <a:schemeClr val="tx1"/>
+                </a:solidFill>
+                <a:miter lim="800000"/>
+                <a:headEnd/>
+                <a:tailEnd/>
+              </a14:hiddenLine>
+            </a:ext>
+          </a:extLst>
+        </p:spPr>
+      </p:pic>
+      <p:sp>
+        <p:nvSpPr>
+          <p:cNvPr id="2" name="1 Título">
+            <a:extLst>
+              <a:ext uri="{FF2B5EF4-FFF2-40B4-BE49-F238E27FC236}">
+                <a16:creationId xmlns:a16="http://schemas.microsoft.com/office/drawing/2014/main" id="{3162B693-5543-8973-343D-04BA6FD70BEC}"/>
+              </a:ext>
+            </a:extLst>
+          </p:cNvPr>
+          <p:cNvSpPr>
+            <a:spLocks noGrp="1"/>
+          </p:cNvSpPr>
+          <p:nvPr>
+            <p:ph type="title"/>
+          </p:nvPr>
+        </p:nvSpPr>
+        <p:spPr>
+          <a:xfrm>
+            <a:off x="2555776" y="-66607"/>
+            <a:ext cx="5410944" cy="1143000"/>
+          </a:xfrm>
+        </p:spPr>
+        <p:txBody>
+          <a:bodyPr>
+            <a:normAutofit/>
+          </a:bodyPr>
+          <a:lstStyle/>
+          <a:p>
+            <a:r>
+              <a:rPr lang="es-ES" sz="3200" b="1" dirty="0">
+                <a:solidFill>
+                  <a:schemeClr val="bg1"/>
+                </a:solidFill>
+              </a:rPr>
+              <a:t>Conclusiones</a:t>
+            </a:r>
+            <a:endParaRPr lang="es-ES" sz="3200" dirty="0">
+              <a:solidFill>
+                <a:schemeClr val="bg1"/>
+              </a:solidFill>
+            </a:endParaRPr>
+          </a:p>
+        </p:txBody>
+      </p:sp>
+      <p:pic>
+        <p:nvPicPr>
+          <p:cNvPr id="6" name="Imagen 5">
+            <a:extLst>
+              <a:ext uri="{FF2B5EF4-FFF2-40B4-BE49-F238E27FC236}">
+                <a16:creationId xmlns:a16="http://schemas.microsoft.com/office/drawing/2014/main" id="{141C44B4-1304-3F03-518C-29280674BF38}"/>
+              </a:ext>
+            </a:extLst>
+          </p:cNvPr>
+          <p:cNvPicPr>
+            <a:picLocks noChangeAspect="1"/>
+          </p:cNvPicPr>
+          <p:nvPr/>
+        </p:nvPicPr>
+        <p:blipFill rotWithShape="1">
+          <a:blip r:embed="rId3" cstate="print">
+            <a:extLst>
+              <a:ext uri="{28A0092B-C50C-407E-A947-70E740481C1C}">
+                <a14:useLocalDpi xmlns:a14="http://schemas.microsoft.com/office/drawing/2010/main" val="0"/>
+              </a:ext>
+            </a:extLst>
+          </a:blip>
+          <a:srcRect l="4235" t="5471" r="70358" b="63070"/>
+          <a:stretch/>
+        </p:blipFill>
+        <p:spPr>
+          <a:xfrm>
+            <a:off x="303249" y="0"/>
+            <a:ext cx="921475" cy="883080"/>
+          </a:xfrm>
+          <a:prstGeom prst="rect">
+            <a:avLst/>
+          </a:prstGeom>
+        </p:spPr>
+      </p:pic>
+      <p:sp>
+        <p:nvSpPr>
+          <p:cNvPr id="4" name="Marcador de número de diapositiva 3">
+            <a:extLst>
+              <a:ext uri="{FF2B5EF4-FFF2-40B4-BE49-F238E27FC236}">
+                <a16:creationId xmlns:a16="http://schemas.microsoft.com/office/drawing/2014/main" id="{A60761BD-A242-3D09-756C-7D014739C275}"/>
+              </a:ext>
+            </a:extLst>
+          </p:cNvPr>
+          <p:cNvSpPr>
+            <a:spLocks noGrp="1"/>
+          </p:cNvSpPr>
+          <p:nvPr>
+            <p:ph type="sldNum" sz="quarter" idx="12"/>
+          </p:nvPr>
+        </p:nvSpPr>
+        <p:spPr/>
+        <p:txBody>
+          <a:bodyPr/>
+          <a:lstStyle/>
+          <a:p>
+            <a:fld id="{132FADFE-3B8F-471C-ABF0-DBC7717ECBBC}" type="slidenum">
+              <a:rPr lang="es-ES" smtClean="0"/>
+              <a:t>22</a:t>
+            </a:fld>
+            <a:endParaRPr lang="es-ES"/>
+          </a:p>
+        </p:txBody>
+      </p:sp>
+      <p:sp>
+        <p:nvSpPr>
+          <p:cNvPr id="7" name="CuadroTexto 6">
+            <a:extLst>
+              <a:ext uri="{FF2B5EF4-FFF2-40B4-BE49-F238E27FC236}">
+                <a16:creationId xmlns:a16="http://schemas.microsoft.com/office/drawing/2014/main" id="{87CC387C-F119-8F29-9349-7312B7CF7076}"/>
+              </a:ext>
+            </a:extLst>
+          </p:cNvPr>
+          <p:cNvSpPr txBox="1"/>
+          <p:nvPr/>
+        </p:nvSpPr>
+        <p:spPr>
+          <a:xfrm>
+            <a:off x="0" y="1412776"/>
+            <a:ext cx="9036496" cy="3301032"/>
+          </a:xfrm>
+          <a:prstGeom prst="rect">
+            <a:avLst/>
+          </a:prstGeom>
+          <a:noFill/>
+        </p:spPr>
+        <p:txBody>
+          <a:bodyPr wrap="square">
+            <a:spAutoFit/>
+          </a:bodyPr>
+          <a:lstStyle/>
+          <a:p>
+            <a:pPr marL="285750" indent="-285750" algn="just">
+              <a:lnSpc>
+                <a:spcPts val="2143"/>
+              </a:lnSpc>
+              <a:spcBef>
+                <a:spcPts val="1029"/>
+              </a:spcBef>
+              <a:spcAft>
+                <a:spcPts val="1029"/>
+              </a:spcAft>
+              <a:buFont typeface="Wingdings" panose="05000000000000000000" pitchFamily="2" charset="2"/>
+              <a:buChar char="Ø"/>
+            </a:pPr>
+            <a:r>
+              <a:rPr lang="es-ES" sz="2400" b="0" i="0" dirty="0">
+                <a:solidFill>
+                  <a:srgbClr val="404040"/>
+                </a:solidFill>
+                <a:effectLst/>
+                <a:latin typeface="Arial" panose="020B0604020202020204" pitchFamily="34" charset="0"/>
+                <a:cs typeface="Arial" panose="020B0604020202020204" pitchFamily="34" charset="0"/>
+              </a:rPr>
+              <a:t>Implementada solución web especializada para gestión y cálculo de transporte de sedimentos en costas sur-orientales de Cuba, fortaleciendo análisis ambiental y toma de decisiones costeras.</a:t>
+            </a:r>
+          </a:p>
+          <a:p>
+            <a:pPr marL="285750" indent="-285750" algn="just">
+              <a:lnSpc>
+                <a:spcPts val="2143"/>
+              </a:lnSpc>
+              <a:spcBef>
+                <a:spcPts val="1029"/>
+              </a:spcBef>
+              <a:spcAft>
+                <a:spcPts val="1029"/>
+              </a:spcAft>
+              <a:buFont typeface="Wingdings" panose="05000000000000000000" pitchFamily="2" charset="2"/>
+              <a:buChar char="Ø"/>
+            </a:pPr>
+            <a:r>
+              <a:rPr lang="es-ES" sz="2400" b="0" i="0" dirty="0">
+                <a:solidFill>
+                  <a:srgbClr val="404040"/>
+                </a:solidFill>
+                <a:effectLst/>
+                <a:latin typeface="Arial" panose="020B0604020202020204" pitchFamily="34" charset="0"/>
+                <a:cs typeface="Arial" panose="020B0604020202020204" pitchFamily="34" charset="0"/>
+              </a:rPr>
+              <a:t>Automatización mediante modelos matemáticos validados, eliminando errores manuales y reduciendo tiempos de análisis en estudios costeros.</a:t>
+            </a:r>
+          </a:p>
+          <a:p>
+            <a:pPr marL="285750" indent="-285750" algn="just">
+              <a:lnSpc>
+                <a:spcPts val="2143"/>
+              </a:lnSpc>
+              <a:spcBef>
+                <a:spcPts val="1029"/>
+              </a:spcBef>
+              <a:spcAft>
+                <a:spcPts val="1029"/>
+              </a:spcAft>
+              <a:buFont typeface="Wingdings" panose="05000000000000000000" pitchFamily="2" charset="2"/>
+              <a:buChar char="Ø"/>
+            </a:pPr>
+            <a:r>
+              <a:rPr lang="es-ES" sz="2400" b="0" i="0" dirty="0">
+                <a:solidFill>
+                  <a:srgbClr val="404040"/>
+                </a:solidFill>
+                <a:effectLst/>
+                <a:latin typeface="Arial" panose="020B0604020202020204" pitchFamily="34" charset="0"/>
+                <a:cs typeface="Arial" panose="020B0604020202020204" pitchFamily="34" charset="0"/>
+              </a:rPr>
+              <a:t>Solución contextualizada que digitaliza y optimiza el control técnico de sedimentos, contribuyendo a la conservación de ecosistemas costeros vulnerables.</a:t>
+            </a:r>
+          </a:p>
+        </p:txBody>
+      </p:sp>
+    </p:spTree>
+    <p:extLst>
+      <p:ext uri="{BB962C8B-B14F-4D97-AF65-F5344CB8AC3E}">
+        <p14:creationId xmlns:p14="http://schemas.microsoft.com/office/powerpoint/2010/main" val="2193556288"/>
+      </p:ext>
+    </p:extLst>
+  </p:cSld>
+  <p:clrMapOvr>
+    <a:masterClrMapping/>
+  </p:clrMapOvr>
+</p:sld>
+</file>
+
+<file path=ppt/slides/slide23.xml><?xml version="1.0" encoding="utf-8"?>
+<p:sld xmlns:a="http://schemas.openxmlformats.org/drawingml/2006/main" xmlns:r="http://schemas.openxmlformats.org/officeDocument/2006/relationships" xmlns:p="http://schemas.openxmlformats.org/presentationml/2006/main">
+  <p:cSld>
+    <p:spTree>
+      <p:nvGrpSpPr>
+        <p:cNvPr id="1" name="">
+          <a:extLst>
+            <a:ext uri="{FF2B5EF4-FFF2-40B4-BE49-F238E27FC236}">
+              <a16:creationId xmlns:a16="http://schemas.microsoft.com/office/drawing/2014/main" id="{FE4717B7-29FE-8A87-F45E-66C86F3F0B99}"/>
+            </a:ext>
+          </a:extLst>
+        </p:cNvPr>
+        <p:cNvGrpSpPr/>
+        <p:nvPr/>
+      </p:nvGrpSpPr>
+      <p:grpSpPr>
+        <a:xfrm>
+          <a:off x="0" y="0"/>
+          <a:ext cx="0" cy="0"/>
+          <a:chOff x="0" y="0"/>
+          <a:chExt cx="0" cy="0"/>
+        </a:xfrm>
+      </p:grpSpPr>
+      <p:pic>
+        <p:nvPicPr>
+          <p:cNvPr id="2051" name="Picture 3">
+            <a:extLst>
+              <a:ext uri="{FF2B5EF4-FFF2-40B4-BE49-F238E27FC236}">
+                <a16:creationId xmlns:a16="http://schemas.microsoft.com/office/drawing/2014/main" id="{62A2215C-EC2A-D53D-2D77-14C748AA18D4}"/>
+              </a:ext>
+            </a:extLst>
+          </p:cNvPr>
+          <p:cNvPicPr>
+            <a:picLocks noChangeAspect="1" noChangeArrowheads="1"/>
+          </p:cNvPicPr>
+          <p:nvPr/>
+        </p:nvPicPr>
+        <p:blipFill>
+          <a:blip r:embed="rId2">
+            <a:extLst>
+              <a:ext uri="{28A0092B-C50C-407E-A947-70E740481C1C}">
+                <a14:useLocalDpi xmlns:a14="http://schemas.microsoft.com/office/drawing/2010/main" val="0"/>
+              </a:ext>
+            </a:extLst>
+          </a:blip>
+          <a:srcRect/>
+          <a:stretch>
+            <a:fillRect/>
+          </a:stretch>
+        </p:blipFill>
+        <p:spPr bwMode="auto">
+          <a:xfrm>
+            <a:off x="1475657" y="0"/>
+            <a:ext cx="7668344" cy="1011462"/>
+          </a:xfrm>
+          <a:prstGeom prst="rect">
+            <a:avLst/>
+          </a:prstGeom>
+          <a:noFill/>
+          <a:ln>
+            <a:noFill/>
+          </a:ln>
+          <a:extLst>
+            <a:ext uri="{909E8E84-426E-40DD-AFC4-6F175D3DCCD1}">
+              <a14:hiddenFill xmlns:a14="http://schemas.microsoft.com/office/drawing/2010/main">
+                <a:solidFill>
+                  <a:schemeClr val="accent1"/>
+                </a:solidFill>
+              </a14:hiddenFill>
+            </a:ext>
+            <a:ext uri="{91240B29-F687-4F45-9708-019B960494DF}">
+              <a14:hiddenLine xmlns:a14="http://schemas.microsoft.com/office/drawing/2010/main" w="9525">
+                <a:solidFill>
+                  <a:schemeClr val="tx1"/>
+                </a:solidFill>
+                <a:miter lim="800000"/>
+                <a:headEnd/>
+                <a:tailEnd/>
+              </a14:hiddenLine>
+            </a:ext>
+          </a:extLst>
+        </p:spPr>
+      </p:pic>
+      <p:sp>
+        <p:nvSpPr>
+          <p:cNvPr id="2" name="1 Título">
+            <a:extLst>
+              <a:ext uri="{FF2B5EF4-FFF2-40B4-BE49-F238E27FC236}">
+                <a16:creationId xmlns:a16="http://schemas.microsoft.com/office/drawing/2014/main" id="{246252CE-9A8E-B277-0617-472B113B2BD8}"/>
+              </a:ext>
+            </a:extLst>
+          </p:cNvPr>
+          <p:cNvSpPr>
+            <a:spLocks noGrp="1"/>
+          </p:cNvSpPr>
+          <p:nvPr>
+            <p:ph type="title"/>
+          </p:nvPr>
+        </p:nvSpPr>
+        <p:spPr>
+          <a:xfrm>
+            <a:off x="2555776" y="-66607"/>
+            <a:ext cx="5410944" cy="1143000"/>
+          </a:xfrm>
+        </p:spPr>
+        <p:txBody>
+          <a:bodyPr>
+            <a:normAutofit/>
+          </a:bodyPr>
+          <a:lstStyle/>
+          <a:p>
+            <a:r>
+              <a:rPr lang="es-ES" sz="3200" b="1" dirty="0">
+                <a:solidFill>
+                  <a:schemeClr val="bg1"/>
+                </a:solidFill>
+              </a:rPr>
+              <a:t>Recomendaciones</a:t>
+            </a:r>
+            <a:endParaRPr lang="es-ES" sz="3200" dirty="0">
+              <a:solidFill>
+                <a:schemeClr val="bg1"/>
+              </a:solidFill>
+            </a:endParaRPr>
+          </a:p>
+        </p:txBody>
+      </p:sp>
+      <p:pic>
+        <p:nvPicPr>
+          <p:cNvPr id="6" name="Imagen 5">
+            <a:extLst>
+              <a:ext uri="{FF2B5EF4-FFF2-40B4-BE49-F238E27FC236}">
+                <a16:creationId xmlns:a16="http://schemas.microsoft.com/office/drawing/2014/main" id="{E4B25A5E-09B2-0494-7C5C-F992F5DCBE3A}"/>
+              </a:ext>
+            </a:extLst>
+          </p:cNvPr>
+          <p:cNvPicPr>
+            <a:picLocks noChangeAspect="1"/>
+          </p:cNvPicPr>
+          <p:nvPr/>
+        </p:nvPicPr>
+        <p:blipFill rotWithShape="1">
+          <a:blip r:embed="rId3" cstate="print">
+            <a:extLst>
+              <a:ext uri="{28A0092B-C50C-407E-A947-70E740481C1C}">
+                <a14:useLocalDpi xmlns:a14="http://schemas.microsoft.com/office/drawing/2010/main" val="0"/>
+              </a:ext>
+            </a:extLst>
+          </a:blip>
+          <a:srcRect l="4235" t="5471" r="70358" b="63070"/>
+          <a:stretch/>
+        </p:blipFill>
+        <p:spPr>
+          <a:xfrm>
+            <a:off x="303249" y="0"/>
+            <a:ext cx="921475" cy="883080"/>
+          </a:xfrm>
+          <a:prstGeom prst="rect">
+            <a:avLst/>
+          </a:prstGeom>
+        </p:spPr>
+      </p:pic>
+      <p:sp>
+        <p:nvSpPr>
+          <p:cNvPr id="4" name="Marcador de número de diapositiva 3">
+            <a:extLst>
+              <a:ext uri="{FF2B5EF4-FFF2-40B4-BE49-F238E27FC236}">
+                <a16:creationId xmlns:a16="http://schemas.microsoft.com/office/drawing/2014/main" id="{2A462989-F7BB-4261-092E-730278A3AB8B}"/>
+              </a:ext>
+            </a:extLst>
+          </p:cNvPr>
+          <p:cNvSpPr>
+            <a:spLocks noGrp="1"/>
+          </p:cNvSpPr>
+          <p:nvPr>
+            <p:ph type="sldNum" sz="quarter" idx="12"/>
+          </p:nvPr>
+        </p:nvSpPr>
+        <p:spPr/>
+        <p:txBody>
+          <a:bodyPr/>
+          <a:lstStyle/>
+          <a:p>
+            <a:fld id="{132FADFE-3B8F-471C-ABF0-DBC7717ECBBC}" type="slidenum">
+              <a:rPr lang="es-ES" smtClean="0"/>
+              <a:t>23</a:t>
+            </a:fld>
+            <a:endParaRPr lang="es-ES"/>
+          </a:p>
+        </p:txBody>
+      </p:sp>
+      <p:sp>
+        <p:nvSpPr>
+          <p:cNvPr id="7" name="CuadroTexto 6">
+            <a:extLst>
+              <a:ext uri="{FF2B5EF4-FFF2-40B4-BE49-F238E27FC236}">
+                <a16:creationId xmlns:a16="http://schemas.microsoft.com/office/drawing/2014/main" id="{7299EAE4-8F49-30FA-D9C8-3D952D64AD6C}"/>
+              </a:ext>
+            </a:extLst>
+          </p:cNvPr>
+          <p:cNvSpPr txBox="1"/>
+          <p:nvPr/>
+        </p:nvSpPr>
+        <p:spPr>
+          <a:xfrm>
+            <a:off x="0" y="1412776"/>
+            <a:ext cx="9036496" cy="4062651"/>
+          </a:xfrm>
+          <a:prstGeom prst="rect">
+            <a:avLst/>
+          </a:prstGeom>
+          <a:noFill/>
+        </p:spPr>
+        <p:txBody>
+          <a:bodyPr wrap="square">
+            <a:spAutoFit/>
+          </a:bodyPr>
+          <a:lstStyle/>
+          <a:p>
+            <a:br>
+              <a:rPr lang="es-ES" dirty="0"/>
+            </a:br>
+            <a:r>
+              <a:rPr lang="es-ES" sz="2400" dirty="0">
+                <a:latin typeface="Arial" panose="020B0604020202020204" pitchFamily="34" charset="0"/>
+                <a:cs typeface="Arial" panose="020B0604020202020204" pitchFamily="34" charset="0"/>
+              </a:rPr>
+              <a:t>• Ampliar módulos funcionales</a:t>
+            </a:r>
+          </a:p>
+          <a:p>
+            <a:br>
+              <a:rPr lang="es-ES" sz="2400" dirty="0">
+                <a:latin typeface="Arial" panose="020B0604020202020204" pitchFamily="34" charset="0"/>
+                <a:cs typeface="Arial" panose="020B0604020202020204" pitchFamily="34" charset="0"/>
+              </a:rPr>
+            </a:br>
+            <a:r>
+              <a:rPr lang="es-ES" sz="2400" dirty="0">
+                <a:latin typeface="Arial" panose="020B0604020202020204" pitchFamily="34" charset="0"/>
+                <a:cs typeface="Arial" panose="020B0604020202020204" pitchFamily="34" charset="0"/>
+              </a:rPr>
+              <a:t>• Implementar microservicios para estadísticas históricas y control de zonas de riesgo</a:t>
+            </a:r>
+          </a:p>
+          <a:p>
+            <a:br>
+              <a:rPr lang="es-ES" sz="2400" dirty="0">
+                <a:latin typeface="Arial" panose="020B0604020202020204" pitchFamily="34" charset="0"/>
+                <a:cs typeface="Arial" panose="020B0604020202020204" pitchFamily="34" charset="0"/>
+              </a:rPr>
+            </a:br>
+            <a:r>
+              <a:rPr lang="es-ES" sz="2400" dirty="0">
+                <a:latin typeface="Arial" panose="020B0604020202020204" pitchFamily="34" charset="0"/>
+                <a:cs typeface="Arial" panose="020B0604020202020204" pitchFamily="34" charset="0"/>
+              </a:rPr>
+              <a:t>• Ajustar algoritmos con especialistas de GEOCUBA según evolución de modelos y necesidades regionales</a:t>
+            </a:r>
+          </a:p>
+          <a:p>
+            <a:br>
+              <a:rPr lang="es-ES" sz="2400" dirty="0">
+                <a:latin typeface="Arial" panose="020B0604020202020204" pitchFamily="34" charset="0"/>
+                <a:cs typeface="Arial" panose="020B0604020202020204" pitchFamily="34" charset="0"/>
+              </a:rPr>
+            </a:br>
+            <a:r>
+              <a:rPr lang="es-ES" sz="2400" dirty="0">
+                <a:latin typeface="Arial" panose="020B0604020202020204" pitchFamily="34" charset="0"/>
+                <a:cs typeface="Arial" panose="020B0604020202020204" pitchFamily="34" charset="0"/>
+              </a:rPr>
+              <a:t>• Evaluar extensión del sistema a otras provincias costeras con problemas similares de erosión/sedimentación</a:t>
+            </a:r>
+          </a:p>
+        </p:txBody>
+      </p:sp>
+    </p:spTree>
+    <p:extLst>
+      <p:ext uri="{BB962C8B-B14F-4D97-AF65-F5344CB8AC3E}">
+        <p14:creationId xmlns:p14="http://schemas.microsoft.com/office/powerpoint/2010/main" val="3554214069"/>
+      </p:ext>
+    </p:extLst>
+  </p:cSld>
+  <p:clrMapOvr>
+    <a:masterClrMapping/>
+  </p:clrMapOvr>
+</p:sld>
+</file>
+
+<file path=ppt/slides/slide24.xml><?xml version="1.0" encoding="utf-8"?>
+<p:sld xmlns:a="http://schemas.openxmlformats.org/drawingml/2006/main" xmlns:r="http://schemas.openxmlformats.org/officeDocument/2006/relationships" xmlns:p="http://schemas.openxmlformats.org/presentationml/2006/main">
+  <p:cSld>
+    <p:spTree>
+      <p:nvGrpSpPr>
+        <p:cNvPr id="1" name="">
+          <a:extLst>
+            <a:ext uri="{FF2B5EF4-FFF2-40B4-BE49-F238E27FC236}">
+              <a16:creationId xmlns:a16="http://schemas.microsoft.com/office/drawing/2014/main" id="{EF8E35C2-407E-D55E-8888-3F2800BFFFF2}"/>
+            </a:ext>
+          </a:extLst>
+        </p:cNvPr>
+        <p:cNvGrpSpPr/>
+        <p:nvPr/>
+      </p:nvGrpSpPr>
+      <p:grpSpPr>
+        <a:xfrm>
+          <a:off x="0" y="0"/>
+          <a:ext cx="0" cy="0"/>
+          <a:chOff x="0" y="0"/>
+          <a:chExt cx="0" cy="0"/>
+        </a:xfrm>
+      </p:grpSpPr>
+      <p:pic>
+        <p:nvPicPr>
+          <p:cNvPr id="1028" name="Picture 4">
+            <a:extLst>
+              <a:ext uri="{FF2B5EF4-FFF2-40B4-BE49-F238E27FC236}">
+                <a16:creationId xmlns:a16="http://schemas.microsoft.com/office/drawing/2014/main" id="{C453890D-D67F-6D58-A3BB-443EA87BE306}"/>
+              </a:ext>
+            </a:extLst>
+          </p:cNvPr>
+          <p:cNvPicPr>
+            <a:picLocks noChangeAspect="1" noChangeArrowheads="1"/>
+          </p:cNvPicPr>
+          <p:nvPr/>
+        </p:nvPicPr>
+        <p:blipFill>
+          <a:blip r:embed="rId2">
+            <a:extLst>
+              <a:ext uri="{28A0092B-C50C-407E-A947-70E740481C1C}">
+                <a14:useLocalDpi xmlns:a14="http://schemas.microsoft.com/office/drawing/2010/main" val="0"/>
+              </a:ext>
+            </a:extLst>
+          </a:blip>
+          <a:srcRect/>
+          <a:stretch>
+            <a:fillRect/>
+          </a:stretch>
+        </p:blipFill>
+        <p:spPr bwMode="auto">
+          <a:xfrm>
+            <a:off x="-828600" y="1517"/>
+            <a:ext cx="3816424" cy="6857581"/>
+          </a:xfrm>
+          <a:prstGeom prst="rect">
+            <a:avLst/>
+          </a:prstGeom>
+          <a:noFill/>
+          <a:ln>
+            <a:noFill/>
+          </a:ln>
+          <a:extLst>
+            <a:ext uri="{909E8E84-426E-40DD-AFC4-6F175D3DCCD1}">
+              <a14:hiddenFill xmlns:a14="http://schemas.microsoft.com/office/drawing/2010/main">
+                <a:solidFill>
+                  <a:schemeClr val="accent1"/>
+                </a:solidFill>
+              </a14:hiddenFill>
+            </a:ext>
+            <a:ext uri="{91240B29-F687-4F45-9708-019B960494DF}">
+              <a14:hiddenLine xmlns:a14="http://schemas.microsoft.com/office/drawing/2010/main" w="9525">
+                <a:solidFill>
+                  <a:schemeClr val="tx1"/>
+                </a:solidFill>
+                <a:miter lim="800000"/>
+                <a:headEnd/>
+                <a:tailEnd/>
+              </a14:hiddenLine>
+            </a:ext>
+          </a:extLst>
+        </p:spPr>
+      </p:pic>
+      <p:sp>
+        <p:nvSpPr>
+          <p:cNvPr id="7" name="1 CuadroTexto">
+            <a:extLst>
+              <a:ext uri="{FF2B5EF4-FFF2-40B4-BE49-F238E27FC236}">
+                <a16:creationId xmlns:a16="http://schemas.microsoft.com/office/drawing/2014/main" id="{97F277A7-F9AD-5A78-9FCE-892A766DFC0A}"/>
+              </a:ext>
+            </a:extLst>
+          </p:cNvPr>
+          <p:cNvSpPr txBox="1"/>
+          <p:nvPr/>
+        </p:nvSpPr>
+        <p:spPr>
+          <a:xfrm>
+            <a:off x="3129897" y="2638266"/>
+            <a:ext cx="5844674" cy="707886"/>
+          </a:xfrm>
+          <a:prstGeom prst="rect">
+            <a:avLst/>
+          </a:prstGeom>
+          <a:noFill/>
+        </p:spPr>
+        <p:txBody>
+          <a:bodyPr wrap="square" rtlCol="0">
+            <a:spAutoFit/>
+          </a:bodyPr>
+          <a:lstStyle/>
+          <a:p>
+            <a:pPr algn="ctr"/>
+            <a:r>
+              <a:rPr lang="es-ES" sz="4000" b="1" dirty="0"/>
+              <a:t>Trabajo de Diploma</a:t>
+            </a:r>
+          </a:p>
+        </p:txBody>
+      </p:sp>
+      <p:sp>
+        <p:nvSpPr>
+          <p:cNvPr id="8" name="1 CuadroTexto">
+            <a:extLst>
+              <a:ext uri="{FF2B5EF4-FFF2-40B4-BE49-F238E27FC236}">
+                <a16:creationId xmlns:a16="http://schemas.microsoft.com/office/drawing/2014/main" id="{184D8B79-5B46-F4C0-DC36-84B9A18FF598}"/>
+              </a:ext>
+            </a:extLst>
+          </p:cNvPr>
+          <p:cNvSpPr txBox="1"/>
+          <p:nvPr/>
+        </p:nvSpPr>
+        <p:spPr>
+          <a:xfrm>
+            <a:off x="3008208" y="5346413"/>
+            <a:ext cx="6135792" cy="1569660"/>
+          </a:xfrm>
+          <a:prstGeom prst="rect">
+            <a:avLst/>
+          </a:prstGeom>
+          <a:noFill/>
+        </p:spPr>
+        <p:txBody>
+          <a:bodyPr wrap="square" rtlCol="0">
+            <a:spAutoFit/>
+          </a:bodyPr>
+          <a:lstStyle/>
+          <a:p>
+            <a:r>
+              <a:rPr lang="es-ES" sz="2000" b="1" dirty="0"/>
+              <a:t>Autor: </a:t>
+            </a:r>
+            <a:r>
+              <a:rPr lang="es-ES" sz="2000" dirty="0"/>
+              <a:t>Dariel Enmanuel Cabrera López</a:t>
+            </a:r>
+          </a:p>
+          <a:p>
+            <a:r>
+              <a:rPr lang="es-ES" sz="2000" b="1" dirty="0"/>
+              <a:t>Tutor:  </a:t>
+            </a:r>
+            <a:r>
+              <a:rPr lang="es-CU" sz="1800" dirty="0" err="1">
+                <a:effectLst/>
+                <a:latin typeface="Arial" panose="020B0604020202020204" pitchFamily="34" charset="0"/>
+                <a:ea typeface="Arial" panose="020B0604020202020204" pitchFamily="34" charset="0"/>
+              </a:rPr>
+              <a:t>Dr.C</a:t>
+            </a:r>
+            <a:r>
+              <a:rPr lang="es-CU" sz="1800" dirty="0">
+                <a:effectLst/>
+                <a:latin typeface="Arial" panose="020B0604020202020204" pitchFamily="34" charset="0"/>
+                <a:ea typeface="Arial" panose="020B0604020202020204" pitchFamily="34" charset="0"/>
+              </a:rPr>
+              <a:t> </a:t>
+            </a:r>
+            <a:r>
+              <a:rPr lang="es-CU" sz="1800" dirty="0" err="1">
+                <a:effectLst/>
+                <a:latin typeface="Arial" panose="020B0604020202020204" pitchFamily="34" charset="0"/>
+                <a:ea typeface="Arial" panose="020B0604020202020204" pitchFamily="34" charset="0"/>
+              </a:rPr>
+              <a:t>Dionis</a:t>
+            </a:r>
+            <a:r>
+              <a:rPr lang="es-CU" sz="1800" dirty="0">
+                <a:effectLst/>
+                <a:latin typeface="Arial" panose="020B0604020202020204" pitchFamily="34" charset="0"/>
+                <a:ea typeface="Arial" panose="020B0604020202020204" pitchFamily="34" charset="0"/>
+              </a:rPr>
+              <a:t> López Ramos</a:t>
+            </a:r>
+            <a:r>
+              <a:rPr lang="es-CU" sz="1800" dirty="0">
+                <a:solidFill>
+                  <a:srgbClr val="000000"/>
+                </a:solidFill>
+                <a:effectLst/>
+                <a:latin typeface="Arial" panose="020B0604020202020204" pitchFamily="34" charset="0"/>
+                <a:ea typeface="Arial" panose="020B0604020202020204" pitchFamily="34" charset="0"/>
+              </a:rPr>
+              <a:t> </a:t>
+            </a:r>
+          </a:p>
+          <a:p>
+            <a:endParaRPr lang="es-CU" sz="1800" dirty="0">
+              <a:solidFill>
+                <a:srgbClr val="000000"/>
+              </a:solidFill>
+              <a:effectLst/>
+              <a:latin typeface="Arial" panose="020B0604020202020204" pitchFamily="34" charset="0"/>
+              <a:ea typeface="Arial" panose="020B0604020202020204" pitchFamily="34" charset="0"/>
+            </a:endParaRPr>
+          </a:p>
+          <a:p>
+            <a:pPr algn="ctr"/>
+            <a:r>
+              <a:rPr lang="es-CU" dirty="0">
+                <a:solidFill>
+                  <a:srgbClr val="000000"/>
+                </a:solidFill>
+                <a:latin typeface="Arial" panose="020B0604020202020204" pitchFamily="34" charset="0"/>
+              </a:rPr>
+              <a:t>Santiago de Cuba</a:t>
+            </a:r>
+            <a:endParaRPr lang="es-ES" sz="2000" dirty="0"/>
+          </a:p>
+          <a:p>
+            <a:pPr algn="ctr"/>
+            <a:r>
+              <a:rPr lang="es-ES" sz="2000" dirty="0"/>
+              <a:t>2025</a:t>
+            </a:r>
+          </a:p>
+        </p:txBody>
+      </p:sp>
+      <p:sp>
+        <p:nvSpPr>
+          <p:cNvPr id="10" name="1 CuadroTexto">
+            <a:extLst>
+              <a:ext uri="{FF2B5EF4-FFF2-40B4-BE49-F238E27FC236}">
+                <a16:creationId xmlns:a16="http://schemas.microsoft.com/office/drawing/2014/main" id="{88843958-D34B-E74E-EAAD-04FE363EC8E4}"/>
+              </a:ext>
+            </a:extLst>
+          </p:cNvPr>
+          <p:cNvSpPr txBox="1"/>
+          <p:nvPr/>
+        </p:nvSpPr>
+        <p:spPr>
+          <a:xfrm>
+            <a:off x="3008208" y="3402690"/>
+            <a:ext cx="6088051" cy="1755802"/>
+          </a:xfrm>
+          <a:prstGeom prst="rect">
+            <a:avLst/>
+          </a:prstGeom>
+          <a:noFill/>
+        </p:spPr>
+        <p:txBody>
+          <a:bodyPr wrap="square" rtlCol="0">
+            <a:spAutoFit/>
+          </a:bodyPr>
+          <a:lstStyle/>
+          <a:p>
+            <a:pPr algn="just"/>
+            <a:r>
+              <a:rPr lang="es-CU" sz="2400" b="1" dirty="0"/>
+              <a:t>Tema:</a:t>
+            </a:r>
+          </a:p>
+          <a:p>
+            <a:pPr marL="6350" indent="-6350" algn="just">
+              <a:lnSpc>
+                <a:spcPct val="146000"/>
+              </a:lnSpc>
+              <a:spcAft>
+                <a:spcPts val="635"/>
+              </a:spcAft>
+            </a:pPr>
+            <a:r>
+              <a:rPr lang="es-CU" sz="2000" dirty="0">
+                <a:solidFill>
+                  <a:srgbClr val="000000"/>
+                </a:solidFill>
+                <a:effectLst/>
+                <a:latin typeface="Arial" panose="020B0604020202020204" pitchFamily="34" charset="0"/>
+                <a:ea typeface="Arial" panose="020B0604020202020204" pitchFamily="34" charset="0"/>
+              </a:rPr>
+              <a:t>"Sistema Informático para la Gestión del Cálculo del Transporte de Sedimentos en Costas Sur-Orientales" </a:t>
+            </a:r>
+          </a:p>
+        </p:txBody>
+      </p:sp>
+      <p:pic>
+        <p:nvPicPr>
+          <p:cNvPr id="2" name="Imagen 1">
+            <a:extLst>
+              <a:ext uri="{FF2B5EF4-FFF2-40B4-BE49-F238E27FC236}">
+                <a16:creationId xmlns:a16="http://schemas.microsoft.com/office/drawing/2014/main" id="{EE99770C-6182-05B0-97D6-7A69C59F534F}"/>
+              </a:ext>
+            </a:extLst>
+          </p:cNvPr>
+          <p:cNvPicPr>
+            <a:picLocks noChangeAspect="1"/>
+          </p:cNvPicPr>
+          <p:nvPr/>
+        </p:nvPicPr>
+        <p:blipFill>
+          <a:blip r:embed="rId3"/>
+          <a:stretch>
+            <a:fillRect/>
+          </a:stretch>
+        </p:blipFill>
+        <p:spPr>
+          <a:xfrm>
+            <a:off x="5415060" y="43252"/>
+            <a:ext cx="1513539" cy="1513539"/>
+          </a:xfrm>
+          <a:prstGeom prst="rect">
+            <a:avLst/>
+          </a:prstGeom>
+        </p:spPr>
+      </p:pic>
+      <p:sp>
+        <p:nvSpPr>
+          <p:cNvPr id="3" name="Rectángulo 2">
+            <a:extLst>
+              <a:ext uri="{FF2B5EF4-FFF2-40B4-BE49-F238E27FC236}">
+                <a16:creationId xmlns:a16="http://schemas.microsoft.com/office/drawing/2014/main" id="{A87D22FA-8AC6-E60C-42C1-259F302FF827}"/>
+              </a:ext>
+            </a:extLst>
+          </p:cNvPr>
+          <p:cNvSpPr/>
+          <p:nvPr/>
+        </p:nvSpPr>
+        <p:spPr>
+          <a:xfrm>
+            <a:off x="3203848" y="1483007"/>
+            <a:ext cx="5940151" cy="1015663"/>
+          </a:xfrm>
+          <a:prstGeom prst="rect">
+            <a:avLst/>
+          </a:prstGeom>
+        </p:spPr>
+        <p:txBody>
+          <a:bodyPr wrap="square">
+            <a:spAutoFit/>
+          </a:bodyPr>
+          <a:lstStyle/>
+          <a:p>
+            <a:pPr algn="ctr"/>
+            <a:r>
+              <a:rPr lang="es-ES" sz="2000" b="1" dirty="0"/>
+              <a:t>Facultad de Ingeniería en </a:t>
+            </a:r>
+          </a:p>
+          <a:p>
+            <a:pPr algn="ctr"/>
+            <a:r>
+              <a:rPr lang="es-ES" sz="2000" b="1" dirty="0"/>
+              <a:t>Telecomunicaciones Informática y Biomédica</a:t>
+            </a:r>
+          </a:p>
+          <a:p>
+            <a:pPr algn="ctr"/>
+            <a:r>
+              <a:rPr lang="es-ES" sz="2000" b="1" dirty="0"/>
+              <a:t>Departamento de Ingeniería Informática</a:t>
+            </a:r>
+          </a:p>
+        </p:txBody>
+      </p:sp>
+    </p:spTree>
+    <p:extLst>
+      <p:ext uri="{BB962C8B-B14F-4D97-AF65-F5344CB8AC3E}">
+        <p14:creationId xmlns:p14="http://schemas.microsoft.com/office/powerpoint/2010/main" val="773100421"/>
+      </p:ext>
+    </p:extLst>
+  </p:cSld>
+  <p:clrMapOvr>
+    <a:masterClrMapping/>
+  </p:clrMapOvr>
+</p:sld>
+</file>
+
+<file path=ppt/slides/slide25.xml><?xml version="1.0" encoding="utf-8"?>
+<p:sld xmlns:a="http://schemas.openxmlformats.org/drawingml/2006/main" xmlns:r="http://schemas.openxmlformats.org/officeDocument/2006/relationships" xmlns:p="http://schemas.openxmlformats.org/presentationml/2006/main">
+  <p:cSld>
+    <p:spTree>
+      <p:nvGrpSpPr>
+        <p:cNvPr id="1" name="">
+          <a:extLst>
+            <a:ext uri="{FF2B5EF4-FFF2-40B4-BE49-F238E27FC236}">
+              <a16:creationId xmlns:a16="http://schemas.microsoft.com/office/drawing/2014/main" id="{9B68D981-AC26-2E1D-9E3F-9D2BE9A315E7}"/>
+            </a:ext>
+          </a:extLst>
+        </p:cNvPr>
+        <p:cNvGrpSpPr/>
+        <p:nvPr/>
+      </p:nvGrpSpPr>
+      <p:grpSpPr>
+        <a:xfrm>
+          <a:off x="0" y="0"/>
+          <a:ext cx="0" cy="0"/>
+          <a:chOff x="0" y="0"/>
+          <a:chExt cx="0" cy="0"/>
+        </a:xfrm>
+      </p:grpSpPr>
+      <p:pic>
+        <p:nvPicPr>
+          <p:cNvPr id="2051" name="Picture 3">
+            <a:extLst>
+              <a:ext uri="{FF2B5EF4-FFF2-40B4-BE49-F238E27FC236}">
+                <a16:creationId xmlns:a16="http://schemas.microsoft.com/office/drawing/2014/main" id="{0A4EDB5B-E429-9885-B01B-9E08AAF71B87}"/>
+              </a:ext>
+            </a:extLst>
+          </p:cNvPr>
+          <p:cNvPicPr>
+            <a:picLocks noChangeAspect="1" noChangeArrowheads="1"/>
+          </p:cNvPicPr>
+          <p:nvPr/>
+        </p:nvPicPr>
+        <p:blipFill>
+          <a:blip r:embed="rId2">
+            <a:extLst>
+              <a:ext uri="{28A0092B-C50C-407E-A947-70E740481C1C}">
+                <a14:useLocalDpi xmlns:a14="http://schemas.microsoft.com/office/drawing/2010/main" val="0"/>
+              </a:ext>
+            </a:extLst>
+          </a:blip>
+          <a:srcRect/>
+          <a:stretch>
+            <a:fillRect/>
+          </a:stretch>
+        </p:blipFill>
+        <p:spPr bwMode="auto">
+          <a:xfrm>
+            <a:off x="1475657" y="0"/>
+            <a:ext cx="7668344" cy="1011462"/>
+          </a:xfrm>
+          <a:prstGeom prst="rect">
+            <a:avLst/>
+          </a:prstGeom>
+          <a:noFill/>
+          <a:ln>
+            <a:noFill/>
+          </a:ln>
+          <a:extLst>
+            <a:ext uri="{909E8E84-426E-40DD-AFC4-6F175D3DCCD1}">
+              <a14:hiddenFill xmlns:a14="http://schemas.microsoft.com/office/drawing/2010/main">
+                <a:solidFill>
+                  <a:schemeClr val="accent1"/>
+                </a:solidFill>
+              </a14:hiddenFill>
+            </a:ext>
+            <a:ext uri="{91240B29-F687-4F45-9708-019B960494DF}">
+              <a14:hiddenLine xmlns:a14="http://schemas.microsoft.com/office/drawing/2010/main" w="9525">
+                <a:solidFill>
+                  <a:schemeClr val="tx1"/>
+                </a:solidFill>
+                <a:miter lim="800000"/>
+                <a:headEnd/>
+                <a:tailEnd/>
+              </a14:hiddenLine>
+            </a:ext>
+          </a:extLst>
+        </p:spPr>
+      </p:pic>
+      <p:sp>
+        <p:nvSpPr>
+          <p:cNvPr id="2" name="1 Título">
+            <a:extLst>
+              <a:ext uri="{FF2B5EF4-FFF2-40B4-BE49-F238E27FC236}">
+                <a16:creationId xmlns:a16="http://schemas.microsoft.com/office/drawing/2014/main" id="{2224DB92-AAF0-6D1D-2E97-C7271CD6A768}"/>
+              </a:ext>
+            </a:extLst>
+          </p:cNvPr>
+          <p:cNvSpPr>
+            <a:spLocks noGrp="1"/>
+          </p:cNvSpPr>
+          <p:nvPr>
+            <p:ph type="title"/>
+          </p:nvPr>
+        </p:nvSpPr>
+        <p:spPr>
+          <a:xfrm>
+            <a:off x="2555776" y="-66607"/>
+            <a:ext cx="5410944" cy="1143000"/>
+          </a:xfrm>
+        </p:spPr>
+        <p:txBody>
+          <a:bodyPr>
+            <a:normAutofit/>
+          </a:bodyPr>
+          <a:lstStyle/>
+          <a:p>
+            <a:r>
+              <a:rPr lang="es-ES" sz="3200" b="1" dirty="0">
+                <a:solidFill>
+                  <a:schemeClr val="bg1"/>
+                </a:solidFill>
+              </a:rPr>
+              <a:t>Preguntas</a:t>
+            </a:r>
+            <a:endParaRPr lang="es-ES" sz="3200" dirty="0">
+              <a:solidFill>
+                <a:schemeClr val="bg1"/>
+              </a:solidFill>
+            </a:endParaRPr>
+          </a:p>
+        </p:txBody>
+      </p:sp>
+      <p:pic>
+        <p:nvPicPr>
+          <p:cNvPr id="6" name="Imagen 5">
+            <a:extLst>
+              <a:ext uri="{FF2B5EF4-FFF2-40B4-BE49-F238E27FC236}">
+                <a16:creationId xmlns:a16="http://schemas.microsoft.com/office/drawing/2014/main" id="{69FE9503-C67A-709E-5A30-37C8D8DE3F02}"/>
+              </a:ext>
+            </a:extLst>
+          </p:cNvPr>
+          <p:cNvPicPr>
+            <a:picLocks noChangeAspect="1"/>
+          </p:cNvPicPr>
+          <p:nvPr/>
+        </p:nvPicPr>
+        <p:blipFill rotWithShape="1">
+          <a:blip r:embed="rId3" cstate="print">
+            <a:extLst>
+              <a:ext uri="{28A0092B-C50C-407E-A947-70E740481C1C}">
+                <a14:useLocalDpi xmlns:a14="http://schemas.microsoft.com/office/drawing/2010/main" val="0"/>
+              </a:ext>
+            </a:extLst>
+          </a:blip>
+          <a:srcRect l="4235" t="5471" r="70358" b="63070"/>
+          <a:stretch/>
+        </p:blipFill>
+        <p:spPr>
+          <a:xfrm>
+            <a:off x="303249" y="0"/>
+            <a:ext cx="921475" cy="883080"/>
+          </a:xfrm>
+          <a:prstGeom prst="rect">
+            <a:avLst/>
+          </a:prstGeom>
+        </p:spPr>
+      </p:pic>
+      <p:sp>
+        <p:nvSpPr>
+          <p:cNvPr id="4" name="Marcador de número de diapositiva 3">
+            <a:extLst>
+              <a:ext uri="{FF2B5EF4-FFF2-40B4-BE49-F238E27FC236}">
+                <a16:creationId xmlns:a16="http://schemas.microsoft.com/office/drawing/2014/main" id="{D170727B-DD45-F881-391D-EE664D2FFAFB}"/>
+              </a:ext>
+            </a:extLst>
+          </p:cNvPr>
+          <p:cNvSpPr>
+            <a:spLocks noGrp="1"/>
+          </p:cNvSpPr>
+          <p:nvPr>
+            <p:ph type="sldNum" sz="quarter" idx="12"/>
+          </p:nvPr>
+        </p:nvSpPr>
+        <p:spPr/>
+        <p:txBody>
+          <a:bodyPr/>
+          <a:lstStyle/>
+          <a:p>
+            <a:fld id="{132FADFE-3B8F-471C-ABF0-DBC7717ECBBC}" type="slidenum">
+              <a:rPr lang="es-ES" smtClean="0"/>
+              <a:t>25</a:t>
+            </a:fld>
+            <a:endParaRPr lang="es-ES"/>
+          </a:p>
+        </p:txBody>
+      </p:sp>
+      <p:sp>
+        <p:nvSpPr>
+          <p:cNvPr id="7" name="CuadroTexto 6">
+            <a:extLst>
+              <a:ext uri="{FF2B5EF4-FFF2-40B4-BE49-F238E27FC236}">
+                <a16:creationId xmlns:a16="http://schemas.microsoft.com/office/drawing/2014/main" id="{5583EE2F-1941-3A27-9173-1CFBA3FB0728}"/>
+              </a:ext>
+            </a:extLst>
+          </p:cNvPr>
+          <p:cNvSpPr txBox="1"/>
+          <p:nvPr/>
+        </p:nvSpPr>
+        <p:spPr>
+          <a:xfrm>
+            <a:off x="303249" y="1412776"/>
+            <a:ext cx="8383551" cy="3816429"/>
+          </a:xfrm>
+          <a:prstGeom prst="rect">
+            <a:avLst/>
+          </a:prstGeom>
+          <a:noFill/>
+        </p:spPr>
+        <p:txBody>
+          <a:bodyPr wrap="square">
+            <a:spAutoFit/>
+          </a:bodyPr>
+          <a:lstStyle/>
+          <a:p>
+            <a:pPr marL="457200" indent="-457200">
+              <a:buAutoNum type="arabicPeriod"/>
+            </a:pPr>
+            <a:r>
+              <a:rPr lang="es-ES" sz="2000" dirty="0">
+                <a:latin typeface="Arial" panose="020B0604020202020204" pitchFamily="34" charset="0"/>
+                <a:cs typeface="Arial" panose="020B0604020202020204" pitchFamily="34" charset="0"/>
+              </a:rPr>
+              <a:t>Usted tiene en cuenta en su implementación salvar las trazas de todas las acciones realizadas en el Sistema Informático como parte de la Seguridad.</a:t>
+            </a:r>
+          </a:p>
+          <a:p>
+            <a:r>
+              <a:rPr lang="es-ES" dirty="0"/>
+              <a:t>2</a:t>
+            </a:r>
+            <a:r>
+              <a:rPr lang="es-ES" dirty="0">
+                <a:latin typeface="Arial" panose="020B0604020202020204" pitchFamily="34" charset="0"/>
+                <a:cs typeface="Arial" panose="020B0604020202020204" pitchFamily="34" charset="0"/>
+              </a:rPr>
+              <a:t>.  En el Documento de su Tesis, usted plantea en el ámbito nacional, aunque se han realizado investigaciones en el cálculo de transporte de sedimentos en costas cubanas utilizando estos mismos modelos internacionales, no hay evidencia clara de que se haya desarrollado un software nativo cubano específicamente para este propósito.</a:t>
+            </a:r>
+            <a:endParaRPr lang="en-US" dirty="0">
+              <a:latin typeface="Arial" panose="020B0604020202020204" pitchFamily="34" charset="0"/>
+              <a:cs typeface="Arial" panose="020B0604020202020204" pitchFamily="34" charset="0"/>
+            </a:endParaRPr>
+          </a:p>
+          <a:p>
+            <a:r>
+              <a:rPr lang="es-ES" dirty="0">
+                <a:latin typeface="Arial" panose="020B0604020202020204" pitchFamily="34" charset="0"/>
+                <a:cs typeface="Arial" panose="020B0604020202020204" pitchFamily="34" charset="0"/>
+              </a:rPr>
+              <a:t>Si es as</a:t>
+            </a:r>
+            <a:r>
+              <a:rPr lang="es-MX" dirty="0">
+                <a:latin typeface="Arial" panose="020B0604020202020204" pitchFamily="34" charset="0"/>
+                <a:cs typeface="Arial" panose="020B0604020202020204" pitchFamily="34" charset="0"/>
+              </a:rPr>
+              <a:t>í</a:t>
+            </a:r>
+            <a:r>
+              <a:rPr lang="es-ES" dirty="0">
+                <a:latin typeface="Arial" panose="020B0604020202020204" pitchFamily="34" charset="0"/>
+                <a:cs typeface="Arial" panose="020B0604020202020204" pitchFamily="34" charset="0"/>
+              </a:rPr>
+              <a:t>, porque los investigadores no trabajan directamente con el Delft3D si es de </a:t>
+            </a:r>
+            <a:r>
+              <a:rPr lang="es-ES" dirty="0" err="1">
+                <a:latin typeface="Arial" panose="020B0604020202020204" pitchFamily="34" charset="0"/>
+                <a:cs typeface="Arial" panose="020B0604020202020204" pitchFamily="34" charset="0"/>
+              </a:rPr>
+              <a:t>codigo</a:t>
+            </a:r>
+            <a:r>
+              <a:rPr lang="es-ES" dirty="0">
+                <a:latin typeface="Arial" panose="020B0604020202020204" pitchFamily="34" charset="0"/>
+                <a:cs typeface="Arial" panose="020B0604020202020204" pitchFamily="34" charset="0"/>
+              </a:rPr>
+              <a:t> abierto.</a:t>
+            </a:r>
+            <a:endParaRPr lang="en-US" dirty="0">
+              <a:latin typeface="Arial" panose="020B0604020202020204" pitchFamily="34" charset="0"/>
+              <a:cs typeface="Arial" panose="020B0604020202020204" pitchFamily="34" charset="0"/>
+            </a:endParaRPr>
+          </a:p>
+          <a:p>
+            <a:r>
+              <a:rPr lang="es-ES" dirty="0">
+                <a:latin typeface="Arial" panose="020B0604020202020204" pitchFamily="34" charset="0"/>
+                <a:cs typeface="Arial" panose="020B0604020202020204" pitchFamily="34" charset="0"/>
+              </a:rPr>
+              <a:t>Responda el porque no se realizaron modificaciones al mismo para el Contexto cubano y si Como futuro Ingeniero ¿se valor</a:t>
+            </a:r>
+            <a:r>
+              <a:rPr lang="es-MX" dirty="0" err="1">
+                <a:latin typeface="Arial" panose="020B0604020202020204" pitchFamily="34" charset="0"/>
+                <a:cs typeface="Arial" panose="020B0604020202020204" pitchFamily="34" charset="0"/>
+              </a:rPr>
+              <a:t>ó</a:t>
+            </a:r>
+            <a:r>
+              <a:rPr lang="es-MX" dirty="0">
+                <a:latin typeface="Arial" panose="020B0604020202020204" pitchFamily="34" charset="0"/>
+                <a:cs typeface="Arial" panose="020B0604020202020204" pitchFamily="34" charset="0"/>
+              </a:rPr>
+              <a:t> </a:t>
+            </a:r>
+            <a:r>
+              <a:rPr lang="es-ES" dirty="0">
+                <a:latin typeface="Arial" panose="020B0604020202020204" pitchFamily="34" charset="0"/>
+                <a:cs typeface="Arial" panose="020B0604020202020204" pitchFamily="34" charset="0"/>
+              </a:rPr>
+              <a:t>esta Propuesta con su Cliente? </a:t>
+            </a:r>
+            <a:endParaRPr lang="en-US" dirty="0">
+              <a:latin typeface="Arial" panose="020B0604020202020204" pitchFamily="34" charset="0"/>
+              <a:cs typeface="Arial" panose="020B0604020202020204" pitchFamily="34" charset="0"/>
+            </a:endParaRPr>
+          </a:p>
+          <a:p>
+            <a:pPr marL="457200" indent="-457200">
+              <a:buAutoNum type="arabicPeriod"/>
+            </a:pPr>
+            <a:endParaRPr lang="en-US" sz="2000" dirty="0">
+              <a:latin typeface="Arial" panose="020B0604020202020204" pitchFamily="34" charset="0"/>
+              <a:cs typeface="Arial" panose="020B0604020202020204" pitchFamily="34" charset="0"/>
+            </a:endParaRPr>
+          </a:p>
+        </p:txBody>
+      </p:sp>
+    </p:spTree>
+    <p:extLst>
+      <p:ext uri="{BB962C8B-B14F-4D97-AF65-F5344CB8AC3E}">
+        <p14:creationId xmlns:p14="http://schemas.microsoft.com/office/powerpoint/2010/main" val="3547127183"/>
       </p:ext>
     </p:extLst>
   </p:cSld>
